--- a/slides/5_advanced.pptx
+++ b/slides/5_advanced.pptx
@@ -5,31 +5,32 @@
     <p:sldMasterId id="2147483648" r:id="rId1"/>
   </p:sldMasterIdLst>
   <p:notesMasterIdLst>
-    <p:notesMasterId r:id="rId24"/>
+    <p:notesMasterId r:id="rId25"/>
   </p:notesMasterIdLst>
   <p:sldIdLst>
     <p:sldId id="256" r:id="rId2"/>
-    <p:sldId id="861" r:id="rId3"/>
-    <p:sldId id="862" r:id="rId4"/>
-    <p:sldId id="854" r:id="rId5"/>
-    <p:sldId id="855" r:id="rId6"/>
-    <p:sldId id="867" r:id="rId7"/>
-    <p:sldId id="856" r:id="rId8"/>
-    <p:sldId id="866" r:id="rId9"/>
-    <p:sldId id="565" r:id="rId10"/>
-    <p:sldId id="568" r:id="rId11"/>
-    <p:sldId id="864" r:id="rId12"/>
-    <p:sldId id="860" r:id="rId13"/>
-    <p:sldId id="270" r:id="rId14"/>
-    <p:sldId id="858" r:id="rId15"/>
-    <p:sldId id="868" r:id="rId16"/>
-    <p:sldId id="857" r:id="rId17"/>
-    <p:sldId id="870" r:id="rId18"/>
-    <p:sldId id="869" r:id="rId19"/>
-    <p:sldId id="271" r:id="rId20"/>
-    <p:sldId id="859" r:id="rId21"/>
-    <p:sldId id="567" r:id="rId22"/>
-    <p:sldId id="865" r:id="rId23"/>
+    <p:sldId id="871" r:id="rId3"/>
+    <p:sldId id="861" r:id="rId4"/>
+    <p:sldId id="862" r:id="rId5"/>
+    <p:sldId id="854" r:id="rId6"/>
+    <p:sldId id="855" r:id="rId7"/>
+    <p:sldId id="867" r:id="rId8"/>
+    <p:sldId id="856" r:id="rId9"/>
+    <p:sldId id="866" r:id="rId10"/>
+    <p:sldId id="565" r:id="rId11"/>
+    <p:sldId id="568" r:id="rId12"/>
+    <p:sldId id="864" r:id="rId13"/>
+    <p:sldId id="860" r:id="rId14"/>
+    <p:sldId id="270" r:id="rId15"/>
+    <p:sldId id="858" r:id="rId16"/>
+    <p:sldId id="868" r:id="rId17"/>
+    <p:sldId id="857" r:id="rId18"/>
+    <p:sldId id="870" r:id="rId19"/>
+    <p:sldId id="869" r:id="rId20"/>
+    <p:sldId id="271" r:id="rId21"/>
+    <p:sldId id="859" r:id="rId22"/>
+    <p:sldId id="567" r:id="rId23"/>
+    <p:sldId id="865" r:id="rId24"/>
   </p:sldIdLst>
   <p:sldSz cx="12192000" cy="6858000"/>
   <p:notesSz cx="6858000" cy="9144000"/>
@@ -500,7 +501,7 @@
           <a:p>
             <a:fld id="{506E0FD1-891F-4B1E-916D-E9B585160BB8}" type="datetimeFigureOut">
               <a:rPr lang="en-GB" smtClean="0"/>
-              <a:t>11/04/2026</a:t>
+              <a:t>23/04/2026</a:t>
             </a:fld>
             <a:endParaRPr lang="en-GB"/>
           </a:p>
@@ -917,7 +918,7 @@
           <a:p>
             <a:fld id="{D68C3F22-27B2-44E3-9C5F-D08126455F6F}" type="datetime1">
               <a:rPr lang="en-GB" smtClean="0"/>
-              <a:t>11/04/2026</a:t>
+              <a:t>23/04/2026</a:t>
             </a:fld>
             <a:endParaRPr lang="en-GB"/>
           </a:p>
@@ -1117,7 +1118,7 @@
           <a:p>
             <a:fld id="{1CD03846-7BF6-4FB6-A921-FF3379ADBD4C}" type="datetime1">
               <a:rPr lang="en-GB" smtClean="0"/>
-              <a:t>11/04/2026</a:t>
+              <a:t>23/04/2026</a:t>
             </a:fld>
             <a:endParaRPr lang="en-GB"/>
           </a:p>
@@ -1327,7 +1328,7 @@
           <a:p>
             <a:fld id="{99E1B91A-3FD0-4144-9C84-63E9688ED2FE}" type="datetime1">
               <a:rPr lang="en-GB" smtClean="0"/>
-              <a:t>11/04/2026</a:t>
+              <a:t>23/04/2026</a:t>
             </a:fld>
             <a:endParaRPr lang="en-GB"/>
           </a:p>
@@ -1527,7 +1528,7 @@
           <a:p>
             <a:fld id="{5295ED7B-FEAD-4734-819F-93EF4B0EA908}" type="datetime1">
               <a:rPr lang="en-GB" smtClean="0"/>
-              <a:t>11/04/2026</a:t>
+              <a:t>23/04/2026</a:t>
             </a:fld>
             <a:endParaRPr lang="en-GB"/>
           </a:p>
@@ -1803,7 +1804,7 @@
           <a:p>
             <a:fld id="{D2D5D4B4-C926-4B45-8815-1ED8911179A2}" type="datetime1">
               <a:rPr lang="en-GB" smtClean="0"/>
-              <a:t>11/04/2026</a:t>
+              <a:t>23/04/2026</a:t>
             </a:fld>
             <a:endParaRPr lang="en-GB"/>
           </a:p>
@@ -2071,7 +2072,7 @@
           <a:p>
             <a:fld id="{B4C5210A-0E37-4935-93AF-69F21A5F712F}" type="datetime1">
               <a:rPr lang="en-GB" smtClean="0"/>
-              <a:t>11/04/2026</a:t>
+              <a:t>23/04/2026</a:t>
             </a:fld>
             <a:endParaRPr lang="en-GB"/>
           </a:p>
@@ -2486,7 +2487,7 @@
           <a:p>
             <a:fld id="{3D3A6B2F-436C-4691-80E8-9C890E000E9D}" type="datetime1">
               <a:rPr lang="en-GB" smtClean="0"/>
-              <a:t>11/04/2026</a:t>
+              <a:t>23/04/2026</a:t>
             </a:fld>
             <a:endParaRPr lang="en-GB"/>
           </a:p>
@@ -2628,7 +2629,7 @@
           <a:p>
             <a:fld id="{84385F4C-D74B-496F-8D21-97E3549C783B}" type="datetime1">
               <a:rPr lang="en-GB" smtClean="0"/>
-              <a:t>11/04/2026</a:t>
+              <a:t>23/04/2026</a:t>
             </a:fld>
             <a:endParaRPr lang="en-GB"/>
           </a:p>
@@ -2741,7 +2742,7 @@
           <a:p>
             <a:fld id="{0CBDCB32-C241-4703-A832-4EB47BD54E83}" type="datetime1">
               <a:rPr lang="en-GB" smtClean="0"/>
-              <a:t>11/04/2026</a:t>
+              <a:t>23/04/2026</a:t>
             </a:fld>
             <a:endParaRPr lang="en-GB"/>
           </a:p>
@@ -3054,7 +3055,7 @@
           <a:p>
             <a:fld id="{85C150FF-BE95-4D25-A16A-E368A81CBF24}" type="datetime1">
               <a:rPr lang="en-GB" smtClean="0"/>
-              <a:t>11/04/2026</a:t>
+              <a:t>23/04/2026</a:t>
             </a:fld>
             <a:endParaRPr lang="en-GB"/>
           </a:p>
@@ -3343,7 +3344,7 @@
           <a:p>
             <a:fld id="{F3C5DB4B-B349-43C9-A424-BADA723AD9F1}" type="datetime1">
               <a:rPr lang="en-GB" smtClean="0"/>
-              <a:t>11/04/2026</a:t>
+              <a:t>23/04/2026</a:t>
             </a:fld>
             <a:endParaRPr lang="en-GB"/>
           </a:p>
@@ -3586,7 +3587,7 @@
           <a:p>
             <a:fld id="{12632426-0A0C-405F-A3D0-2D11AA44702A}" type="datetime1">
               <a:rPr lang="en-GB" smtClean="0"/>
-              <a:t>11/04/2026</a:t>
+              <a:t>23/04/2026</a:t>
             </a:fld>
             <a:endParaRPr lang="en-GB"/>
           </a:p>
@@ -4103,6 +4104,430 @@
       </p:grpSpPr>
       <p:pic>
         <p:nvPicPr>
+          <p:cNvPr id="7" name="Picture 6" descr="Graphical user interface, application&#10;&#10;Description automatically generated">
+            <a:extLst>
+              <a:ext uri="{FF2B5EF4-FFF2-40B4-BE49-F238E27FC236}">
+                <a16:creationId xmlns:a16="http://schemas.microsoft.com/office/drawing/2014/main" id="{C2F0C89D-B6FC-F83C-9F0B-A0A7B0579D0D}"/>
+              </a:ext>
+            </a:extLst>
+          </p:cNvPr>
+          <p:cNvPicPr>
+            <a:picLocks noChangeAspect="1"/>
+          </p:cNvPicPr>
+          <p:nvPr/>
+        </p:nvPicPr>
+        <p:blipFill>
+          <a:blip r:embed="rId2"/>
+          <a:stretch>
+            <a:fillRect/>
+          </a:stretch>
+        </p:blipFill>
+        <p:spPr>
+          <a:xfrm>
+            <a:off x="4419600" y="1405625"/>
+            <a:ext cx="7772400" cy="4581741"/>
+          </a:xfrm>
+          <a:prstGeom prst="rect">
+            <a:avLst/>
+          </a:prstGeom>
+        </p:spPr>
+      </p:pic>
+      <p:sp>
+        <p:nvSpPr>
+          <p:cNvPr id="2" name="Title 1">
+            <a:extLst>
+              <a:ext uri="{FF2B5EF4-FFF2-40B4-BE49-F238E27FC236}">
+                <a16:creationId xmlns:a16="http://schemas.microsoft.com/office/drawing/2014/main" id="{593F088E-C3DC-F2DD-C0D6-CDDB71782F2C}"/>
+              </a:ext>
+            </a:extLst>
+          </p:cNvPr>
+          <p:cNvSpPr>
+            <a:spLocks noGrp="1"/>
+          </p:cNvSpPr>
+          <p:nvPr>
+            <p:ph type="title"/>
+          </p:nvPr>
+        </p:nvSpPr>
+        <p:spPr/>
+        <p:txBody>
+          <a:bodyPr/>
+          <a:lstStyle/>
+          <a:p>
+            <a:r>
+              <a:rPr lang="en-DE" dirty="0"/>
+              <a:t>RL from Human Feedback</a:t>
+            </a:r>
+          </a:p>
+        </p:txBody>
+      </p:sp>
+      <p:sp>
+        <p:nvSpPr>
+          <p:cNvPr id="3" name="Content Placeholder 2">
+            <a:extLst>
+              <a:ext uri="{FF2B5EF4-FFF2-40B4-BE49-F238E27FC236}">
+                <a16:creationId xmlns:a16="http://schemas.microsoft.com/office/drawing/2014/main" id="{3C6A0BAE-42AC-6B59-AF1B-7A814C8BF708}"/>
+              </a:ext>
+            </a:extLst>
+          </p:cNvPr>
+          <p:cNvSpPr>
+            <a:spLocks noGrp="1"/>
+          </p:cNvSpPr>
+          <p:nvPr>
+            <p:ph idx="1"/>
+          </p:nvPr>
+        </p:nvSpPr>
+        <p:spPr>
+          <a:xfrm>
+            <a:off x="838200" y="1825625"/>
+            <a:ext cx="3428118" cy="4351338"/>
+          </a:xfrm>
+        </p:spPr>
+        <p:txBody>
+          <a:bodyPr>
+            <a:normAutofit/>
+          </a:bodyPr>
+          <a:lstStyle/>
+          <a:p>
+            <a:pPr marL="0" indent="0">
+              <a:buNone/>
+            </a:pPr>
+            <a:r>
+              <a:rPr lang="en-GB" sz="2400" dirty="0"/>
+              <a:t>example for supporting large language models (transformers) with RL</a:t>
+            </a:r>
+          </a:p>
+          <a:p>
+            <a:pPr marL="0" indent="0">
+              <a:buNone/>
+            </a:pPr>
+            <a:endParaRPr lang="en-GB" sz="2400" dirty="0"/>
+          </a:p>
+          <a:p>
+            <a:pPr marL="0" indent="0">
+              <a:buNone/>
+            </a:pPr>
+            <a:r>
+              <a:rPr lang="en-GB" sz="2400" dirty="0"/>
+              <a:t>u</a:t>
+            </a:r>
+            <a:r>
+              <a:rPr lang="en-DE" sz="2400" dirty="0"/>
+              <a:t>sed in famous ChatGPT</a:t>
+            </a:r>
+          </a:p>
+          <a:p>
+            <a:pPr marL="0" indent="0">
+              <a:buNone/>
+            </a:pPr>
+            <a:endParaRPr lang="en-DE" sz="2400" dirty="0"/>
+          </a:p>
+          <a:p>
+            <a:pPr marL="0" indent="0">
+              <a:buNone/>
+            </a:pPr>
+            <a:r>
+              <a:rPr lang="en-GB" sz="2400" dirty="0"/>
+              <a:t>goal</a:t>
+            </a:r>
+            <a:r>
+              <a:rPr lang="en-DE" sz="2400" dirty="0"/>
+              <a:t>: improve alignment with user intentions</a:t>
+            </a:r>
+          </a:p>
+          <a:p>
+            <a:pPr marL="0" indent="0">
+              <a:buNone/>
+            </a:pPr>
+            <a:r>
+              <a:rPr lang="en-DE" sz="2400" dirty="0">
+                <a:sym typeface="Wingdings" pitchFamily="2" charset="2"/>
+              </a:rPr>
+              <a:t> </a:t>
+            </a:r>
+            <a:r>
+              <a:rPr lang="en-GB" sz="2400" dirty="0">
+                <a:sym typeface="Wingdings" pitchFamily="2" charset="2"/>
+              </a:rPr>
+              <a:t>l</a:t>
+            </a:r>
+            <a:r>
+              <a:rPr lang="en-DE" sz="2400" dirty="0">
+                <a:sym typeface="Wingdings" pitchFamily="2" charset="2"/>
+              </a:rPr>
+              <a:t>earn from human preferences</a:t>
+            </a:r>
+            <a:endParaRPr lang="en-DE" sz="2400" dirty="0"/>
+          </a:p>
+        </p:txBody>
+      </p:sp>
+      <p:sp>
+        <p:nvSpPr>
+          <p:cNvPr id="4" name="Slide Number Placeholder 3">
+            <a:extLst>
+              <a:ext uri="{FF2B5EF4-FFF2-40B4-BE49-F238E27FC236}">
+                <a16:creationId xmlns:a16="http://schemas.microsoft.com/office/drawing/2014/main" id="{C6D34CD7-6253-E16B-BF24-28A9AD5BF1F3}"/>
+              </a:ext>
+            </a:extLst>
+          </p:cNvPr>
+          <p:cNvSpPr>
+            <a:spLocks noGrp="1"/>
+          </p:cNvSpPr>
+          <p:nvPr>
+            <p:ph type="sldNum" sz="quarter" idx="12"/>
+          </p:nvPr>
+        </p:nvSpPr>
+        <p:spPr/>
+        <p:txBody>
+          <a:bodyPr/>
+          <a:lstStyle/>
+          <a:p>
+            <a:fld id="{C48B675A-2084-C34A-84F6-1B6A8516A5F3}" type="slidenum">
+              <a:rPr lang="en-DE" smtClean="0"/>
+              <a:t>10</a:t>
+            </a:fld>
+            <a:endParaRPr lang="en-DE"/>
+          </a:p>
+        </p:txBody>
+      </p:sp>
+      <p:sp>
+        <p:nvSpPr>
+          <p:cNvPr id="5" name="TextBox 4">
+            <a:extLst>
+              <a:ext uri="{FF2B5EF4-FFF2-40B4-BE49-F238E27FC236}">
+                <a16:creationId xmlns:a16="http://schemas.microsoft.com/office/drawing/2014/main" id="{F665346F-C1B5-44BB-1572-3B45F4ED02AB}"/>
+              </a:ext>
+            </a:extLst>
+          </p:cNvPr>
+          <p:cNvSpPr txBox="1"/>
+          <p:nvPr/>
+        </p:nvSpPr>
+        <p:spPr>
+          <a:xfrm>
+            <a:off x="11471564" y="5912427"/>
+            <a:ext cx="567154" cy="246221"/>
+          </a:xfrm>
+          <a:prstGeom prst="rect">
+            <a:avLst/>
+          </a:prstGeom>
+          <a:noFill/>
+        </p:spPr>
+        <p:txBody>
+          <a:bodyPr wrap="square" rtlCol="0">
+            <a:spAutoFit/>
+          </a:bodyPr>
+          <a:lstStyle/>
+          <a:p>
+            <a:r>
+              <a:rPr lang="de-DE" sz="1000" dirty="0">
+                <a:hlinkClick r:id="rId3"/>
+              </a:rPr>
+              <a:t>source</a:t>
+            </a:r>
+            <a:endParaRPr lang="de-DE" sz="1000" dirty="0"/>
+          </a:p>
+        </p:txBody>
+      </p:sp>
+      <p:sp>
+        <p:nvSpPr>
+          <p:cNvPr id="6" name="TextBox 5">
+            <a:extLst>
+              <a:ext uri="{FF2B5EF4-FFF2-40B4-BE49-F238E27FC236}">
+                <a16:creationId xmlns:a16="http://schemas.microsoft.com/office/drawing/2014/main" id="{F4E95162-A0A6-C1BF-4669-5F2070D5B2D9}"/>
+              </a:ext>
+            </a:extLst>
+          </p:cNvPr>
+          <p:cNvSpPr txBox="1"/>
+          <p:nvPr/>
+        </p:nvSpPr>
+        <p:spPr>
+          <a:xfrm>
+            <a:off x="4074452" y="5987366"/>
+            <a:ext cx="6843733" cy="830997"/>
+          </a:xfrm>
+          <a:prstGeom prst="rect">
+            <a:avLst/>
+          </a:prstGeom>
+          <a:noFill/>
+        </p:spPr>
+        <p:txBody>
+          <a:bodyPr wrap="none" rtlCol="0">
+            <a:spAutoFit/>
+          </a:bodyPr>
+          <a:lstStyle/>
+          <a:p>
+            <a:r>
+              <a:rPr lang="en-DE" sz="2400" dirty="0"/>
+              <a:t>RL looks at reward of text output passages as a whole</a:t>
+            </a:r>
+          </a:p>
+          <a:p>
+            <a:r>
+              <a:rPr lang="en-DE" sz="2400" dirty="0"/>
+              <a:t>(rather than token-level loss in supervised learning)</a:t>
+            </a:r>
+          </a:p>
+        </p:txBody>
+      </p:sp>
+      <p:cxnSp>
+        <p:nvCxnSpPr>
+          <p:cNvPr id="9" name="Straight Arrow Connector 8">
+            <a:extLst>
+              <a:ext uri="{FF2B5EF4-FFF2-40B4-BE49-F238E27FC236}">
+                <a16:creationId xmlns:a16="http://schemas.microsoft.com/office/drawing/2014/main" id="{86DCB36A-F3CD-F1E8-2BCE-4920F055AE4C}"/>
+              </a:ext>
+            </a:extLst>
+          </p:cNvPr>
+          <p:cNvCxnSpPr>
+            <a:stCxn id="6" idx="0"/>
+          </p:cNvCxnSpPr>
+          <p:nvPr/>
+        </p:nvCxnSpPr>
+        <p:spPr>
+          <a:xfrm flipV="1">
+            <a:off x="7496319" y="5423338"/>
+            <a:ext cx="544095" cy="564028"/>
+          </a:xfrm>
+          <a:prstGeom prst="straightConnector1">
+            <a:avLst/>
+          </a:prstGeom>
+          <a:ln>
+            <a:tailEnd type="triangle"/>
+          </a:ln>
+        </p:spPr>
+        <p:style>
+          <a:lnRef idx="1">
+            <a:schemeClr val="accent1"/>
+          </a:lnRef>
+          <a:fillRef idx="0">
+            <a:schemeClr val="accent1"/>
+          </a:fillRef>
+          <a:effectRef idx="0">
+            <a:schemeClr val="accent1"/>
+          </a:effectRef>
+          <a:fontRef idx="minor">
+            <a:schemeClr val="tx1"/>
+          </a:fontRef>
+        </p:style>
+      </p:cxnSp>
+      <p:cxnSp>
+        <p:nvCxnSpPr>
+          <p:cNvPr id="11" name="Straight Arrow Connector 10">
+            <a:extLst>
+              <a:ext uri="{FF2B5EF4-FFF2-40B4-BE49-F238E27FC236}">
+                <a16:creationId xmlns:a16="http://schemas.microsoft.com/office/drawing/2014/main" id="{B2369C2E-81DE-95D0-4575-09A54721567F}"/>
+              </a:ext>
+            </a:extLst>
+          </p:cNvPr>
+          <p:cNvCxnSpPr>
+            <a:stCxn id="6" idx="0"/>
+          </p:cNvCxnSpPr>
+          <p:nvPr/>
+        </p:nvCxnSpPr>
+        <p:spPr>
+          <a:xfrm flipV="1">
+            <a:off x="7496319" y="5213131"/>
+            <a:ext cx="2194219" cy="774235"/>
+          </a:xfrm>
+          <a:prstGeom prst="straightConnector1">
+            <a:avLst/>
+          </a:prstGeom>
+          <a:ln>
+            <a:tailEnd type="triangle"/>
+          </a:ln>
+        </p:spPr>
+        <p:style>
+          <a:lnRef idx="1">
+            <a:schemeClr val="accent1"/>
+          </a:lnRef>
+          <a:fillRef idx="0">
+            <a:schemeClr val="accent1"/>
+          </a:fillRef>
+          <a:effectRef idx="0">
+            <a:schemeClr val="accent1"/>
+          </a:effectRef>
+          <a:fontRef idx="minor">
+            <a:schemeClr val="tx1"/>
+          </a:fontRef>
+        </p:style>
+      </p:cxnSp>
+      <p:sp>
+        <p:nvSpPr>
+          <p:cNvPr id="8" name="TextBox 7">
+            <a:extLst>
+              <a:ext uri="{FF2B5EF4-FFF2-40B4-BE49-F238E27FC236}">
+                <a16:creationId xmlns:a16="http://schemas.microsoft.com/office/drawing/2014/main" id="{636E222B-9AD4-6410-D19C-F53E4BAB3E0B}"/>
+              </a:ext>
+            </a:extLst>
+          </p:cNvPr>
+          <p:cNvSpPr txBox="1"/>
+          <p:nvPr/>
+        </p:nvSpPr>
+        <p:spPr>
+          <a:xfrm>
+            <a:off x="10041003" y="39637"/>
+            <a:ext cx="2057400" cy="369332"/>
+          </a:xfrm>
+          <a:prstGeom prst="rect">
+            <a:avLst/>
+          </a:prstGeom>
+          <a:noFill/>
+        </p:spPr>
+        <p:txBody>
+          <a:bodyPr wrap="square">
+            <a:spAutoFit/>
+          </a:bodyPr>
+          <a:lstStyle/>
+          <a:p>
+            <a:r>
+              <a:rPr lang="en-GB" dirty="0"/>
+              <a:t>e</a:t>
+            </a:r>
+            <a:r>
+              <a:rPr lang="en-DE"/>
+              <a:t>xample: </a:t>
+            </a:r>
+            <a:r>
+              <a:rPr lang="en-DE">
+                <a:hlinkClick r:id="rId4"/>
+              </a:rPr>
+              <a:t>ChatGPT</a:t>
+            </a:r>
+            <a:endParaRPr lang="en-GB" dirty="0"/>
+          </a:p>
+        </p:txBody>
+      </p:sp>
+    </p:spTree>
+    <p:extLst>
+      <p:ext uri="{BB962C8B-B14F-4D97-AF65-F5344CB8AC3E}">
+        <p14:creationId xmlns:p14="http://schemas.microsoft.com/office/powerpoint/2010/main" val="1487215908"/>
+      </p:ext>
+    </p:extLst>
+  </p:cSld>
+  <p:clrMapOvr>
+    <a:masterClrMapping/>
+  </p:clrMapOvr>
+</p:sld>
+</file>
+
+<file path=ppt/slides/slide11.xml><?xml version="1.0" encoding="utf-8"?>
+<p:sld xmlns:a="http://schemas.openxmlformats.org/drawingml/2006/main" xmlns:r="http://schemas.openxmlformats.org/officeDocument/2006/relationships" xmlns:p="http://schemas.openxmlformats.org/presentationml/2006/main">
+  <p:cSld>
+    <p:spTree>
+      <p:nvGrpSpPr>
+        <p:cNvPr id="1" name=""/>
+        <p:cNvGrpSpPr/>
+        <p:nvPr/>
+      </p:nvGrpSpPr>
+      <p:grpSpPr>
+        <a:xfrm>
+          <a:off x="0" y="0"/>
+          <a:ext cx="0" cy="0"/>
+          <a:chOff x="0" y="0"/>
+          <a:chExt cx="0" cy="0"/>
+        </a:xfrm>
+      </p:grpSpPr>
+      <p:pic>
+        <p:nvPicPr>
           <p:cNvPr id="10" name="Picture 9">
             <a:extLst>
               <a:ext uri="{FF2B5EF4-FFF2-40B4-BE49-F238E27FC236}">
@@ -4182,7 +4607,7 @@
           <a:p>
             <a:fld id="{C48B675A-2084-C34A-84F6-1B6A8516A5F3}" type="slidenum">
               <a:rPr lang="en-DE" smtClean="0"/>
-              <a:t>10</a:t>
+              <a:t>11</a:t>
             </a:fld>
             <a:endParaRPr lang="en-DE"/>
           </a:p>
@@ -4323,7 +4748,7 @@
 </p:sld>
 </file>
 
-<file path=ppt/slides/slide11.xml><?xml version="1.0" encoding="utf-8"?>
+<file path=ppt/slides/slide12.xml><?xml version="1.0" encoding="utf-8"?>
 <p:sld xmlns:a="http://schemas.openxmlformats.org/drawingml/2006/main" xmlns:r="http://schemas.openxmlformats.org/officeDocument/2006/relationships" xmlns:p="http://schemas.openxmlformats.org/presentationml/2006/main">
   <p:cSld>
     <p:spTree>
@@ -4415,7 +4840,7 @@
           <a:p>
             <a:fld id="{08C366F5-AFAD-49CB-854A-9D9E238FCA13}" type="slidenum">
               <a:rPr lang="en-GB" smtClean="0"/>
-              <a:t>11</a:t>
+              <a:t>12</a:t>
             </a:fld>
             <a:endParaRPr lang="en-GB"/>
           </a:p>
@@ -4425,167 +4850,6 @@
     <p:extLst>
       <p:ext uri="{BB962C8B-B14F-4D97-AF65-F5344CB8AC3E}">
         <p14:creationId xmlns:p14="http://schemas.microsoft.com/office/powerpoint/2010/main" val="2472302990"/>
-      </p:ext>
-    </p:extLst>
-  </p:cSld>
-  <p:clrMapOvr>
-    <a:masterClrMapping/>
-  </p:clrMapOvr>
-</p:sld>
-</file>
-
-<file path=ppt/slides/slide12.xml><?xml version="1.0" encoding="utf-8"?>
-<p:sld xmlns:a="http://schemas.openxmlformats.org/drawingml/2006/main" xmlns:r="http://schemas.openxmlformats.org/officeDocument/2006/relationships" xmlns:p="http://schemas.openxmlformats.org/presentationml/2006/main">
-  <p:cSld>
-    <p:spTree>
-      <p:nvGrpSpPr>
-        <p:cNvPr id="1" name=""/>
-        <p:cNvGrpSpPr/>
-        <p:nvPr/>
-      </p:nvGrpSpPr>
-      <p:grpSpPr>
-        <a:xfrm>
-          <a:off x="0" y="0"/>
-          <a:ext cx="0" cy="0"/>
-          <a:chOff x="0" y="0"/>
-          <a:chExt cx="0" cy="0"/>
-        </a:xfrm>
-      </p:grpSpPr>
-      <p:sp>
-        <p:nvSpPr>
-          <p:cNvPr id="2" name="Titel 1">
-            <a:extLst>
-              <a:ext uri="{FF2B5EF4-FFF2-40B4-BE49-F238E27FC236}">
-                <a16:creationId xmlns:a16="http://schemas.microsoft.com/office/drawing/2014/main" id="{7B3FAC51-65A5-1409-A6D0-7B810403B8BE}"/>
-              </a:ext>
-            </a:extLst>
-          </p:cNvPr>
-          <p:cNvSpPr>
-            <a:spLocks noGrp="1"/>
-          </p:cNvSpPr>
-          <p:nvPr>
-            <p:ph type="title"/>
-          </p:nvPr>
-        </p:nvSpPr>
-        <p:spPr/>
-        <p:txBody>
-          <a:bodyPr/>
-          <a:lstStyle/>
-          <a:p>
-            <a:r>
-              <a:rPr lang="en-GB" dirty="0"/>
-              <a:t>Trajectory </a:t>
-            </a:r>
-            <a:r>
-              <a:rPr lang="en-GB" dirty="0" err="1"/>
-              <a:t>Modeling</a:t>
-            </a:r>
-            <a:endParaRPr lang="de-DE" dirty="0"/>
-          </a:p>
-        </p:txBody>
-      </p:sp>
-      <p:sp>
-        <p:nvSpPr>
-          <p:cNvPr id="3" name="Inhaltsplatzhalter 2">
-            <a:extLst>
-              <a:ext uri="{FF2B5EF4-FFF2-40B4-BE49-F238E27FC236}">
-                <a16:creationId xmlns:a16="http://schemas.microsoft.com/office/drawing/2014/main" id="{5E36192F-8BCF-0FAF-226A-963A74B4ED5D}"/>
-              </a:ext>
-            </a:extLst>
-          </p:cNvPr>
-          <p:cNvSpPr>
-            <a:spLocks noGrp="1"/>
-          </p:cNvSpPr>
-          <p:nvPr>
-            <p:ph idx="1"/>
-          </p:nvPr>
-        </p:nvSpPr>
-        <p:spPr/>
-        <p:txBody>
-          <a:bodyPr/>
-          <a:lstStyle/>
-          <a:p>
-            <a:r>
-              <a:rPr lang="de-DE" dirty="0" err="1"/>
-              <a:t>Using</a:t>
-            </a:r>
-            <a:r>
-              <a:rPr lang="de-DE" dirty="0"/>
-              <a:t> </a:t>
-            </a:r>
-            <a:r>
-              <a:rPr lang="de-DE" dirty="0" err="1"/>
-              <a:t>sequence</a:t>
-            </a:r>
-            <a:r>
-              <a:rPr lang="de-DE" dirty="0"/>
-              <a:t> </a:t>
-            </a:r>
-            <a:r>
-              <a:rPr lang="de-DE" dirty="0" err="1"/>
-              <a:t>models</a:t>
-            </a:r>
-            <a:r>
-              <a:rPr lang="de-DE" dirty="0"/>
-              <a:t> </a:t>
-            </a:r>
-            <a:r>
-              <a:rPr lang="de-DE" dirty="0" err="1"/>
-              <a:t>for</a:t>
-            </a:r>
-            <a:r>
-              <a:rPr lang="de-DE" dirty="0"/>
-              <a:t> </a:t>
-            </a:r>
-            <a:r>
-              <a:rPr lang="de-DE" dirty="0" err="1"/>
-              <a:t>policy</a:t>
-            </a:r>
-            <a:r>
-              <a:rPr lang="de-DE" dirty="0"/>
-              <a:t> </a:t>
-            </a:r>
-            <a:r>
-              <a:rPr lang="de-DE" dirty="0" err="1"/>
-              <a:t>prediction</a:t>
-            </a:r>
-            <a:endParaRPr lang="de-DE" dirty="0"/>
-          </a:p>
-        </p:txBody>
-      </p:sp>
-      <p:sp>
-        <p:nvSpPr>
-          <p:cNvPr id="4" name="Foliennummernplatzhalter 3">
-            <a:extLst>
-              <a:ext uri="{FF2B5EF4-FFF2-40B4-BE49-F238E27FC236}">
-                <a16:creationId xmlns:a16="http://schemas.microsoft.com/office/drawing/2014/main" id="{231F773B-8566-CAF5-9DFE-D45C971800E2}"/>
-              </a:ext>
-            </a:extLst>
-          </p:cNvPr>
-          <p:cNvSpPr>
-            <a:spLocks noGrp="1"/>
-          </p:cNvSpPr>
-          <p:nvPr>
-            <p:ph type="sldNum" sz="quarter" idx="12"/>
-          </p:nvPr>
-        </p:nvSpPr>
-        <p:spPr/>
-        <p:txBody>
-          <a:bodyPr/>
-          <a:lstStyle/>
-          <a:p>
-            <a:fld id="{08C366F5-AFAD-49CB-854A-9D9E238FCA13}" type="slidenum">
-              <a:rPr lang="en-GB" smtClean="0"/>
-              <a:t>12</a:t>
-            </a:fld>
-            <a:endParaRPr lang="en-GB"/>
-          </a:p>
-        </p:txBody>
-      </p:sp>
-    </p:spTree>
-    <p:extLst>
-      <p:ext uri="{BB962C8B-B14F-4D97-AF65-F5344CB8AC3E}">
-        <p14:creationId xmlns:p14="http://schemas.microsoft.com/office/powerpoint/2010/main" val="2825950394"/>
       </p:ext>
     </p:extLst>
   </p:cSld>
@@ -4612,6 +4876,167 @@
           <a:chExt cx="0" cy="0"/>
         </a:xfrm>
       </p:grpSpPr>
+      <p:sp>
+        <p:nvSpPr>
+          <p:cNvPr id="2" name="Titel 1">
+            <a:extLst>
+              <a:ext uri="{FF2B5EF4-FFF2-40B4-BE49-F238E27FC236}">
+                <a16:creationId xmlns:a16="http://schemas.microsoft.com/office/drawing/2014/main" id="{7B3FAC51-65A5-1409-A6D0-7B810403B8BE}"/>
+              </a:ext>
+            </a:extLst>
+          </p:cNvPr>
+          <p:cNvSpPr>
+            <a:spLocks noGrp="1"/>
+          </p:cNvSpPr>
+          <p:nvPr>
+            <p:ph type="title"/>
+          </p:nvPr>
+        </p:nvSpPr>
+        <p:spPr/>
+        <p:txBody>
+          <a:bodyPr/>
+          <a:lstStyle/>
+          <a:p>
+            <a:r>
+              <a:rPr lang="en-GB" dirty="0"/>
+              <a:t>Trajectory </a:t>
+            </a:r>
+            <a:r>
+              <a:rPr lang="en-GB" dirty="0" err="1"/>
+              <a:t>Modeling</a:t>
+            </a:r>
+            <a:endParaRPr lang="de-DE" dirty="0"/>
+          </a:p>
+        </p:txBody>
+      </p:sp>
+      <p:sp>
+        <p:nvSpPr>
+          <p:cNvPr id="3" name="Inhaltsplatzhalter 2">
+            <a:extLst>
+              <a:ext uri="{FF2B5EF4-FFF2-40B4-BE49-F238E27FC236}">
+                <a16:creationId xmlns:a16="http://schemas.microsoft.com/office/drawing/2014/main" id="{5E36192F-8BCF-0FAF-226A-963A74B4ED5D}"/>
+              </a:ext>
+            </a:extLst>
+          </p:cNvPr>
+          <p:cNvSpPr>
+            <a:spLocks noGrp="1"/>
+          </p:cNvSpPr>
+          <p:nvPr>
+            <p:ph idx="1"/>
+          </p:nvPr>
+        </p:nvSpPr>
+        <p:spPr/>
+        <p:txBody>
+          <a:bodyPr/>
+          <a:lstStyle/>
+          <a:p>
+            <a:r>
+              <a:rPr lang="de-DE" dirty="0" err="1"/>
+              <a:t>Using</a:t>
+            </a:r>
+            <a:r>
+              <a:rPr lang="de-DE" dirty="0"/>
+              <a:t> </a:t>
+            </a:r>
+            <a:r>
+              <a:rPr lang="de-DE" dirty="0" err="1"/>
+              <a:t>sequence</a:t>
+            </a:r>
+            <a:r>
+              <a:rPr lang="de-DE" dirty="0"/>
+              <a:t> </a:t>
+            </a:r>
+            <a:r>
+              <a:rPr lang="de-DE" dirty="0" err="1"/>
+              <a:t>models</a:t>
+            </a:r>
+            <a:r>
+              <a:rPr lang="de-DE" dirty="0"/>
+              <a:t> </a:t>
+            </a:r>
+            <a:r>
+              <a:rPr lang="de-DE" dirty="0" err="1"/>
+              <a:t>for</a:t>
+            </a:r>
+            <a:r>
+              <a:rPr lang="de-DE" dirty="0"/>
+              <a:t> </a:t>
+            </a:r>
+            <a:r>
+              <a:rPr lang="de-DE" dirty="0" err="1"/>
+              <a:t>policy</a:t>
+            </a:r>
+            <a:r>
+              <a:rPr lang="de-DE" dirty="0"/>
+              <a:t> </a:t>
+            </a:r>
+            <a:r>
+              <a:rPr lang="de-DE" dirty="0" err="1"/>
+              <a:t>prediction</a:t>
+            </a:r>
+            <a:endParaRPr lang="de-DE" dirty="0"/>
+          </a:p>
+        </p:txBody>
+      </p:sp>
+      <p:sp>
+        <p:nvSpPr>
+          <p:cNvPr id="4" name="Foliennummernplatzhalter 3">
+            <a:extLst>
+              <a:ext uri="{FF2B5EF4-FFF2-40B4-BE49-F238E27FC236}">
+                <a16:creationId xmlns:a16="http://schemas.microsoft.com/office/drawing/2014/main" id="{231F773B-8566-CAF5-9DFE-D45C971800E2}"/>
+              </a:ext>
+            </a:extLst>
+          </p:cNvPr>
+          <p:cNvSpPr>
+            <a:spLocks noGrp="1"/>
+          </p:cNvSpPr>
+          <p:nvPr>
+            <p:ph type="sldNum" sz="quarter" idx="12"/>
+          </p:nvPr>
+        </p:nvSpPr>
+        <p:spPr/>
+        <p:txBody>
+          <a:bodyPr/>
+          <a:lstStyle/>
+          <a:p>
+            <a:fld id="{08C366F5-AFAD-49CB-854A-9D9E238FCA13}" type="slidenum">
+              <a:rPr lang="en-GB" smtClean="0"/>
+              <a:t>13</a:t>
+            </a:fld>
+            <a:endParaRPr lang="en-GB"/>
+          </a:p>
+        </p:txBody>
+      </p:sp>
+    </p:spTree>
+    <p:extLst>
+      <p:ext uri="{BB962C8B-B14F-4D97-AF65-F5344CB8AC3E}">
+        <p14:creationId xmlns:p14="http://schemas.microsoft.com/office/powerpoint/2010/main" val="2825950394"/>
+      </p:ext>
+    </p:extLst>
+  </p:cSld>
+  <p:clrMapOvr>
+    <a:masterClrMapping/>
+  </p:clrMapOvr>
+</p:sld>
+</file>
+
+<file path=ppt/slides/slide14.xml><?xml version="1.0" encoding="utf-8"?>
+<p:sld xmlns:a="http://schemas.openxmlformats.org/drawingml/2006/main" xmlns:r="http://schemas.openxmlformats.org/officeDocument/2006/relationships" xmlns:p="http://schemas.openxmlformats.org/presentationml/2006/main">
+  <p:cSld>
+    <p:spTree>
+      <p:nvGrpSpPr>
+        <p:cNvPr id="1" name=""/>
+        <p:cNvGrpSpPr/>
+        <p:nvPr/>
+      </p:nvGrpSpPr>
+      <p:grpSpPr>
+        <a:xfrm>
+          <a:off x="0" y="0"/>
+          <a:ext cx="0" cy="0"/>
+          <a:chOff x="0" y="0"/>
+          <a:chExt cx="0" cy="0"/>
+        </a:xfrm>
+      </p:grpSpPr>
       <p:pic>
         <p:nvPicPr>
           <p:cNvPr id="6" name="Picture 5" descr="A screenshot of a computer&#10;&#10;Description automatically generated with medium confidence">
@@ -4737,7 +5162,7 @@
           <a:p>
             <a:fld id="{384C2C1F-BED8-2340-8784-C66D22CCFBBD}" type="slidenum">
               <a:rPr lang="en-DE" smtClean="0"/>
-              <a:t>13</a:t>
+              <a:t>14</a:t>
             </a:fld>
             <a:endParaRPr lang="en-DE"/>
           </a:p>
@@ -5161,7 +5586,7 @@
 </p:sld>
 </file>
 
-<file path=ppt/slides/slide14.xml><?xml version="1.0" encoding="utf-8"?>
+<file path=ppt/slides/slide15.xml><?xml version="1.0" encoding="utf-8"?>
 <p:sld xmlns:a="http://schemas.openxmlformats.org/drawingml/2006/main" xmlns:r="http://schemas.openxmlformats.org/officeDocument/2006/relationships" xmlns:p="http://schemas.openxmlformats.org/presentationml/2006/main">
   <p:cSld>
     <p:spTree>
@@ -5303,7 +5728,7 @@
           <a:p>
             <a:fld id="{08C366F5-AFAD-49CB-854A-9D9E238FCA13}" type="slidenum">
               <a:rPr lang="en-GB" smtClean="0"/>
-              <a:t>14</a:t>
+              <a:t>15</a:t>
             </a:fld>
             <a:endParaRPr lang="en-GB"/>
           </a:p>
@@ -5322,7 +5747,7 @@
 </p:sld>
 </file>
 
-<file path=ppt/slides/slide15.xml><?xml version="1.0" encoding="utf-8"?>
+<file path=ppt/slides/slide16.xml><?xml version="1.0" encoding="utf-8"?>
 <p:sld xmlns:a="http://schemas.openxmlformats.org/drawingml/2006/main" xmlns:r="http://schemas.openxmlformats.org/officeDocument/2006/relationships" xmlns:p="http://schemas.openxmlformats.org/presentationml/2006/main">
   <p:cSld>
     <p:spTree>
@@ -5410,7 +5835,7 @@
           <a:p>
             <a:fld id="{08C366F5-AFAD-49CB-854A-9D9E238FCA13}" type="slidenum">
               <a:rPr lang="en-GB" smtClean="0"/>
-              <a:t>15</a:t>
+              <a:t>16</a:t>
             </a:fld>
             <a:endParaRPr lang="en-GB"/>
           </a:p>
@@ -5420,166 +5845,6 @@
     <p:extLst>
       <p:ext uri="{BB962C8B-B14F-4D97-AF65-F5344CB8AC3E}">
         <p14:creationId xmlns:p14="http://schemas.microsoft.com/office/powerpoint/2010/main" val="774495290"/>
-      </p:ext>
-    </p:extLst>
-  </p:cSld>
-  <p:clrMapOvr>
-    <a:masterClrMapping/>
-  </p:clrMapOvr>
-</p:sld>
-</file>
-
-<file path=ppt/slides/slide16.xml><?xml version="1.0" encoding="utf-8"?>
-<p:sld xmlns:a="http://schemas.openxmlformats.org/drawingml/2006/main" xmlns:r="http://schemas.openxmlformats.org/officeDocument/2006/relationships" xmlns:p="http://schemas.openxmlformats.org/presentationml/2006/main">
-  <p:cSld>
-    <p:spTree>
-      <p:nvGrpSpPr>
-        <p:cNvPr id="1" name=""/>
-        <p:cNvGrpSpPr/>
-        <p:nvPr/>
-      </p:nvGrpSpPr>
-      <p:grpSpPr>
-        <a:xfrm>
-          <a:off x="0" y="0"/>
-          <a:ext cx="0" cy="0"/>
-          <a:chOff x="0" y="0"/>
-          <a:chExt cx="0" cy="0"/>
-        </a:xfrm>
-      </p:grpSpPr>
-      <p:sp>
-        <p:nvSpPr>
-          <p:cNvPr id="2" name="Titel 1">
-            <a:extLst>
-              <a:ext uri="{FF2B5EF4-FFF2-40B4-BE49-F238E27FC236}">
-                <a16:creationId xmlns:a16="http://schemas.microsoft.com/office/drawing/2014/main" id="{226B6C36-06F3-AC73-A6FB-6E52BC3AAE3B}"/>
-              </a:ext>
-            </a:extLst>
-          </p:cNvPr>
-          <p:cNvSpPr>
-            <a:spLocks noGrp="1"/>
-          </p:cNvSpPr>
-          <p:nvPr>
-            <p:ph type="title"/>
-          </p:nvPr>
-        </p:nvSpPr>
-        <p:spPr/>
-        <p:txBody>
-          <a:bodyPr/>
-          <a:lstStyle/>
-          <a:p>
-            <a:r>
-              <a:rPr lang="de-DE" dirty="0" err="1"/>
-              <a:t>Embodied</a:t>
-            </a:r>
-            <a:r>
-              <a:rPr lang="de-DE" dirty="0"/>
-              <a:t> RL</a:t>
-            </a:r>
-          </a:p>
-        </p:txBody>
-      </p:sp>
-      <p:sp>
-        <p:nvSpPr>
-          <p:cNvPr id="3" name="Inhaltsplatzhalter 2">
-            <a:extLst>
-              <a:ext uri="{FF2B5EF4-FFF2-40B4-BE49-F238E27FC236}">
-                <a16:creationId xmlns:a16="http://schemas.microsoft.com/office/drawing/2014/main" id="{27221939-A1BE-48B0-4D95-46E4C8412FBC}"/>
-              </a:ext>
-            </a:extLst>
-          </p:cNvPr>
-          <p:cNvSpPr>
-            <a:spLocks noGrp="1"/>
-          </p:cNvSpPr>
-          <p:nvPr>
-            <p:ph idx="1"/>
-          </p:nvPr>
-        </p:nvSpPr>
-        <p:spPr/>
-        <p:txBody>
-          <a:bodyPr/>
-          <a:lstStyle/>
-          <a:p>
-            <a:r>
-              <a:rPr lang="de-DE" dirty="0" err="1"/>
-              <a:t>Agents</a:t>
-            </a:r>
-            <a:r>
-              <a:rPr lang="de-DE" dirty="0"/>
-              <a:t> </a:t>
-            </a:r>
-            <a:r>
-              <a:rPr lang="de-DE" dirty="0" err="1"/>
-              <a:t>interacting</a:t>
-            </a:r>
-            <a:r>
-              <a:rPr lang="de-DE" dirty="0"/>
-              <a:t> </a:t>
-            </a:r>
-            <a:r>
-              <a:rPr lang="de-DE" dirty="0" err="1"/>
-              <a:t>with</a:t>
-            </a:r>
-            <a:r>
-              <a:rPr lang="de-DE" dirty="0"/>
-              <a:t> </a:t>
-            </a:r>
-            <a:r>
-              <a:rPr lang="de-DE" dirty="0" err="1"/>
-              <a:t>complex</a:t>
-            </a:r>
-            <a:r>
-              <a:rPr lang="de-DE" dirty="0"/>
-              <a:t>, </a:t>
-            </a:r>
-            <a:r>
-              <a:rPr lang="de-DE" dirty="0" err="1"/>
-              <a:t>realistic</a:t>
-            </a:r>
-            <a:r>
-              <a:rPr lang="de-DE" dirty="0"/>
-              <a:t> </a:t>
-            </a:r>
-            <a:r>
-              <a:rPr lang="de-DE" dirty="0" err="1"/>
-              <a:t>environments</a:t>
-            </a:r>
-            <a:endParaRPr lang="de-DE" dirty="0"/>
-          </a:p>
-        </p:txBody>
-      </p:sp>
-      <p:sp>
-        <p:nvSpPr>
-          <p:cNvPr id="4" name="Foliennummernplatzhalter 3">
-            <a:extLst>
-              <a:ext uri="{FF2B5EF4-FFF2-40B4-BE49-F238E27FC236}">
-                <a16:creationId xmlns:a16="http://schemas.microsoft.com/office/drawing/2014/main" id="{803C05ED-0DFD-A388-0080-8843F879919E}"/>
-              </a:ext>
-            </a:extLst>
-          </p:cNvPr>
-          <p:cNvSpPr>
-            <a:spLocks noGrp="1"/>
-          </p:cNvSpPr>
-          <p:nvPr>
-            <p:ph type="sldNum" sz="quarter" idx="12"/>
-          </p:nvPr>
-        </p:nvSpPr>
-        <p:spPr/>
-        <p:txBody>
-          <a:bodyPr/>
-          <a:lstStyle/>
-          <a:p>
-            <a:fld id="{08C366F5-AFAD-49CB-854A-9D9E238FCA13}" type="slidenum">
-              <a:rPr lang="en-GB" smtClean="0"/>
-              <a:t>16</a:t>
-            </a:fld>
-            <a:endParaRPr lang="en-GB"/>
-          </a:p>
-        </p:txBody>
-      </p:sp>
-    </p:spTree>
-    <p:extLst>
-      <p:ext uri="{BB962C8B-B14F-4D97-AF65-F5344CB8AC3E}">
-        <p14:creationId xmlns:p14="http://schemas.microsoft.com/office/powerpoint/2010/main" val="3856566800"/>
       </p:ext>
     </p:extLst>
   </p:cSld>
@@ -5611,7 +5876,7 @@
           <p:cNvPr id="2" name="Titel 1">
             <a:extLst>
               <a:ext uri="{FF2B5EF4-FFF2-40B4-BE49-F238E27FC236}">
-                <a16:creationId xmlns:a16="http://schemas.microsoft.com/office/drawing/2014/main" id="{3638C6F0-EEAA-7DD3-F1D2-34D4F5F17A5D}"/>
+                <a16:creationId xmlns:a16="http://schemas.microsoft.com/office/drawing/2014/main" id="{226B6C36-06F3-AC73-A6FB-6E52BC3AAE3B}"/>
               </a:ext>
             </a:extLst>
           </p:cNvPr>
@@ -5628,8 +5893,12 @@
           <a:lstStyle/>
           <a:p>
             <a:r>
-              <a:rPr lang="de-DE" dirty="0"/>
-              <a:t>Isaac Sim &amp; Lab</a:t>
+              <a:rPr lang="de-DE" dirty="0" err="1"/>
+              <a:t>Embodied</a:t>
+            </a:r>
+            <a:r>
+              <a:rPr lang="de-DE" dirty="0"/>
+              <a:t> RL</a:t>
             </a:r>
           </a:p>
         </p:txBody>
@@ -5639,7 +5908,7 @@
           <p:cNvPr id="3" name="Inhaltsplatzhalter 2">
             <a:extLst>
               <a:ext uri="{FF2B5EF4-FFF2-40B4-BE49-F238E27FC236}">
-                <a16:creationId xmlns:a16="http://schemas.microsoft.com/office/drawing/2014/main" id="{56AB4563-14C8-A40B-C7FB-7CA27C97201F}"/>
+                <a16:creationId xmlns:a16="http://schemas.microsoft.com/office/drawing/2014/main" id="{27221939-A1BE-48B0-4D95-46E4C8412FBC}"/>
               </a:ext>
             </a:extLst>
           </p:cNvPr>
@@ -5655,7 +5924,51 @@
           <a:bodyPr/>
           <a:lstStyle/>
           <a:p>
-            <a:endParaRPr lang="de-DE"/>
+            <a:r>
+              <a:rPr lang="de-DE" dirty="0" err="1"/>
+              <a:t>Agents</a:t>
+            </a:r>
+            <a:r>
+              <a:rPr lang="de-DE" dirty="0"/>
+              <a:t> </a:t>
+            </a:r>
+            <a:r>
+              <a:rPr lang="de-DE" dirty="0" err="1"/>
+              <a:t>interacting</a:t>
+            </a:r>
+            <a:r>
+              <a:rPr lang="de-DE" dirty="0"/>
+              <a:t> </a:t>
+            </a:r>
+            <a:r>
+              <a:rPr lang="de-DE" dirty="0" err="1"/>
+              <a:t>with</a:t>
+            </a:r>
+            <a:r>
+              <a:rPr lang="de-DE" dirty="0"/>
+              <a:t> </a:t>
+            </a:r>
+            <a:r>
+              <a:rPr lang="de-DE" dirty="0" err="1"/>
+              <a:t>complex</a:t>
+            </a:r>
+            <a:r>
+              <a:rPr lang="de-DE" dirty="0"/>
+              <a:t>, </a:t>
+            </a:r>
+            <a:r>
+              <a:rPr lang="de-DE" dirty="0" err="1"/>
+              <a:t>realistic</a:t>
+            </a:r>
+            <a:r>
+              <a:rPr lang="de-DE" dirty="0"/>
+              <a:t> </a:t>
+            </a:r>
+            <a:r>
+              <a:rPr lang="de-DE" dirty="0" err="1"/>
+              <a:t>environments</a:t>
+            </a:r>
+            <a:endParaRPr lang="de-DE" dirty="0"/>
           </a:p>
         </p:txBody>
       </p:sp>
@@ -5664,7 +5977,7 @@
           <p:cNvPr id="4" name="Foliennummernplatzhalter 3">
             <a:extLst>
               <a:ext uri="{FF2B5EF4-FFF2-40B4-BE49-F238E27FC236}">
-                <a16:creationId xmlns:a16="http://schemas.microsoft.com/office/drawing/2014/main" id="{5AD6968C-F452-BA18-653A-B2E00C905166}"/>
+                <a16:creationId xmlns:a16="http://schemas.microsoft.com/office/drawing/2014/main" id="{803C05ED-0DFD-A388-0080-8843F879919E}"/>
               </a:ext>
             </a:extLst>
           </p:cNvPr>
@@ -5691,7 +6004,7 @@
     </p:spTree>
     <p:extLst>
       <p:ext uri="{BB962C8B-B14F-4D97-AF65-F5344CB8AC3E}">
-        <p14:creationId xmlns:p14="http://schemas.microsoft.com/office/powerpoint/2010/main" val="1464015792"/>
+        <p14:creationId xmlns:p14="http://schemas.microsoft.com/office/powerpoint/2010/main" val="3856566800"/>
       </p:ext>
     </p:extLst>
   </p:cSld>
@@ -5723,7 +6036,7 @@
           <p:cNvPr id="2" name="Titel 1">
             <a:extLst>
               <a:ext uri="{FF2B5EF4-FFF2-40B4-BE49-F238E27FC236}">
-                <a16:creationId xmlns:a16="http://schemas.microsoft.com/office/drawing/2014/main" id="{9728D84D-0315-CC40-03E4-0D67C66A8EAA}"/>
+                <a16:creationId xmlns:a16="http://schemas.microsoft.com/office/drawing/2014/main" id="{3638C6F0-EEAA-7DD3-F1D2-34D4F5F17A5D}"/>
               </a:ext>
             </a:extLst>
           </p:cNvPr>
@@ -5741,15 +6054,7 @@
           <a:p>
             <a:r>
               <a:rPr lang="de-DE" dirty="0"/>
-              <a:t>Sim-</a:t>
-            </a:r>
-            <a:r>
-              <a:rPr lang="de-DE" dirty="0" err="1"/>
-              <a:t>to</a:t>
-            </a:r>
-            <a:r>
-              <a:rPr lang="de-DE" dirty="0"/>
-              <a:t>-Real Gap</a:t>
+              <a:t>Isaac Sim &amp; Lab</a:t>
             </a:r>
           </a:p>
         </p:txBody>
@@ -5759,7 +6064,7 @@
           <p:cNvPr id="3" name="Inhaltsplatzhalter 2">
             <a:extLst>
               <a:ext uri="{FF2B5EF4-FFF2-40B4-BE49-F238E27FC236}">
-                <a16:creationId xmlns:a16="http://schemas.microsoft.com/office/drawing/2014/main" id="{69AFEC59-CB1E-7792-3404-78A3B93E229C}"/>
+                <a16:creationId xmlns:a16="http://schemas.microsoft.com/office/drawing/2014/main" id="{56AB4563-14C8-A40B-C7FB-7CA27C97201F}"/>
               </a:ext>
             </a:extLst>
           </p:cNvPr>
@@ -5784,7 +6089,7 @@
           <p:cNvPr id="4" name="Foliennummernplatzhalter 3">
             <a:extLst>
               <a:ext uri="{FF2B5EF4-FFF2-40B4-BE49-F238E27FC236}">
-                <a16:creationId xmlns:a16="http://schemas.microsoft.com/office/drawing/2014/main" id="{629AC89E-FE0F-BB39-BE49-90F4B5A47D06}"/>
+                <a16:creationId xmlns:a16="http://schemas.microsoft.com/office/drawing/2014/main" id="{5AD6968C-F452-BA18-653A-B2E00C905166}"/>
               </a:ext>
             </a:extLst>
           </p:cNvPr>
@@ -5811,7 +6116,7 @@
     </p:spTree>
     <p:extLst>
       <p:ext uri="{BB962C8B-B14F-4D97-AF65-F5344CB8AC3E}">
-        <p14:creationId xmlns:p14="http://schemas.microsoft.com/office/powerpoint/2010/main" val="3603028818"/>
+        <p14:creationId xmlns:p14="http://schemas.microsoft.com/office/powerpoint/2010/main" val="1464015792"/>
       </p:ext>
     </p:extLst>
   </p:cSld>
@@ -5843,7 +6148,7 @@
           <p:cNvPr id="2" name="Titel 1">
             <a:extLst>
               <a:ext uri="{FF2B5EF4-FFF2-40B4-BE49-F238E27FC236}">
-                <a16:creationId xmlns:a16="http://schemas.microsoft.com/office/drawing/2014/main" id="{BB527B4E-318F-01F3-DA5E-D552C9431BA0}"/>
+                <a16:creationId xmlns:a16="http://schemas.microsoft.com/office/drawing/2014/main" id="{9728D84D-0315-CC40-03E4-0D67C66A8EAA}"/>
               </a:ext>
             </a:extLst>
           </p:cNvPr>
@@ -5861,13 +6166,16 @@
           <a:p>
             <a:r>
               <a:rPr lang="de-DE" dirty="0"/>
-              <a:t>Generalist Robot </a:t>
-            </a:r>
-            <a:r>
-              <a:rPr lang="de-DE" dirty="0" err="1"/>
-              <a:t>Policies</a:t>
-            </a:r>
-            <a:endParaRPr lang="de-DE" dirty="0"/>
+              <a:t>Sim-</a:t>
+            </a:r>
+            <a:r>
+              <a:rPr lang="de-DE" dirty="0" err="1"/>
+              <a:t>to</a:t>
+            </a:r>
+            <a:r>
+              <a:rPr lang="de-DE" dirty="0"/>
+              <a:t>-Real Gap</a:t>
+            </a:r>
           </a:p>
         </p:txBody>
       </p:sp>
@@ -5876,7 +6184,7 @@
           <p:cNvPr id="3" name="Inhaltsplatzhalter 2">
             <a:extLst>
               <a:ext uri="{FF2B5EF4-FFF2-40B4-BE49-F238E27FC236}">
-                <a16:creationId xmlns:a16="http://schemas.microsoft.com/office/drawing/2014/main" id="{0EDD8201-E814-754C-57A9-E0D3326CEC1E}"/>
+                <a16:creationId xmlns:a16="http://schemas.microsoft.com/office/drawing/2014/main" id="{69AFEC59-CB1E-7792-3404-78A3B93E229C}"/>
               </a:ext>
             </a:extLst>
           </p:cNvPr>
@@ -5892,15 +6200,7 @@
           <a:bodyPr/>
           <a:lstStyle/>
           <a:p>
-            <a:r>
-              <a:rPr lang="de-DE" dirty="0"/>
-              <a:t>e.g., </a:t>
-            </a:r>
-            <a:r>
-              <a:rPr lang="de-DE" dirty="0" err="1"/>
-              <a:t>SmolVLA</a:t>
-            </a:r>
-            <a:endParaRPr lang="de-DE" dirty="0"/>
+            <a:endParaRPr lang="de-DE"/>
           </a:p>
         </p:txBody>
       </p:sp>
@@ -5909,7 +6209,7 @@
           <p:cNvPr id="4" name="Foliennummernplatzhalter 3">
             <a:extLst>
               <a:ext uri="{FF2B5EF4-FFF2-40B4-BE49-F238E27FC236}">
-                <a16:creationId xmlns:a16="http://schemas.microsoft.com/office/drawing/2014/main" id="{26BC5031-BD7E-00D2-C81A-AA5111B94CBE}"/>
+                <a16:creationId xmlns:a16="http://schemas.microsoft.com/office/drawing/2014/main" id="{629AC89E-FE0F-BB39-BE49-90F4B5A47D06}"/>
               </a:ext>
             </a:extLst>
           </p:cNvPr>
@@ -5936,7 +6236,7 @@
     </p:spTree>
     <p:extLst>
       <p:ext uri="{BB962C8B-B14F-4D97-AF65-F5344CB8AC3E}">
-        <p14:creationId xmlns:p14="http://schemas.microsoft.com/office/powerpoint/2010/main" val="3427472480"/>
+        <p14:creationId xmlns:p14="http://schemas.microsoft.com/office/powerpoint/2010/main" val="3603028818"/>
       </p:ext>
     </p:extLst>
   </p:cSld>
@@ -5968,7 +6268,7 @@
           <p:cNvPr id="2" name="Titel 1">
             <a:extLst>
               <a:ext uri="{FF2B5EF4-FFF2-40B4-BE49-F238E27FC236}">
-                <a16:creationId xmlns:a16="http://schemas.microsoft.com/office/drawing/2014/main" id="{ADAEB7CC-A04B-6527-EF17-EAAD14C75673}"/>
+                <a16:creationId xmlns:a16="http://schemas.microsoft.com/office/drawing/2014/main" id="{C2056A97-9371-940F-5B97-4DC15D45258C}"/>
               </a:ext>
             </a:extLst>
           </p:cNvPr>
@@ -5985,12 +6285,46 @@
           <a:lstStyle/>
           <a:p>
             <a:r>
-              <a:rPr lang="de-DE" dirty="0"/>
-              <a:t>Idea </a:t>
-            </a:r>
-            <a:r>
-              <a:rPr lang="de-DE" dirty="0" err="1"/>
-              <a:t>of</a:t>
+              <a:rPr lang="de-DE" dirty="0" err="1"/>
+              <a:t>Advanced</a:t>
+            </a:r>
+            <a:r>
+              <a:rPr lang="de-DE" dirty="0"/>
+              <a:t> &amp; Emerging RL Methods</a:t>
+            </a:r>
+          </a:p>
+        </p:txBody>
+      </p:sp>
+      <p:sp>
+        <p:nvSpPr>
+          <p:cNvPr id="3" name="Inhaltsplatzhalter 2">
+            <a:extLst>
+              <a:ext uri="{FF2B5EF4-FFF2-40B4-BE49-F238E27FC236}">
+                <a16:creationId xmlns:a16="http://schemas.microsoft.com/office/drawing/2014/main" id="{D4EA7976-4FFB-2C1D-163C-451080EF5658}"/>
+              </a:ext>
+            </a:extLst>
+          </p:cNvPr>
+          <p:cNvSpPr>
+            <a:spLocks noGrp="1"/>
+          </p:cNvSpPr>
+          <p:nvPr>
+            <p:ph idx="1"/>
+          </p:nvPr>
+        </p:nvSpPr>
+        <p:spPr/>
+        <p:txBody>
+          <a:bodyPr>
+            <a:normAutofit lnSpcReduction="10000"/>
+          </a:bodyPr>
+          <a:lstStyle/>
+          <a:p>
+            <a:r>
+              <a:rPr lang="de-DE" dirty="0"/>
+              <a:t>Learning </a:t>
+            </a:r>
+            <a:r>
+              <a:rPr lang="de-DE" dirty="0" err="1"/>
+              <a:t>with</a:t>
             </a:r>
             <a:r>
               <a:rPr lang="de-DE" dirty="0"/>
@@ -5998,46 +6332,132 @@
             </a:r>
             <a:r>
               <a:rPr lang="de-DE" dirty="0" err="1"/>
-              <a:t>the</a:t>
-            </a:r>
-            <a:r>
-              <a:rPr lang="de-DE" dirty="0"/>
-              <a:t> Chapter</a:t>
-            </a:r>
-          </a:p>
-        </p:txBody>
-      </p:sp>
-      <p:sp>
-        <p:nvSpPr>
-          <p:cNvPr id="3" name="Inhaltsplatzhalter 2">
-            <a:extLst>
-              <a:ext uri="{FF2B5EF4-FFF2-40B4-BE49-F238E27FC236}">
-                <a16:creationId xmlns:a16="http://schemas.microsoft.com/office/drawing/2014/main" id="{8B10677E-ECE3-1E8B-E304-7206CF32AF5E}"/>
-              </a:ext>
-            </a:extLst>
-          </p:cNvPr>
-          <p:cNvSpPr>
-            <a:spLocks noGrp="1"/>
-          </p:cNvSpPr>
-          <p:nvPr>
-            <p:ph idx="1"/>
-          </p:nvPr>
-        </p:nvSpPr>
-        <p:spPr/>
-        <p:txBody>
-          <a:bodyPr/>
-          <a:lstStyle/>
+              <a:t>models</a:t>
+            </a:r>
+            <a:r>
+              <a:rPr lang="de-DE" dirty="0"/>
+              <a:t> and </a:t>
+            </a:r>
+            <a:r>
+              <a:rPr lang="de-DE" dirty="0" err="1"/>
+              <a:t>fixed</a:t>
+            </a:r>
+            <a:r>
+              <a:rPr lang="de-DE" dirty="0"/>
+              <a:t> </a:t>
+            </a:r>
+            <a:r>
+              <a:rPr lang="de-DE" dirty="0" err="1"/>
+              <a:t>data</a:t>
+            </a:r>
+            <a:r>
+              <a:rPr lang="de-DE" dirty="0"/>
+              <a:t>: model-</a:t>
+            </a:r>
+            <a:r>
+              <a:rPr lang="de-DE" dirty="0" err="1"/>
+              <a:t>based</a:t>
+            </a:r>
+            <a:r>
+              <a:rPr lang="de-DE" dirty="0"/>
+              <a:t> RL, offline RL</a:t>
+            </a:r>
+          </a:p>
           <a:p>
             <a:pPr marL="0" indent="0">
               <a:buNone/>
             </a:pPr>
+            <a:endParaRPr lang="de-DE" dirty="0"/>
+          </a:p>
+          <a:p>
+            <a:r>
+              <a:rPr lang="de-DE" dirty="0"/>
+              <a:t>Learning </a:t>
+            </a:r>
+            <a:r>
+              <a:rPr lang="de-DE" dirty="0" err="1"/>
+              <a:t>with</a:t>
+            </a:r>
+            <a:r>
+              <a:rPr lang="de-DE" dirty="0"/>
+              <a:t> </a:t>
+            </a:r>
+            <a:r>
+              <a:rPr lang="de-DE" dirty="0" err="1"/>
+              <a:t>demonstrations</a:t>
+            </a:r>
+            <a:r>
+              <a:rPr lang="de-DE" dirty="0"/>
+              <a:t> and </a:t>
+            </a:r>
+            <a:r>
+              <a:rPr lang="de-DE" dirty="0" err="1"/>
+              <a:t>humans</a:t>
+            </a:r>
+            <a:r>
+              <a:rPr lang="de-DE" dirty="0"/>
+              <a:t>: </a:t>
+            </a:r>
+            <a:r>
+              <a:rPr lang="de-DE" dirty="0" err="1"/>
+              <a:t>behavior</a:t>
+            </a:r>
+            <a:r>
+              <a:rPr lang="de-DE" dirty="0"/>
+              <a:t> </a:t>
+            </a:r>
+            <a:r>
+              <a:rPr lang="de-DE" dirty="0" err="1"/>
+              <a:t>cloning</a:t>
+            </a:r>
+            <a:r>
+              <a:rPr lang="de-DE" dirty="0"/>
+              <a:t>, </a:t>
+            </a:r>
+            <a:r>
+              <a:rPr lang="de-DE" dirty="0" err="1"/>
+              <a:t>imitation</a:t>
+            </a:r>
+            <a:r>
+              <a:rPr lang="de-DE" dirty="0"/>
+              <a:t> </a:t>
+            </a:r>
+            <a:r>
+              <a:rPr lang="de-DE" dirty="0" err="1"/>
+              <a:t>learning</a:t>
+            </a:r>
+            <a:r>
+              <a:rPr lang="de-DE" dirty="0"/>
+              <a:t>, RL </a:t>
+            </a:r>
+            <a:r>
+              <a:rPr lang="de-DE" dirty="0" err="1"/>
+              <a:t>from</a:t>
+            </a:r>
+            <a:r>
+              <a:rPr lang="de-DE" dirty="0"/>
+              <a:t> human </a:t>
+            </a:r>
+            <a:r>
+              <a:rPr lang="de-DE" dirty="0" err="1"/>
+              <a:t>feedback</a:t>
+            </a:r>
+            <a:endParaRPr lang="de-DE" dirty="0"/>
+          </a:p>
+          <a:p>
+            <a:pPr marL="0" indent="0">
+              <a:buNone/>
+            </a:pPr>
+            <a:endParaRPr lang="de-DE" dirty="0"/>
+          </a:p>
+          <a:p>
             <a:r>
               <a:rPr lang="de-DE" dirty="0"/>
               <a:t>RL </a:t>
             </a:r>
             <a:r>
               <a:rPr lang="de-DE" dirty="0" err="1"/>
-              <a:t>approaches</a:t>
+              <a:t>as</a:t>
             </a:r>
             <a:r>
               <a:rPr lang="de-DE" dirty="0"/>
@@ -6045,7 +6465,23 @@
             </a:r>
             <a:r>
               <a:rPr lang="de-DE" dirty="0" err="1"/>
-              <a:t>that</a:t>
+              <a:t>sequence</a:t>
+            </a:r>
+            <a:r>
+              <a:rPr lang="de-DE" dirty="0"/>
+              <a:t> and generative </a:t>
+            </a:r>
+            <a:r>
+              <a:rPr lang="de-DE" dirty="0" err="1"/>
+              <a:t>modeling</a:t>
+            </a:r>
+            <a:r>
+              <a:rPr lang="de-DE" dirty="0"/>
+              <a:t>: </a:t>
+            </a:r>
+            <a:r>
+              <a:rPr lang="de-DE" dirty="0" err="1"/>
+              <a:t>trajectory</a:t>
             </a:r>
             <a:r>
               <a:rPr lang="de-DE" dirty="0"/>
@@ -6053,7 +6489,15 @@
             </a:r>
             <a:r>
               <a:rPr lang="de-DE" dirty="0" err="1"/>
-              <a:t>extend</a:t>
+              <a:t>modeling</a:t>
+            </a:r>
+            <a:r>
+              <a:rPr lang="de-DE" dirty="0"/>
+              <a:t>, </a:t>
+            </a:r>
+            <a:r>
+              <a:rPr lang="de-DE" dirty="0" err="1"/>
+              <a:t>decision</a:t>
             </a:r>
             <a:r>
               <a:rPr lang="de-DE" dirty="0"/>
@@ -6061,7 +6505,15 @@
             </a:r>
             <a:r>
               <a:rPr lang="de-DE" dirty="0" err="1"/>
-              <a:t>or</a:t>
+              <a:t>transformer</a:t>
+            </a:r>
+            <a:r>
+              <a:rPr lang="de-DE" dirty="0"/>
+              <a:t>, </a:t>
+            </a:r>
+            <a:r>
+              <a:rPr lang="de-DE" dirty="0" err="1"/>
+              <a:t>diffusion</a:t>
             </a:r>
             <a:r>
               <a:rPr lang="de-DE" dirty="0"/>
@@ -6069,7 +6521,36 @@
             </a:r>
             <a:r>
               <a:rPr lang="de-DE" dirty="0" err="1"/>
-              <a:t>complement</a:t>
+              <a:t>policies</a:t>
+            </a:r>
+            <a:endParaRPr lang="de-DE" dirty="0"/>
+          </a:p>
+          <a:p>
+            <a:pPr marL="0" indent="0">
+              <a:buNone/>
+            </a:pPr>
+            <a:endParaRPr lang="de-DE" dirty="0"/>
+          </a:p>
+          <a:p>
+            <a:r>
+              <a:rPr lang="de-DE" dirty="0" err="1"/>
+              <a:t>Scaling</a:t>
+            </a:r>
+            <a:r>
+              <a:rPr lang="de-DE" dirty="0"/>
+              <a:t> RL </a:t>
+            </a:r>
+            <a:r>
+              <a:rPr lang="de-DE" dirty="0" err="1"/>
+              <a:t>to</a:t>
+            </a:r>
+            <a:r>
+              <a:rPr lang="de-DE" dirty="0"/>
+              <a:t> real-</a:t>
+            </a:r>
+            <a:r>
+              <a:rPr lang="de-DE" dirty="0" err="1"/>
+              <a:t>world</a:t>
             </a:r>
             <a:r>
               <a:rPr lang="de-DE" dirty="0"/>
@@ -6077,15 +6558,47 @@
             </a:r>
             <a:r>
               <a:rPr lang="de-DE" dirty="0" err="1"/>
-              <a:t>standard</a:t>
-            </a:r>
-            <a:r>
-              <a:rPr lang="de-DE" dirty="0"/>
-              <a:t> model-</a:t>
-            </a:r>
-            <a:r>
-              <a:rPr lang="de-DE" dirty="0" err="1"/>
-              <a:t>free</a:t>
+              <a:t>robotics</a:t>
+            </a:r>
+            <a:r>
+              <a:rPr lang="de-DE" dirty="0"/>
+              <a:t>: </a:t>
+            </a:r>
+            <a:r>
+              <a:rPr lang="de-DE" dirty="0" err="1"/>
+              <a:t>embodied</a:t>
+            </a:r>
+            <a:r>
+              <a:rPr lang="de-DE" dirty="0"/>
+              <a:t> RL, </a:t>
+            </a:r>
+            <a:r>
+              <a:rPr lang="de-DE" dirty="0" err="1"/>
+              <a:t>sim</a:t>
+            </a:r>
+            <a:r>
+              <a:rPr lang="de-DE" dirty="0"/>
+              <a:t>-</a:t>
+            </a:r>
+            <a:r>
+              <a:rPr lang="de-DE" dirty="0" err="1"/>
+              <a:t>to</a:t>
+            </a:r>
+            <a:r>
+              <a:rPr lang="de-DE" dirty="0"/>
+              <a:t>-real </a:t>
+            </a:r>
+            <a:r>
+              <a:rPr lang="de-DE" dirty="0" err="1"/>
+              <a:t>gap</a:t>
+            </a:r>
+            <a:r>
+              <a:rPr lang="de-DE" dirty="0"/>
+              <a:t>, </a:t>
+            </a:r>
+            <a:r>
+              <a:rPr lang="de-DE" dirty="0" err="1"/>
+              <a:t>generalist</a:t>
             </a:r>
             <a:r>
               <a:rPr lang="de-DE" dirty="0"/>
@@ -6093,90 +6606,45 @@
             </a:r>
             <a:r>
               <a:rPr lang="de-DE" dirty="0" err="1"/>
-              <a:t>methods</a:t>
+              <a:t>robot</a:t>
+            </a:r>
+            <a:r>
+              <a:rPr lang="de-DE" dirty="0"/>
+              <a:t> </a:t>
+            </a:r>
+            <a:r>
+              <a:rPr lang="de-DE" dirty="0" err="1"/>
+              <a:t>policies</a:t>
+            </a:r>
+            <a:r>
+              <a:rPr lang="de-DE" dirty="0"/>
+              <a:t>, </a:t>
+            </a:r>
+            <a:r>
+              <a:rPr lang="de-DE" dirty="0" err="1"/>
+              <a:t>vision</a:t>
+            </a:r>
+            <a:r>
+              <a:rPr lang="de-DE" dirty="0"/>
+              <a:t>-</a:t>
+            </a:r>
+            <a:r>
+              <a:rPr lang="de-DE" dirty="0" err="1"/>
+              <a:t>language</a:t>
+            </a:r>
+            <a:r>
+              <a:rPr lang="de-DE" dirty="0"/>
+              <a:t>-action </a:t>
+            </a:r>
+            <a:r>
+              <a:rPr lang="de-DE" dirty="0" err="1"/>
+              <a:t>models</a:t>
             </a:r>
             <a:endParaRPr lang="de-DE" dirty="0"/>
           </a:p>
           <a:p>
-            <a:r>
-              <a:rPr lang="de-DE" dirty="0"/>
-              <a:t>model-</a:t>
-            </a:r>
-            <a:r>
-              <a:rPr lang="de-DE" dirty="0" err="1"/>
-              <a:t>based</a:t>
-            </a:r>
-            <a:r>
-              <a:rPr lang="de-DE" dirty="0"/>
-              <a:t> </a:t>
-            </a:r>
-            <a:r>
-              <a:rPr lang="de-DE" dirty="0" err="1"/>
-              <a:t>techniques</a:t>
-            </a:r>
             <a:endParaRPr lang="de-DE" dirty="0"/>
           </a:p>
-          <a:p>
-            <a:r>
-              <a:rPr lang="de-DE" dirty="0"/>
-              <a:t>offline and </a:t>
-            </a:r>
-            <a:r>
-              <a:rPr lang="de-DE" dirty="0" err="1"/>
-              <a:t>data-driven</a:t>
-            </a:r>
-            <a:r>
-              <a:rPr lang="de-DE" dirty="0"/>
-              <a:t> </a:t>
-            </a:r>
-            <a:r>
-              <a:rPr lang="de-DE" dirty="0" err="1"/>
-              <a:t>approaches</a:t>
-            </a:r>
-            <a:endParaRPr lang="de-DE" dirty="0"/>
-          </a:p>
-          <a:p>
-            <a:r>
-              <a:rPr lang="de-DE" dirty="0" err="1"/>
-              <a:t>imitation</a:t>
-            </a:r>
-            <a:r>
-              <a:rPr lang="de-DE" dirty="0"/>
-              <a:t> </a:t>
-            </a:r>
-            <a:r>
-              <a:rPr lang="de-DE" dirty="0" err="1"/>
-              <a:t>learning</a:t>
-            </a:r>
-            <a:endParaRPr lang="de-DE" dirty="0"/>
-          </a:p>
-          <a:p>
-            <a:r>
-              <a:rPr lang="de-DE" dirty="0"/>
-              <a:t>generative </a:t>
-            </a:r>
-            <a:r>
-              <a:rPr lang="de-DE" dirty="0" err="1"/>
-              <a:t>or</a:t>
-            </a:r>
-            <a:r>
-              <a:rPr lang="de-DE" dirty="0"/>
-              <a:t> multimodal </a:t>
-            </a:r>
-            <a:r>
-              <a:rPr lang="de-DE" dirty="0" err="1"/>
-              <a:t>policy</a:t>
-            </a:r>
-            <a:r>
-              <a:rPr lang="de-DE" dirty="0"/>
-              <a:t> </a:t>
-            </a:r>
-            <a:r>
-              <a:rPr lang="de-DE" dirty="0" err="1"/>
-              <a:t>methods</a:t>
-            </a:r>
-            <a:endParaRPr lang="de-DE" dirty="0"/>
-          </a:p>
         </p:txBody>
       </p:sp>
       <p:sp>
@@ -6184,7 +6652,7 @@
           <p:cNvPr id="4" name="Foliennummernplatzhalter 3">
             <a:extLst>
               <a:ext uri="{FF2B5EF4-FFF2-40B4-BE49-F238E27FC236}">
-                <a16:creationId xmlns:a16="http://schemas.microsoft.com/office/drawing/2014/main" id="{B6445948-8990-4E81-A1F1-EA0CA33CBDA1}"/>
+                <a16:creationId xmlns:a16="http://schemas.microsoft.com/office/drawing/2014/main" id="{B9E8331C-FBA4-410C-2E60-017DBE3321DA}"/>
               </a:ext>
             </a:extLst>
           </p:cNvPr>
@@ -6211,7 +6679,7 @@
     </p:spTree>
     <p:extLst>
       <p:ext uri="{BB962C8B-B14F-4D97-AF65-F5344CB8AC3E}">
-        <p14:creationId xmlns:p14="http://schemas.microsoft.com/office/powerpoint/2010/main" val="2796642825"/>
+        <p14:creationId xmlns:p14="http://schemas.microsoft.com/office/powerpoint/2010/main" val="1394451592"/>
       </p:ext>
     </p:extLst>
   </p:cSld>
@@ -6243,7 +6711,7 @@
           <p:cNvPr id="2" name="Titel 1">
             <a:extLst>
               <a:ext uri="{FF2B5EF4-FFF2-40B4-BE49-F238E27FC236}">
-                <a16:creationId xmlns:a16="http://schemas.microsoft.com/office/drawing/2014/main" id="{BDA7BBA6-3E54-57FD-D5B4-A8C70F7360E2}"/>
+                <a16:creationId xmlns:a16="http://schemas.microsoft.com/office/drawing/2014/main" id="{BB527B4E-318F-01F3-DA5E-D552C9431BA0}"/>
               </a:ext>
             </a:extLst>
           </p:cNvPr>
@@ -6261,17 +6729,22 @@
           <a:p>
             <a:r>
               <a:rPr lang="de-DE" dirty="0"/>
-              <a:t>Vision-Language-Action Models</a:t>
-            </a:r>
-          </a:p>
-        </p:txBody>
-      </p:sp>
-      <p:sp>
-        <p:nvSpPr>
-          <p:cNvPr id="6" name="Inhaltsplatzhalter 5">
-            <a:extLst>
-              <a:ext uri="{FF2B5EF4-FFF2-40B4-BE49-F238E27FC236}">
-                <a16:creationId xmlns:a16="http://schemas.microsoft.com/office/drawing/2014/main" id="{96889E58-4E7D-1C17-1621-FA929ACC4D3B}"/>
+              <a:t>Generalist Robot </a:t>
+            </a:r>
+            <a:r>
+              <a:rPr lang="de-DE" dirty="0" err="1"/>
+              <a:t>Policies</a:t>
+            </a:r>
+            <a:endParaRPr lang="de-DE" dirty="0"/>
+          </a:p>
+        </p:txBody>
+      </p:sp>
+      <p:sp>
+        <p:nvSpPr>
+          <p:cNvPr id="3" name="Inhaltsplatzhalter 2">
+            <a:extLst>
+              <a:ext uri="{FF2B5EF4-FFF2-40B4-BE49-F238E27FC236}">
+                <a16:creationId xmlns:a16="http://schemas.microsoft.com/office/drawing/2014/main" id="{0EDD8201-E814-754C-57A9-E0D3326CEC1E}"/>
               </a:ext>
             </a:extLst>
           </p:cNvPr>
@@ -6287,160 +6760,24 @@
           <a:bodyPr/>
           <a:lstStyle/>
           <a:p>
-            <a:pPr marL="0" indent="0">
-              <a:buNone/>
-            </a:pPr>
-            <a:r>
-              <a:rPr lang="de-DE" dirty="0" err="1"/>
-              <a:t>Integrating</a:t>
-            </a:r>
-            <a:r>
-              <a:rPr lang="de-DE" dirty="0"/>
-              <a:t> </a:t>
-            </a:r>
-            <a:r>
-              <a:rPr lang="de-DE" dirty="0" err="1"/>
-              <a:t>visual</a:t>
-            </a:r>
-            <a:r>
-              <a:rPr lang="de-DE" dirty="0"/>
-              <a:t> and </a:t>
-            </a:r>
-            <a:r>
-              <a:rPr lang="de-DE" dirty="0" err="1"/>
-              <a:t>textual</a:t>
-            </a:r>
-            <a:r>
-              <a:rPr lang="de-DE" dirty="0"/>
-              <a:t> </a:t>
-            </a:r>
-            <a:r>
-              <a:rPr lang="de-DE" dirty="0" err="1"/>
-              <a:t>inputs</a:t>
-            </a:r>
-            <a:r>
-              <a:rPr lang="de-DE" dirty="0"/>
-              <a:t> </a:t>
-            </a:r>
-            <a:r>
-              <a:rPr lang="de-DE" dirty="0" err="1"/>
-              <a:t>for</a:t>
-            </a:r>
-            <a:r>
-              <a:rPr lang="de-DE" dirty="0"/>
-              <a:t> </a:t>
-            </a:r>
-            <a:r>
-              <a:rPr lang="de-DE" dirty="0" err="1"/>
-              <a:t>policy</a:t>
-            </a:r>
-            <a:r>
-              <a:rPr lang="de-DE" dirty="0"/>
-              <a:t> </a:t>
-            </a:r>
-            <a:r>
-              <a:rPr lang="de-DE" dirty="0" err="1"/>
-              <a:t>learning</a:t>
+            <a:r>
+              <a:rPr lang="de-DE" dirty="0"/>
+              <a:t>e.g., </a:t>
+            </a:r>
+            <a:r>
+              <a:rPr lang="de-DE" dirty="0" err="1"/>
+              <a:t>SmolVLA</a:t>
             </a:r>
             <a:endParaRPr lang="de-DE" dirty="0"/>
           </a:p>
-          <a:p>
-            <a:pPr marL="0" indent="0">
-              <a:buNone/>
-            </a:pPr>
-            <a:endParaRPr lang="de-DE" dirty="0"/>
-          </a:p>
-          <a:p>
-            <a:r>
-              <a:rPr lang="de-DE" dirty="0"/>
-              <a:t>Vision </a:t>
-            </a:r>
-            <a:r>
-              <a:rPr lang="de-DE" dirty="0" err="1"/>
-              <a:t>encoders</a:t>
-            </a:r>
-            <a:r>
-              <a:rPr lang="de-DE" dirty="0"/>
-              <a:t> (</a:t>
-            </a:r>
-            <a:r>
-              <a:rPr lang="de-DE" dirty="0" err="1"/>
-              <a:t>ResNet</a:t>
-            </a:r>
-            <a:r>
-              <a:rPr lang="de-DE" dirty="0"/>
-              <a:t>, </a:t>
-            </a:r>
-            <a:r>
-              <a:rPr lang="de-DE" dirty="0" err="1"/>
-              <a:t>ViT</a:t>
-            </a:r>
-            <a:r>
-              <a:rPr lang="de-DE" dirty="0"/>
-              <a:t>)</a:t>
-            </a:r>
-          </a:p>
-          <a:p>
-            <a:r>
-              <a:rPr lang="de-DE" dirty="0"/>
-              <a:t>Language </a:t>
-            </a:r>
-            <a:r>
-              <a:rPr lang="de-DE" dirty="0" err="1"/>
-              <a:t>models</a:t>
-            </a:r>
-            <a:endParaRPr lang="de-DE" dirty="0"/>
-          </a:p>
-          <a:p>
-            <a:r>
-              <a:rPr lang="de-DE" dirty="0"/>
-              <a:t>Multimodal </a:t>
-            </a:r>
-            <a:r>
-              <a:rPr lang="de-DE" dirty="0" err="1"/>
-              <a:t>fusion</a:t>
-            </a:r>
-            <a:endParaRPr lang="de-DE" dirty="0"/>
-          </a:p>
-          <a:p>
-            <a:r>
-              <a:rPr lang="de-DE" dirty="0" err="1"/>
-              <a:t>Tokenization</a:t>
-            </a:r>
-            <a:r>
-              <a:rPr lang="de-DE" dirty="0"/>
-              <a:t> </a:t>
-            </a:r>
-            <a:r>
-              <a:rPr lang="de-DE" dirty="0" err="1"/>
-              <a:t>of</a:t>
-            </a:r>
-            <a:r>
-              <a:rPr lang="de-DE" dirty="0"/>
-              <a:t> </a:t>
-            </a:r>
-            <a:r>
-              <a:rPr lang="de-DE" dirty="0" err="1"/>
-              <a:t>sensorimotor</a:t>
-            </a:r>
-            <a:r>
-              <a:rPr lang="de-DE" dirty="0"/>
-              <a:t> </a:t>
-            </a:r>
-            <a:r>
-              <a:rPr lang="de-DE" dirty="0" err="1"/>
-              <a:t>sequences</a:t>
-            </a:r>
-            <a:endParaRPr lang="de-DE" dirty="0"/>
-          </a:p>
-        </p:txBody>
-      </p:sp>
-      <p:sp>
-        <p:nvSpPr>
-          <p:cNvPr id="5" name="Foliennummernplatzhalter 4">
-            <a:extLst>
-              <a:ext uri="{FF2B5EF4-FFF2-40B4-BE49-F238E27FC236}">
-                <a16:creationId xmlns:a16="http://schemas.microsoft.com/office/drawing/2014/main" id="{67471126-BCCE-5A0D-2C01-13F8853CD6C9}"/>
+        </p:txBody>
+      </p:sp>
+      <p:sp>
+        <p:nvSpPr>
+          <p:cNvPr id="4" name="Foliennummernplatzhalter 3">
+            <a:extLst>
+              <a:ext uri="{FF2B5EF4-FFF2-40B4-BE49-F238E27FC236}">
+                <a16:creationId xmlns:a16="http://schemas.microsoft.com/office/drawing/2014/main" id="{26BC5031-BD7E-00D2-C81A-AA5111B94CBE}"/>
               </a:ext>
             </a:extLst>
           </p:cNvPr>
@@ -6467,7 +6804,7 @@
     </p:spTree>
     <p:extLst>
       <p:ext uri="{BB962C8B-B14F-4D97-AF65-F5344CB8AC3E}">
-        <p14:creationId xmlns:p14="http://schemas.microsoft.com/office/powerpoint/2010/main" val="726160561"/>
+        <p14:creationId xmlns:p14="http://schemas.microsoft.com/office/powerpoint/2010/main" val="3427472480"/>
       </p:ext>
     </p:extLst>
   </p:cSld>
@@ -6496,6 +6833,262 @@
       </p:grpSpPr>
       <p:sp>
         <p:nvSpPr>
+          <p:cNvPr id="2" name="Titel 1">
+            <a:extLst>
+              <a:ext uri="{FF2B5EF4-FFF2-40B4-BE49-F238E27FC236}">
+                <a16:creationId xmlns:a16="http://schemas.microsoft.com/office/drawing/2014/main" id="{BDA7BBA6-3E54-57FD-D5B4-A8C70F7360E2}"/>
+              </a:ext>
+            </a:extLst>
+          </p:cNvPr>
+          <p:cNvSpPr>
+            <a:spLocks noGrp="1"/>
+          </p:cNvSpPr>
+          <p:nvPr>
+            <p:ph type="title"/>
+          </p:nvPr>
+        </p:nvSpPr>
+        <p:spPr/>
+        <p:txBody>
+          <a:bodyPr/>
+          <a:lstStyle/>
+          <a:p>
+            <a:r>
+              <a:rPr lang="de-DE" dirty="0"/>
+              <a:t>Vision-Language-Action Models</a:t>
+            </a:r>
+          </a:p>
+        </p:txBody>
+      </p:sp>
+      <p:sp>
+        <p:nvSpPr>
+          <p:cNvPr id="6" name="Inhaltsplatzhalter 5">
+            <a:extLst>
+              <a:ext uri="{FF2B5EF4-FFF2-40B4-BE49-F238E27FC236}">
+                <a16:creationId xmlns:a16="http://schemas.microsoft.com/office/drawing/2014/main" id="{96889E58-4E7D-1C17-1621-FA929ACC4D3B}"/>
+              </a:ext>
+            </a:extLst>
+          </p:cNvPr>
+          <p:cNvSpPr>
+            <a:spLocks noGrp="1"/>
+          </p:cNvSpPr>
+          <p:nvPr>
+            <p:ph idx="1"/>
+          </p:nvPr>
+        </p:nvSpPr>
+        <p:spPr/>
+        <p:txBody>
+          <a:bodyPr/>
+          <a:lstStyle/>
+          <a:p>
+            <a:pPr marL="0" indent="0">
+              <a:buNone/>
+            </a:pPr>
+            <a:r>
+              <a:rPr lang="de-DE" dirty="0" err="1"/>
+              <a:t>Integrating</a:t>
+            </a:r>
+            <a:r>
+              <a:rPr lang="de-DE" dirty="0"/>
+              <a:t> </a:t>
+            </a:r>
+            <a:r>
+              <a:rPr lang="de-DE" dirty="0" err="1"/>
+              <a:t>visual</a:t>
+            </a:r>
+            <a:r>
+              <a:rPr lang="de-DE" dirty="0"/>
+              <a:t> and </a:t>
+            </a:r>
+            <a:r>
+              <a:rPr lang="de-DE" dirty="0" err="1"/>
+              <a:t>textual</a:t>
+            </a:r>
+            <a:r>
+              <a:rPr lang="de-DE" dirty="0"/>
+              <a:t> </a:t>
+            </a:r>
+            <a:r>
+              <a:rPr lang="de-DE" dirty="0" err="1"/>
+              <a:t>inputs</a:t>
+            </a:r>
+            <a:r>
+              <a:rPr lang="de-DE" dirty="0"/>
+              <a:t> </a:t>
+            </a:r>
+            <a:r>
+              <a:rPr lang="de-DE" dirty="0" err="1"/>
+              <a:t>for</a:t>
+            </a:r>
+            <a:r>
+              <a:rPr lang="de-DE" dirty="0"/>
+              <a:t> </a:t>
+            </a:r>
+            <a:r>
+              <a:rPr lang="de-DE" dirty="0" err="1"/>
+              <a:t>policy</a:t>
+            </a:r>
+            <a:r>
+              <a:rPr lang="de-DE" dirty="0"/>
+              <a:t> </a:t>
+            </a:r>
+            <a:r>
+              <a:rPr lang="de-DE" dirty="0" err="1"/>
+              <a:t>learning</a:t>
+            </a:r>
+            <a:endParaRPr lang="de-DE" dirty="0"/>
+          </a:p>
+          <a:p>
+            <a:pPr marL="0" indent="0">
+              <a:buNone/>
+            </a:pPr>
+            <a:endParaRPr lang="de-DE" dirty="0"/>
+          </a:p>
+          <a:p>
+            <a:r>
+              <a:rPr lang="de-DE" dirty="0"/>
+              <a:t>Vision </a:t>
+            </a:r>
+            <a:r>
+              <a:rPr lang="de-DE" dirty="0" err="1"/>
+              <a:t>encoders</a:t>
+            </a:r>
+            <a:r>
+              <a:rPr lang="de-DE" dirty="0"/>
+              <a:t> (</a:t>
+            </a:r>
+            <a:r>
+              <a:rPr lang="de-DE" dirty="0" err="1"/>
+              <a:t>ResNet</a:t>
+            </a:r>
+            <a:r>
+              <a:rPr lang="de-DE" dirty="0"/>
+              <a:t>, </a:t>
+            </a:r>
+            <a:r>
+              <a:rPr lang="de-DE" dirty="0" err="1"/>
+              <a:t>ViT</a:t>
+            </a:r>
+            <a:r>
+              <a:rPr lang="de-DE" dirty="0"/>
+              <a:t>)</a:t>
+            </a:r>
+          </a:p>
+          <a:p>
+            <a:r>
+              <a:rPr lang="de-DE" dirty="0"/>
+              <a:t>Language </a:t>
+            </a:r>
+            <a:r>
+              <a:rPr lang="de-DE" dirty="0" err="1"/>
+              <a:t>models</a:t>
+            </a:r>
+            <a:endParaRPr lang="de-DE" dirty="0"/>
+          </a:p>
+          <a:p>
+            <a:r>
+              <a:rPr lang="de-DE" dirty="0"/>
+              <a:t>Multimodal </a:t>
+            </a:r>
+            <a:r>
+              <a:rPr lang="de-DE" dirty="0" err="1"/>
+              <a:t>fusion</a:t>
+            </a:r>
+            <a:endParaRPr lang="de-DE" dirty="0"/>
+          </a:p>
+          <a:p>
+            <a:r>
+              <a:rPr lang="de-DE" dirty="0" err="1"/>
+              <a:t>Tokenization</a:t>
+            </a:r>
+            <a:r>
+              <a:rPr lang="de-DE" dirty="0"/>
+              <a:t> </a:t>
+            </a:r>
+            <a:r>
+              <a:rPr lang="de-DE" dirty="0" err="1"/>
+              <a:t>of</a:t>
+            </a:r>
+            <a:r>
+              <a:rPr lang="de-DE" dirty="0"/>
+              <a:t> </a:t>
+            </a:r>
+            <a:r>
+              <a:rPr lang="de-DE" dirty="0" err="1"/>
+              <a:t>sensorimotor</a:t>
+            </a:r>
+            <a:r>
+              <a:rPr lang="de-DE" dirty="0"/>
+              <a:t> </a:t>
+            </a:r>
+            <a:r>
+              <a:rPr lang="de-DE" dirty="0" err="1"/>
+              <a:t>sequences</a:t>
+            </a:r>
+            <a:endParaRPr lang="de-DE" dirty="0"/>
+          </a:p>
+        </p:txBody>
+      </p:sp>
+      <p:sp>
+        <p:nvSpPr>
+          <p:cNvPr id="5" name="Foliennummernplatzhalter 4">
+            <a:extLst>
+              <a:ext uri="{FF2B5EF4-FFF2-40B4-BE49-F238E27FC236}">
+                <a16:creationId xmlns:a16="http://schemas.microsoft.com/office/drawing/2014/main" id="{67471126-BCCE-5A0D-2C01-13F8853CD6C9}"/>
+              </a:ext>
+            </a:extLst>
+          </p:cNvPr>
+          <p:cNvSpPr>
+            <a:spLocks noGrp="1"/>
+          </p:cNvSpPr>
+          <p:nvPr>
+            <p:ph type="sldNum" sz="quarter" idx="12"/>
+          </p:nvPr>
+        </p:nvSpPr>
+        <p:spPr/>
+        <p:txBody>
+          <a:bodyPr/>
+          <a:lstStyle/>
+          <a:p>
+            <a:fld id="{08C366F5-AFAD-49CB-854A-9D9E238FCA13}" type="slidenum">
+              <a:rPr lang="en-GB" smtClean="0"/>
+              <a:t>21</a:t>
+            </a:fld>
+            <a:endParaRPr lang="en-GB"/>
+          </a:p>
+        </p:txBody>
+      </p:sp>
+    </p:spTree>
+    <p:extLst>
+      <p:ext uri="{BB962C8B-B14F-4D97-AF65-F5344CB8AC3E}">
+        <p14:creationId xmlns:p14="http://schemas.microsoft.com/office/powerpoint/2010/main" val="726160561"/>
+      </p:ext>
+    </p:extLst>
+  </p:cSld>
+  <p:clrMapOvr>
+    <a:masterClrMapping/>
+  </p:clrMapOvr>
+</p:sld>
+</file>
+
+<file path=ppt/slides/slide22.xml><?xml version="1.0" encoding="utf-8"?>
+<p:sld xmlns:a="http://schemas.openxmlformats.org/drawingml/2006/main" xmlns:r="http://schemas.openxmlformats.org/officeDocument/2006/relationships" xmlns:p="http://schemas.openxmlformats.org/presentationml/2006/main">
+  <p:cSld>
+    <p:spTree>
+      <p:nvGrpSpPr>
+        <p:cNvPr id="1" name=""/>
+        <p:cNvGrpSpPr/>
+        <p:nvPr/>
+      </p:nvGrpSpPr>
+      <p:grpSpPr>
+        <a:xfrm>
+          <a:off x="0" y="0"/>
+          <a:ext cx="0" cy="0"/>
+          <a:chOff x="0" y="0"/>
+          <a:chExt cx="0" cy="0"/>
+        </a:xfrm>
+      </p:grpSpPr>
+      <p:sp>
+        <p:nvSpPr>
           <p:cNvPr id="7" name="Title 6">
             <a:extLst>
               <a:ext uri="{FF2B5EF4-FFF2-40B4-BE49-F238E27FC236}">
@@ -6601,7 +7194,7 @@
           <a:p>
             <a:fld id="{C48B675A-2084-C34A-84F6-1B6A8516A5F3}" type="slidenum">
               <a:rPr lang="en-DE" smtClean="0"/>
-              <a:t>21</a:t>
+              <a:t>22</a:t>
             </a:fld>
             <a:endParaRPr lang="en-DE"/>
           </a:p>
@@ -6884,7 +7477,7 @@
 </p:sld>
 </file>
 
-<file path=ppt/slides/slide22.xml><?xml version="1.0" encoding="utf-8"?>
+<file path=ppt/slides/slide23.xml><?xml version="1.0" encoding="utf-8"?>
 <p:sld xmlns:a="http://schemas.openxmlformats.org/drawingml/2006/main" xmlns:r="http://schemas.openxmlformats.org/officeDocument/2006/relationships" xmlns:p="http://schemas.openxmlformats.org/presentationml/2006/main">
   <p:cSld>
     <p:spTree>
@@ -7017,7 +7610,7 @@
           <a:p>
             <a:fld id="{08C366F5-AFAD-49CB-854A-9D9E238FCA13}" type="slidenum">
               <a:rPr lang="en-GB" smtClean="0"/>
-              <a:t>22</a:t>
+              <a:t>23</a:t>
             </a:fld>
             <a:endParaRPr lang="en-GB"/>
           </a:p>
@@ -7055,10 +7648,10 @@
       </p:grpSpPr>
       <p:sp>
         <p:nvSpPr>
-          <p:cNvPr id="5" name="Titel 4">
-            <a:extLst>
-              <a:ext uri="{FF2B5EF4-FFF2-40B4-BE49-F238E27FC236}">
-                <a16:creationId xmlns:a16="http://schemas.microsoft.com/office/drawing/2014/main" id="{EEED0B19-871D-4F1F-000C-D522BFBC8220}"/>
+          <p:cNvPr id="2" name="Titel 1">
+            <a:extLst>
+              <a:ext uri="{FF2B5EF4-FFF2-40B4-BE49-F238E27FC236}">
+                <a16:creationId xmlns:a16="http://schemas.microsoft.com/office/drawing/2014/main" id="{ADAEB7CC-A04B-6527-EF17-EAAD14C75673}"/>
               </a:ext>
             </a:extLst>
           </p:cNvPr>
@@ -7076,16 +7669,196 @@
           <a:p>
             <a:r>
               <a:rPr lang="de-DE" dirty="0"/>
-              <a:t>Model-</a:t>
-            </a:r>
-            <a:r>
-              <a:rPr lang="de-DE" dirty="0" err="1"/>
-              <a:t>Based</a:t>
-            </a:r>
-            <a:r>
-              <a:rPr lang="de-DE" dirty="0"/>
-              <a:t> and Offline RL</a:t>
-            </a:r>
+              <a:t>Idea </a:t>
+            </a:r>
+            <a:r>
+              <a:rPr lang="de-DE" dirty="0" err="1"/>
+              <a:t>of</a:t>
+            </a:r>
+            <a:r>
+              <a:rPr lang="de-DE" dirty="0"/>
+              <a:t> </a:t>
+            </a:r>
+            <a:r>
+              <a:rPr lang="de-DE" dirty="0" err="1"/>
+              <a:t>the</a:t>
+            </a:r>
+            <a:r>
+              <a:rPr lang="de-DE" dirty="0"/>
+              <a:t> Chapter</a:t>
+            </a:r>
+          </a:p>
+        </p:txBody>
+      </p:sp>
+      <p:sp>
+        <p:nvSpPr>
+          <p:cNvPr id="3" name="Inhaltsplatzhalter 2">
+            <a:extLst>
+              <a:ext uri="{FF2B5EF4-FFF2-40B4-BE49-F238E27FC236}">
+                <a16:creationId xmlns:a16="http://schemas.microsoft.com/office/drawing/2014/main" id="{8B10677E-ECE3-1E8B-E304-7206CF32AF5E}"/>
+              </a:ext>
+            </a:extLst>
+          </p:cNvPr>
+          <p:cNvSpPr>
+            <a:spLocks noGrp="1"/>
+          </p:cNvSpPr>
+          <p:nvPr>
+            <p:ph idx="1"/>
+          </p:nvPr>
+        </p:nvSpPr>
+        <p:spPr/>
+        <p:txBody>
+          <a:bodyPr/>
+          <a:lstStyle/>
+          <a:p>
+            <a:pPr marL="0" indent="0">
+              <a:buNone/>
+            </a:pPr>
+            <a:r>
+              <a:rPr lang="de-DE" dirty="0"/>
+              <a:t>RL </a:t>
+            </a:r>
+            <a:r>
+              <a:rPr lang="de-DE" dirty="0" err="1"/>
+              <a:t>approaches</a:t>
+            </a:r>
+            <a:r>
+              <a:rPr lang="de-DE" dirty="0"/>
+              <a:t> </a:t>
+            </a:r>
+            <a:r>
+              <a:rPr lang="de-DE" dirty="0" err="1"/>
+              <a:t>that</a:t>
+            </a:r>
+            <a:r>
+              <a:rPr lang="de-DE" dirty="0"/>
+              <a:t> </a:t>
+            </a:r>
+            <a:r>
+              <a:rPr lang="de-DE" dirty="0" err="1"/>
+              <a:t>extend</a:t>
+            </a:r>
+            <a:r>
+              <a:rPr lang="de-DE" dirty="0"/>
+              <a:t> </a:t>
+            </a:r>
+            <a:r>
+              <a:rPr lang="de-DE" dirty="0" err="1"/>
+              <a:t>or</a:t>
+            </a:r>
+            <a:r>
+              <a:rPr lang="de-DE" dirty="0"/>
+              <a:t> </a:t>
+            </a:r>
+            <a:r>
+              <a:rPr lang="de-DE" dirty="0" err="1"/>
+              <a:t>complement</a:t>
+            </a:r>
+            <a:r>
+              <a:rPr lang="de-DE" dirty="0"/>
+              <a:t> </a:t>
+            </a:r>
+            <a:r>
+              <a:rPr lang="de-DE" dirty="0" err="1"/>
+              <a:t>standard</a:t>
+            </a:r>
+            <a:r>
+              <a:rPr lang="de-DE" dirty="0"/>
+              <a:t> model-</a:t>
+            </a:r>
+            <a:r>
+              <a:rPr lang="de-DE" dirty="0" err="1"/>
+              <a:t>free</a:t>
+            </a:r>
+            <a:r>
+              <a:rPr lang="de-DE" dirty="0"/>
+              <a:t> </a:t>
+            </a:r>
+            <a:r>
+              <a:rPr lang="de-DE" dirty="0" err="1"/>
+              <a:t>methods</a:t>
+            </a:r>
+            <a:endParaRPr lang="de-DE" dirty="0"/>
+          </a:p>
+          <a:p>
+            <a:r>
+              <a:rPr lang="de-DE" dirty="0"/>
+              <a:t>model-</a:t>
+            </a:r>
+            <a:r>
+              <a:rPr lang="de-DE" dirty="0" err="1"/>
+              <a:t>based</a:t>
+            </a:r>
+            <a:r>
+              <a:rPr lang="de-DE" dirty="0"/>
+              <a:t> </a:t>
+            </a:r>
+            <a:r>
+              <a:rPr lang="de-DE" dirty="0" err="1"/>
+              <a:t>techniques</a:t>
+            </a:r>
+            <a:endParaRPr lang="de-DE" dirty="0"/>
+          </a:p>
+          <a:p>
+            <a:r>
+              <a:rPr lang="de-DE" dirty="0"/>
+              <a:t>offline and </a:t>
+            </a:r>
+            <a:r>
+              <a:rPr lang="de-DE" dirty="0" err="1"/>
+              <a:t>data-driven</a:t>
+            </a:r>
+            <a:r>
+              <a:rPr lang="de-DE" dirty="0"/>
+              <a:t> </a:t>
+            </a:r>
+            <a:r>
+              <a:rPr lang="de-DE" dirty="0" err="1"/>
+              <a:t>approaches</a:t>
+            </a:r>
+            <a:endParaRPr lang="de-DE" dirty="0"/>
+          </a:p>
+          <a:p>
+            <a:r>
+              <a:rPr lang="de-DE" dirty="0" err="1"/>
+              <a:t>imitation</a:t>
+            </a:r>
+            <a:r>
+              <a:rPr lang="de-DE" dirty="0"/>
+              <a:t> </a:t>
+            </a:r>
+            <a:r>
+              <a:rPr lang="de-DE" dirty="0" err="1"/>
+              <a:t>learning</a:t>
+            </a:r>
+            <a:endParaRPr lang="de-DE" dirty="0"/>
+          </a:p>
+          <a:p>
+            <a:r>
+              <a:rPr lang="de-DE" dirty="0"/>
+              <a:t>generative </a:t>
+            </a:r>
+            <a:r>
+              <a:rPr lang="de-DE" dirty="0" err="1"/>
+              <a:t>or</a:t>
+            </a:r>
+            <a:r>
+              <a:rPr lang="de-DE" dirty="0"/>
+              <a:t> multimodal </a:t>
+            </a:r>
+            <a:r>
+              <a:rPr lang="de-DE" dirty="0" err="1"/>
+              <a:t>policy</a:t>
+            </a:r>
+            <a:r>
+              <a:rPr lang="de-DE" dirty="0"/>
+              <a:t> </a:t>
+            </a:r>
+            <a:r>
+              <a:rPr lang="de-DE" dirty="0" err="1"/>
+              <a:t>methods</a:t>
+            </a:r>
+            <a:endParaRPr lang="de-DE" dirty="0"/>
           </a:p>
         </p:txBody>
       </p:sp>
@@ -7094,7 +7867,7 @@
           <p:cNvPr id="4" name="Foliennummernplatzhalter 3">
             <a:extLst>
               <a:ext uri="{FF2B5EF4-FFF2-40B4-BE49-F238E27FC236}">
-                <a16:creationId xmlns:a16="http://schemas.microsoft.com/office/drawing/2014/main" id="{2A3ABEFD-2E15-2C89-0B3B-679A28E47CB8}"/>
+                <a16:creationId xmlns:a16="http://schemas.microsoft.com/office/drawing/2014/main" id="{B6445948-8990-4E81-A1F1-EA0CA33CBDA1}"/>
               </a:ext>
             </a:extLst>
           </p:cNvPr>
@@ -7121,7 +7894,7 @@
     </p:spTree>
     <p:extLst>
       <p:ext uri="{BB962C8B-B14F-4D97-AF65-F5344CB8AC3E}">
-        <p14:creationId xmlns:p14="http://schemas.microsoft.com/office/powerpoint/2010/main" val="3317837677"/>
+        <p14:creationId xmlns:p14="http://schemas.microsoft.com/office/powerpoint/2010/main" val="2796642825"/>
       </p:ext>
     </p:extLst>
   </p:cSld>
@@ -7150,10 +7923,10 @@
       </p:grpSpPr>
       <p:sp>
         <p:nvSpPr>
-          <p:cNvPr id="2" name="Titel 1">
-            <a:extLst>
-              <a:ext uri="{FF2B5EF4-FFF2-40B4-BE49-F238E27FC236}">
-                <a16:creationId xmlns:a16="http://schemas.microsoft.com/office/drawing/2014/main" id="{E877E127-F485-4187-FF77-8D015E7DACCC}"/>
+          <p:cNvPr id="5" name="Titel 4">
+            <a:extLst>
+              <a:ext uri="{FF2B5EF4-FFF2-40B4-BE49-F238E27FC236}">
+                <a16:creationId xmlns:a16="http://schemas.microsoft.com/office/drawing/2014/main" id="{EEED0B19-871D-4F1F-000C-D522BFBC8220}"/>
               </a:ext>
             </a:extLst>
           </p:cNvPr>
@@ -7179,81 +7952,8 @@
             </a:r>
             <a:r>
               <a:rPr lang="de-DE" dirty="0"/>
-              <a:t> RL</a:t>
-            </a:r>
-          </a:p>
-        </p:txBody>
-      </p:sp>
-      <p:sp>
-        <p:nvSpPr>
-          <p:cNvPr id="3" name="Inhaltsplatzhalter 2">
-            <a:extLst>
-              <a:ext uri="{FF2B5EF4-FFF2-40B4-BE49-F238E27FC236}">
-                <a16:creationId xmlns:a16="http://schemas.microsoft.com/office/drawing/2014/main" id="{F51217FA-F236-BEE9-1596-5444C7A83D3C}"/>
-              </a:ext>
-            </a:extLst>
-          </p:cNvPr>
-          <p:cNvSpPr>
-            <a:spLocks noGrp="1"/>
-          </p:cNvSpPr>
-          <p:nvPr>
-            <p:ph idx="1"/>
-          </p:nvPr>
-        </p:nvSpPr>
-        <p:spPr/>
-        <p:txBody>
-          <a:bodyPr/>
-          <a:lstStyle/>
-          <a:p>
-            <a:r>
-              <a:rPr lang="de-DE" dirty="0"/>
-              <a:t>Learning </a:t>
-            </a:r>
-            <a:r>
-              <a:rPr lang="de-DE" dirty="0" err="1"/>
-              <a:t>dynamics</a:t>
-            </a:r>
-            <a:r>
-              <a:rPr lang="de-DE" dirty="0"/>
-              <a:t> </a:t>
-            </a:r>
-            <a:r>
-              <a:rPr lang="de-DE" dirty="0" err="1"/>
-              <a:t>models</a:t>
-            </a:r>
-            <a:r>
-              <a:rPr lang="de-DE" dirty="0"/>
-              <a:t> </a:t>
-            </a:r>
-            <a:r>
-              <a:rPr lang="de-DE" dirty="0" err="1"/>
-              <a:t>to</a:t>
-            </a:r>
-            <a:r>
-              <a:rPr lang="de-DE" dirty="0"/>
-              <a:t> plan </a:t>
-            </a:r>
-            <a:r>
-              <a:rPr lang="de-DE" dirty="0" err="1"/>
-              <a:t>or</a:t>
-            </a:r>
-            <a:r>
-              <a:rPr lang="de-DE" dirty="0"/>
-              <a:t> </a:t>
-            </a:r>
-            <a:r>
-              <a:rPr lang="de-DE" dirty="0" err="1"/>
-              <a:t>improve</a:t>
-            </a:r>
-            <a:r>
-              <a:rPr lang="de-DE" dirty="0"/>
-              <a:t> sample </a:t>
-            </a:r>
-            <a:r>
-              <a:rPr lang="de-DE" dirty="0" err="1"/>
-              <a:t>efficiency</a:t>
-            </a:r>
-            <a:endParaRPr lang="de-DE" dirty="0"/>
+              <a:t> and Offline RL</a:t>
+            </a:r>
           </a:p>
         </p:txBody>
       </p:sp>
@@ -7262,7 +7962,7 @@
           <p:cNvPr id="4" name="Foliennummernplatzhalter 3">
             <a:extLst>
               <a:ext uri="{FF2B5EF4-FFF2-40B4-BE49-F238E27FC236}">
-                <a16:creationId xmlns:a16="http://schemas.microsoft.com/office/drawing/2014/main" id="{D2D4494C-3760-B7F5-D34E-2FAEC3BE2C8B}"/>
+                <a16:creationId xmlns:a16="http://schemas.microsoft.com/office/drawing/2014/main" id="{2A3ABEFD-2E15-2C89-0B3B-679A28E47CB8}"/>
               </a:ext>
             </a:extLst>
           </p:cNvPr>
@@ -7289,7 +7989,7 @@
     </p:spTree>
     <p:extLst>
       <p:ext uri="{BB962C8B-B14F-4D97-AF65-F5344CB8AC3E}">
-        <p14:creationId xmlns:p14="http://schemas.microsoft.com/office/powerpoint/2010/main" val="1562480722"/>
+        <p14:creationId xmlns:p14="http://schemas.microsoft.com/office/powerpoint/2010/main" val="3317837677"/>
       </p:ext>
     </p:extLst>
   </p:cSld>
@@ -7321,7 +8021,7 @@
           <p:cNvPr id="2" name="Titel 1">
             <a:extLst>
               <a:ext uri="{FF2B5EF4-FFF2-40B4-BE49-F238E27FC236}">
-                <a16:creationId xmlns:a16="http://schemas.microsoft.com/office/drawing/2014/main" id="{67F160CE-84E4-0CDF-8D88-7AFDC5AA3939}"/>
+                <a16:creationId xmlns:a16="http://schemas.microsoft.com/office/drawing/2014/main" id="{E877E127-F485-4187-FF77-8D015E7DACCC}"/>
               </a:ext>
             </a:extLst>
           </p:cNvPr>
@@ -7339,7 +8039,15 @@
           <a:p>
             <a:r>
               <a:rPr lang="de-DE" dirty="0"/>
-              <a:t>Offline RL</a:t>
+              <a:t>Model-</a:t>
+            </a:r>
+            <a:r>
+              <a:rPr lang="de-DE" dirty="0" err="1"/>
+              <a:t>Based</a:t>
+            </a:r>
+            <a:r>
+              <a:rPr lang="de-DE" dirty="0"/>
+              <a:t> RL</a:t>
             </a:r>
           </a:p>
         </p:txBody>
@@ -7349,7 +8057,7 @@
           <p:cNvPr id="3" name="Inhaltsplatzhalter 2">
             <a:extLst>
               <a:ext uri="{FF2B5EF4-FFF2-40B4-BE49-F238E27FC236}">
-                <a16:creationId xmlns:a16="http://schemas.microsoft.com/office/drawing/2014/main" id="{596B0F67-5191-D62E-9178-26EF99222178}"/>
+                <a16:creationId xmlns:a16="http://schemas.microsoft.com/office/drawing/2014/main" id="{F51217FA-F236-BEE9-1596-5444C7A83D3C}"/>
               </a:ext>
             </a:extLst>
           </p:cNvPr>
@@ -7371,7 +8079,7 @@
             </a:r>
             <a:r>
               <a:rPr lang="de-DE" dirty="0" err="1"/>
-              <a:t>from</a:t>
+              <a:t>dynamics</a:t>
             </a:r>
             <a:r>
               <a:rPr lang="de-DE" dirty="0"/>
@@ -7379,7 +8087,7 @@
             </a:r>
             <a:r>
               <a:rPr lang="de-DE" dirty="0" err="1"/>
-              <a:t>fixed</a:t>
+              <a:t>models</a:t>
             </a:r>
             <a:r>
               <a:rPr lang="de-DE" dirty="0"/>
@@ -7387,7 +8095,15 @@
             </a:r>
             <a:r>
               <a:rPr lang="de-DE" dirty="0" err="1"/>
-              <a:t>datasets</a:t>
+              <a:t>to</a:t>
+            </a:r>
+            <a:r>
+              <a:rPr lang="de-DE" dirty="0"/>
+              <a:t> plan </a:t>
+            </a:r>
+            <a:r>
+              <a:rPr lang="de-DE" dirty="0" err="1"/>
+              <a:t>or</a:t>
             </a:r>
             <a:r>
               <a:rPr lang="de-DE" dirty="0"/>
@@ -7395,15 +8111,15 @@
             </a:r>
             <a:r>
               <a:rPr lang="de-DE" dirty="0" err="1"/>
-              <a:t>without</a:t>
-            </a:r>
-            <a:r>
-              <a:rPr lang="de-DE" dirty="0"/>
-              <a:t> online </a:t>
-            </a:r>
-            <a:r>
-              <a:rPr lang="de-DE" dirty="0" err="1"/>
-              <a:t>interaction</a:t>
+              <a:t>improve</a:t>
+            </a:r>
+            <a:r>
+              <a:rPr lang="de-DE" dirty="0"/>
+              <a:t> sample </a:t>
+            </a:r>
+            <a:r>
+              <a:rPr lang="de-DE" dirty="0" err="1"/>
+              <a:t>efficiency</a:t>
             </a:r>
             <a:endParaRPr lang="de-DE" dirty="0"/>
           </a:p>
@@ -7414,7 +8130,7 @@
           <p:cNvPr id="4" name="Foliennummernplatzhalter 3">
             <a:extLst>
               <a:ext uri="{FF2B5EF4-FFF2-40B4-BE49-F238E27FC236}">
-                <a16:creationId xmlns:a16="http://schemas.microsoft.com/office/drawing/2014/main" id="{83219327-6F35-D7AF-8124-0EE106318528}"/>
+                <a16:creationId xmlns:a16="http://schemas.microsoft.com/office/drawing/2014/main" id="{D2D4494C-3760-B7F5-D34E-2FAEC3BE2C8B}"/>
               </a:ext>
             </a:extLst>
           </p:cNvPr>
@@ -7433,6 +8149,158 @@
             <a:fld id="{08C366F5-AFAD-49CB-854A-9D9E238FCA13}" type="slidenum">
               <a:rPr lang="en-GB" smtClean="0"/>
               <a:t>5</a:t>
+            </a:fld>
+            <a:endParaRPr lang="en-GB"/>
+          </a:p>
+        </p:txBody>
+      </p:sp>
+    </p:spTree>
+    <p:extLst>
+      <p:ext uri="{BB962C8B-B14F-4D97-AF65-F5344CB8AC3E}">
+        <p14:creationId xmlns:p14="http://schemas.microsoft.com/office/powerpoint/2010/main" val="1562480722"/>
+      </p:ext>
+    </p:extLst>
+  </p:cSld>
+  <p:clrMapOvr>
+    <a:masterClrMapping/>
+  </p:clrMapOvr>
+</p:sld>
+</file>
+
+<file path=ppt/slides/slide6.xml><?xml version="1.0" encoding="utf-8"?>
+<p:sld xmlns:a="http://schemas.openxmlformats.org/drawingml/2006/main" xmlns:r="http://schemas.openxmlformats.org/officeDocument/2006/relationships" xmlns:p="http://schemas.openxmlformats.org/presentationml/2006/main">
+  <p:cSld>
+    <p:spTree>
+      <p:nvGrpSpPr>
+        <p:cNvPr id="1" name=""/>
+        <p:cNvGrpSpPr/>
+        <p:nvPr/>
+      </p:nvGrpSpPr>
+      <p:grpSpPr>
+        <a:xfrm>
+          <a:off x="0" y="0"/>
+          <a:ext cx="0" cy="0"/>
+          <a:chOff x="0" y="0"/>
+          <a:chExt cx="0" cy="0"/>
+        </a:xfrm>
+      </p:grpSpPr>
+      <p:sp>
+        <p:nvSpPr>
+          <p:cNvPr id="2" name="Titel 1">
+            <a:extLst>
+              <a:ext uri="{FF2B5EF4-FFF2-40B4-BE49-F238E27FC236}">
+                <a16:creationId xmlns:a16="http://schemas.microsoft.com/office/drawing/2014/main" id="{67F160CE-84E4-0CDF-8D88-7AFDC5AA3939}"/>
+              </a:ext>
+            </a:extLst>
+          </p:cNvPr>
+          <p:cNvSpPr>
+            <a:spLocks noGrp="1"/>
+          </p:cNvSpPr>
+          <p:nvPr>
+            <p:ph type="title"/>
+          </p:nvPr>
+        </p:nvSpPr>
+        <p:spPr/>
+        <p:txBody>
+          <a:bodyPr/>
+          <a:lstStyle/>
+          <a:p>
+            <a:r>
+              <a:rPr lang="de-DE" dirty="0"/>
+              <a:t>Offline RL</a:t>
+            </a:r>
+          </a:p>
+        </p:txBody>
+      </p:sp>
+      <p:sp>
+        <p:nvSpPr>
+          <p:cNvPr id="3" name="Inhaltsplatzhalter 2">
+            <a:extLst>
+              <a:ext uri="{FF2B5EF4-FFF2-40B4-BE49-F238E27FC236}">
+                <a16:creationId xmlns:a16="http://schemas.microsoft.com/office/drawing/2014/main" id="{596B0F67-5191-D62E-9178-26EF99222178}"/>
+              </a:ext>
+            </a:extLst>
+          </p:cNvPr>
+          <p:cNvSpPr>
+            <a:spLocks noGrp="1"/>
+          </p:cNvSpPr>
+          <p:nvPr>
+            <p:ph idx="1"/>
+          </p:nvPr>
+        </p:nvSpPr>
+        <p:spPr/>
+        <p:txBody>
+          <a:bodyPr/>
+          <a:lstStyle/>
+          <a:p>
+            <a:r>
+              <a:rPr lang="de-DE" dirty="0"/>
+              <a:t>Learning </a:t>
+            </a:r>
+            <a:r>
+              <a:rPr lang="de-DE" dirty="0" err="1"/>
+              <a:t>from</a:t>
+            </a:r>
+            <a:r>
+              <a:rPr lang="de-DE" dirty="0"/>
+              <a:t> </a:t>
+            </a:r>
+            <a:r>
+              <a:rPr lang="de-DE" dirty="0" err="1"/>
+              <a:t>fixed</a:t>
+            </a:r>
+            <a:r>
+              <a:rPr lang="de-DE" dirty="0"/>
+              <a:t> </a:t>
+            </a:r>
+            <a:r>
+              <a:rPr lang="de-DE" dirty="0" err="1"/>
+              <a:t>datasets</a:t>
+            </a:r>
+            <a:r>
+              <a:rPr lang="de-DE" dirty="0"/>
+              <a:t> </a:t>
+            </a:r>
+            <a:r>
+              <a:rPr lang="de-DE" dirty="0" err="1"/>
+              <a:t>without</a:t>
+            </a:r>
+            <a:r>
+              <a:rPr lang="de-DE" dirty="0"/>
+              <a:t> online </a:t>
+            </a:r>
+            <a:r>
+              <a:rPr lang="de-DE" dirty="0" err="1"/>
+              <a:t>interaction</a:t>
+            </a:r>
+            <a:endParaRPr lang="de-DE" dirty="0"/>
+          </a:p>
+        </p:txBody>
+      </p:sp>
+      <p:sp>
+        <p:nvSpPr>
+          <p:cNvPr id="4" name="Foliennummernplatzhalter 3">
+            <a:extLst>
+              <a:ext uri="{FF2B5EF4-FFF2-40B4-BE49-F238E27FC236}">
+                <a16:creationId xmlns:a16="http://schemas.microsoft.com/office/drawing/2014/main" id="{83219327-6F35-D7AF-8124-0EE106318528}"/>
+              </a:ext>
+            </a:extLst>
+          </p:cNvPr>
+          <p:cNvSpPr>
+            <a:spLocks noGrp="1"/>
+          </p:cNvSpPr>
+          <p:nvPr>
+            <p:ph type="sldNum" sz="quarter" idx="12"/>
+          </p:nvPr>
+        </p:nvSpPr>
+        <p:spPr/>
+        <p:txBody>
+          <a:bodyPr/>
+          <a:lstStyle/>
+          <a:p>
+            <a:fld id="{08C366F5-AFAD-49CB-854A-9D9E238FCA13}" type="slidenum">
+              <a:rPr lang="en-GB" smtClean="0"/>
+              <a:t>6</a:t>
             </a:fld>
             <a:endParaRPr lang="en-GB"/>
           </a:p>
@@ -7451,7 +8319,7 @@
 </p:sld>
 </file>
 
-<file path=ppt/slides/slide6.xml><?xml version="1.0" encoding="utf-8"?>
+<file path=ppt/slides/slide7.xml><?xml version="1.0" encoding="utf-8"?>
 <p:sld xmlns:a="http://schemas.openxmlformats.org/drawingml/2006/main" xmlns:r="http://schemas.openxmlformats.org/officeDocument/2006/relationships" xmlns:p="http://schemas.openxmlformats.org/presentationml/2006/main">
   <p:cSld>
     <p:spTree>
@@ -7538,7 +8406,7 @@
           <a:p>
             <a:fld id="{08C366F5-AFAD-49CB-854A-9D9E238FCA13}" type="slidenum">
               <a:rPr lang="en-GB" smtClean="0"/>
-              <a:t>6</a:t>
+              <a:t>7</a:t>
             </a:fld>
             <a:endParaRPr lang="en-GB"/>
           </a:p>
@@ -7548,127 +8416,6 @@
     <p:extLst>
       <p:ext uri="{BB962C8B-B14F-4D97-AF65-F5344CB8AC3E}">
         <p14:creationId xmlns:p14="http://schemas.microsoft.com/office/powerpoint/2010/main" val="1761437533"/>
-      </p:ext>
-    </p:extLst>
-  </p:cSld>
-  <p:clrMapOvr>
-    <a:masterClrMapping/>
-  </p:clrMapOvr>
-</p:sld>
-</file>
-
-<file path=ppt/slides/slide7.xml><?xml version="1.0" encoding="utf-8"?>
-<p:sld xmlns:a="http://schemas.openxmlformats.org/drawingml/2006/main" xmlns:r="http://schemas.openxmlformats.org/officeDocument/2006/relationships" xmlns:p="http://schemas.openxmlformats.org/presentationml/2006/main">
-  <p:cSld>
-    <p:spTree>
-      <p:nvGrpSpPr>
-        <p:cNvPr id="1" name=""/>
-        <p:cNvGrpSpPr/>
-        <p:nvPr/>
-      </p:nvGrpSpPr>
-      <p:grpSpPr>
-        <a:xfrm>
-          <a:off x="0" y="0"/>
-          <a:ext cx="0" cy="0"/>
-          <a:chOff x="0" y="0"/>
-          <a:chExt cx="0" cy="0"/>
-        </a:xfrm>
-      </p:grpSpPr>
-      <p:sp>
-        <p:nvSpPr>
-          <p:cNvPr id="2" name="Titel 1">
-            <a:extLst>
-              <a:ext uri="{FF2B5EF4-FFF2-40B4-BE49-F238E27FC236}">
-                <a16:creationId xmlns:a16="http://schemas.microsoft.com/office/drawing/2014/main" id="{53FA03BF-908E-A68C-5420-D9AB5953F590}"/>
-              </a:ext>
-            </a:extLst>
-          </p:cNvPr>
-          <p:cNvSpPr>
-            <a:spLocks noGrp="1"/>
-          </p:cNvSpPr>
-          <p:nvPr>
-            <p:ph type="title"/>
-          </p:nvPr>
-        </p:nvSpPr>
-        <p:spPr/>
-        <p:txBody>
-          <a:bodyPr/>
-          <a:lstStyle/>
-          <a:p>
-            <a:r>
-              <a:rPr lang="de-DE" dirty="0" err="1"/>
-              <a:t>Behavior</a:t>
-            </a:r>
-            <a:r>
-              <a:rPr lang="de-DE" dirty="0"/>
-              <a:t> </a:t>
-            </a:r>
-            <a:r>
-              <a:rPr lang="de-DE" dirty="0" err="1"/>
-              <a:t>Cloning</a:t>
-            </a:r>
-            <a:endParaRPr lang="de-DE" dirty="0"/>
-          </a:p>
-        </p:txBody>
-      </p:sp>
-      <p:sp>
-        <p:nvSpPr>
-          <p:cNvPr id="3" name="Inhaltsplatzhalter 2">
-            <a:extLst>
-              <a:ext uri="{FF2B5EF4-FFF2-40B4-BE49-F238E27FC236}">
-                <a16:creationId xmlns:a16="http://schemas.microsoft.com/office/drawing/2014/main" id="{A4374729-908A-2746-7EDF-3B66E9268DB7}"/>
-              </a:ext>
-            </a:extLst>
-          </p:cNvPr>
-          <p:cNvSpPr>
-            <a:spLocks noGrp="1"/>
-          </p:cNvSpPr>
-          <p:nvPr>
-            <p:ph idx="1"/>
-          </p:nvPr>
-        </p:nvSpPr>
-        <p:spPr/>
-        <p:txBody>
-          <a:bodyPr/>
-          <a:lstStyle/>
-          <a:p>
-            <a:endParaRPr lang="de-DE" dirty="0"/>
-          </a:p>
-        </p:txBody>
-      </p:sp>
-      <p:sp>
-        <p:nvSpPr>
-          <p:cNvPr id="4" name="Foliennummernplatzhalter 3">
-            <a:extLst>
-              <a:ext uri="{FF2B5EF4-FFF2-40B4-BE49-F238E27FC236}">
-                <a16:creationId xmlns:a16="http://schemas.microsoft.com/office/drawing/2014/main" id="{4DCDCF85-4CE3-59AD-F996-D7A37AE8FF84}"/>
-              </a:ext>
-            </a:extLst>
-          </p:cNvPr>
-          <p:cNvSpPr>
-            <a:spLocks noGrp="1"/>
-          </p:cNvSpPr>
-          <p:nvPr>
-            <p:ph type="sldNum" sz="quarter" idx="12"/>
-          </p:nvPr>
-        </p:nvSpPr>
-        <p:spPr/>
-        <p:txBody>
-          <a:bodyPr/>
-          <a:lstStyle/>
-          <a:p>
-            <a:fld id="{08C366F5-AFAD-49CB-854A-9D9E238FCA13}" type="slidenum">
-              <a:rPr lang="en-GB" smtClean="0"/>
-              <a:t>7</a:t>
-            </a:fld>
-            <a:endParaRPr lang="en-GB"/>
-          </a:p>
-        </p:txBody>
-      </p:sp>
-    </p:spTree>
-    <p:extLst>
-      <p:ext uri="{BB962C8B-B14F-4D97-AF65-F5344CB8AC3E}">
-        <p14:creationId xmlns:p14="http://schemas.microsoft.com/office/powerpoint/2010/main" val="3260434765"/>
       </p:ext>
     </p:extLst>
   </p:cSld>
@@ -7700,7 +8447,7 @@
           <p:cNvPr id="2" name="Titel 1">
             <a:extLst>
               <a:ext uri="{FF2B5EF4-FFF2-40B4-BE49-F238E27FC236}">
-                <a16:creationId xmlns:a16="http://schemas.microsoft.com/office/drawing/2014/main" id="{948FAD46-DAA4-EBE8-6800-3264FEB431F6}"/>
+                <a16:creationId xmlns:a16="http://schemas.microsoft.com/office/drawing/2014/main" id="{53FA03BF-908E-A68C-5420-D9AB5953F590}"/>
               </a:ext>
             </a:extLst>
           </p:cNvPr>
@@ -7717,9 +8464,18 @@
           <a:lstStyle/>
           <a:p>
             <a:r>
-              <a:rPr lang="de-DE" dirty="0"/>
-              <a:t>Imitation Learning</a:t>
-            </a:r>
+              <a:rPr lang="de-DE" dirty="0" err="1"/>
+              <a:t>Behavior</a:t>
+            </a:r>
+            <a:r>
+              <a:rPr lang="de-DE" dirty="0"/>
+              <a:t> </a:t>
+            </a:r>
+            <a:r>
+              <a:rPr lang="de-DE" dirty="0" err="1"/>
+              <a:t>Cloning</a:t>
+            </a:r>
+            <a:endParaRPr lang="de-DE" dirty="0"/>
           </a:p>
         </p:txBody>
       </p:sp>
@@ -7728,7 +8484,7 @@
           <p:cNvPr id="3" name="Inhaltsplatzhalter 2">
             <a:extLst>
               <a:ext uri="{FF2B5EF4-FFF2-40B4-BE49-F238E27FC236}">
-                <a16:creationId xmlns:a16="http://schemas.microsoft.com/office/drawing/2014/main" id="{188DD584-086F-95E0-F3CE-7DF069DD963F}"/>
+                <a16:creationId xmlns:a16="http://schemas.microsoft.com/office/drawing/2014/main" id="{A4374729-908A-2746-7EDF-3B66E9268DB7}"/>
               </a:ext>
             </a:extLst>
           </p:cNvPr>
@@ -7744,22 +8500,6 @@
           <a:bodyPr/>
           <a:lstStyle/>
           <a:p>
-            <a:r>
-              <a:rPr lang="de-DE" dirty="0"/>
-              <a:t>Learning </a:t>
-            </a:r>
-            <a:r>
-              <a:rPr lang="de-DE" dirty="0" err="1"/>
-              <a:t>from</a:t>
-            </a:r>
-            <a:r>
-              <a:rPr lang="de-DE" dirty="0"/>
-              <a:t> </a:t>
-            </a:r>
-            <a:r>
-              <a:rPr lang="de-DE" dirty="0" err="1"/>
-              <a:t>demonstrations</a:t>
-            </a:r>
             <a:endParaRPr lang="de-DE" dirty="0"/>
           </a:p>
         </p:txBody>
@@ -7769,7 +8509,7 @@
           <p:cNvPr id="4" name="Foliennummernplatzhalter 3">
             <a:extLst>
               <a:ext uri="{FF2B5EF4-FFF2-40B4-BE49-F238E27FC236}">
-                <a16:creationId xmlns:a16="http://schemas.microsoft.com/office/drawing/2014/main" id="{46FC482C-7B2A-5132-4240-27911079364D}"/>
+                <a16:creationId xmlns:a16="http://schemas.microsoft.com/office/drawing/2014/main" id="{4DCDCF85-4CE3-59AD-F996-D7A37AE8FF84}"/>
               </a:ext>
             </a:extLst>
           </p:cNvPr>
@@ -7796,7 +8536,7 @@
     </p:spTree>
     <p:extLst>
       <p:ext uri="{BB962C8B-B14F-4D97-AF65-F5344CB8AC3E}">
-        <p14:creationId xmlns:p14="http://schemas.microsoft.com/office/powerpoint/2010/main" val="2946518115"/>
+        <p14:creationId xmlns:p14="http://schemas.microsoft.com/office/powerpoint/2010/main" val="3260434765"/>
       </p:ext>
     </p:extLst>
   </p:cSld>
@@ -7823,42 +8563,12 @@
           <a:chExt cx="0" cy="0"/>
         </a:xfrm>
       </p:grpSpPr>
-      <p:pic>
-        <p:nvPicPr>
-          <p:cNvPr id="7" name="Picture 6" descr="Graphical user interface, application&#10;&#10;Description automatically generated">
-            <a:extLst>
-              <a:ext uri="{FF2B5EF4-FFF2-40B4-BE49-F238E27FC236}">
-                <a16:creationId xmlns:a16="http://schemas.microsoft.com/office/drawing/2014/main" id="{C2F0C89D-B6FC-F83C-9F0B-A0A7B0579D0D}"/>
-              </a:ext>
-            </a:extLst>
-          </p:cNvPr>
-          <p:cNvPicPr>
-            <a:picLocks noChangeAspect="1"/>
-          </p:cNvPicPr>
-          <p:nvPr/>
-        </p:nvPicPr>
-        <p:blipFill>
-          <a:blip r:embed="rId2"/>
-          <a:stretch>
-            <a:fillRect/>
-          </a:stretch>
-        </p:blipFill>
-        <p:spPr>
-          <a:xfrm>
-            <a:off x="4419600" y="1405625"/>
-            <a:ext cx="7772400" cy="4581741"/>
-          </a:xfrm>
-          <a:prstGeom prst="rect">
-            <a:avLst/>
-          </a:prstGeom>
-        </p:spPr>
-      </p:pic>
-      <p:sp>
-        <p:nvSpPr>
-          <p:cNvPr id="2" name="Title 1">
-            <a:extLst>
-              <a:ext uri="{FF2B5EF4-FFF2-40B4-BE49-F238E27FC236}">
-                <a16:creationId xmlns:a16="http://schemas.microsoft.com/office/drawing/2014/main" id="{593F088E-C3DC-F2DD-C0D6-CDDB71782F2C}"/>
+      <p:sp>
+        <p:nvSpPr>
+          <p:cNvPr id="2" name="Titel 1">
+            <a:extLst>
+              <a:ext uri="{FF2B5EF4-FFF2-40B4-BE49-F238E27FC236}">
+                <a16:creationId xmlns:a16="http://schemas.microsoft.com/office/drawing/2014/main" id="{948FAD46-DAA4-EBE8-6800-3264FEB431F6}"/>
               </a:ext>
             </a:extLst>
           </p:cNvPr>
@@ -7875,18 +8585,18 @@
           <a:lstStyle/>
           <a:p>
             <a:r>
-              <a:rPr lang="en-DE" dirty="0"/>
-              <a:t>RL from Human Feedback</a:t>
-            </a:r>
-          </a:p>
-        </p:txBody>
-      </p:sp>
-      <p:sp>
-        <p:nvSpPr>
-          <p:cNvPr id="3" name="Content Placeholder 2">
-            <a:extLst>
-              <a:ext uri="{FF2B5EF4-FFF2-40B4-BE49-F238E27FC236}">
-                <a16:creationId xmlns:a16="http://schemas.microsoft.com/office/drawing/2014/main" id="{3C6A0BAE-42AC-6B59-AF1B-7A814C8BF708}"/>
+              <a:rPr lang="de-DE" dirty="0"/>
+              <a:t>Imitation Learning</a:t>
+            </a:r>
+          </a:p>
+        </p:txBody>
+      </p:sp>
+      <p:sp>
+        <p:nvSpPr>
+          <p:cNvPr id="3" name="Inhaltsplatzhalter 2">
+            <a:extLst>
+              <a:ext uri="{FF2B5EF4-FFF2-40B4-BE49-F238E27FC236}">
+                <a16:creationId xmlns:a16="http://schemas.microsoft.com/office/drawing/2014/main" id="{188DD584-086F-95E0-F3CE-7DF069DD963F}"/>
               </a:ext>
             </a:extLst>
           </p:cNvPr>
@@ -7897,96 +8607,37 @@
             <p:ph idx="1"/>
           </p:nvPr>
         </p:nvSpPr>
-        <p:spPr>
-          <a:xfrm>
-            <a:off x="838200" y="1825625"/>
-            <a:ext cx="3428118" cy="4351338"/>
-          </a:xfrm>
-        </p:spPr>
-        <p:txBody>
-          <a:bodyPr>
-            <a:normAutofit/>
-          </a:bodyPr>
-          <a:lstStyle/>
-          <a:p>
-            <a:pPr marL="0" indent="0">
-              <a:buNone/>
-            </a:pPr>
-            <a:r>
-              <a:rPr lang="en-GB" sz="2400" dirty="0"/>
-              <a:t>example for supporting large language models (transformers) with RL</a:t>
-            </a:r>
-          </a:p>
-          <a:p>
-            <a:pPr marL="0" indent="0">
-              <a:buNone/>
-            </a:pPr>
-            <a:endParaRPr lang="en-GB" sz="2400" dirty="0"/>
-          </a:p>
-          <a:p>
-            <a:pPr marL="0" indent="0">
-              <a:buNone/>
-            </a:pPr>
-            <a:r>
-              <a:rPr lang="en-GB" sz="2400" dirty="0"/>
-              <a:t>u</a:t>
-            </a:r>
-            <a:r>
-              <a:rPr lang="en-DE" sz="2400" dirty="0"/>
-              <a:t>sed in famous ChatGPT</a:t>
-            </a:r>
-          </a:p>
-          <a:p>
-            <a:pPr marL="0" indent="0">
-              <a:buNone/>
-            </a:pPr>
-            <a:endParaRPr lang="en-DE" sz="2400" dirty="0"/>
-          </a:p>
-          <a:p>
-            <a:pPr marL="0" indent="0">
-              <a:buNone/>
-            </a:pPr>
-            <a:r>
-              <a:rPr lang="en-GB" sz="2400" dirty="0"/>
-              <a:t>goal</a:t>
-            </a:r>
-            <a:r>
-              <a:rPr lang="en-DE" sz="2400" dirty="0"/>
-              <a:t>: improve alignment with user intentions</a:t>
-            </a:r>
-          </a:p>
-          <a:p>
-            <a:pPr marL="0" indent="0">
-              <a:buNone/>
-            </a:pPr>
-            <a:r>
-              <a:rPr lang="en-DE" sz="2400" dirty="0">
-                <a:sym typeface="Wingdings" pitchFamily="2" charset="2"/>
-              </a:rPr>
-              <a:t> </a:t>
-            </a:r>
-            <a:r>
-              <a:rPr lang="en-GB" sz="2400" dirty="0">
-                <a:sym typeface="Wingdings" pitchFamily="2" charset="2"/>
-              </a:rPr>
-              <a:t>l</a:t>
-            </a:r>
-            <a:r>
-              <a:rPr lang="en-DE" sz="2400" dirty="0">
-                <a:sym typeface="Wingdings" pitchFamily="2" charset="2"/>
-              </a:rPr>
-              <a:t>earn from human preferences</a:t>
-            </a:r>
-            <a:endParaRPr lang="en-DE" sz="2400" dirty="0"/>
-          </a:p>
-        </p:txBody>
-      </p:sp>
-      <p:sp>
-        <p:nvSpPr>
-          <p:cNvPr id="4" name="Slide Number Placeholder 3">
-            <a:extLst>
-              <a:ext uri="{FF2B5EF4-FFF2-40B4-BE49-F238E27FC236}">
-                <a16:creationId xmlns:a16="http://schemas.microsoft.com/office/drawing/2014/main" id="{C6D34CD7-6253-E16B-BF24-28A9AD5BF1F3}"/>
+        <p:spPr/>
+        <p:txBody>
+          <a:bodyPr/>
+          <a:lstStyle/>
+          <a:p>
+            <a:r>
+              <a:rPr lang="de-DE" dirty="0"/>
+              <a:t>Learning </a:t>
+            </a:r>
+            <a:r>
+              <a:rPr lang="de-DE" dirty="0" err="1"/>
+              <a:t>from</a:t>
+            </a:r>
+            <a:r>
+              <a:rPr lang="de-DE" dirty="0"/>
+              <a:t> </a:t>
+            </a:r>
+            <a:r>
+              <a:rPr lang="de-DE" dirty="0" err="1"/>
+              <a:t>demonstrations</a:t>
+            </a:r>
+            <a:endParaRPr lang="de-DE" dirty="0"/>
+          </a:p>
+        </p:txBody>
+      </p:sp>
+      <p:sp>
+        <p:nvSpPr>
+          <p:cNvPr id="4" name="Foliennummernplatzhalter 3">
+            <a:extLst>
+              <a:ext uri="{FF2B5EF4-FFF2-40B4-BE49-F238E27FC236}">
+                <a16:creationId xmlns:a16="http://schemas.microsoft.com/office/drawing/2014/main" id="{46FC482C-7B2A-5132-4240-27911079364D}"/>
               </a:ext>
             </a:extLst>
           </p:cNvPr>
@@ -8002,225 +8653,18 @@
           <a:bodyPr/>
           <a:lstStyle/>
           <a:p>
-            <a:fld id="{C48B675A-2084-C34A-84F6-1B6A8516A5F3}" type="slidenum">
-              <a:rPr lang="en-DE" smtClean="0"/>
+            <a:fld id="{08C366F5-AFAD-49CB-854A-9D9E238FCA13}" type="slidenum">
+              <a:rPr lang="en-GB" smtClean="0"/>
               <a:t>9</a:t>
             </a:fld>
-            <a:endParaRPr lang="en-DE"/>
-          </a:p>
-        </p:txBody>
-      </p:sp>
-      <p:sp>
-        <p:nvSpPr>
-          <p:cNvPr id="5" name="TextBox 4">
-            <a:extLst>
-              <a:ext uri="{FF2B5EF4-FFF2-40B4-BE49-F238E27FC236}">
-                <a16:creationId xmlns:a16="http://schemas.microsoft.com/office/drawing/2014/main" id="{F665346F-C1B5-44BB-1572-3B45F4ED02AB}"/>
-              </a:ext>
-            </a:extLst>
-          </p:cNvPr>
-          <p:cNvSpPr txBox="1"/>
-          <p:nvPr/>
-        </p:nvSpPr>
-        <p:spPr>
-          <a:xfrm>
-            <a:off x="11471564" y="5912427"/>
-            <a:ext cx="567154" cy="246221"/>
-          </a:xfrm>
-          <a:prstGeom prst="rect">
-            <a:avLst/>
-          </a:prstGeom>
-          <a:noFill/>
-        </p:spPr>
-        <p:txBody>
-          <a:bodyPr wrap="square" rtlCol="0">
-            <a:spAutoFit/>
-          </a:bodyPr>
-          <a:lstStyle/>
-          <a:p>
-            <a:r>
-              <a:rPr lang="de-DE" sz="1000" dirty="0">
-                <a:hlinkClick r:id="rId3"/>
-              </a:rPr>
-              <a:t>source</a:t>
-            </a:r>
-            <a:endParaRPr lang="de-DE" sz="1000" dirty="0"/>
-          </a:p>
-        </p:txBody>
-      </p:sp>
-      <p:sp>
-        <p:nvSpPr>
-          <p:cNvPr id="6" name="TextBox 5">
-            <a:extLst>
-              <a:ext uri="{FF2B5EF4-FFF2-40B4-BE49-F238E27FC236}">
-                <a16:creationId xmlns:a16="http://schemas.microsoft.com/office/drawing/2014/main" id="{F4E95162-A0A6-C1BF-4669-5F2070D5B2D9}"/>
-              </a:ext>
-            </a:extLst>
-          </p:cNvPr>
-          <p:cNvSpPr txBox="1"/>
-          <p:nvPr/>
-        </p:nvSpPr>
-        <p:spPr>
-          <a:xfrm>
-            <a:off x="4074452" y="5987366"/>
-            <a:ext cx="6843733" cy="830997"/>
-          </a:xfrm>
-          <a:prstGeom prst="rect">
-            <a:avLst/>
-          </a:prstGeom>
-          <a:noFill/>
-        </p:spPr>
-        <p:txBody>
-          <a:bodyPr wrap="none" rtlCol="0">
-            <a:spAutoFit/>
-          </a:bodyPr>
-          <a:lstStyle/>
-          <a:p>
-            <a:r>
-              <a:rPr lang="en-DE" sz="2400" dirty="0"/>
-              <a:t>RL looks at reward of text output passages as a whole</a:t>
-            </a:r>
-          </a:p>
-          <a:p>
-            <a:r>
-              <a:rPr lang="en-DE" sz="2400" dirty="0"/>
-              <a:t>(rather than token-level loss in supervised learning)</a:t>
-            </a:r>
-          </a:p>
-        </p:txBody>
-      </p:sp>
-      <p:cxnSp>
-        <p:nvCxnSpPr>
-          <p:cNvPr id="9" name="Straight Arrow Connector 8">
-            <a:extLst>
-              <a:ext uri="{FF2B5EF4-FFF2-40B4-BE49-F238E27FC236}">
-                <a16:creationId xmlns:a16="http://schemas.microsoft.com/office/drawing/2014/main" id="{86DCB36A-F3CD-F1E8-2BCE-4920F055AE4C}"/>
-              </a:ext>
-            </a:extLst>
-          </p:cNvPr>
-          <p:cNvCxnSpPr>
-            <a:stCxn id="6" idx="0"/>
-          </p:cNvCxnSpPr>
-          <p:nvPr/>
-        </p:nvCxnSpPr>
-        <p:spPr>
-          <a:xfrm flipV="1">
-            <a:off x="7496319" y="5423338"/>
-            <a:ext cx="544095" cy="564028"/>
-          </a:xfrm>
-          <a:prstGeom prst="straightConnector1">
-            <a:avLst/>
-          </a:prstGeom>
-          <a:ln>
-            <a:tailEnd type="triangle"/>
-          </a:ln>
-        </p:spPr>
-        <p:style>
-          <a:lnRef idx="1">
-            <a:schemeClr val="accent1"/>
-          </a:lnRef>
-          <a:fillRef idx="0">
-            <a:schemeClr val="accent1"/>
-          </a:fillRef>
-          <a:effectRef idx="0">
-            <a:schemeClr val="accent1"/>
-          </a:effectRef>
-          <a:fontRef idx="minor">
-            <a:schemeClr val="tx1"/>
-          </a:fontRef>
-        </p:style>
-      </p:cxnSp>
-      <p:cxnSp>
-        <p:nvCxnSpPr>
-          <p:cNvPr id="11" name="Straight Arrow Connector 10">
-            <a:extLst>
-              <a:ext uri="{FF2B5EF4-FFF2-40B4-BE49-F238E27FC236}">
-                <a16:creationId xmlns:a16="http://schemas.microsoft.com/office/drawing/2014/main" id="{B2369C2E-81DE-95D0-4575-09A54721567F}"/>
-              </a:ext>
-            </a:extLst>
-          </p:cNvPr>
-          <p:cNvCxnSpPr>
-            <a:stCxn id="6" idx="0"/>
-          </p:cNvCxnSpPr>
-          <p:nvPr/>
-        </p:nvCxnSpPr>
-        <p:spPr>
-          <a:xfrm flipV="1">
-            <a:off x="7496319" y="5213131"/>
-            <a:ext cx="2194219" cy="774235"/>
-          </a:xfrm>
-          <a:prstGeom prst="straightConnector1">
-            <a:avLst/>
-          </a:prstGeom>
-          <a:ln>
-            <a:tailEnd type="triangle"/>
-          </a:ln>
-        </p:spPr>
-        <p:style>
-          <a:lnRef idx="1">
-            <a:schemeClr val="accent1"/>
-          </a:lnRef>
-          <a:fillRef idx="0">
-            <a:schemeClr val="accent1"/>
-          </a:fillRef>
-          <a:effectRef idx="0">
-            <a:schemeClr val="accent1"/>
-          </a:effectRef>
-          <a:fontRef idx="minor">
-            <a:schemeClr val="tx1"/>
-          </a:fontRef>
-        </p:style>
-      </p:cxnSp>
-      <p:sp>
-        <p:nvSpPr>
-          <p:cNvPr id="8" name="TextBox 7">
-            <a:extLst>
-              <a:ext uri="{FF2B5EF4-FFF2-40B4-BE49-F238E27FC236}">
-                <a16:creationId xmlns:a16="http://schemas.microsoft.com/office/drawing/2014/main" id="{636E222B-9AD4-6410-D19C-F53E4BAB3E0B}"/>
-              </a:ext>
-            </a:extLst>
-          </p:cNvPr>
-          <p:cNvSpPr txBox="1"/>
-          <p:nvPr/>
-        </p:nvSpPr>
-        <p:spPr>
-          <a:xfrm>
-            <a:off x="10041003" y="39637"/>
-            <a:ext cx="2057400" cy="369332"/>
-          </a:xfrm>
-          <a:prstGeom prst="rect">
-            <a:avLst/>
-          </a:prstGeom>
-          <a:noFill/>
-        </p:spPr>
-        <p:txBody>
-          <a:bodyPr wrap="square">
-            <a:spAutoFit/>
-          </a:bodyPr>
-          <a:lstStyle/>
-          <a:p>
-            <a:r>
-              <a:rPr lang="en-GB" dirty="0"/>
-              <a:t>e</a:t>
-            </a:r>
-            <a:r>
-              <a:rPr lang="en-DE"/>
-              <a:t>xample: </a:t>
-            </a:r>
-            <a:r>
-              <a:rPr lang="en-DE">
-                <a:hlinkClick r:id="rId4"/>
-              </a:rPr>
-              <a:t>ChatGPT</a:t>
-            </a:r>
-            <a:endParaRPr lang="en-GB" dirty="0"/>
+            <a:endParaRPr lang="en-GB"/>
           </a:p>
         </p:txBody>
       </p:sp>
     </p:spTree>
     <p:extLst>
       <p:ext uri="{BB962C8B-B14F-4D97-AF65-F5344CB8AC3E}">
-        <p14:creationId xmlns:p14="http://schemas.microsoft.com/office/powerpoint/2010/main" val="1487215908"/>
+        <p14:creationId xmlns:p14="http://schemas.microsoft.com/office/powerpoint/2010/main" val="2946518115"/>
       </p:ext>
     </p:extLst>
   </p:cSld>

--- a/slides/5_advanced.pptx
+++ b/slides/5_advanced.pptx
@@ -5,7 +5,7 @@
     <p:sldMasterId id="2147483648" r:id="rId1"/>
   </p:sldMasterIdLst>
   <p:notesMasterIdLst>
-    <p:notesMasterId r:id="rId25"/>
+    <p:notesMasterId r:id="rId24"/>
   </p:notesMasterIdLst>
   <p:sldIdLst>
     <p:sldId id="256" r:id="rId2"/>
@@ -18,19 +18,18 @@
     <p:sldId id="856" r:id="rId9"/>
     <p:sldId id="866" r:id="rId10"/>
     <p:sldId id="565" r:id="rId11"/>
-    <p:sldId id="568" r:id="rId12"/>
-    <p:sldId id="864" r:id="rId13"/>
-    <p:sldId id="860" r:id="rId14"/>
-    <p:sldId id="270" r:id="rId15"/>
-    <p:sldId id="858" r:id="rId16"/>
-    <p:sldId id="868" r:id="rId17"/>
-    <p:sldId id="857" r:id="rId18"/>
-    <p:sldId id="870" r:id="rId19"/>
-    <p:sldId id="869" r:id="rId20"/>
-    <p:sldId id="271" r:id="rId21"/>
-    <p:sldId id="859" r:id="rId22"/>
-    <p:sldId id="567" r:id="rId23"/>
-    <p:sldId id="865" r:id="rId24"/>
+    <p:sldId id="864" r:id="rId12"/>
+    <p:sldId id="860" r:id="rId13"/>
+    <p:sldId id="270" r:id="rId14"/>
+    <p:sldId id="858" r:id="rId15"/>
+    <p:sldId id="868" r:id="rId16"/>
+    <p:sldId id="857" r:id="rId17"/>
+    <p:sldId id="870" r:id="rId18"/>
+    <p:sldId id="869" r:id="rId19"/>
+    <p:sldId id="271" r:id="rId20"/>
+    <p:sldId id="859" r:id="rId21"/>
+    <p:sldId id="567" r:id="rId22"/>
+    <p:sldId id="865" r:id="rId23"/>
   </p:sldIdLst>
   <p:sldSz cx="12192000" cy="6858000"/>
   <p:notesSz cx="6858000" cy="9144000"/>
@@ -501,7 +500,7 @@
           <a:p>
             <a:fld id="{506E0FD1-891F-4B1E-916D-E9B585160BB8}" type="datetimeFigureOut">
               <a:rPr lang="en-GB" smtClean="0"/>
-              <a:t>23/04/2026</a:t>
+              <a:t>26/04/2026</a:t>
             </a:fld>
             <a:endParaRPr lang="en-GB"/>
           </a:p>
@@ -918,7 +917,7 @@
           <a:p>
             <a:fld id="{D68C3F22-27B2-44E3-9C5F-D08126455F6F}" type="datetime1">
               <a:rPr lang="en-GB" smtClean="0"/>
-              <a:t>23/04/2026</a:t>
+              <a:t>26/04/2026</a:t>
             </a:fld>
             <a:endParaRPr lang="en-GB"/>
           </a:p>
@@ -1118,7 +1117,7 @@
           <a:p>
             <a:fld id="{1CD03846-7BF6-4FB6-A921-FF3379ADBD4C}" type="datetime1">
               <a:rPr lang="en-GB" smtClean="0"/>
-              <a:t>23/04/2026</a:t>
+              <a:t>26/04/2026</a:t>
             </a:fld>
             <a:endParaRPr lang="en-GB"/>
           </a:p>
@@ -1328,7 +1327,7 @@
           <a:p>
             <a:fld id="{99E1B91A-3FD0-4144-9C84-63E9688ED2FE}" type="datetime1">
               <a:rPr lang="en-GB" smtClean="0"/>
-              <a:t>23/04/2026</a:t>
+              <a:t>26/04/2026</a:t>
             </a:fld>
             <a:endParaRPr lang="en-GB"/>
           </a:p>
@@ -1528,7 +1527,7 @@
           <a:p>
             <a:fld id="{5295ED7B-FEAD-4734-819F-93EF4B0EA908}" type="datetime1">
               <a:rPr lang="en-GB" smtClean="0"/>
-              <a:t>23/04/2026</a:t>
+              <a:t>26/04/2026</a:t>
             </a:fld>
             <a:endParaRPr lang="en-GB"/>
           </a:p>
@@ -1804,7 +1803,7 @@
           <a:p>
             <a:fld id="{D2D5D4B4-C926-4B45-8815-1ED8911179A2}" type="datetime1">
               <a:rPr lang="en-GB" smtClean="0"/>
-              <a:t>23/04/2026</a:t>
+              <a:t>26/04/2026</a:t>
             </a:fld>
             <a:endParaRPr lang="en-GB"/>
           </a:p>
@@ -2072,7 +2071,7 @@
           <a:p>
             <a:fld id="{B4C5210A-0E37-4935-93AF-69F21A5F712F}" type="datetime1">
               <a:rPr lang="en-GB" smtClean="0"/>
-              <a:t>23/04/2026</a:t>
+              <a:t>26/04/2026</a:t>
             </a:fld>
             <a:endParaRPr lang="en-GB"/>
           </a:p>
@@ -2487,7 +2486,7 @@
           <a:p>
             <a:fld id="{3D3A6B2F-436C-4691-80E8-9C890E000E9D}" type="datetime1">
               <a:rPr lang="en-GB" smtClean="0"/>
-              <a:t>23/04/2026</a:t>
+              <a:t>26/04/2026</a:t>
             </a:fld>
             <a:endParaRPr lang="en-GB"/>
           </a:p>
@@ -2629,7 +2628,7 @@
           <a:p>
             <a:fld id="{84385F4C-D74B-496F-8D21-97E3549C783B}" type="datetime1">
               <a:rPr lang="en-GB" smtClean="0"/>
-              <a:t>23/04/2026</a:t>
+              <a:t>26/04/2026</a:t>
             </a:fld>
             <a:endParaRPr lang="en-GB"/>
           </a:p>
@@ -2742,7 +2741,7 @@
           <a:p>
             <a:fld id="{0CBDCB32-C241-4703-A832-4EB47BD54E83}" type="datetime1">
               <a:rPr lang="en-GB" smtClean="0"/>
-              <a:t>23/04/2026</a:t>
+              <a:t>26/04/2026</a:t>
             </a:fld>
             <a:endParaRPr lang="en-GB"/>
           </a:p>
@@ -3055,7 +3054,7 @@
           <a:p>
             <a:fld id="{85C150FF-BE95-4D25-A16A-E368A81CBF24}" type="datetime1">
               <a:rPr lang="en-GB" smtClean="0"/>
-              <a:t>23/04/2026</a:t>
+              <a:t>26/04/2026</a:t>
             </a:fld>
             <a:endParaRPr lang="en-GB"/>
           </a:p>
@@ -3344,7 +3343,7 @@
           <a:p>
             <a:fld id="{F3C5DB4B-B349-43C9-A424-BADA723AD9F1}" type="datetime1">
               <a:rPr lang="en-GB" smtClean="0"/>
-              <a:t>23/04/2026</a:t>
+              <a:t>26/04/2026</a:t>
             </a:fld>
             <a:endParaRPr lang="en-GB"/>
           </a:p>
@@ -3587,7 +3586,7 @@
           <a:p>
             <a:fld id="{12632426-0A0C-405F-A3D0-2D11AA44702A}" type="datetime1">
               <a:rPr lang="en-GB" smtClean="0"/>
-              <a:t>23/04/2026</a:t>
+              <a:t>26/04/2026</a:t>
             </a:fld>
             <a:endParaRPr lang="en-GB"/>
           </a:p>
@@ -4368,134 +4367,6 @@
           </a:p>
         </p:txBody>
       </p:sp>
-      <p:cxnSp>
-        <p:nvCxnSpPr>
-          <p:cNvPr id="9" name="Straight Arrow Connector 8">
-            <a:extLst>
-              <a:ext uri="{FF2B5EF4-FFF2-40B4-BE49-F238E27FC236}">
-                <a16:creationId xmlns:a16="http://schemas.microsoft.com/office/drawing/2014/main" id="{86DCB36A-F3CD-F1E8-2BCE-4920F055AE4C}"/>
-              </a:ext>
-            </a:extLst>
-          </p:cNvPr>
-          <p:cNvCxnSpPr>
-            <a:stCxn id="6" idx="0"/>
-          </p:cNvCxnSpPr>
-          <p:nvPr/>
-        </p:nvCxnSpPr>
-        <p:spPr>
-          <a:xfrm flipV="1">
-            <a:off x="7496319" y="5423338"/>
-            <a:ext cx="544095" cy="564028"/>
-          </a:xfrm>
-          <a:prstGeom prst="straightConnector1">
-            <a:avLst/>
-          </a:prstGeom>
-          <a:ln>
-            <a:tailEnd type="triangle"/>
-          </a:ln>
-        </p:spPr>
-        <p:style>
-          <a:lnRef idx="1">
-            <a:schemeClr val="accent1"/>
-          </a:lnRef>
-          <a:fillRef idx="0">
-            <a:schemeClr val="accent1"/>
-          </a:fillRef>
-          <a:effectRef idx="0">
-            <a:schemeClr val="accent1"/>
-          </a:effectRef>
-          <a:fontRef idx="minor">
-            <a:schemeClr val="tx1"/>
-          </a:fontRef>
-        </p:style>
-      </p:cxnSp>
-      <p:cxnSp>
-        <p:nvCxnSpPr>
-          <p:cNvPr id="11" name="Straight Arrow Connector 10">
-            <a:extLst>
-              <a:ext uri="{FF2B5EF4-FFF2-40B4-BE49-F238E27FC236}">
-                <a16:creationId xmlns:a16="http://schemas.microsoft.com/office/drawing/2014/main" id="{B2369C2E-81DE-95D0-4575-09A54721567F}"/>
-              </a:ext>
-            </a:extLst>
-          </p:cNvPr>
-          <p:cNvCxnSpPr>
-            <a:stCxn id="6" idx="0"/>
-          </p:cNvCxnSpPr>
-          <p:nvPr/>
-        </p:nvCxnSpPr>
-        <p:spPr>
-          <a:xfrm flipV="1">
-            <a:off x="7496319" y="5213131"/>
-            <a:ext cx="2194219" cy="774235"/>
-          </a:xfrm>
-          <a:prstGeom prst="straightConnector1">
-            <a:avLst/>
-          </a:prstGeom>
-          <a:ln>
-            <a:tailEnd type="triangle"/>
-          </a:ln>
-        </p:spPr>
-        <p:style>
-          <a:lnRef idx="1">
-            <a:schemeClr val="accent1"/>
-          </a:lnRef>
-          <a:fillRef idx="0">
-            <a:schemeClr val="accent1"/>
-          </a:fillRef>
-          <a:effectRef idx="0">
-            <a:schemeClr val="accent1"/>
-          </a:effectRef>
-          <a:fontRef idx="minor">
-            <a:schemeClr val="tx1"/>
-          </a:fontRef>
-        </p:style>
-      </p:cxnSp>
-      <p:sp>
-        <p:nvSpPr>
-          <p:cNvPr id="8" name="TextBox 7">
-            <a:extLst>
-              <a:ext uri="{FF2B5EF4-FFF2-40B4-BE49-F238E27FC236}">
-                <a16:creationId xmlns:a16="http://schemas.microsoft.com/office/drawing/2014/main" id="{636E222B-9AD4-6410-D19C-F53E4BAB3E0B}"/>
-              </a:ext>
-            </a:extLst>
-          </p:cNvPr>
-          <p:cNvSpPr txBox="1"/>
-          <p:nvPr/>
-        </p:nvSpPr>
-        <p:spPr>
-          <a:xfrm>
-            <a:off x="10041003" y="39637"/>
-            <a:ext cx="2057400" cy="369332"/>
-          </a:xfrm>
-          <a:prstGeom prst="rect">
-            <a:avLst/>
-          </a:prstGeom>
-          <a:noFill/>
-        </p:spPr>
-        <p:txBody>
-          <a:bodyPr wrap="square">
-            <a:spAutoFit/>
-          </a:bodyPr>
-          <a:lstStyle/>
-          <a:p>
-            <a:r>
-              <a:rPr lang="en-GB" dirty="0"/>
-              <a:t>e</a:t>
-            </a:r>
-            <a:r>
-              <a:rPr lang="en-DE"/>
-              <a:t>xample: </a:t>
-            </a:r>
-            <a:r>
-              <a:rPr lang="en-DE">
-                <a:hlinkClick r:id="rId4"/>
-              </a:rPr>
-              <a:t>ChatGPT</a:t>
-            </a:r>
-            <a:endParaRPr lang="en-GB" dirty="0"/>
-          </a:p>
-        </p:txBody>
-      </p:sp>
     </p:spTree>
     <p:extLst>
       <p:ext uri="{BB962C8B-B14F-4D97-AF65-F5344CB8AC3E}">
@@ -4510,245 +4381,6 @@
 </file>
 
 <file path=ppt/slides/slide11.xml><?xml version="1.0" encoding="utf-8"?>
-<p:sld xmlns:a="http://schemas.openxmlformats.org/drawingml/2006/main" xmlns:r="http://schemas.openxmlformats.org/officeDocument/2006/relationships" xmlns:p="http://schemas.openxmlformats.org/presentationml/2006/main">
-  <p:cSld>
-    <p:spTree>
-      <p:nvGrpSpPr>
-        <p:cNvPr id="1" name=""/>
-        <p:cNvGrpSpPr/>
-        <p:nvPr/>
-      </p:nvGrpSpPr>
-      <p:grpSpPr>
-        <a:xfrm>
-          <a:off x="0" y="0"/>
-          <a:ext cx="0" cy="0"/>
-          <a:chOff x="0" y="0"/>
-          <a:chExt cx="0" cy="0"/>
-        </a:xfrm>
-      </p:grpSpPr>
-      <p:pic>
-        <p:nvPicPr>
-          <p:cNvPr id="10" name="Picture 9">
-            <a:extLst>
-              <a:ext uri="{FF2B5EF4-FFF2-40B4-BE49-F238E27FC236}">
-                <a16:creationId xmlns:a16="http://schemas.microsoft.com/office/drawing/2014/main" id="{65B70AB9-0BC4-1E66-9A69-3EC9AB066270}"/>
-              </a:ext>
-            </a:extLst>
-          </p:cNvPr>
-          <p:cNvPicPr>
-            <a:picLocks noChangeAspect="1"/>
-          </p:cNvPicPr>
-          <p:nvPr/>
-        </p:nvPicPr>
-        <p:blipFill>
-          <a:blip r:embed="rId2"/>
-          <a:stretch>
-            <a:fillRect/>
-          </a:stretch>
-        </p:blipFill>
-        <p:spPr>
-          <a:xfrm>
-            <a:off x="148281" y="1690688"/>
-            <a:ext cx="8340594" cy="4507417"/>
-          </a:xfrm>
-          <a:prstGeom prst="rect">
-            <a:avLst/>
-          </a:prstGeom>
-        </p:spPr>
-      </p:pic>
-      <p:sp>
-        <p:nvSpPr>
-          <p:cNvPr id="2" name="Title 1">
-            <a:extLst>
-              <a:ext uri="{FF2B5EF4-FFF2-40B4-BE49-F238E27FC236}">
-                <a16:creationId xmlns:a16="http://schemas.microsoft.com/office/drawing/2014/main" id="{B8404CCD-7229-82B2-D1B8-04EBA10318CE}"/>
-              </a:ext>
-            </a:extLst>
-          </p:cNvPr>
-          <p:cNvSpPr>
-            <a:spLocks noGrp="1"/>
-          </p:cNvSpPr>
-          <p:nvPr>
-            <p:ph type="title"/>
-          </p:nvPr>
-        </p:nvSpPr>
-        <p:spPr/>
-        <p:txBody>
-          <a:bodyPr/>
-          <a:lstStyle/>
-          <a:p>
-            <a:r>
-              <a:rPr lang="en-GB" dirty="0"/>
-              <a:t>Reward Model</a:t>
-            </a:r>
-          </a:p>
-        </p:txBody>
-      </p:sp>
-      <p:sp>
-        <p:nvSpPr>
-          <p:cNvPr id="4" name="Slide Number Placeholder 3">
-            <a:extLst>
-              <a:ext uri="{FF2B5EF4-FFF2-40B4-BE49-F238E27FC236}">
-                <a16:creationId xmlns:a16="http://schemas.microsoft.com/office/drawing/2014/main" id="{47DD22C8-EC85-4D35-CEC9-046ED7D856C0}"/>
-              </a:ext>
-            </a:extLst>
-          </p:cNvPr>
-          <p:cNvSpPr>
-            <a:spLocks noGrp="1"/>
-          </p:cNvSpPr>
-          <p:nvPr>
-            <p:ph type="sldNum" sz="quarter" idx="12"/>
-          </p:nvPr>
-        </p:nvSpPr>
-        <p:spPr/>
-        <p:txBody>
-          <a:bodyPr/>
-          <a:lstStyle/>
-          <a:p>
-            <a:fld id="{C48B675A-2084-C34A-84F6-1B6A8516A5F3}" type="slidenum">
-              <a:rPr lang="en-DE" smtClean="0"/>
-              <a:t>11</a:t>
-            </a:fld>
-            <a:endParaRPr lang="en-DE"/>
-          </a:p>
-        </p:txBody>
-      </p:sp>
-      <p:sp>
-        <p:nvSpPr>
-          <p:cNvPr id="7" name="TextBox 6">
-            <a:extLst>
-              <a:ext uri="{FF2B5EF4-FFF2-40B4-BE49-F238E27FC236}">
-                <a16:creationId xmlns:a16="http://schemas.microsoft.com/office/drawing/2014/main" id="{883B01FF-1571-A5E4-44E5-D12652BC9357}"/>
-              </a:ext>
-            </a:extLst>
-          </p:cNvPr>
-          <p:cNvSpPr txBox="1"/>
-          <p:nvPr/>
-        </p:nvSpPr>
-        <p:spPr>
-          <a:xfrm>
-            <a:off x="6851822" y="5923318"/>
-            <a:ext cx="619241" cy="246221"/>
-          </a:xfrm>
-          <a:prstGeom prst="rect">
-            <a:avLst/>
-          </a:prstGeom>
-          <a:noFill/>
-        </p:spPr>
-        <p:txBody>
-          <a:bodyPr wrap="square" rtlCol="0">
-            <a:spAutoFit/>
-          </a:bodyPr>
-          <a:lstStyle/>
-          <a:p>
-            <a:r>
-              <a:rPr lang="de-DE" sz="1000" dirty="0">
-                <a:hlinkClick r:id="rId3"/>
-              </a:rPr>
-              <a:t>source</a:t>
-            </a:r>
-            <a:endParaRPr lang="de-DE" sz="1000" dirty="0"/>
-          </a:p>
-        </p:txBody>
-      </p:sp>
-      <p:sp>
-        <p:nvSpPr>
-          <p:cNvPr id="8" name="TextBox 7">
-            <a:extLst>
-              <a:ext uri="{FF2B5EF4-FFF2-40B4-BE49-F238E27FC236}">
-                <a16:creationId xmlns:a16="http://schemas.microsoft.com/office/drawing/2014/main" id="{C383CE18-C392-78CC-5AF4-58FFCE773BC9}"/>
-              </a:ext>
-            </a:extLst>
-          </p:cNvPr>
-          <p:cNvSpPr txBox="1"/>
-          <p:nvPr/>
-        </p:nvSpPr>
-        <p:spPr>
-          <a:xfrm>
-            <a:off x="8077287" y="3288785"/>
-            <a:ext cx="3908766" cy="2677656"/>
-          </a:xfrm>
-          <a:prstGeom prst="rect">
-            <a:avLst/>
-          </a:prstGeom>
-          <a:noFill/>
-          <a:ln>
-            <a:solidFill>
-              <a:schemeClr val="tx1"/>
-            </a:solidFill>
-          </a:ln>
-        </p:spPr>
-        <p:txBody>
-          <a:bodyPr wrap="square" rtlCol="0">
-            <a:spAutoFit/>
-          </a:bodyPr>
-          <a:lstStyle/>
-          <a:p>
-            <a:r>
-              <a:rPr lang="en-GB" sz="2400" dirty="0"/>
-              <a:t>loss function for supervised learning sometimes difficult to define</a:t>
-            </a:r>
-          </a:p>
-          <a:p>
-            <a:endParaRPr lang="en-GB" sz="2400" dirty="0"/>
-          </a:p>
-          <a:p>
-            <a:r>
-              <a:rPr lang="en-GB" sz="2400" dirty="0"/>
-              <a:t>RL allows learning (instead of manually setting) of loss function</a:t>
-            </a:r>
-          </a:p>
-        </p:txBody>
-      </p:sp>
-      <p:sp>
-        <p:nvSpPr>
-          <p:cNvPr id="11" name="TextBox 10">
-            <a:extLst>
-              <a:ext uri="{FF2B5EF4-FFF2-40B4-BE49-F238E27FC236}">
-                <a16:creationId xmlns:a16="http://schemas.microsoft.com/office/drawing/2014/main" id="{9102ED80-4B46-74FC-59F4-1052A516B67B}"/>
-              </a:ext>
-            </a:extLst>
-          </p:cNvPr>
-          <p:cNvSpPr txBox="1"/>
-          <p:nvPr/>
-        </p:nvSpPr>
-        <p:spPr>
-          <a:xfrm>
-            <a:off x="2982097" y="5086062"/>
-            <a:ext cx="1132618" cy="338554"/>
-          </a:xfrm>
-          <a:prstGeom prst="rect">
-            <a:avLst/>
-          </a:prstGeom>
-          <a:noFill/>
-        </p:spPr>
-        <p:txBody>
-          <a:bodyPr wrap="none" rtlCol="0">
-            <a:spAutoFit/>
-          </a:bodyPr>
-          <a:lstStyle/>
-          <a:p>
-            <a:r>
-              <a:rPr lang="en-GB" sz="1600" dirty="0"/>
-              <a:t>(e.g., RLHF)</a:t>
-            </a:r>
-          </a:p>
-        </p:txBody>
-      </p:sp>
-    </p:spTree>
-    <p:extLst>
-      <p:ext uri="{BB962C8B-B14F-4D97-AF65-F5344CB8AC3E}">
-        <p14:creationId xmlns:p14="http://schemas.microsoft.com/office/powerpoint/2010/main" val="4032294120"/>
-      </p:ext>
-    </p:extLst>
-  </p:cSld>
-  <p:clrMapOvr>
-    <a:masterClrMapping/>
-  </p:clrMapOvr>
-</p:sld>
-</file>
-
-<file path=ppt/slides/slide12.xml><?xml version="1.0" encoding="utf-8"?>
 <p:sld xmlns:a="http://schemas.openxmlformats.org/drawingml/2006/main" xmlns:r="http://schemas.openxmlformats.org/officeDocument/2006/relationships" xmlns:p="http://schemas.openxmlformats.org/presentationml/2006/main">
   <p:cSld>
     <p:spTree>
@@ -4840,7 +4472,7 @@
           <a:p>
             <a:fld id="{08C366F5-AFAD-49CB-854A-9D9E238FCA13}" type="slidenum">
               <a:rPr lang="en-GB" smtClean="0"/>
-              <a:t>12</a:t>
+              <a:t>11</a:t>
             </a:fld>
             <a:endParaRPr lang="en-GB"/>
           </a:p>
@@ -4850,6 +4482,170 @@
     <p:extLst>
       <p:ext uri="{BB962C8B-B14F-4D97-AF65-F5344CB8AC3E}">
         <p14:creationId xmlns:p14="http://schemas.microsoft.com/office/powerpoint/2010/main" val="2472302990"/>
+      </p:ext>
+    </p:extLst>
+  </p:cSld>
+  <p:clrMapOvr>
+    <a:masterClrMapping/>
+  </p:clrMapOvr>
+</p:sld>
+</file>
+
+<file path=ppt/slides/slide12.xml><?xml version="1.0" encoding="utf-8"?>
+<p:sld xmlns:a="http://schemas.openxmlformats.org/drawingml/2006/main" xmlns:r="http://schemas.openxmlformats.org/officeDocument/2006/relationships" xmlns:p="http://schemas.openxmlformats.org/presentationml/2006/main">
+  <p:cSld>
+    <p:spTree>
+      <p:nvGrpSpPr>
+        <p:cNvPr id="1" name=""/>
+        <p:cNvGrpSpPr/>
+        <p:nvPr/>
+      </p:nvGrpSpPr>
+      <p:grpSpPr>
+        <a:xfrm>
+          <a:off x="0" y="0"/>
+          <a:ext cx="0" cy="0"/>
+          <a:chOff x="0" y="0"/>
+          <a:chExt cx="0" cy="0"/>
+        </a:xfrm>
+      </p:grpSpPr>
+      <p:sp>
+        <p:nvSpPr>
+          <p:cNvPr id="2" name="Titel 1">
+            <a:extLst>
+              <a:ext uri="{FF2B5EF4-FFF2-40B4-BE49-F238E27FC236}">
+                <a16:creationId xmlns:a16="http://schemas.microsoft.com/office/drawing/2014/main" id="{7B3FAC51-65A5-1409-A6D0-7B810403B8BE}"/>
+              </a:ext>
+            </a:extLst>
+          </p:cNvPr>
+          <p:cNvSpPr>
+            <a:spLocks noGrp="1"/>
+          </p:cNvSpPr>
+          <p:nvPr>
+            <p:ph type="title"/>
+          </p:nvPr>
+        </p:nvSpPr>
+        <p:spPr/>
+        <p:txBody>
+          <a:bodyPr/>
+          <a:lstStyle/>
+          <a:p>
+            <a:r>
+              <a:rPr lang="en-GB" dirty="0"/>
+              <a:t>Trajectory </a:t>
+            </a:r>
+            <a:r>
+              <a:rPr lang="en-GB" dirty="0" err="1"/>
+              <a:t>Modeling</a:t>
+            </a:r>
+            <a:endParaRPr lang="de-DE" dirty="0"/>
+          </a:p>
+        </p:txBody>
+      </p:sp>
+      <p:sp>
+        <p:nvSpPr>
+          <p:cNvPr id="3" name="Inhaltsplatzhalter 2">
+            <a:extLst>
+              <a:ext uri="{FF2B5EF4-FFF2-40B4-BE49-F238E27FC236}">
+                <a16:creationId xmlns:a16="http://schemas.microsoft.com/office/drawing/2014/main" id="{5E36192F-8BCF-0FAF-226A-963A74B4ED5D}"/>
+              </a:ext>
+            </a:extLst>
+          </p:cNvPr>
+          <p:cNvSpPr>
+            <a:spLocks noGrp="1"/>
+          </p:cNvSpPr>
+          <p:nvPr>
+            <p:ph idx="1"/>
+          </p:nvPr>
+        </p:nvSpPr>
+        <p:spPr/>
+        <p:txBody>
+          <a:bodyPr/>
+          <a:lstStyle/>
+          <a:p>
+            <a:pPr marL="0" indent="0">
+              <a:buNone/>
+            </a:pPr>
+            <a:r>
+              <a:rPr lang="de-DE" dirty="0" err="1"/>
+              <a:t>using</a:t>
+            </a:r>
+            <a:r>
+              <a:rPr lang="de-DE" dirty="0"/>
+              <a:t> </a:t>
+            </a:r>
+            <a:r>
+              <a:rPr lang="de-DE" dirty="0" err="1"/>
+              <a:t>sequence</a:t>
+            </a:r>
+            <a:r>
+              <a:rPr lang="de-DE" dirty="0"/>
+              <a:t> </a:t>
+            </a:r>
+            <a:r>
+              <a:rPr lang="de-DE" dirty="0" err="1"/>
+              <a:t>models</a:t>
+            </a:r>
+            <a:r>
+              <a:rPr lang="de-DE" dirty="0"/>
+              <a:t> </a:t>
+            </a:r>
+            <a:r>
+              <a:rPr lang="de-DE" dirty="0" err="1"/>
+              <a:t>for</a:t>
+            </a:r>
+            <a:r>
+              <a:rPr lang="de-DE" dirty="0"/>
+              <a:t> </a:t>
+            </a:r>
+            <a:r>
+              <a:rPr lang="de-DE" dirty="0" err="1"/>
+              <a:t>policy</a:t>
+            </a:r>
+            <a:r>
+              <a:rPr lang="de-DE" dirty="0"/>
+              <a:t> </a:t>
+            </a:r>
+            <a:r>
+              <a:rPr lang="de-DE" dirty="0" err="1"/>
+              <a:t>prediction</a:t>
+            </a:r>
+            <a:endParaRPr lang="de-DE" dirty="0"/>
+          </a:p>
+        </p:txBody>
+      </p:sp>
+      <p:sp>
+        <p:nvSpPr>
+          <p:cNvPr id="4" name="Foliennummernplatzhalter 3">
+            <a:extLst>
+              <a:ext uri="{FF2B5EF4-FFF2-40B4-BE49-F238E27FC236}">
+                <a16:creationId xmlns:a16="http://schemas.microsoft.com/office/drawing/2014/main" id="{231F773B-8566-CAF5-9DFE-D45C971800E2}"/>
+              </a:ext>
+            </a:extLst>
+          </p:cNvPr>
+          <p:cNvSpPr>
+            <a:spLocks noGrp="1"/>
+          </p:cNvSpPr>
+          <p:nvPr>
+            <p:ph type="sldNum" sz="quarter" idx="12"/>
+          </p:nvPr>
+        </p:nvSpPr>
+        <p:spPr/>
+        <p:txBody>
+          <a:bodyPr/>
+          <a:lstStyle/>
+          <a:p>
+            <a:fld id="{08C366F5-AFAD-49CB-854A-9D9E238FCA13}" type="slidenum">
+              <a:rPr lang="en-GB" smtClean="0"/>
+              <a:t>12</a:t>
+            </a:fld>
+            <a:endParaRPr lang="en-GB"/>
+          </a:p>
+        </p:txBody>
+      </p:sp>
+    </p:spTree>
+    <p:extLst>
+      <p:ext uri="{BB962C8B-B14F-4D97-AF65-F5344CB8AC3E}">
+        <p14:creationId xmlns:p14="http://schemas.microsoft.com/office/powerpoint/2010/main" val="2825950394"/>
       </p:ext>
     </p:extLst>
   </p:cSld>
@@ -4876,167 +4672,6 @@
           <a:chExt cx="0" cy="0"/>
         </a:xfrm>
       </p:grpSpPr>
-      <p:sp>
-        <p:nvSpPr>
-          <p:cNvPr id="2" name="Titel 1">
-            <a:extLst>
-              <a:ext uri="{FF2B5EF4-FFF2-40B4-BE49-F238E27FC236}">
-                <a16:creationId xmlns:a16="http://schemas.microsoft.com/office/drawing/2014/main" id="{7B3FAC51-65A5-1409-A6D0-7B810403B8BE}"/>
-              </a:ext>
-            </a:extLst>
-          </p:cNvPr>
-          <p:cNvSpPr>
-            <a:spLocks noGrp="1"/>
-          </p:cNvSpPr>
-          <p:nvPr>
-            <p:ph type="title"/>
-          </p:nvPr>
-        </p:nvSpPr>
-        <p:spPr/>
-        <p:txBody>
-          <a:bodyPr/>
-          <a:lstStyle/>
-          <a:p>
-            <a:r>
-              <a:rPr lang="en-GB" dirty="0"/>
-              <a:t>Trajectory </a:t>
-            </a:r>
-            <a:r>
-              <a:rPr lang="en-GB" dirty="0" err="1"/>
-              <a:t>Modeling</a:t>
-            </a:r>
-            <a:endParaRPr lang="de-DE" dirty="0"/>
-          </a:p>
-        </p:txBody>
-      </p:sp>
-      <p:sp>
-        <p:nvSpPr>
-          <p:cNvPr id="3" name="Inhaltsplatzhalter 2">
-            <a:extLst>
-              <a:ext uri="{FF2B5EF4-FFF2-40B4-BE49-F238E27FC236}">
-                <a16:creationId xmlns:a16="http://schemas.microsoft.com/office/drawing/2014/main" id="{5E36192F-8BCF-0FAF-226A-963A74B4ED5D}"/>
-              </a:ext>
-            </a:extLst>
-          </p:cNvPr>
-          <p:cNvSpPr>
-            <a:spLocks noGrp="1"/>
-          </p:cNvSpPr>
-          <p:nvPr>
-            <p:ph idx="1"/>
-          </p:nvPr>
-        </p:nvSpPr>
-        <p:spPr/>
-        <p:txBody>
-          <a:bodyPr/>
-          <a:lstStyle/>
-          <a:p>
-            <a:r>
-              <a:rPr lang="de-DE" dirty="0" err="1"/>
-              <a:t>Using</a:t>
-            </a:r>
-            <a:r>
-              <a:rPr lang="de-DE" dirty="0"/>
-              <a:t> </a:t>
-            </a:r>
-            <a:r>
-              <a:rPr lang="de-DE" dirty="0" err="1"/>
-              <a:t>sequence</a:t>
-            </a:r>
-            <a:r>
-              <a:rPr lang="de-DE" dirty="0"/>
-              <a:t> </a:t>
-            </a:r>
-            <a:r>
-              <a:rPr lang="de-DE" dirty="0" err="1"/>
-              <a:t>models</a:t>
-            </a:r>
-            <a:r>
-              <a:rPr lang="de-DE" dirty="0"/>
-              <a:t> </a:t>
-            </a:r>
-            <a:r>
-              <a:rPr lang="de-DE" dirty="0" err="1"/>
-              <a:t>for</a:t>
-            </a:r>
-            <a:r>
-              <a:rPr lang="de-DE" dirty="0"/>
-              <a:t> </a:t>
-            </a:r>
-            <a:r>
-              <a:rPr lang="de-DE" dirty="0" err="1"/>
-              <a:t>policy</a:t>
-            </a:r>
-            <a:r>
-              <a:rPr lang="de-DE" dirty="0"/>
-              <a:t> </a:t>
-            </a:r>
-            <a:r>
-              <a:rPr lang="de-DE" dirty="0" err="1"/>
-              <a:t>prediction</a:t>
-            </a:r>
-            <a:endParaRPr lang="de-DE" dirty="0"/>
-          </a:p>
-        </p:txBody>
-      </p:sp>
-      <p:sp>
-        <p:nvSpPr>
-          <p:cNvPr id="4" name="Foliennummernplatzhalter 3">
-            <a:extLst>
-              <a:ext uri="{FF2B5EF4-FFF2-40B4-BE49-F238E27FC236}">
-                <a16:creationId xmlns:a16="http://schemas.microsoft.com/office/drawing/2014/main" id="{231F773B-8566-CAF5-9DFE-D45C971800E2}"/>
-              </a:ext>
-            </a:extLst>
-          </p:cNvPr>
-          <p:cNvSpPr>
-            <a:spLocks noGrp="1"/>
-          </p:cNvSpPr>
-          <p:nvPr>
-            <p:ph type="sldNum" sz="quarter" idx="12"/>
-          </p:nvPr>
-        </p:nvSpPr>
-        <p:spPr/>
-        <p:txBody>
-          <a:bodyPr/>
-          <a:lstStyle/>
-          <a:p>
-            <a:fld id="{08C366F5-AFAD-49CB-854A-9D9E238FCA13}" type="slidenum">
-              <a:rPr lang="en-GB" smtClean="0"/>
-              <a:t>13</a:t>
-            </a:fld>
-            <a:endParaRPr lang="en-GB"/>
-          </a:p>
-        </p:txBody>
-      </p:sp>
-    </p:spTree>
-    <p:extLst>
-      <p:ext uri="{BB962C8B-B14F-4D97-AF65-F5344CB8AC3E}">
-        <p14:creationId xmlns:p14="http://schemas.microsoft.com/office/powerpoint/2010/main" val="2825950394"/>
-      </p:ext>
-    </p:extLst>
-  </p:cSld>
-  <p:clrMapOvr>
-    <a:masterClrMapping/>
-  </p:clrMapOvr>
-</p:sld>
-</file>
-
-<file path=ppt/slides/slide14.xml><?xml version="1.0" encoding="utf-8"?>
-<p:sld xmlns:a="http://schemas.openxmlformats.org/drawingml/2006/main" xmlns:r="http://schemas.openxmlformats.org/officeDocument/2006/relationships" xmlns:p="http://schemas.openxmlformats.org/presentationml/2006/main">
-  <p:cSld>
-    <p:spTree>
-      <p:nvGrpSpPr>
-        <p:cNvPr id="1" name=""/>
-        <p:cNvGrpSpPr/>
-        <p:nvPr/>
-      </p:nvGrpSpPr>
-      <p:grpSpPr>
-        <a:xfrm>
-          <a:off x="0" y="0"/>
-          <a:ext cx="0" cy="0"/>
-          <a:chOff x="0" y="0"/>
-          <a:chExt cx="0" cy="0"/>
-        </a:xfrm>
-      </p:grpSpPr>
       <p:pic>
         <p:nvPicPr>
           <p:cNvPr id="6" name="Picture 5" descr="A screenshot of a computer&#10;&#10;Description automatically generated with medium confidence">
@@ -5162,7 +4797,7 @@
           <a:p>
             <a:fld id="{384C2C1F-BED8-2340-8784-C66D22CCFBBD}" type="slidenum">
               <a:rPr lang="en-DE" smtClean="0"/>
-              <a:t>14</a:t>
+              <a:t>13</a:t>
             </a:fld>
             <a:endParaRPr lang="en-DE"/>
           </a:p>
@@ -5533,46 +5168,6 @@
           </a:p>
         </p:txBody>
       </p:sp>
-      <p:sp>
-        <p:nvSpPr>
-          <p:cNvPr id="3" name="TextBox 2">
-            <a:extLst>
-              <a:ext uri="{FF2B5EF4-FFF2-40B4-BE49-F238E27FC236}">
-                <a16:creationId xmlns:a16="http://schemas.microsoft.com/office/drawing/2014/main" id="{457002E9-22BD-8C75-95CD-6B4A3A738ADA}"/>
-              </a:ext>
-            </a:extLst>
-          </p:cNvPr>
-          <p:cNvSpPr txBox="1"/>
-          <p:nvPr/>
-        </p:nvSpPr>
-        <p:spPr>
-          <a:xfrm>
-            <a:off x="8813800" y="67280"/>
-            <a:ext cx="3316870" cy="430887"/>
-          </a:xfrm>
-          <a:prstGeom prst="rect">
-            <a:avLst/>
-          </a:prstGeom>
-          <a:noFill/>
-          <a:ln>
-            <a:solidFill>
-              <a:schemeClr val="tx1"/>
-            </a:solidFill>
-          </a:ln>
-        </p:spPr>
-        <p:txBody>
-          <a:bodyPr wrap="none" rtlCol="0">
-            <a:spAutoFit/>
-          </a:bodyPr>
-          <a:lstStyle/>
-          <a:p>
-            <a:r>
-              <a:rPr lang="en-GB" sz="2200" dirty="0"/>
-              <a:t>overcome Markov property</a:t>
-            </a:r>
-          </a:p>
-        </p:txBody>
-      </p:sp>
     </p:spTree>
     <p:extLst>
       <p:ext uri="{BB962C8B-B14F-4D97-AF65-F5344CB8AC3E}">
@@ -5586,7 +5181,7 @@
 </p:sld>
 </file>
 
-<file path=ppt/slides/slide15.xml><?xml version="1.0" encoding="utf-8"?>
+<file path=ppt/slides/slide14.xml><?xml version="1.0" encoding="utf-8"?>
 <p:sld xmlns:a="http://schemas.openxmlformats.org/drawingml/2006/main" xmlns:r="http://schemas.openxmlformats.org/officeDocument/2006/relationships" xmlns:p="http://schemas.openxmlformats.org/presentationml/2006/main">
   <p:cSld>
     <p:spTree>
@@ -5657,9 +5252,12 @@
           <a:bodyPr/>
           <a:lstStyle/>
           <a:p>
-            <a:r>
-              <a:rPr lang="de-DE" dirty="0" err="1"/>
-              <a:t>Using</a:t>
+            <a:pPr marL="0" indent="0">
+              <a:buNone/>
+            </a:pPr>
+            <a:r>
+              <a:rPr lang="de-DE" dirty="0" err="1"/>
+              <a:t>using</a:t>
             </a:r>
             <a:r>
               <a:rPr lang="de-DE" dirty="0"/>
@@ -5728,7 +5326,7 @@
           <a:p>
             <a:fld id="{08C366F5-AFAD-49CB-854A-9D9E238FCA13}" type="slidenum">
               <a:rPr lang="en-GB" smtClean="0"/>
-              <a:t>15</a:t>
+              <a:t>14</a:t>
             </a:fld>
             <a:endParaRPr lang="en-GB"/>
           </a:p>
@@ -5747,7 +5345,7 @@
 </p:sld>
 </file>
 
-<file path=ppt/slides/slide16.xml><?xml version="1.0" encoding="utf-8"?>
+<file path=ppt/slides/slide15.xml><?xml version="1.0" encoding="utf-8"?>
 <p:sld xmlns:a="http://schemas.openxmlformats.org/drawingml/2006/main" xmlns:r="http://schemas.openxmlformats.org/officeDocument/2006/relationships" xmlns:p="http://schemas.openxmlformats.org/presentationml/2006/main">
   <p:cSld>
     <p:spTree>
@@ -5835,7 +5433,7 @@
           <a:p>
             <a:fld id="{08C366F5-AFAD-49CB-854A-9D9E238FCA13}" type="slidenum">
               <a:rPr lang="en-GB" smtClean="0"/>
-              <a:t>16</a:t>
+              <a:t>15</a:t>
             </a:fld>
             <a:endParaRPr lang="en-GB"/>
           </a:p>
@@ -5845,6 +5443,169 @@
     <p:extLst>
       <p:ext uri="{BB962C8B-B14F-4D97-AF65-F5344CB8AC3E}">
         <p14:creationId xmlns:p14="http://schemas.microsoft.com/office/powerpoint/2010/main" val="774495290"/>
+      </p:ext>
+    </p:extLst>
+  </p:cSld>
+  <p:clrMapOvr>
+    <a:masterClrMapping/>
+  </p:clrMapOvr>
+</p:sld>
+</file>
+
+<file path=ppt/slides/slide16.xml><?xml version="1.0" encoding="utf-8"?>
+<p:sld xmlns:a="http://schemas.openxmlformats.org/drawingml/2006/main" xmlns:r="http://schemas.openxmlformats.org/officeDocument/2006/relationships" xmlns:p="http://schemas.openxmlformats.org/presentationml/2006/main">
+  <p:cSld>
+    <p:spTree>
+      <p:nvGrpSpPr>
+        <p:cNvPr id="1" name=""/>
+        <p:cNvGrpSpPr/>
+        <p:nvPr/>
+      </p:nvGrpSpPr>
+      <p:grpSpPr>
+        <a:xfrm>
+          <a:off x="0" y="0"/>
+          <a:ext cx="0" cy="0"/>
+          <a:chOff x="0" y="0"/>
+          <a:chExt cx="0" cy="0"/>
+        </a:xfrm>
+      </p:grpSpPr>
+      <p:sp>
+        <p:nvSpPr>
+          <p:cNvPr id="2" name="Titel 1">
+            <a:extLst>
+              <a:ext uri="{FF2B5EF4-FFF2-40B4-BE49-F238E27FC236}">
+                <a16:creationId xmlns:a16="http://schemas.microsoft.com/office/drawing/2014/main" id="{226B6C36-06F3-AC73-A6FB-6E52BC3AAE3B}"/>
+              </a:ext>
+            </a:extLst>
+          </p:cNvPr>
+          <p:cNvSpPr>
+            <a:spLocks noGrp="1"/>
+          </p:cNvSpPr>
+          <p:nvPr>
+            <p:ph type="title"/>
+          </p:nvPr>
+        </p:nvSpPr>
+        <p:spPr/>
+        <p:txBody>
+          <a:bodyPr/>
+          <a:lstStyle/>
+          <a:p>
+            <a:r>
+              <a:rPr lang="de-DE" dirty="0" err="1"/>
+              <a:t>Embodied</a:t>
+            </a:r>
+            <a:r>
+              <a:rPr lang="de-DE" dirty="0"/>
+              <a:t> RL</a:t>
+            </a:r>
+          </a:p>
+        </p:txBody>
+      </p:sp>
+      <p:sp>
+        <p:nvSpPr>
+          <p:cNvPr id="3" name="Inhaltsplatzhalter 2">
+            <a:extLst>
+              <a:ext uri="{FF2B5EF4-FFF2-40B4-BE49-F238E27FC236}">
+                <a16:creationId xmlns:a16="http://schemas.microsoft.com/office/drawing/2014/main" id="{27221939-A1BE-48B0-4D95-46E4C8412FBC}"/>
+              </a:ext>
+            </a:extLst>
+          </p:cNvPr>
+          <p:cNvSpPr>
+            <a:spLocks noGrp="1"/>
+          </p:cNvSpPr>
+          <p:nvPr>
+            <p:ph idx="1"/>
+          </p:nvPr>
+        </p:nvSpPr>
+        <p:spPr/>
+        <p:txBody>
+          <a:bodyPr/>
+          <a:lstStyle/>
+          <a:p>
+            <a:pPr marL="0" indent="0">
+              <a:buNone/>
+            </a:pPr>
+            <a:r>
+              <a:rPr lang="de-DE" dirty="0" err="1"/>
+              <a:t>agents</a:t>
+            </a:r>
+            <a:r>
+              <a:rPr lang="de-DE" dirty="0"/>
+              <a:t> </a:t>
+            </a:r>
+            <a:r>
+              <a:rPr lang="de-DE" dirty="0" err="1"/>
+              <a:t>interacting</a:t>
+            </a:r>
+            <a:r>
+              <a:rPr lang="de-DE" dirty="0"/>
+              <a:t> </a:t>
+            </a:r>
+            <a:r>
+              <a:rPr lang="de-DE" dirty="0" err="1"/>
+              <a:t>with</a:t>
+            </a:r>
+            <a:r>
+              <a:rPr lang="de-DE" dirty="0"/>
+              <a:t> </a:t>
+            </a:r>
+            <a:r>
+              <a:rPr lang="de-DE" dirty="0" err="1"/>
+              <a:t>complex</a:t>
+            </a:r>
+            <a:r>
+              <a:rPr lang="de-DE" dirty="0"/>
+              <a:t>, </a:t>
+            </a:r>
+            <a:r>
+              <a:rPr lang="de-DE" dirty="0" err="1"/>
+              <a:t>realistic</a:t>
+            </a:r>
+            <a:r>
+              <a:rPr lang="de-DE" dirty="0"/>
+              <a:t> </a:t>
+            </a:r>
+            <a:r>
+              <a:rPr lang="de-DE" dirty="0" err="1"/>
+              <a:t>environments</a:t>
+            </a:r>
+            <a:endParaRPr lang="de-DE" dirty="0"/>
+          </a:p>
+        </p:txBody>
+      </p:sp>
+      <p:sp>
+        <p:nvSpPr>
+          <p:cNvPr id="4" name="Foliennummernplatzhalter 3">
+            <a:extLst>
+              <a:ext uri="{FF2B5EF4-FFF2-40B4-BE49-F238E27FC236}">
+                <a16:creationId xmlns:a16="http://schemas.microsoft.com/office/drawing/2014/main" id="{803C05ED-0DFD-A388-0080-8843F879919E}"/>
+              </a:ext>
+            </a:extLst>
+          </p:cNvPr>
+          <p:cNvSpPr>
+            <a:spLocks noGrp="1"/>
+          </p:cNvSpPr>
+          <p:nvPr>
+            <p:ph type="sldNum" sz="quarter" idx="12"/>
+          </p:nvPr>
+        </p:nvSpPr>
+        <p:spPr/>
+        <p:txBody>
+          <a:bodyPr/>
+          <a:lstStyle/>
+          <a:p>
+            <a:fld id="{08C366F5-AFAD-49CB-854A-9D9E238FCA13}" type="slidenum">
+              <a:rPr lang="en-GB" smtClean="0"/>
+              <a:t>16</a:t>
+            </a:fld>
+            <a:endParaRPr lang="en-GB"/>
+          </a:p>
+        </p:txBody>
+      </p:sp>
+    </p:spTree>
+    <p:extLst>
+      <p:ext uri="{BB962C8B-B14F-4D97-AF65-F5344CB8AC3E}">
+        <p14:creationId xmlns:p14="http://schemas.microsoft.com/office/powerpoint/2010/main" val="3856566800"/>
       </p:ext>
     </p:extLst>
   </p:cSld>
@@ -5876,7 +5637,7 @@
           <p:cNvPr id="2" name="Titel 1">
             <a:extLst>
               <a:ext uri="{FF2B5EF4-FFF2-40B4-BE49-F238E27FC236}">
-                <a16:creationId xmlns:a16="http://schemas.microsoft.com/office/drawing/2014/main" id="{226B6C36-06F3-AC73-A6FB-6E52BC3AAE3B}"/>
+                <a16:creationId xmlns:a16="http://schemas.microsoft.com/office/drawing/2014/main" id="{3638C6F0-EEAA-7DD3-F1D2-34D4F5F17A5D}"/>
               </a:ext>
             </a:extLst>
           </p:cNvPr>
@@ -5893,12 +5654,8 @@
           <a:lstStyle/>
           <a:p>
             <a:r>
-              <a:rPr lang="de-DE" dirty="0" err="1"/>
-              <a:t>Embodied</a:t>
-            </a:r>
-            <a:r>
-              <a:rPr lang="de-DE" dirty="0"/>
-              <a:t> RL</a:t>
+              <a:rPr lang="de-DE" dirty="0"/>
+              <a:t>Isaac Sim &amp; Lab</a:t>
             </a:r>
           </a:p>
         </p:txBody>
@@ -5908,7 +5665,7 @@
           <p:cNvPr id="3" name="Inhaltsplatzhalter 2">
             <a:extLst>
               <a:ext uri="{FF2B5EF4-FFF2-40B4-BE49-F238E27FC236}">
-                <a16:creationId xmlns:a16="http://schemas.microsoft.com/office/drawing/2014/main" id="{27221939-A1BE-48B0-4D95-46E4C8412FBC}"/>
+                <a16:creationId xmlns:a16="http://schemas.microsoft.com/office/drawing/2014/main" id="{56AB4563-14C8-A40B-C7FB-7CA27C97201F}"/>
               </a:ext>
             </a:extLst>
           </p:cNvPr>
@@ -5924,51 +5681,7 @@
           <a:bodyPr/>
           <a:lstStyle/>
           <a:p>
-            <a:r>
-              <a:rPr lang="de-DE" dirty="0" err="1"/>
-              <a:t>Agents</a:t>
-            </a:r>
-            <a:r>
-              <a:rPr lang="de-DE" dirty="0"/>
-              <a:t> </a:t>
-            </a:r>
-            <a:r>
-              <a:rPr lang="de-DE" dirty="0" err="1"/>
-              <a:t>interacting</a:t>
-            </a:r>
-            <a:r>
-              <a:rPr lang="de-DE" dirty="0"/>
-              <a:t> </a:t>
-            </a:r>
-            <a:r>
-              <a:rPr lang="de-DE" dirty="0" err="1"/>
-              <a:t>with</a:t>
-            </a:r>
-            <a:r>
-              <a:rPr lang="de-DE" dirty="0"/>
-              <a:t> </a:t>
-            </a:r>
-            <a:r>
-              <a:rPr lang="de-DE" dirty="0" err="1"/>
-              <a:t>complex</a:t>
-            </a:r>
-            <a:r>
-              <a:rPr lang="de-DE" dirty="0"/>
-              <a:t>, </a:t>
-            </a:r>
-            <a:r>
-              <a:rPr lang="de-DE" dirty="0" err="1"/>
-              <a:t>realistic</a:t>
-            </a:r>
-            <a:r>
-              <a:rPr lang="de-DE" dirty="0"/>
-              <a:t> </a:t>
-            </a:r>
-            <a:r>
-              <a:rPr lang="de-DE" dirty="0" err="1"/>
-              <a:t>environments</a:t>
-            </a:r>
-            <a:endParaRPr lang="de-DE" dirty="0"/>
+            <a:endParaRPr lang="de-DE"/>
           </a:p>
         </p:txBody>
       </p:sp>
@@ -5977,7 +5690,7 @@
           <p:cNvPr id="4" name="Foliennummernplatzhalter 3">
             <a:extLst>
               <a:ext uri="{FF2B5EF4-FFF2-40B4-BE49-F238E27FC236}">
-                <a16:creationId xmlns:a16="http://schemas.microsoft.com/office/drawing/2014/main" id="{803C05ED-0DFD-A388-0080-8843F879919E}"/>
+                <a16:creationId xmlns:a16="http://schemas.microsoft.com/office/drawing/2014/main" id="{5AD6968C-F452-BA18-653A-B2E00C905166}"/>
               </a:ext>
             </a:extLst>
           </p:cNvPr>
@@ -6004,7 +5717,7 @@
     </p:spTree>
     <p:extLst>
       <p:ext uri="{BB962C8B-B14F-4D97-AF65-F5344CB8AC3E}">
-        <p14:creationId xmlns:p14="http://schemas.microsoft.com/office/powerpoint/2010/main" val="3856566800"/>
+        <p14:creationId xmlns:p14="http://schemas.microsoft.com/office/powerpoint/2010/main" val="1464015792"/>
       </p:ext>
     </p:extLst>
   </p:cSld>
@@ -6036,7 +5749,7 @@
           <p:cNvPr id="2" name="Titel 1">
             <a:extLst>
               <a:ext uri="{FF2B5EF4-FFF2-40B4-BE49-F238E27FC236}">
-                <a16:creationId xmlns:a16="http://schemas.microsoft.com/office/drawing/2014/main" id="{3638C6F0-EEAA-7DD3-F1D2-34D4F5F17A5D}"/>
+                <a16:creationId xmlns:a16="http://schemas.microsoft.com/office/drawing/2014/main" id="{9728D84D-0315-CC40-03E4-0D67C66A8EAA}"/>
               </a:ext>
             </a:extLst>
           </p:cNvPr>
@@ -6054,7 +5767,15 @@
           <a:p>
             <a:r>
               <a:rPr lang="de-DE" dirty="0"/>
-              <a:t>Isaac Sim &amp; Lab</a:t>
+              <a:t>Sim-</a:t>
+            </a:r>
+            <a:r>
+              <a:rPr lang="de-DE" dirty="0" err="1"/>
+              <a:t>to</a:t>
+            </a:r>
+            <a:r>
+              <a:rPr lang="de-DE" dirty="0"/>
+              <a:t>-Real Gap</a:t>
             </a:r>
           </a:p>
         </p:txBody>
@@ -6064,7 +5785,7 @@
           <p:cNvPr id="3" name="Inhaltsplatzhalter 2">
             <a:extLst>
               <a:ext uri="{FF2B5EF4-FFF2-40B4-BE49-F238E27FC236}">
-                <a16:creationId xmlns:a16="http://schemas.microsoft.com/office/drawing/2014/main" id="{56AB4563-14C8-A40B-C7FB-7CA27C97201F}"/>
+                <a16:creationId xmlns:a16="http://schemas.microsoft.com/office/drawing/2014/main" id="{69AFEC59-CB1E-7792-3404-78A3B93E229C}"/>
               </a:ext>
             </a:extLst>
           </p:cNvPr>
@@ -6089,7 +5810,7 @@
           <p:cNvPr id="4" name="Foliennummernplatzhalter 3">
             <a:extLst>
               <a:ext uri="{FF2B5EF4-FFF2-40B4-BE49-F238E27FC236}">
-                <a16:creationId xmlns:a16="http://schemas.microsoft.com/office/drawing/2014/main" id="{5AD6968C-F452-BA18-653A-B2E00C905166}"/>
+                <a16:creationId xmlns:a16="http://schemas.microsoft.com/office/drawing/2014/main" id="{629AC89E-FE0F-BB39-BE49-90F4B5A47D06}"/>
               </a:ext>
             </a:extLst>
           </p:cNvPr>
@@ -6116,7 +5837,7 @@
     </p:spTree>
     <p:extLst>
       <p:ext uri="{BB962C8B-B14F-4D97-AF65-F5344CB8AC3E}">
-        <p14:creationId xmlns:p14="http://schemas.microsoft.com/office/powerpoint/2010/main" val="1464015792"/>
+        <p14:creationId xmlns:p14="http://schemas.microsoft.com/office/powerpoint/2010/main" val="3603028818"/>
       </p:ext>
     </p:extLst>
   </p:cSld>
@@ -6148,7 +5869,7 @@
           <p:cNvPr id="2" name="Titel 1">
             <a:extLst>
               <a:ext uri="{FF2B5EF4-FFF2-40B4-BE49-F238E27FC236}">
-                <a16:creationId xmlns:a16="http://schemas.microsoft.com/office/drawing/2014/main" id="{9728D84D-0315-CC40-03E4-0D67C66A8EAA}"/>
+                <a16:creationId xmlns:a16="http://schemas.microsoft.com/office/drawing/2014/main" id="{BB527B4E-318F-01F3-DA5E-D552C9431BA0}"/>
               </a:ext>
             </a:extLst>
           </p:cNvPr>
@@ -6166,16 +5887,13 @@
           <a:p>
             <a:r>
               <a:rPr lang="de-DE" dirty="0"/>
-              <a:t>Sim-</a:t>
-            </a:r>
-            <a:r>
-              <a:rPr lang="de-DE" dirty="0" err="1"/>
-              <a:t>to</a:t>
-            </a:r>
-            <a:r>
-              <a:rPr lang="de-DE" dirty="0"/>
-              <a:t>-Real Gap</a:t>
-            </a:r>
+              <a:t>Generalist Robot </a:t>
+            </a:r>
+            <a:r>
+              <a:rPr lang="de-DE" dirty="0" err="1"/>
+              <a:t>Policies</a:t>
+            </a:r>
+            <a:endParaRPr lang="de-DE" dirty="0"/>
           </a:p>
         </p:txBody>
       </p:sp>
@@ -6184,7 +5902,7 @@
           <p:cNvPr id="3" name="Inhaltsplatzhalter 2">
             <a:extLst>
               <a:ext uri="{FF2B5EF4-FFF2-40B4-BE49-F238E27FC236}">
-                <a16:creationId xmlns:a16="http://schemas.microsoft.com/office/drawing/2014/main" id="{69AFEC59-CB1E-7792-3404-78A3B93E229C}"/>
+                <a16:creationId xmlns:a16="http://schemas.microsoft.com/office/drawing/2014/main" id="{0EDD8201-E814-754C-57A9-E0D3326CEC1E}"/>
               </a:ext>
             </a:extLst>
           </p:cNvPr>
@@ -6200,7 +5918,18 @@
           <a:bodyPr/>
           <a:lstStyle/>
           <a:p>
-            <a:endParaRPr lang="de-DE"/>
+            <a:pPr marL="0" indent="0">
+              <a:buNone/>
+            </a:pPr>
+            <a:r>
+              <a:rPr lang="de-DE" dirty="0"/>
+              <a:t>e.g., </a:t>
+            </a:r>
+            <a:r>
+              <a:rPr lang="de-DE" dirty="0" err="1"/>
+              <a:t>SmolVLA</a:t>
+            </a:r>
+            <a:endParaRPr lang="de-DE" dirty="0"/>
           </a:p>
         </p:txBody>
       </p:sp>
@@ -6209,7 +5938,7 @@
           <p:cNvPr id="4" name="Foliennummernplatzhalter 3">
             <a:extLst>
               <a:ext uri="{FF2B5EF4-FFF2-40B4-BE49-F238E27FC236}">
-                <a16:creationId xmlns:a16="http://schemas.microsoft.com/office/drawing/2014/main" id="{629AC89E-FE0F-BB39-BE49-90F4B5A47D06}"/>
+                <a16:creationId xmlns:a16="http://schemas.microsoft.com/office/drawing/2014/main" id="{26BC5031-BD7E-00D2-C81A-AA5111B94CBE}"/>
               </a:ext>
             </a:extLst>
           </p:cNvPr>
@@ -6236,7 +5965,7 @@
     </p:spTree>
     <p:extLst>
       <p:ext uri="{BB962C8B-B14F-4D97-AF65-F5344CB8AC3E}">
-        <p14:creationId xmlns:p14="http://schemas.microsoft.com/office/powerpoint/2010/main" val="3603028818"/>
+        <p14:creationId xmlns:p14="http://schemas.microsoft.com/office/powerpoint/2010/main" val="3427472480"/>
       </p:ext>
     </p:extLst>
   </p:cSld>
@@ -6711,7 +6440,7 @@
           <p:cNvPr id="2" name="Titel 1">
             <a:extLst>
               <a:ext uri="{FF2B5EF4-FFF2-40B4-BE49-F238E27FC236}">
-                <a16:creationId xmlns:a16="http://schemas.microsoft.com/office/drawing/2014/main" id="{BB527B4E-318F-01F3-DA5E-D552C9431BA0}"/>
+                <a16:creationId xmlns:a16="http://schemas.microsoft.com/office/drawing/2014/main" id="{BDA7BBA6-3E54-57FD-D5B4-A8C70F7360E2}"/>
               </a:ext>
             </a:extLst>
           </p:cNvPr>
@@ -6729,55 +6458,194 @@
           <a:p>
             <a:r>
               <a:rPr lang="de-DE" dirty="0"/>
-              <a:t>Generalist Robot </a:t>
-            </a:r>
-            <a:r>
-              <a:rPr lang="de-DE" dirty="0" err="1"/>
-              <a:t>Policies</a:t>
+              <a:t>Vision-Language-Action Models</a:t>
+            </a:r>
+          </a:p>
+        </p:txBody>
+      </p:sp>
+      <p:sp>
+        <p:nvSpPr>
+          <p:cNvPr id="6" name="Inhaltsplatzhalter 5">
+            <a:extLst>
+              <a:ext uri="{FF2B5EF4-FFF2-40B4-BE49-F238E27FC236}">
+                <a16:creationId xmlns:a16="http://schemas.microsoft.com/office/drawing/2014/main" id="{96889E58-4E7D-1C17-1621-FA929ACC4D3B}"/>
+              </a:ext>
+            </a:extLst>
+          </p:cNvPr>
+          <p:cNvSpPr>
+            <a:spLocks noGrp="1"/>
+          </p:cNvSpPr>
+          <p:nvPr>
+            <p:ph idx="1"/>
+          </p:nvPr>
+        </p:nvSpPr>
+        <p:spPr/>
+        <p:txBody>
+          <a:bodyPr/>
+          <a:lstStyle/>
+          <a:p>
+            <a:pPr marL="0" indent="0">
+              <a:buNone/>
+            </a:pPr>
+            <a:r>
+              <a:rPr lang="de-DE" dirty="0" err="1"/>
+              <a:t>integrating</a:t>
+            </a:r>
+            <a:r>
+              <a:rPr lang="de-DE" dirty="0"/>
+              <a:t> </a:t>
+            </a:r>
+            <a:r>
+              <a:rPr lang="de-DE" dirty="0" err="1"/>
+              <a:t>visual</a:t>
+            </a:r>
+            <a:r>
+              <a:rPr lang="de-DE" dirty="0"/>
+              <a:t> and </a:t>
+            </a:r>
+            <a:r>
+              <a:rPr lang="de-DE" dirty="0" err="1"/>
+              <a:t>textual</a:t>
+            </a:r>
+            <a:r>
+              <a:rPr lang="de-DE" dirty="0"/>
+              <a:t> </a:t>
+            </a:r>
+            <a:r>
+              <a:rPr lang="de-DE" dirty="0" err="1"/>
+              <a:t>inputs</a:t>
+            </a:r>
+            <a:r>
+              <a:rPr lang="de-DE" dirty="0"/>
+              <a:t> </a:t>
+            </a:r>
+            <a:r>
+              <a:rPr lang="de-DE" dirty="0" err="1"/>
+              <a:t>for</a:t>
+            </a:r>
+            <a:r>
+              <a:rPr lang="de-DE" dirty="0"/>
+              <a:t> </a:t>
+            </a:r>
+            <a:r>
+              <a:rPr lang="de-DE" dirty="0" err="1"/>
+              <a:t>policy</a:t>
+            </a:r>
+            <a:r>
+              <a:rPr lang="de-DE" dirty="0"/>
+              <a:t> </a:t>
+            </a:r>
+            <a:r>
+              <a:rPr lang="de-DE" dirty="0" err="1"/>
+              <a:t>learning</a:t>
             </a:r>
             <a:endParaRPr lang="de-DE" dirty="0"/>
           </a:p>
-        </p:txBody>
-      </p:sp>
-      <p:sp>
-        <p:nvSpPr>
-          <p:cNvPr id="3" name="Inhaltsplatzhalter 2">
-            <a:extLst>
-              <a:ext uri="{FF2B5EF4-FFF2-40B4-BE49-F238E27FC236}">
-                <a16:creationId xmlns:a16="http://schemas.microsoft.com/office/drawing/2014/main" id="{0EDD8201-E814-754C-57A9-E0D3326CEC1E}"/>
-              </a:ext>
-            </a:extLst>
-          </p:cNvPr>
-          <p:cNvSpPr>
-            <a:spLocks noGrp="1"/>
-          </p:cNvSpPr>
-          <p:nvPr>
-            <p:ph idx="1"/>
-          </p:nvPr>
-        </p:nvSpPr>
-        <p:spPr/>
-        <p:txBody>
-          <a:bodyPr/>
-          <a:lstStyle/>
-          <a:p>
-            <a:r>
-              <a:rPr lang="de-DE" dirty="0"/>
-              <a:t>e.g., </a:t>
-            </a:r>
-            <a:r>
-              <a:rPr lang="de-DE" dirty="0" err="1"/>
-              <a:t>SmolVLA</a:t>
-            </a:r>
+          <a:p>
+            <a:pPr marL="0" indent="0">
+              <a:buNone/>
+            </a:pPr>
             <a:endParaRPr lang="de-DE" dirty="0"/>
           </a:p>
-        </p:txBody>
-      </p:sp>
-      <p:sp>
-        <p:nvSpPr>
-          <p:cNvPr id="4" name="Foliennummernplatzhalter 3">
-            <a:extLst>
-              <a:ext uri="{FF2B5EF4-FFF2-40B4-BE49-F238E27FC236}">
-                <a16:creationId xmlns:a16="http://schemas.microsoft.com/office/drawing/2014/main" id="{26BC5031-BD7E-00D2-C81A-AA5111B94CBE}"/>
+          <a:p>
+            <a:r>
+              <a:rPr lang="de-DE" dirty="0" err="1"/>
+              <a:t>vision</a:t>
+            </a:r>
+            <a:r>
+              <a:rPr lang="de-DE" dirty="0"/>
+              <a:t> </a:t>
+            </a:r>
+            <a:r>
+              <a:rPr lang="de-DE" dirty="0" err="1"/>
+              <a:t>encoders</a:t>
+            </a:r>
+            <a:r>
+              <a:rPr lang="de-DE" dirty="0"/>
+              <a:t> (</a:t>
+            </a:r>
+            <a:r>
+              <a:rPr lang="de-DE" dirty="0" err="1"/>
+              <a:t>ResNet</a:t>
+            </a:r>
+            <a:r>
+              <a:rPr lang="de-DE" dirty="0"/>
+              <a:t>, </a:t>
+            </a:r>
+            <a:r>
+              <a:rPr lang="de-DE" dirty="0" err="1"/>
+              <a:t>ViT</a:t>
+            </a:r>
+            <a:r>
+              <a:rPr lang="de-DE" dirty="0"/>
+              <a:t>)</a:t>
+            </a:r>
+          </a:p>
+          <a:p>
+            <a:r>
+              <a:rPr lang="de-DE" dirty="0" err="1"/>
+              <a:t>language</a:t>
+            </a:r>
+            <a:r>
+              <a:rPr lang="de-DE" dirty="0"/>
+              <a:t> </a:t>
+            </a:r>
+            <a:r>
+              <a:rPr lang="de-DE" dirty="0" err="1"/>
+              <a:t>models</a:t>
+            </a:r>
+            <a:endParaRPr lang="de-DE" dirty="0"/>
+          </a:p>
+          <a:p>
+            <a:r>
+              <a:rPr lang="de-DE" dirty="0"/>
+              <a:t>multimodal </a:t>
+            </a:r>
+            <a:r>
+              <a:rPr lang="de-DE" dirty="0" err="1"/>
+              <a:t>fusion</a:t>
+            </a:r>
+            <a:endParaRPr lang="de-DE" dirty="0"/>
+          </a:p>
+          <a:p>
+            <a:r>
+              <a:rPr lang="de-DE" dirty="0" err="1"/>
+              <a:t>tokenization</a:t>
+            </a:r>
+            <a:r>
+              <a:rPr lang="de-DE" dirty="0"/>
+              <a:t> </a:t>
+            </a:r>
+            <a:r>
+              <a:rPr lang="de-DE" dirty="0" err="1"/>
+              <a:t>of</a:t>
+            </a:r>
+            <a:r>
+              <a:rPr lang="de-DE" dirty="0"/>
+              <a:t> </a:t>
+            </a:r>
+            <a:r>
+              <a:rPr lang="de-DE" dirty="0" err="1"/>
+              <a:t>sensorimotor</a:t>
+            </a:r>
+            <a:r>
+              <a:rPr lang="de-DE" dirty="0"/>
+              <a:t> </a:t>
+            </a:r>
+            <a:r>
+              <a:rPr lang="de-DE" dirty="0" err="1"/>
+              <a:t>sequences</a:t>
+            </a:r>
+            <a:endParaRPr lang="de-DE" dirty="0"/>
+          </a:p>
+        </p:txBody>
+      </p:sp>
+      <p:sp>
+        <p:nvSpPr>
+          <p:cNvPr id="5" name="Foliennummernplatzhalter 4">
+            <a:extLst>
+              <a:ext uri="{FF2B5EF4-FFF2-40B4-BE49-F238E27FC236}">
+                <a16:creationId xmlns:a16="http://schemas.microsoft.com/office/drawing/2014/main" id="{67471126-BCCE-5A0D-2C01-13F8853CD6C9}"/>
               </a:ext>
             </a:extLst>
           </p:cNvPr>
@@ -6804,7 +6672,7 @@
     </p:spTree>
     <p:extLst>
       <p:ext uri="{BB962C8B-B14F-4D97-AF65-F5344CB8AC3E}">
-        <p14:creationId xmlns:p14="http://schemas.microsoft.com/office/powerpoint/2010/main" val="3427472480"/>
+        <p14:creationId xmlns:p14="http://schemas.microsoft.com/office/powerpoint/2010/main" val="726160561"/>
       </p:ext>
     </p:extLst>
   </p:cSld>
@@ -6833,262 +6701,6 @@
       </p:grpSpPr>
       <p:sp>
         <p:nvSpPr>
-          <p:cNvPr id="2" name="Titel 1">
-            <a:extLst>
-              <a:ext uri="{FF2B5EF4-FFF2-40B4-BE49-F238E27FC236}">
-                <a16:creationId xmlns:a16="http://schemas.microsoft.com/office/drawing/2014/main" id="{BDA7BBA6-3E54-57FD-D5B4-A8C70F7360E2}"/>
-              </a:ext>
-            </a:extLst>
-          </p:cNvPr>
-          <p:cNvSpPr>
-            <a:spLocks noGrp="1"/>
-          </p:cNvSpPr>
-          <p:nvPr>
-            <p:ph type="title"/>
-          </p:nvPr>
-        </p:nvSpPr>
-        <p:spPr/>
-        <p:txBody>
-          <a:bodyPr/>
-          <a:lstStyle/>
-          <a:p>
-            <a:r>
-              <a:rPr lang="de-DE" dirty="0"/>
-              <a:t>Vision-Language-Action Models</a:t>
-            </a:r>
-          </a:p>
-        </p:txBody>
-      </p:sp>
-      <p:sp>
-        <p:nvSpPr>
-          <p:cNvPr id="6" name="Inhaltsplatzhalter 5">
-            <a:extLst>
-              <a:ext uri="{FF2B5EF4-FFF2-40B4-BE49-F238E27FC236}">
-                <a16:creationId xmlns:a16="http://schemas.microsoft.com/office/drawing/2014/main" id="{96889E58-4E7D-1C17-1621-FA929ACC4D3B}"/>
-              </a:ext>
-            </a:extLst>
-          </p:cNvPr>
-          <p:cNvSpPr>
-            <a:spLocks noGrp="1"/>
-          </p:cNvSpPr>
-          <p:nvPr>
-            <p:ph idx="1"/>
-          </p:nvPr>
-        </p:nvSpPr>
-        <p:spPr/>
-        <p:txBody>
-          <a:bodyPr/>
-          <a:lstStyle/>
-          <a:p>
-            <a:pPr marL="0" indent="0">
-              <a:buNone/>
-            </a:pPr>
-            <a:r>
-              <a:rPr lang="de-DE" dirty="0" err="1"/>
-              <a:t>Integrating</a:t>
-            </a:r>
-            <a:r>
-              <a:rPr lang="de-DE" dirty="0"/>
-              <a:t> </a:t>
-            </a:r>
-            <a:r>
-              <a:rPr lang="de-DE" dirty="0" err="1"/>
-              <a:t>visual</a:t>
-            </a:r>
-            <a:r>
-              <a:rPr lang="de-DE" dirty="0"/>
-              <a:t> and </a:t>
-            </a:r>
-            <a:r>
-              <a:rPr lang="de-DE" dirty="0" err="1"/>
-              <a:t>textual</a:t>
-            </a:r>
-            <a:r>
-              <a:rPr lang="de-DE" dirty="0"/>
-              <a:t> </a:t>
-            </a:r>
-            <a:r>
-              <a:rPr lang="de-DE" dirty="0" err="1"/>
-              <a:t>inputs</a:t>
-            </a:r>
-            <a:r>
-              <a:rPr lang="de-DE" dirty="0"/>
-              <a:t> </a:t>
-            </a:r>
-            <a:r>
-              <a:rPr lang="de-DE" dirty="0" err="1"/>
-              <a:t>for</a:t>
-            </a:r>
-            <a:r>
-              <a:rPr lang="de-DE" dirty="0"/>
-              <a:t> </a:t>
-            </a:r>
-            <a:r>
-              <a:rPr lang="de-DE" dirty="0" err="1"/>
-              <a:t>policy</a:t>
-            </a:r>
-            <a:r>
-              <a:rPr lang="de-DE" dirty="0"/>
-              <a:t> </a:t>
-            </a:r>
-            <a:r>
-              <a:rPr lang="de-DE" dirty="0" err="1"/>
-              <a:t>learning</a:t>
-            </a:r>
-            <a:endParaRPr lang="de-DE" dirty="0"/>
-          </a:p>
-          <a:p>
-            <a:pPr marL="0" indent="0">
-              <a:buNone/>
-            </a:pPr>
-            <a:endParaRPr lang="de-DE" dirty="0"/>
-          </a:p>
-          <a:p>
-            <a:r>
-              <a:rPr lang="de-DE" dirty="0"/>
-              <a:t>Vision </a:t>
-            </a:r>
-            <a:r>
-              <a:rPr lang="de-DE" dirty="0" err="1"/>
-              <a:t>encoders</a:t>
-            </a:r>
-            <a:r>
-              <a:rPr lang="de-DE" dirty="0"/>
-              <a:t> (</a:t>
-            </a:r>
-            <a:r>
-              <a:rPr lang="de-DE" dirty="0" err="1"/>
-              <a:t>ResNet</a:t>
-            </a:r>
-            <a:r>
-              <a:rPr lang="de-DE" dirty="0"/>
-              <a:t>, </a:t>
-            </a:r>
-            <a:r>
-              <a:rPr lang="de-DE" dirty="0" err="1"/>
-              <a:t>ViT</a:t>
-            </a:r>
-            <a:r>
-              <a:rPr lang="de-DE" dirty="0"/>
-              <a:t>)</a:t>
-            </a:r>
-          </a:p>
-          <a:p>
-            <a:r>
-              <a:rPr lang="de-DE" dirty="0"/>
-              <a:t>Language </a:t>
-            </a:r>
-            <a:r>
-              <a:rPr lang="de-DE" dirty="0" err="1"/>
-              <a:t>models</a:t>
-            </a:r>
-            <a:endParaRPr lang="de-DE" dirty="0"/>
-          </a:p>
-          <a:p>
-            <a:r>
-              <a:rPr lang="de-DE" dirty="0"/>
-              <a:t>Multimodal </a:t>
-            </a:r>
-            <a:r>
-              <a:rPr lang="de-DE" dirty="0" err="1"/>
-              <a:t>fusion</a:t>
-            </a:r>
-            <a:endParaRPr lang="de-DE" dirty="0"/>
-          </a:p>
-          <a:p>
-            <a:r>
-              <a:rPr lang="de-DE" dirty="0" err="1"/>
-              <a:t>Tokenization</a:t>
-            </a:r>
-            <a:r>
-              <a:rPr lang="de-DE" dirty="0"/>
-              <a:t> </a:t>
-            </a:r>
-            <a:r>
-              <a:rPr lang="de-DE" dirty="0" err="1"/>
-              <a:t>of</a:t>
-            </a:r>
-            <a:r>
-              <a:rPr lang="de-DE" dirty="0"/>
-              <a:t> </a:t>
-            </a:r>
-            <a:r>
-              <a:rPr lang="de-DE" dirty="0" err="1"/>
-              <a:t>sensorimotor</a:t>
-            </a:r>
-            <a:r>
-              <a:rPr lang="de-DE" dirty="0"/>
-              <a:t> </a:t>
-            </a:r>
-            <a:r>
-              <a:rPr lang="de-DE" dirty="0" err="1"/>
-              <a:t>sequences</a:t>
-            </a:r>
-            <a:endParaRPr lang="de-DE" dirty="0"/>
-          </a:p>
-        </p:txBody>
-      </p:sp>
-      <p:sp>
-        <p:nvSpPr>
-          <p:cNvPr id="5" name="Foliennummernplatzhalter 4">
-            <a:extLst>
-              <a:ext uri="{FF2B5EF4-FFF2-40B4-BE49-F238E27FC236}">
-                <a16:creationId xmlns:a16="http://schemas.microsoft.com/office/drawing/2014/main" id="{67471126-BCCE-5A0D-2C01-13F8853CD6C9}"/>
-              </a:ext>
-            </a:extLst>
-          </p:cNvPr>
-          <p:cNvSpPr>
-            <a:spLocks noGrp="1"/>
-          </p:cNvSpPr>
-          <p:nvPr>
-            <p:ph type="sldNum" sz="quarter" idx="12"/>
-          </p:nvPr>
-        </p:nvSpPr>
-        <p:spPr/>
-        <p:txBody>
-          <a:bodyPr/>
-          <a:lstStyle/>
-          <a:p>
-            <a:fld id="{08C366F5-AFAD-49CB-854A-9D9E238FCA13}" type="slidenum">
-              <a:rPr lang="en-GB" smtClean="0"/>
-              <a:t>21</a:t>
-            </a:fld>
-            <a:endParaRPr lang="en-GB"/>
-          </a:p>
-        </p:txBody>
-      </p:sp>
-    </p:spTree>
-    <p:extLst>
-      <p:ext uri="{BB962C8B-B14F-4D97-AF65-F5344CB8AC3E}">
-        <p14:creationId xmlns:p14="http://schemas.microsoft.com/office/powerpoint/2010/main" val="726160561"/>
-      </p:ext>
-    </p:extLst>
-  </p:cSld>
-  <p:clrMapOvr>
-    <a:masterClrMapping/>
-  </p:clrMapOvr>
-</p:sld>
-</file>
-
-<file path=ppt/slides/slide22.xml><?xml version="1.0" encoding="utf-8"?>
-<p:sld xmlns:a="http://schemas.openxmlformats.org/drawingml/2006/main" xmlns:r="http://schemas.openxmlformats.org/officeDocument/2006/relationships" xmlns:p="http://schemas.openxmlformats.org/presentationml/2006/main">
-  <p:cSld>
-    <p:spTree>
-      <p:nvGrpSpPr>
-        <p:cNvPr id="1" name=""/>
-        <p:cNvGrpSpPr/>
-        <p:nvPr/>
-      </p:nvGrpSpPr>
-      <p:grpSpPr>
-        <a:xfrm>
-          <a:off x="0" y="0"/>
-          <a:ext cx="0" cy="0"/>
-          <a:chOff x="0" y="0"/>
-          <a:chExt cx="0" cy="0"/>
-        </a:xfrm>
-      </p:grpSpPr>
-      <p:sp>
-        <p:nvSpPr>
           <p:cNvPr id="7" name="Title 6">
             <a:extLst>
               <a:ext uri="{FF2B5EF4-FFF2-40B4-BE49-F238E27FC236}">
@@ -7194,7 +6806,7 @@
           <a:p>
             <a:fld id="{C48B675A-2084-C34A-84F6-1B6A8516A5F3}" type="slidenum">
               <a:rPr lang="en-DE" smtClean="0"/>
-              <a:t>22</a:t>
+              <a:t>21</a:t>
             </a:fld>
             <a:endParaRPr lang="en-DE"/>
           </a:p>
@@ -7420,50 +7032,6 @@
           </a:fontRef>
         </p:style>
       </p:cxnSp>
-      <p:sp>
-        <p:nvSpPr>
-          <p:cNvPr id="17" name="TextBox 16">
-            <a:extLst>
-              <a:ext uri="{FF2B5EF4-FFF2-40B4-BE49-F238E27FC236}">
-                <a16:creationId xmlns:a16="http://schemas.microsoft.com/office/drawing/2014/main" id="{111C129D-61C6-8D0A-F6F7-526D2F6A40B5}"/>
-              </a:ext>
-            </a:extLst>
-          </p:cNvPr>
-          <p:cNvSpPr txBox="1"/>
-          <p:nvPr/>
-        </p:nvSpPr>
-        <p:spPr>
-          <a:xfrm>
-            <a:off x="6951519" y="0"/>
-            <a:ext cx="5240482" cy="769441"/>
-          </a:xfrm>
-          <a:prstGeom prst="rect">
-            <a:avLst/>
-          </a:prstGeom>
-          <a:noFill/>
-          <a:ln>
-            <a:noFill/>
-          </a:ln>
-        </p:spPr>
-        <p:txBody>
-          <a:bodyPr wrap="square">
-            <a:spAutoFit/>
-          </a:bodyPr>
-          <a:lstStyle/>
-          <a:p>
-            <a:r>
-              <a:rPr lang="en-GB" sz="2200" dirty="0"/>
-              <a:t>can also condition imitation learning</a:t>
-            </a:r>
-          </a:p>
-          <a:p>
-            <a:r>
-              <a:rPr lang="en-GB" sz="2200" dirty="0"/>
-              <a:t>diffusion objective for multimodal outputs </a:t>
-            </a:r>
-          </a:p>
-        </p:txBody>
-      </p:sp>
     </p:spTree>
     <p:extLst>
       <p:ext uri="{BB962C8B-B14F-4D97-AF65-F5344CB8AC3E}">
@@ -7477,7 +7045,7 @@
 </p:sld>
 </file>
 
-<file path=ppt/slides/slide23.xml><?xml version="1.0" encoding="utf-8"?>
+<file path=ppt/slides/slide22.xml><?xml version="1.0" encoding="utf-8"?>
 <p:sld xmlns:a="http://schemas.openxmlformats.org/drawingml/2006/main" xmlns:r="http://schemas.openxmlformats.org/officeDocument/2006/relationships" xmlns:p="http://schemas.openxmlformats.org/presentationml/2006/main">
   <p:cSld>
     <p:spTree>
@@ -7610,7 +7178,7 @@
           <a:p>
             <a:fld id="{08C366F5-AFAD-49CB-854A-9D9E238FCA13}" type="slidenum">
               <a:rPr lang="en-GB" smtClean="0"/>
-              <a:t>23</a:t>
+              <a:t>22</a:t>
             </a:fld>
             <a:endParaRPr lang="en-GB"/>
           </a:p>
@@ -7716,7 +7284,23 @@
             </a:pPr>
             <a:r>
               <a:rPr lang="de-DE" dirty="0"/>
-              <a:t>RL </a:t>
+              <a:t>high-level </a:t>
+            </a:r>
+            <a:r>
+              <a:rPr lang="de-DE" dirty="0" err="1"/>
+              <a:t>overview</a:t>
+            </a:r>
+            <a:r>
+              <a:rPr lang="de-DE" dirty="0"/>
+              <a:t> </a:t>
+            </a:r>
+            <a:r>
+              <a:rPr lang="de-DE" dirty="0" err="1"/>
+              <a:t>of</a:t>
+            </a:r>
+            <a:r>
+              <a:rPr lang="de-DE" dirty="0"/>
+              <a:t> RL </a:t>
             </a:r>
             <a:r>
               <a:rPr lang="de-DE" dirty="0" err="1"/>
@@ -8073,9 +7657,16 @@
           <a:bodyPr/>
           <a:lstStyle/>
           <a:p>
-            <a:r>
-              <a:rPr lang="de-DE" dirty="0"/>
-              <a:t>Learning </a:t>
+            <a:pPr marL="0" indent="0">
+              <a:buNone/>
+            </a:pPr>
+            <a:r>
+              <a:rPr lang="de-DE" dirty="0" err="1"/>
+              <a:t>learning</a:t>
+            </a:r>
+            <a:r>
+              <a:rPr lang="de-DE" dirty="0"/>
+              <a:t> </a:t>
             </a:r>
             <a:r>
               <a:rPr lang="de-DE" dirty="0" err="1"/>
@@ -8233,9 +7824,16 @@
           <a:bodyPr/>
           <a:lstStyle/>
           <a:p>
-            <a:r>
-              <a:rPr lang="de-DE" dirty="0"/>
-              <a:t>Learning </a:t>
+            <a:pPr marL="0" indent="0">
+              <a:buNone/>
+            </a:pPr>
+            <a:r>
+              <a:rPr lang="de-DE" dirty="0" err="1"/>
+              <a:t>learning</a:t>
+            </a:r>
+            <a:r>
+              <a:rPr lang="de-DE" dirty="0"/>
+              <a:t> </a:t>
             </a:r>
             <a:r>
               <a:rPr lang="de-DE" dirty="0" err="1"/>
@@ -8612,9 +8210,16 @@
           <a:bodyPr/>
           <a:lstStyle/>
           <a:p>
-            <a:r>
-              <a:rPr lang="de-DE" dirty="0"/>
-              <a:t>Learning </a:t>
+            <a:pPr marL="0" indent="0">
+              <a:buNone/>
+            </a:pPr>
+            <a:r>
+              <a:rPr lang="de-DE" dirty="0" err="1"/>
+              <a:t>learning</a:t>
+            </a:r>
+            <a:r>
+              <a:rPr lang="de-DE" dirty="0"/>
+              <a:t> </a:t>
             </a:r>
             <a:r>
               <a:rPr lang="de-DE" dirty="0" err="1"/>

--- a/slides/5_advanced.pptx
+++ b/slides/5_advanced.pptx
@@ -5,7 +5,7 @@
     <p:sldMasterId id="2147483648" r:id="rId1"/>
   </p:sldMasterIdLst>
   <p:notesMasterIdLst>
-    <p:notesMasterId r:id="rId24"/>
+    <p:notesMasterId r:id="rId23"/>
   </p:notesMasterIdLst>
   <p:sldIdLst>
     <p:sldId id="256" r:id="rId2"/>
@@ -29,7 +29,6 @@
     <p:sldId id="271" r:id="rId20"/>
     <p:sldId id="859" r:id="rId21"/>
     <p:sldId id="567" r:id="rId22"/>
-    <p:sldId id="865" r:id="rId23"/>
   </p:sldIdLst>
   <p:sldSz cx="12192000" cy="6858000"/>
   <p:notesSz cx="6858000" cy="9144000"/>
@@ -500,7 +499,7 @@
           <a:p>
             <a:fld id="{506E0FD1-891F-4B1E-916D-E9B585160BB8}" type="datetimeFigureOut">
               <a:rPr lang="en-GB" smtClean="0"/>
-              <a:t>26/04/2026</a:t>
+              <a:t>19/05/2026</a:t>
             </a:fld>
             <a:endParaRPr lang="en-GB"/>
           </a:p>
@@ -917,7 +916,7 @@
           <a:p>
             <a:fld id="{D68C3F22-27B2-44E3-9C5F-D08126455F6F}" type="datetime1">
               <a:rPr lang="en-GB" smtClean="0"/>
-              <a:t>26/04/2026</a:t>
+              <a:t>19/05/2026</a:t>
             </a:fld>
             <a:endParaRPr lang="en-GB"/>
           </a:p>
@@ -1117,7 +1116,7 @@
           <a:p>
             <a:fld id="{1CD03846-7BF6-4FB6-A921-FF3379ADBD4C}" type="datetime1">
               <a:rPr lang="en-GB" smtClean="0"/>
-              <a:t>26/04/2026</a:t>
+              <a:t>19/05/2026</a:t>
             </a:fld>
             <a:endParaRPr lang="en-GB"/>
           </a:p>
@@ -1327,7 +1326,7 @@
           <a:p>
             <a:fld id="{99E1B91A-3FD0-4144-9C84-63E9688ED2FE}" type="datetime1">
               <a:rPr lang="en-GB" smtClean="0"/>
-              <a:t>26/04/2026</a:t>
+              <a:t>19/05/2026</a:t>
             </a:fld>
             <a:endParaRPr lang="en-GB"/>
           </a:p>
@@ -1527,7 +1526,7 @@
           <a:p>
             <a:fld id="{5295ED7B-FEAD-4734-819F-93EF4B0EA908}" type="datetime1">
               <a:rPr lang="en-GB" smtClean="0"/>
-              <a:t>26/04/2026</a:t>
+              <a:t>19/05/2026</a:t>
             </a:fld>
             <a:endParaRPr lang="en-GB"/>
           </a:p>
@@ -1803,7 +1802,7 @@
           <a:p>
             <a:fld id="{D2D5D4B4-C926-4B45-8815-1ED8911179A2}" type="datetime1">
               <a:rPr lang="en-GB" smtClean="0"/>
-              <a:t>26/04/2026</a:t>
+              <a:t>19/05/2026</a:t>
             </a:fld>
             <a:endParaRPr lang="en-GB"/>
           </a:p>
@@ -2071,7 +2070,7 @@
           <a:p>
             <a:fld id="{B4C5210A-0E37-4935-93AF-69F21A5F712F}" type="datetime1">
               <a:rPr lang="en-GB" smtClean="0"/>
-              <a:t>26/04/2026</a:t>
+              <a:t>19/05/2026</a:t>
             </a:fld>
             <a:endParaRPr lang="en-GB"/>
           </a:p>
@@ -2486,7 +2485,7 @@
           <a:p>
             <a:fld id="{3D3A6B2F-436C-4691-80E8-9C890E000E9D}" type="datetime1">
               <a:rPr lang="en-GB" smtClean="0"/>
-              <a:t>26/04/2026</a:t>
+              <a:t>19/05/2026</a:t>
             </a:fld>
             <a:endParaRPr lang="en-GB"/>
           </a:p>
@@ -2628,7 +2627,7 @@
           <a:p>
             <a:fld id="{84385F4C-D74B-496F-8D21-97E3549C783B}" type="datetime1">
               <a:rPr lang="en-GB" smtClean="0"/>
-              <a:t>26/04/2026</a:t>
+              <a:t>19/05/2026</a:t>
             </a:fld>
             <a:endParaRPr lang="en-GB"/>
           </a:p>
@@ -2741,7 +2740,7 @@
           <a:p>
             <a:fld id="{0CBDCB32-C241-4703-A832-4EB47BD54E83}" type="datetime1">
               <a:rPr lang="en-GB" smtClean="0"/>
-              <a:t>26/04/2026</a:t>
+              <a:t>19/05/2026</a:t>
             </a:fld>
             <a:endParaRPr lang="en-GB"/>
           </a:p>
@@ -3054,7 +3053,7 @@
           <a:p>
             <a:fld id="{85C150FF-BE95-4D25-A16A-E368A81CBF24}" type="datetime1">
               <a:rPr lang="en-GB" smtClean="0"/>
-              <a:t>26/04/2026</a:t>
+              <a:t>19/05/2026</a:t>
             </a:fld>
             <a:endParaRPr lang="en-GB"/>
           </a:p>
@@ -3343,7 +3342,7 @@
           <a:p>
             <a:fld id="{F3C5DB4B-B349-43C9-A424-BADA723AD9F1}" type="datetime1">
               <a:rPr lang="en-GB" smtClean="0"/>
-              <a:t>26/04/2026</a:t>
+              <a:t>19/05/2026</a:t>
             </a:fld>
             <a:endParaRPr lang="en-GB"/>
           </a:p>
@@ -3586,7 +3585,7 @@
           <a:p>
             <a:fld id="{12632426-0A0C-405F-A3D0-2D11AA44702A}" type="datetime1">
               <a:rPr lang="en-GB" smtClean="0"/>
-              <a:t>26/04/2026</a:t>
+              <a:t>19/05/2026</a:t>
             </a:fld>
             <a:endParaRPr lang="en-GB"/>
           </a:p>
@@ -4541,78 +4540,682 @@
           </a:p>
         </p:txBody>
       </p:sp>
-      <p:sp>
-        <p:nvSpPr>
-          <p:cNvPr id="3" name="Inhaltsplatzhalter 2">
-            <a:extLst>
-              <a:ext uri="{FF2B5EF4-FFF2-40B4-BE49-F238E27FC236}">
-                <a16:creationId xmlns:a16="http://schemas.microsoft.com/office/drawing/2014/main" id="{5E36192F-8BCF-0FAF-226A-963A74B4ED5D}"/>
-              </a:ext>
-            </a:extLst>
-          </p:cNvPr>
-          <p:cNvSpPr>
-            <a:spLocks noGrp="1"/>
-          </p:cNvSpPr>
-          <p:nvPr>
-            <p:ph idx="1"/>
-          </p:nvPr>
-        </p:nvSpPr>
-        <p:spPr/>
-        <p:txBody>
-          <a:bodyPr/>
-          <a:lstStyle/>
-          <a:p>
-            <a:pPr marL="0" indent="0">
-              <a:buNone/>
-            </a:pPr>
-            <a:r>
-              <a:rPr lang="de-DE" dirty="0" err="1"/>
-              <a:t>using</a:t>
-            </a:r>
-            <a:r>
-              <a:rPr lang="de-DE" dirty="0"/>
-              <a:t> </a:t>
-            </a:r>
-            <a:r>
-              <a:rPr lang="de-DE" dirty="0" err="1"/>
-              <a:t>sequence</a:t>
-            </a:r>
-            <a:r>
-              <a:rPr lang="de-DE" dirty="0"/>
-              <a:t> </a:t>
-            </a:r>
-            <a:r>
-              <a:rPr lang="de-DE" dirty="0" err="1"/>
-              <a:t>models</a:t>
-            </a:r>
-            <a:r>
-              <a:rPr lang="de-DE" dirty="0"/>
-              <a:t> </a:t>
-            </a:r>
-            <a:r>
-              <a:rPr lang="de-DE" dirty="0" err="1"/>
-              <a:t>for</a:t>
-            </a:r>
-            <a:r>
-              <a:rPr lang="de-DE" dirty="0"/>
-              <a:t> </a:t>
-            </a:r>
-            <a:r>
-              <a:rPr lang="de-DE" dirty="0" err="1"/>
-              <a:t>policy</a:t>
-            </a:r>
-            <a:r>
-              <a:rPr lang="de-DE" dirty="0"/>
-              <a:t> </a:t>
-            </a:r>
-            <a:r>
-              <a:rPr lang="de-DE" dirty="0" err="1"/>
-              <a:t>prediction</a:t>
-            </a:r>
-            <a:endParaRPr lang="de-DE" dirty="0"/>
-          </a:p>
-        </p:txBody>
-      </p:sp>
+      <mc:AlternateContent xmlns:mc="http://schemas.openxmlformats.org/markup-compatibility/2006" xmlns:a14="http://schemas.microsoft.com/office/drawing/2010/main">
+        <mc:Choice Requires="a14">
+          <p:sp>
+            <p:nvSpPr>
+              <p:cNvPr id="3" name="Inhaltsplatzhalter 2">
+                <a:extLst>
+                  <a:ext uri="{FF2B5EF4-FFF2-40B4-BE49-F238E27FC236}">
+                    <a16:creationId xmlns:a16="http://schemas.microsoft.com/office/drawing/2014/main" id="{5E36192F-8BCF-0FAF-226A-963A74B4ED5D}"/>
+                  </a:ext>
+                </a:extLst>
+              </p:cNvPr>
+              <p:cNvSpPr>
+                <a:spLocks noGrp="1"/>
+              </p:cNvSpPr>
+              <p:nvPr>
+                <p:ph idx="1"/>
+              </p:nvPr>
+            </p:nvSpPr>
+            <p:spPr/>
+            <p:txBody>
+              <a:bodyPr>
+                <a:normAutofit fontScale="92500" lnSpcReduction="10000"/>
+              </a:bodyPr>
+              <a:lstStyle/>
+              <a:p>
+                <a:pPr marL="0" indent="0">
+                  <a:buNone/>
+                </a:pPr>
+                <a:r>
+                  <a:rPr lang="de-DE" dirty="0" err="1"/>
+                  <a:t>reframe</a:t>
+                </a:r>
+                <a:r>
+                  <a:rPr lang="de-DE" dirty="0"/>
+                  <a:t> RL </a:t>
+                </a:r>
+                <a:r>
+                  <a:rPr lang="de-DE" dirty="0" err="1"/>
+                  <a:t>as</a:t>
+                </a:r>
+                <a:r>
+                  <a:rPr lang="de-DE" dirty="0"/>
+                  <a:t> </a:t>
+                </a:r>
+                <a:r>
+                  <a:rPr lang="de-DE" dirty="0" err="1"/>
+                  <a:t>sequence</a:t>
+                </a:r>
+                <a:r>
+                  <a:rPr lang="de-DE" dirty="0"/>
+                  <a:t> </a:t>
+                </a:r>
+                <a:r>
+                  <a:rPr lang="de-DE" dirty="0" err="1"/>
+                  <a:t>generation</a:t>
+                </a:r>
+                <a:r>
+                  <a:rPr lang="de-DE" dirty="0"/>
+                  <a:t>:</a:t>
+                </a:r>
+              </a:p>
+              <a:p>
+                <a:r>
+                  <a:rPr lang="de-DE" dirty="0"/>
+                  <a:t>a </a:t>
+                </a:r>
+                <a:r>
+                  <a:rPr lang="de-DE" dirty="0" err="1"/>
+                  <a:t>trajectory</a:t>
+                </a:r>
+                <a:r>
+                  <a:rPr lang="de-DE" dirty="0"/>
+                  <a:t> </a:t>
+                </a:r>
+                <a:r>
+                  <a:rPr lang="de-DE" dirty="0" err="1"/>
+                  <a:t>is</a:t>
+                </a:r>
+                <a:r>
+                  <a:rPr lang="de-DE" dirty="0"/>
+                  <a:t> </a:t>
+                </a:r>
+                <a:r>
+                  <a:rPr lang="de-DE" dirty="0" err="1"/>
+                  <a:t>treated</a:t>
+                </a:r>
+                <a:r>
+                  <a:rPr lang="de-DE" dirty="0"/>
+                  <a:t> </a:t>
+                </a:r>
+                <a:r>
+                  <a:rPr lang="de-DE" dirty="0" err="1"/>
+                  <a:t>as</a:t>
+                </a:r>
+                <a:r>
+                  <a:rPr lang="de-DE" dirty="0"/>
+                  <a:t> a </a:t>
+                </a:r>
+                <a:r>
+                  <a:rPr lang="de-DE" dirty="0" err="1"/>
+                  <a:t>sequence</a:t>
+                </a:r>
+                <a:r>
+                  <a:rPr lang="de-DE" dirty="0"/>
+                  <a:t>: </a:t>
+                </a:r>
+                <a14:m>
+                  <m:oMath xmlns:m="http://schemas.openxmlformats.org/officeDocument/2006/math">
+                    <m:d>
+                      <m:dPr>
+                        <m:ctrlPr>
+                          <a:rPr lang="de-DE" i="1" smtClean="0">
+                            <a:latin typeface="Cambria Math" panose="02040503050406030204" pitchFamily="18" charset="0"/>
+                          </a:rPr>
+                        </m:ctrlPr>
+                      </m:dPr>
+                      <m:e>
+                        <m:sSub>
+                          <m:sSubPr>
+                            <m:ctrlPr>
+                              <a:rPr lang="de-DE" i="1" smtClean="0">
+                                <a:latin typeface="Cambria Math" panose="02040503050406030204" pitchFamily="18" charset="0"/>
+                              </a:rPr>
+                            </m:ctrlPr>
+                          </m:sSubPr>
+                          <m:e>
+                            <m:r>
+                              <a:rPr lang="de-DE" b="0" i="1" smtClean="0">
+                                <a:latin typeface="Cambria Math" panose="02040503050406030204" pitchFamily="18" charset="0"/>
+                              </a:rPr>
+                              <m:t>𝑠</m:t>
+                            </m:r>
+                          </m:e>
+                          <m:sub>
+                            <m:r>
+                              <a:rPr lang="de-DE" b="0" i="1" smtClean="0">
+                                <a:latin typeface="Cambria Math" panose="02040503050406030204" pitchFamily="18" charset="0"/>
+                              </a:rPr>
+                              <m:t>1</m:t>
+                            </m:r>
+                          </m:sub>
+                        </m:sSub>
+                        <m:r>
+                          <a:rPr lang="de-DE" b="0" i="1" smtClean="0">
+                            <a:latin typeface="Cambria Math" panose="02040503050406030204" pitchFamily="18" charset="0"/>
+                          </a:rPr>
+                          <m:t>,</m:t>
+                        </m:r>
+                        <m:sSub>
+                          <m:sSubPr>
+                            <m:ctrlPr>
+                              <a:rPr lang="de-DE" i="1" smtClean="0">
+                                <a:latin typeface="Cambria Math" panose="02040503050406030204" pitchFamily="18" charset="0"/>
+                              </a:rPr>
+                            </m:ctrlPr>
+                          </m:sSubPr>
+                          <m:e>
+                            <m:r>
+                              <a:rPr lang="de-DE" b="0" i="1" smtClean="0">
+                                <a:latin typeface="Cambria Math" panose="02040503050406030204" pitchFamily="18" charset="0"/>
+                              </a:rPr>
+                              <m:t>𝑎</m:t>
+                            </m:r>
+                          </m:e>
+                          <m:sub>
+                            <m:r>
+                              <a:rPr lang="de-DE" b="0" i="1" smtClean="0">
+                                <a:latin typeface="Cambria Math" panose="02040503050406030204" pitchFamily="18" charset="0"/>
+                              </a:rPr>
+                              <m:t>1</m:t>
+                            </m:r>
+                          </m:sub>
+                        </m:sSub>
+                        <m:r>
+                          <a:rPr lang="de-DE" b="0" i="1" smtClean="0">
+                            <a:latin typeface="Cambria Math" panose="02040503050406030204" pitchFamily="18" charset="0"/>
+                          </a:rPr>
+                          <m:t>,</m:t>
+                        </m:r>
+                        <m:sSub>
+                          <m:sSubPr>
+                            <m:ctrlPr>
+                              <a:rPr lang="de-DE" i="1" smtClean="0">
+                                <a:latin typeface="Cambria Math" panose="02040503050406030204" pitchFamily="18" charset="0"/>
+                              </a:rPr>
+                            </m:ctrlPr>
+                          </m:sSubPr>
+                          <m:e>
+                            <m:r>
+                              <a:rPr lang="de-DE" b="0" i="1" smtClean="0">
+                                <a:latin typeface="Cambria Math" panose="02040503050406030204" pitchFamily="18" charset="0"/>
+                              </a:rPr>
+                              <m:t>𝑟</m:t>
+                            </m:r>
+                          </m:e>
+                          <m:sub>
+                            <m:r>
+                              <a:rPr lang="de-DE" b="0" i="1" smtClean="0">
+                                <a:latin typeface="Cambria Math" panose="02040503050406030204" pitchFamily="18" charset="0"/>
+                              </a:rPr>
+                              <m:t>1</m:t>
+                            </m:r>
+                          </m:sub>
+                        </m:sSub>
+                        <m:r>
+                          <a:rPr lang="de-DE" b="0" i="1" smtClean="0">
+                            <a:latin typeface="Cambria Math" panose="02040503050406030204" pitchFamily="18" charset="0"/>
+                          </a:rPr>
+                          <m:t>,</m:t>
+                        </m:r>
+                        <m:sSub>
+                          <m:sSubPr>
+                            <m:ctrlPr>
+                              <a:rPr lang="de-DE" i="1">
+                                <a:latin typeface="Cambria Math" panose="02040503050406030204" pitchFamily="18" charset="0"/>
+                              </a:rPr>
+                            </m:ctrlPr>
+                          </m:sSubPr>
+                          <m:e>
+                            <m:r>
+                              <a:rPr lang="de-DE" b="0" i="1" smtClean="0">
+                                <a:latin typeface="Cambria Math" panose="02040503050406030204" pitchFamily="18" charset="0"/>
+                              </a:rPr>
+                              <m:t>𝑠</m:t>
+                            </m:r>
+                          </m:e>
+                          <m:sub>
+                            <m:r>
+                              <a:rPr lang="de-DE" b="0" i="1" smtClean="0">
+                                <a:latin typeface="Cambria Math" panose="02040503050406030204" pitchFamily="18" charset="0"/>
+                              </a:rPr>
+                              <m:t>2</m:t>
+                            </m:r>
+                          </m:sub>
+                        </m:sSub>
+                        <m:r>
+                          <a:rPr lang="de-DE" b="0" i="1" smtClean="0">
+                            <a:latin typeface="Cambria Math" panose="02040503050406030204" pitchFamily="18" charset="0"/>
+                          </a:rPr>
+                          <m:t>,</m:t>
+                        </m:r>
+                        <m:sSub>
+                          <m:sSubPr>
+                            <m:ctrlPr>
+                              <a:rPr lang="de-DE" i="1">
+                                <a:latin typeface="Cambria Math" panose="02040503050406030204" pitchFamily="18" charset="0"/>
+                              </a:rPr>
+                            </m:ctrlPr>
+                          </m:sSubPr>
+                          <m:e>
+                            <m:r>
+                              <a:rPr lang="de-DE" b="0" i="1" smtClean="0">
+                                <a:latin typeface="Cambria Math" panose="02040503050406030204" pitchFamily="18" charset="0"/>
+                              </a:rPr>
+                              <m:t>𝑎</m:t>
+                            </m:r>
+                          </m:e>
+                          <m:sub>
+                            <m:r>
+                              <a:rPr lang="de-DE" b="0" i="1" smtClean="0">
+                                <a:latin typeface="Cambria Math" panose="02040503050406030204" pitchFamily="18" charset="0"/>
+                              </a:rPr>
+                              <m:t>2</m:t>
+                            </m:r>
+                          </m:sub>
+                        </m:sSub>
+                        <m:r>
+                          <a:rPr lang="de-DE" b="0" i="1" smtClean="0">
+                            <a:latin typeface="Cambria Math" panose="02040503050406030204" pitchFamily="18" charset="0"/>
+                          </a:rPr>
+                          <m:t>,</m:t>
+                        </m:r>
+                        <m:sSub>
+                          <m:sSubPr>
+                            <m:ctrlPr>
+                              <a:rPr lang="de-DE" i="1">
+                                <a:latin typeface="Cambria Math" panose="02040503050406030204" pitchFamily="18" charset="0"/>
+                              </a:rPr>
+                            </m:ctrlPr>
+                          </m:sSubPr>
+                          <m:e>
+                            <m:r>
+                              <a:rPr lang="de-DE" b="0" i="1" smtClean="0">
+                                <a:latin typeface="Cambria Math" panose="02040503050406030204" pitchFamily="18" charset="0"/>
+                              </a:rPr>
+                              <m:t>𝑟</m:t>
+                            </m:r>
+                          </m:e>
+                          <m:sub>
+                            <m:r>
+                              <a:rPr lang="de-DE" b="0" i="1" smtClean="0">
+                                <a:latin typeface="Cambria Math" panose="02040503050406030204" pitchFamily="18" charset="0"/>
+                              </a:rPr>
+                              <m:t>2</m:t>
+                            </m:r>
+                          </m:sub>
+                        </m:sSub>
+                        <m:r>
+                          <a:rPr lang="de-DE" b="0" i="1" smtClean="0">
+                            <a:latin typeface="Cambria Math" panose="02040503050406030204" pitchFamily="18" charset="0"/>
+                          </a:rPr>
+                          <m:t>,…</m:t>
+                        </m:r>
+                      </m:e>
+                    </m:d>
+                  </m:oMath>
+                </a14:m>
+                <a:endParaRPr lang="de-DE" dirty="0"/>
+              </a:p>
+              <a:p>
+                <a:r>
+                  <a:rPr lang="de-DE" dirty="0" err="1"/>
+                  <a:t>predict</a:t>
+                </a:r>
+                <a:r>
+                  <a:rPr lang="de-DE" dirty="0"/>
+                  <a:t> </a:t>
+                </a:r>
+                <a:r>
+                  <a:rPr lang="de-DE" dirty="0" err="1"/>
+                  <a:t>next</a:t>
+                </a:r>
+                <a:r>
+                  <a:rPr lang="de-DE" dirty="0"/>
+                  <a:t> </a:t>
+                </a:r>
+                <a:r>
+                  <a:rPr lang="de-DE" dirty="0" err="1"/>
+                  <a:t>action</a:t>
+                </a:r>
+                <a:r>
+                  <a:rPr lang="de-DE" dirty="0"/>
+                  <a:t> </a:t>
+                </a:r>
+                <a:r>
+                  <a:rPr lang="de-DE" dirty="0" err="1"/>
+                  <a:t>given</a:t>
+                </a:r>
+                <a:r>
+                  <a:rPr lang="de-DE" dirty="0"/>
+                  <a:t> </a:t>
+                </a:r>
+                <a:r>
+                  <a:rPr lang="de-DE" dirty="0" err="1"/>
+                  <a:t>past</a:t>
+                </a:r>
+                <a:r>
+                  <a:rPr lang="de-DE" dirty="0"/>
+                  <a:t> </a:t>
+                </a:r>
+                <a:r>
+                  <a:rPr lang="de-DE" dirty="0" err="1"/>
+                  <a:t>states</a:t>
+                </a:r>
+                <a:r>
+                  <a:rPr lang="de-DE" dirty="0"/>
+                  <a:t>, </a:t>
+                </a:r>
+                <a:r>
+                  <a:rPr lang="de-DE" dirty="0" err="1"/>
+                  <a:t>actions</a:t>
+                </a:r>
+                <a:r>
+                  <a:rPr lang="de-DE" dirty="0"/>
+                  <a:t>, and </a:t>
+                </a:r>
+                <a:r>
+                  <a:rPr lang="de-DE" dirty="0" err="1"/>
+                  <a:t>returns</a:t>
+                </a:r>
+                <a:endParaRPr lang="de-DE" dirty="0"/>
+              </a:p>
+              <a:p>
+                <a:pPr marL="0" indent="0">
+                  <a:buNone/>
+                </a:pPr>
+                <a:r>
+                  <a:rPr lang="de-DE" dirty="0">
+                    <a:sym typeface="Wingdings" pitchFamily="2" charset="2"/>
+                  </a:rPr>
+                  <a:t> </a:t>
+                </a:r>
+                <a:r>
+                  <a:rPr lang="de-DE" dirty="0" err="1"/>
+                  <a:t>instead</a:t>
+                </a:r>
+                <a:r>
+                  <a:rPr lang="de-DE" dirty="0"/>
+                  <a:t> </a:t>
+                </a:r>
+                <a:r>
+                  <a:rPr lang="de-DE" dirty="0" err="1"/>
+                  <a:t>of</a:t>
+                </a:r>
+                <a:r>
+                  <a:rPr lang="de-DE" dirty="0"/>
+                  <a:t> </a:t>
+                </a:r>
+                <a:r>
+                  <a:rPr lang="de-DE" dirty="0" err="1"/>
+                  <a:t>learning</a:t>
+                </a:r>
+                <a:r>
+                  <a:rPr lang="de-DE" dirty="0"/>
+                  <a:t> “</a:t>
+                </a:r>
+                <a:r>
+                  <a:rPr lang="de-DE" dirty="0" err="1"/>
+                  <a:t>policy</a:t>
+                </a:r>
+                <a:r>
+                  <a:rPr lang="de-DE" dirty="0"/>
+                  <a:t> + </a:t>
+                </a:r>
+                <a:r>
+                  <a:rPr lang="de-DE" dirty="0" err="1"/>
+                  <a:t>value</a:t>
+                </a:r>
+                <a:r>
+                  <a:rPr lang="de-DE" dirty="0"/>
+                  <a:t> </a:t>
+                </a:r>
+                <a:r>
+                  <a:rPr lang="de-DE" dirty="0" err="1"/>
+                  <a:t>function</a:t>
+                </a:r>
+                <a:r>
+                  <a:rPr lang="de-DE" dirty="0"/>
+                  <a:t>”, </a:t>
+                </a:r>
+                <a:r>
+                  <a:rPr lang="de-DE" dirty="0" err="1"/>
+                  <a:t>learn</a:t>
+                </a:r>
+                <a:r>
+                  <a:rPr lang="de-DE" dirty="0"/>
+                  <a:t> a </a:t>
+                </a:r>
+                <a:r>
+                  <a:rPr lang="de-DE" dirty="0" err="1"/>
+                  <a:t>sequence</a:t>
+                </a:r>
+                <a:r>
+                  <a:rPr lang="de-DE" dirty="0"/>
+                  <a:t> </a:t>
+                </a:r>
+                <a:r>
+                  <a:rPr lang="de-DE" dirty="0" err="1"/>
+                  <a:t>model</a:t>
+                </a:r>
+                <a:r>
+                  <a:rPr lang="de-DE" dirty="0"/>
+                  <a:t> </a:t>
+                </a:r>
+                <a:r>
+                  <a:rPr lang="de-DE" dirty="0" err="1"/>
+                  <a:t>over</a:t>
+                </a:r>
+                <a:r>
+                  <a:rPr lang="de-DE" dirty="0"/>
+                  <a:t> </a:t>
+                </a:r>
+                <a:r>
+                  <a:rPr lang="de-DE" dirty="0" err="1"/>
+                  <a:t>behavior</a:t>
+                </a:r>
+                <a:endParaRPr lang="de-DE" dirty="0"/>
+              </a:p>
+              <a:p>
+                <a:pPr marL="0" indent="0">
+                  <a:buNone/>
+                </a:pPr>
+                <a:endParaRPr lang="de-DE" dirty="0"/>
+              </a:p>
+              <a:p>
+                <a:r>
+                  <a:rPr lang="de-DE" dirty="0" err="1"/>
+                  <a:t>uses</a:t>
+                </a:r>
+                <a:r>
+                  <a:rPr lang="de-DE" dirty="0"/>
+                  <a:t> </a:t>
+                </a:r>
+                <a:r>
+                  <a:rPr lang="de-DE" dirty="0" err="1"/>
+                  <a:t>architectures</a:t>
+                </a:r>
+                <a:r>
+                  <a:rPr lang="de-DE" dirty="0"/>
+                  <a:t> </a:t>
+                </a:r>
+                <a:r>
+                  <a:rPr lang="de-DE" dirty="0" err="1"/>
+                  <a:t>from</a:t>
+                </a:r>
+                <a:r>
+                  <a:rPr lang="de-DE" dirty="0"/>
+                  <a:t> </a:t>
+                </a:r>
+                <a:r>
+                  <a:rPr lang="de-DE" dirty="0" err="1"/>
+                  <a:t>sequence</a:t>
+                </a:r>
+                <a:r>
+                  <a:rPr lang="de-DE" dirty="0"/>
+                  <a:t> </a:t>
+                </a:r>
+                <a:r>
+                  <a:rPr lang="de-DE" dirty="0" err="1"/>
+                  <a:t>modeling</a:t>
+                </a:r>
+                <a:r>
+                  <a:rPr lang="de-DE" dirty="0"/>
+                  <a:t> (e.g., </a:t>
+                </a:r>
+                <a:r>
+                  <a:rPr lang="de-DE" dirty="0" err="1"/>
+                  <a:t>transformers</a:t>
+                </a:r>
+                <a:r>
+                  <a:rPr lang="de-DE" dirty="0"/>
+                  <a:t>)</a:t>
+                </a:r>
+              </a:p>
+              <a:p>
+                <a:r>
+                  <a:rPr lang="de-DE" dirty="0" err="1"/>
+                  <a:t>naturally</a:t>
+                </a:r>
+                <a:r>
+                  <a:rPr lang="de-DE" dirty="0"/>
+                  <a:t> </a:t>
+                </a:r>
+                <a:r>
+                  <a:rPr lang="de-DE" dirty="0" err="1"/>
+                  <a:t>handles</a:t>
+                </a:r>
+                <a:r>
+                  <a:rPr lang="de-DE" dirty="0"/>
+                  <a:t> </a:t>
+                </a:r>
+                <a:r>
+                  <a:rPr lang="de-DE" dirty="0" err="1"/>
+                  <a:t>long-horizon</a:t>
+                </a:r>
+                <a:r>
+                  <a:rPr lang="de-DE" dirty="0"/>
+                  <a:t> </a:t>
+                </a:r>
+                <a:r>
+                  <a:rPr lang="de-DE" dirty="0" err="1"/>
+                  <a:t>dependencies</a:t>
+                </a:r>
+                <a:endParaRPr lang="de-DE" dirty="0"/>
+              </a:p>
+              <a:p>
+                <a:r>
+                  <a:rPr lang="de-DE" dirty="0" err="1"/>
+                  <a:t>enables</a:t>
+                </a:r>
+                <a:r>
+                  <a:rPr lang="de-DE" dirty="0"/>
+                  <a:t> offline </a:t>
+                </a:r>
+                <a:r>
+                  <a:rPr lang="de-DE" dirty="0" err="1"/>
+                  <a:t>training</a:t>
+                </a:r>
+                <a:r>
+                  <a:rPr lang="de-DE" dirty="0"/>
+                  <a:t> on large </a:t>
+                </a:r>
+                <a:r>
+                  <a:rPr lang="de-DE" dirty="0" err="1"/>
+                  <a:t>trajectory</a:t>
+                </a:r>
+                <a:r>
+                  <a:rPr lang="de-DE" dirty="0"/>
+                  <a:t> </a:t>
+                </a:r>
+                <a:r>
+                  <a:rPr lang="de-DE" dirty="0" err="1"/>
+                  <a:t>datasets</a:t>
+                </a:r>
+                <a:endParaRPr lang="de-DE" dirty="0"/>
+              </a:p>
+              <a:p>
+                <a:r>
+                  <a:rPr lang="de-DE" dirty="0" err="1"/>
+                  <a:t>foundation</a:t>
+                </a:r>
+                <a:r>
+                  <a:rPr lang="de-DE" dirty="0"/>
+                  <a:t> </a:t>
+                </a:r>
+                <a:r>
+                  <a:rPr lang="de-DE" dirty="0" err="1"/>
+                  <a:t>for</a:t>
+                </a:r>
+                <a:r>
+                  <a:rPr lang="de-DE" dirty="0"/>
+                  <a:t> </a:t>
+                </a:r>
+                <a:r>
+                  <a:rPr lang="de-DE" dirty="0" err="1"/>
+                  <a:t>generalist</a:t>
+                </a:r>
+                <a:r>
+                  <a:rPr lang="de-DE" dirty="0"/>
+                  <a:t> </a:t>
+                </a:r>
+                <a:r>
+                  <a:rPr lang="de-DE" dirty="0" err="1"/>
+                  <a:t>policies</a:t>
+                </a:r>
+                <a:r>
+                  <a:rPr lang="de-DE" dirty="0"/>
+                  <a:t> in </a:t>
+                </a:r>
+                <a:r>
+                  <a:rPr lang="de-DE" dirty="0" err="1"/>
+                  <a:t>robotics</a:t>
+                </a:r>
+                <a:r>
+                  <a:rPr lang="de-DE" dirty="0"/>
+                  <a:t> and </a:t>
+                </a:r>
+                <a:r>
+                  <a:rPr lang="de-DE" dirty="0" err="1"/>
+                  <a:t>control</a:t>
+                </a:r>
+                <a:endParaRPr lang="de-DE" dirty="0"/>
+              </a:p>
+            </p:txBody>
+          </p:sp>
+        </mc:Choice>
+        <mc:Fallback xmlns="">
+          <p:sp>
+            <p:nvSpPr>
+              <p:cNvPr id="3" name="Inhaltsplatzhalter 2">
+                <a:extLst>
+                  <a:ext uri="{FF2B5EF4-FFF2-40B4-BE49-F238E27FC236}">
+                    <a16:creationId xmlns:a16="http://schemas.microsoft.com/office/drawing/2014/main" id="{5E36192F-8BCF-0FAF-226A-963A74B4ED5D}"/>
+                  </a:ext>
+                </a:extLst>
+              </p:cNvPr>
+              <p:cNvSpPr>
+                <a:spLocks noGrp="1" noRot="1" noChangeAspect="1" noMove="1" noResize="1" noEditPoints="1" noAdjustHandles="1" noChangeArrowheads="1" noChangeShapeType="1" noTextEdit="1"/>
+              </p:cNvSpPr>
+              <p:nvPr>
+                <p:ph idx="1"/>
+              </p:nvPr>
+            </p:nvSpPr>
+            <p:spPr>
+              <a:blipFill>
+                <a:blip r:embed="rId2"/>
+                <a:stretch>
+                  <a:fillRect l="-1086" t="-2616" b="-1744"/>
+                </a:stretch>
+              </a:blipFill>
+            </p:spPr>
+            <p:txBody>
+              <a:bodyPr/>
+              <a:lstStyle/>
+              <a:p>
+                <a:r>
+                  <a:rPr lang="de-DE">
+                    <a:noFill/>
+                  </a:rPr>
+                  <a:t> </a:t>
+                </a:r>
+              </a:p>
+            </p:txBody>
+          </p:sp>
+        </mc:Fallback>
+      </mc:AlternateContent>
       <p:sp>
         <p:nvSpPr>
           <p:cNvPr id="4" name="Foliennummernplatzhalter 3">
@@ -4904,7 +5507,7 @@
         </p:spPr>
         <p:txBody>
           <a:bodyPr vert="horz" lIns="91440" tIns="45720" rIns="91440" bIns="45720" rtlCol="0">
-            <a:normAutofit fontScale="92500"/>
+            <a:normAutofit fontScale="92500" lnSpcReduction="10000"/>
           </a:bodyPr>
           <a:lstStyle>
             <a:lvl1pPr marL="228600" indent="-228600" algn="l" defTabSz="914400" rtl="0" eaLnBrk="1" latinLnBrk="0" hangingPunct="1">
@@ -5090,13 +5693,55 @@
           </a:p>
           <a:p>
             <a:pPr marL="0" indent="0">
-              <a:buFont typeface="Arial" panose="020B0604020202020204" pitchFamily="34" charset="0"/>
               <a:buNone/>
             </a:pPr>
             <a:r>
               <a:rPr lang="en-GB" sz="2400" dirty="0"/>
-              <a:t>desired return tokens as prompt for action generation</a:t>
-            </a:r>
+              <a:t>desired return tokens as prompt for action generation </a:t>
+            </a:r>
+            <a:r>
+              <a:rPr lang="en-GB" sz="2400" dirty="0">
+                <a:sym typeface="Wingdings" pitchFamily="2" charset="2"/>
+              </a:rPr>
+              <a:t> </a:t>
+            </a:r>
+            <a:r>
+              <a:rPr lang="de-DE" sz="2400" dirty="0" err="1"/>
+              <a:t>favor</a:t>
+            </a:r>
+            <a:r>
+              <a:rPr lang="de-DE" sz="2400" dirty="0"/>
+              <a:t> </a:t>
+            </a:r>
+            <a:r>
+              <a:rPr lang="de-DE" sz="2400" dirty="0" err="1"/>
+              <a:t>actions</a:t>
+            </a:r>
+            <a:r>
+              <a:rPr lang="de-DE" sz="2400" dirty="0"/>
+              <a:t> </a:t>
+            </a:r>
+            <a:r>
+              <a:rPr lang="de-DE" sz="2400" dirty="0" err="1"/>
+              <a:t>that</a:t>
+            </a:r>
+            <a:r>
+              <a:rPr lang="de-DE" sz="2400" dirty="0"/>
+              <a:t> </a:t>
+            </a:r>
+            <a:r>
+              <a:rPr lang="de-DE" sz="2400" dirty="0" err="1"/>
+              <a:t>appear</a:t>
+            </a:r>
+            <a:r>
+              <a:rPr lang="de-DE" sz="2400" dirty="0"/>
+              <a:t> in high-return </a:t>
+            </a:r>
+            <a:r>
+              <a:rPr lang="de-DE" sz="2400" dirty="0" err="1"/>
+              <a:t>trajectories</a:t>
+            </a:r>
+            <a:endParaRPr lang="en-GB" sz="2400" dirty="0"/>
           </a:p>
         </p:txBody>
       </p:sp>
@@ -5231,78 +5876,410 @@
           </a:p>
         </p:txBody>
       </p:sp>
-      <p:sp>
-        <p:nvSpPr>
-          <p:cNvPr id="7" name="Inhaltsplatzhalter 6">
-            <a:extLst>
-              <a:ext uri="{FF2B5EF4-FFF2-40B4-BE49-F238E27FC236}">
-                <a16:creationId xmlns:a16="http://schemas.microsoft.com/office/drawing/2014/main" id="{4B298A16-4517-528C-2ADE-075F0CE60B4A}"/>
-              </a:ext>
-            </a:extLst>
-          </p:cNvPr>
-          <p:cNvSpPr>
-            <a:spLocks noGrp="1"/>
-          </p:cNvSpPr>
-          <p:nvPr>
-            <p:ph idx="1"/>
-          </p:nvPr>
-        </p:nvSpPr>
-        <p:spPr/>
-        <p:txBody>
-          <a:bodyPr/>
-          <a:lstStyle/>
-          <a:p>
-            <a:pPr marL="0" indent="0">
-              <a:buNone/>
-            </a:pPr>
-            <a:r>
-              <a:rPr lang="de-DE" dirty="0" err="1"/>
-              <a:t>using</a:t>
-            </a:r>
-            <a:r>
-              <a:rPr lang="de-DE" dirty="0"/>
-              <a:t> generative </a:t>
-            </a:r>
-            <a:r>
-              <a:rPr lang="de-DE" dirty="0" err="1"/>
-              <a:t>models</a:t>
-            </a:r>
-            <a:r>
-              <a:rPr lang="de-DE" dirty="0"/>
-              <a:t> </a:t>
-            </a:r>
-            <a:r>
-              <a:rPr lang="de-DE" dirty="0" err="1"/>
-              <a:t>to</a:t>
-            </a:r>
-            <a:r>
-              <a:rPr lang="de-DE" dirty="0"/>
-              <a:t> </a:t>
-            </a:r>
-            <a:r>
-              <a:rPr lang="de-DE" dirty="0" err="1"/>
-              <a:t>learn</a:t>
-            </a:r>
-            <a:r>
-              <a:rPr lang="de-DE" dirty="0"/>
-              <a:t> flexible </a:t>
-            </a:r>
-            <a:r>
-              <a:rPr lang="de-DE" dirty="0" err="1"/>
-              <a:t>policy</a:t>
-            </a:r>
-            <a:r>
-              <a:rPr lang="de-DE" dirty="0"/>
-              <a:t> </a:t>
-            </a:r>
-            <a:r>
-              <a:rPr lang="de-DE" dirty="0" err="1"/>
-              <a:t>distributions</a:t>
-            </a:r>
-            <a:endParaRPr lang="de-DE" dirty="0"/>
-          </a:p>
-        </p:txBody>
-      </p:sp>
+      <mc:AlternateContent xmlns:mc="http://schemas.openxmlformats.org/markup-compatibility/2006" xmlns:a14="http://schemas.microsoft.com/office/drawing/2010/main">
+        <mc:Choice Requires="a14">
+          <p:sp>
+            <p:nvSpPr>
+              <p:cNvPr id="7" name="Inhaltsplatzhalter 6">
+                <a:extLst>
+                  <a:ext uri="{FF2B5EF4-FFF2-40B4-BE49-F238E27FC236}">
+                    <a16:creationId xmlns:a16="http://schemas.microsoft.com/office/drawing/2014/main" id="{4B298A16-4517-528C-2ADE-075F0CE60B4A}"/>
+                  </a:ext>
+                </a:extLst>
+              </p:cNvPr>
+              <p:cNvSpPr>
+                <a:spLocks noGrp="1"/>
+              </p:cNvSpPr>
+              <p:nvPr>
+                <p:ph idx="1"/>
+              </p:nvPr>
+            </p:nvSpPr>
+            <p:spPr/>
+            <p:txBody>
+              <a:bodyPr>
+                <a:normAutofit/>
+              </a:bodyPr>
+              <a:lstStyle/>
+              <a:p>
+                <a:pPr marL="0" indent="0">
+                  <a:buNone/>
+                </a:pPr>
+                <a:r>
+                  <a:rPr lang="de-DE" dirty="0" err="1"/>
+                  <a:t>trajectory</a:t>
+                </a:r>
+                <a:r>
+                  <a:rPr lang="de-DE" dirty="0"/>
+                  <a:t> </a:t>
+                </a:r>
+                <a:r>
+                  <a:rPr lang="de-DE" dirty="0" err="1"/>
+                  <a:t>modeling</a:t>
+                </a:r>
+                <a:r>
+                  <a:rPr lang="de-DE" dirty="0"/>
+                  <a:t>: </a:t>
+                </a:r>
+                <a:r>
+                  <a:rPr lang="de-DE" dirty="0" err="1"/>
+                  <a:t>generates</a:t>
+                </a:r>
+                <a:r>
+                  <a:rPr lang="de-DE" dirty="0"/>
+                  <a:t> </a:t>
+                </a:r>
+                <a:r>
+                  <a:rPr lang="de-DE" dirty="0" err="1"/>
+                  <a:t>actions</a:t>
+                </a:r>
+                <a:r>
+                  <a:rPr lang="de-DE" dirty="0"/>
+                  <a:t> </a:t>
+                </a:r>
+                <a:r>
+                  <a:rPr lang="de-DE" dirty="0" err="1"/>
+                  <a:t>autoregressively</a:t>
+                </a:r>
+                <a:r>
+                  <a:rPr lang="de-DE" dirty="0"/>
+                  <a:t> </a:t>
+                </a:r>
+                <a:r>
+                  <a:rPr lang="de-DE" dirty="0" err="1"/>
+                  <a:t>over</a:t>
+                </a:r>
+                <a:r>
+                  <a:rPr lang="de-DE" dirty="0"/>
+                  <a:t> time</a:t>
+                </a:r>
+              </a:p>
+              <a:p>
+                <a:pPr marL="0" indent="0">
+                  <a:buNone/>
+                </a:pPr>
+                <a:endParaRPr lang="de-DE" dirty="0"/>
+              </a:p>
+              <a:p>
+                <a:pPr marL="0" indent="0">
+                  <a:buNone/>
+                </a:pPr>
+                <a:r>
+                  <a:rPr lang="de-DE" dirty="0"/>
+                  <a:t>diffusion </a:t>
+                </a:r>
+                <a:r>
+                  <a:rPr lang="de-DE" dirty="0" err="1"/>
+                  <a:t>policies</a:t>
+                </a:r>
+                <a:r>
+                  <a:rPr lang="de-DE" dirty="0"/>
+                  <a:t>: </a:t>
+                </a:r>
+                <a:r>
+                  <a:rPr lang="de-DE" dirty="0" err="1"/>
+                  <a:t>generate</a:t>
+                </a:r>
+                <a:r>
+                  <a:rPr lang="de-DE" dirty="0"/>
+                  <a:t> </a:t>
+                </a:r>
+                <a:r>
+                  <a:rPr lang="de-DE" dirty="0" err="1"/>
+                  <a:t>each</a:t>
+                </a:r>
+                <a:r>
+                  <a:rPr lang="de-DE" dirty="0"/>
+                  <a:t> </a:t>
+                </a:r>
+                <a:r>
+                  <a:rPr lang="de-DE" dirty="0" err="1"/>
+                  <a:t>action</a:t>
+                </a:r>
+                <a:r>
+                  <a:rPr lang="de-DE" dirty="0"/>
+                  <a:t> </a:t>
+                </a:r>
+                <a:r>
+                  <a:rPr lang="de-DE" dirty="0" err="1"/>
+                  <a:t>individually</a:t>
+                </a:r>
+                <a:r>
+                  <a:rPr lang="de-DE" dirty="0"/>
+                  <a:t> </a:t>
+                </a:r>
+                <a:r>
+                  <a:rPr lang="de-DE" dirty="0" err="1"/>
+                  <a:t>from</a:t>
+                </a:r>
+                <a:r>
+                  <a:rPr lang="de-DE" dirty="0"/>
+                  <a:t> a </a:t>
+                </a:r>
+                <a:r>
+                  <a:rPr lang="de-DE" dirty="0" err="1"/>
+                  <a:t>conditional</a:t>
+                </a:r>
+                <a:r>
+                  <a:rPr lang="de-DE" dirty="0"/>
+                  <a:t> </a:t>
+                </a:r>
+                <a:r>
+                  <a:rPr lang="de-DE" dirty="0" err="1"/>
+                  <a:t>distribution</a:t>
+                </a:r>
+                <a:r>
+                  <a:rPr lang="de-DE" dirty="0"/>
+                  <a:t> </a:t>
+                </a:r>
+                <a14:m>
+                  <m:oMath xmlns:m="http://schemas.openxmlformats.org/officeDocument/2006/math">
+                    <m:r>
+                      <a:rPr lang="en-US" b="0" i="1" smtClean="0">
+                        <a:latin typeface="Cambria Math" panose="02040503050406030204" pitchFamily="18" charset="0"/>
+                      </a:rPr>
+                      <m:t>𝑝</m:t>
+                    </m:r>
+                    <m:d>
+                      <m:dPr>
+                        <m:ctrlPr>
+                          <a:rPr lang="en-US" i="1">
+                            <a:latin typeface="Cambria Math" panose="02040503050406030204" pitchFamily="18" charset="0"/>
+                          </a:rPr>
+                        </m:ctrlPr>
+                      </m:dPr>
+                      <m:e>
+                        <m:sSub>
+                          <m:sSubPr>
+                            <m:ctrlPr>
+                              <a:rPr lang="en-US" i="1">
+                                <a:latin typeface="Cambria Math" panose="02040503050406030204" pitchFamily="18" charset="0"/>
+                              </a:rPr>
+                            </m:ctrlPr>
+                          </m:sSubPr>
+                          <m:e>
+                            <m:r>
+                              <a:rPr lang="de-DE" b="0" i="1" smtClean="0">
+                                <a:latin typeface="Cambria Math" panose="02040503050406030204" pitchFamily="18" charset="0"/>
+                              </a:rPr>
+                              <m:t>𝑎</m:t>
+                            </m:r>
+                          </m:e>
+                          <m:sub>
+                            <m:r>
+                              <a:rPr lang="en-US" b="0" i="1" smtClean="0">
+                                <a:latin typeface="Cambria Math" panose="02040503050406030204" pitchFamily="18" charset="0"/>
+                              </a:rPr>
+                              <m:t>𝑡</m:t>
+                            </m:r>
+                          </m:sub>
+                        </m:sSub>
+                        <m:r>
+                          <a:rPr lang="en-US" b="0" i="1" smtClean="0">
+                            <a:latin typeface="Cambria Math" panose="02040503050406030204" pitchFamily="18" charset="0"/>
+                          </a:rPr>
+                          <m:t>|</m:t>
+                        </m:r>
+                        <m:sSub>
+                          <m:sSubPr>
+                            <m:ctrlPr>
+                              <a:rPr lang="en-US" i="1">
+                                <a:latin typeface="Cambria Math" panose="02040503050406030204" pitchFamily="18" charset="0"/>
+                              </a:rPr>
+                            </m:ctrlPr>
+                          </m:sSubPr>
+                          <m:e>
+                            <m:r>
+                              <a:rPr lang="en-US" b="0" i="1" smtClean="0">
+                                <a:latin typeface="Cambria Math" panose="02040503050406030204" pitchFamily="18" charset="0"/>
+                              </a:rPr>
+                              <m:t>𝑠</m:t>
+                            </m:r>
+                          </m:e>
+                          <m:sub>
+                            <m:r>
+                              <a:rPr lang="en-US" b="0" i="1" smtClean="0">
+                                <a:latin typeface="Cambria Math" panose="02040503050406030204" pitchFamily="18" charset="0"/>
+                              </a:rPr>
+                              <m:t>𝑡</m:t>
+                            </m:r>
+                          </m:sub>
+                        </m:sSub>
+                      </m:e>
+                    </m:d>
+                  </m:oMath>
+                </a14:m>
+                <a:r>
+                  <a:rPr lang="de-DE" dirty="0"/>
+                  <a:t> via an iterative </a:t>
+                </a:r>
+                <a:r>
+                  <a:rPr lang="de-DE" dirty="0" err="1"/>
+                  <a:t>denoising</a:t>
+                </a:r>
+                <a:r>
+                  <a:rPr lang="de-DE" dirty="0"/>
+                  <a:t> </a:t>
+                </a:r>
+                <a:r>
+                  <a:rPr lang="de-DE" dirty="0" err="1"/>
+                  <a:t>process</a:t>
+                </a:r>
+                <a:endParaRPr lang="de-DE" dirty="0"/>
+              </a:p>
+              <a:p>
+                <a:pPr marL="0" indent="0">
+                  <a:buNone/>
+                </a:pPr>
+                <a:endParaRPr lang="de-DE" dirty="0"/>
+              </a:p>
+              <a:p>
+                <a:r>
+                  <a:rPr lang="de-DE" dirty="0" err="1"/>
+                  <a:t>handles</a:t>
+                </a:r>
+                <a:r>
+                  <a:rPr lang="de-DE" dirty="0"/>
+                  <a:t> </a:t>
+                </a:r>
+                <a:r>
+                  <a:rPr lang="de-DE" dirty="0" err="1"/>
+                  <a:t>complex</a:t>
+                </a:r>
+                <a:r>
+                  <a:rPr lang="de-DE" dirty="0"/>
+                  <a:t>, high-dimensional multi-modal </a:t>
+                </a:r>
+                <a:r>
+                  <a:rPr lang="de-DE" dirty="0" err="1"/>
+                  <a:t>action</a:t>
+                </a:r>
+                <a:r>
+                  <a:rPr lang="de-DE" dirty="0"/>
+                  <a:t> </a:t>
+                </a:r>
+                <a:r>
+                  <a:rPr lang="de-DE" dirty="0" err="1"/>
+                  <a:t>spaces</a:t>
+                </a:r>
+                <a:endParaRPr lang="de-DE" dirty="0"/>
+              </a:p>
+              <a:p>
+                <a:r>
+                  <a:rPr lang="de-DE" dirty="0" err="1"/>
+                  <a:t>naturally</a:t>
+                </a:r>
+                <a:r>
+                  <a:rPr lang="de-DE" dirty="0"/>
+                  <a:t> </a:t>
+                </a:r>
+                <a:r>
+                  <a:rPr lang="de-DE" dirty="0" err="1"/>
+                  <a:t>supports</a:t>
+                </a:r>
+                <a:r>
+                  <a:rPr lang="de-DE" dirty="0"/>
+                  <a:t> </a:t>
+                </a:r>
+                <a:r>
+                  <a:rPr lang="de-DE" dirty="0" err="1"/>
+                  <a:t>vision-based</a:t>
+                </a:r>
+                <a:r>
+                  <a:rPr lang="de-DE" dirty="0"/>
+                  <a:t> </a:t>
+                </a:r>
+                <a:r>
+                  <a:rPr lang="de-DE" dirty="0" err="1"/>
+                  <a:t>control</a:t>
+                </a:r>
+                <a:r>
+                  <a:rPr lang="de-DE" dirty="0"/>
+                  <a:t> </a:t>
+                </a:r>
+                <a:r>
+                  <a:rPr lang="de-DE" dirty="0" err="1"/>
+                  <a:t>policies</a:t>
+                </a:r>
+                <a:endParaRPr lang="de-DE" dirty="0"/>
+              </a:p>
+              <a:p>
+                <a:r>
+                  <a:rPr lang="de-DE" dirty="0"/>
+                  <a:t>strong </a:t>
+                </a:r>
+                <a:r>
+                  <a:rPr lang="de-DE" dirty="0" err="1"/>
+                  <a:t>performance</a:t>
+                </a:r>
+                <a:r>
+                  <a:rPr lang="de-DE" dirty="0"/>
+                  <a:t> in </a:t>
+                </a:r>
+                <a:r>
+                  <a:rPr lang="de-DE" dirty="0" err="1"/>
+                  <a:t>imitation</a:t>
+                </a:r>
+                <a:r>
+                  <a:rPr lang="de-DE" dirty="0"/>
+                  <a:t> </a:t>
+                </a:r>
+                <a:r>
+                  <a:rPr lang="de-DE" dirty="0" err="1"/>
+                  <a:t>learning</a:t>
+                </a:r>
+                <a:r>
+                  <a:rPr lang="de-DE" dirty="0"/>
+                  <a:t> </a:t>
+                </a:r>
+                <a:r>
+                  <a:rPr lang="de-DE" dirty="0" err="1"/>
+                  <a:t>settings</a:t>
+                </a:r>
+                <a:endParaRPr lang="de-DE" dirty="0"/>
+              </a:p>
+            </p:txBody>
+          </p:sp>
+        </mc:Choice>
+        <mc:Fallback xmlns="">
+          <p:sp>
+            <p:nvSpPr>
+              <p:cNvPr id="7" name="Inhaltsplatzhalter 6">
+                <a:extLst>
+                  <a:ext uri="{FF2B5EF4-FFF2-40B4-BE49-F238E27FC236}">
+                    <a16:creationId xmlns:a16="http://schemas.microsoft.com/office/drawing/2014/main" id="{4B298A16-4517-528C-2ADE-075F0CE60B4A}"/>
+                  </a:ext>
+                </a:extLst>
+              </p:cNvPr>
+              <p:cNvSpPr>
+                <a:spLocks noGrp="1" noRot="1" noChangeAspect="1" noMove="1" noResize="1" noEditPoints="1" noAdjustHandles="1" noChangeArrowheads="1" noChangeShapeType="1" noTextEdit="1"/>
+              </p:cNvSpPr>
+              <p:nvPr>
+                <p:ph idx="1"/>
+              </p:nvPr>
+            </p:nvSpPr>
+            <p:spPr>
+              <a:blipFill>
+                <a:blip r:embed="rId2"/>
+                <a:stretch>
+                  <a:fillRect l="-1206" t="-2326"/>
+                </a:stretch>
+              </a:blipFill>
+            </p:spPr>
+            <p:txBody>
+              <a:bodyPr/>
+              <a:lstStyle/>
+              <a:p>
+                <a:r>
+                  <a:rPr lang="de-DE">
+                    <a:noFill/>
+                  </a:rPr>
+                  <a:t> </a:t>
+                </a:r>
+              </a:p>
+            </p:txBody>
+          </p:sp>
+        </mc:Fallback>
+      </mc:AlternateContent>
       <p:sp>
         <p:nvSpPr>
           <p:cNvPr id="5" name="Foliennummernplatzhalter 4">
@@ -5519,7 +6496,9 @@
         </p:nvSpPr>
         <p:spPr/>
         <p:txBody>
-          <a:bodyPr/>
+          <a:bodyPr>
+            <a:normAutofit/>
+          </a:bodyPr>
           <a:lstStyle/>
           <a:p>
             <a:pPr marL="0" indent="0">
@@ -5531,7 +6510,39 @@
             </a:r>
             <a:r>
               <a:rPr lang="de-DE" dirty="0"/>
-              <a:t> </a:t>
+              <a:t> (</a:t>
+            </a:r>
+            <a:r>
+              <a:rPr lang="de-DE" dirty="0" err="1"/>
+              <a:t>robot</a:t>
+            </a:r>
+            <a:r>
+              <a:rPr lang="de-DE" dirty="0"/>
+              <a:t>, </a:t>
+            </a:r>
+            <a:r>
+              <a:rPr lang="de-DE" dirty="0" err="1"/>
+              <a:t>avatar</a:t>
+            </a:r>
+            <a:r>
+              <a:rPr lang="de-DE" dirty="0"/>
+              <a:t>, </a:t>
+            </a:r>
+            <a:r>
+              <a:rPr lang="de-DE" dirty="0" err="1"/>
+              <a:t>simulated</a:t>
+            </a:r>
+            <a:r>
+              <a:rPr lang="de-DE" dirty="0"/>
+              <a:t> </a:t>
+            </a:r>
+            <a:r>
+              <a:rPr lang="de-DE" dirty="0" err="1"/>
+              <a:t>agent</a:t>
+            </a:r>
+            <a:r>
+              <a:rPr lang="de-DE" dirty="0"/>
+              <a:t>) </a:t>
             </a:r>
             <a:r>
               <a:rPr lang="de-DE" dirty="0" err="1"/>
@@ -5568,6 +6579,115 @@
             <a:r>
               <a:rPr lang="de-DE" dirty="0" err="1"/>
               <a:t>environments</a:t>
+            </a:r>
+            <a:r>
+              <a:rPr lang="de-DE" dirty="0"/>
+              <a:t> (e.g., </a:t>
+            </a:r>
+            <a:r>
+              <a:rPr lang="de-DE" dirty="0" err="1"/>
+              <a:t>homes</a:t>
+            </a:r>
+            <a:r>
+              <a:rPr lang="de-DE" dirty="0"/>
+              <a:t>, </a:t>
+            </a:r>
+            <a:r>
+              <a:rPr lang="de-DE" dirty="0" err="1"/>
+              <a:t>warehouses</a:t>
+            </a:r>
+            <a:r>
+              <a:rPr lang="de-DE" dirty="0"/>
+              <a:t>, </a:t>
+            </a:r>
+            <a:r>
+              <a:rPr lang="de-DE" dirty="0" err="1"/>
+              <a:t>outdoor</a:t>
+            </a:r>
+            <a:r>
+              <a:rPr lang="de-DE" dirty="0"/>
+              <a:t> </a:t>
+            </a:r>
+            <a:r>
+              <a:rPr lang="de-DE" dirty="0" err="1"/>
+              <a:t>scenes</a:t>
+            </a:r>
+            <a:r>
+              <a:rPr lang="de-DE" dirty="0"/>
+              <a:t>)</a:t>
+            </a:r>
+          </a:p>
+          <a:p>
+            <a:pPr marL="0" indent="0">
+              <a:buNone/>
+            </a:pPr>
+            <a:endParaRPr lang="de-DE" dirty="0"/>
+          </a:p>
+          <a:p>
+            <a:pPr marL="0" indent="0">
+              <a:buNone/>
+            </a:pPr>
+            <a:r>
+              <a:rPr lang="de-DE" dirty="0">
+                <a:sym typeface="Wingdings" pitchFamily="2" charset="2"/>
+              </a:rPr>
+              <a:t> </a:t>
+            </a:r>
+            <a:r>
+              <a:rPr lang="de-DE" dirty="0" err="1"/>
+              <a:t>must</a:t>
+            </a:r>
+            <a:r>
+              <a:rPr lang="de-DE" dirty="0"/>
+              <a:t> deal </a:t>
+            </a:r>
+            <a:r>
+              <a:rPr lang="de-DE" dirty="0" err="1"/>
+              <a:t>with</a:t>
+            </a:r>
+            <a:r>
+              <a:rPr lang="de-DE" dirty="0"/>
+              <a:t>:</a:t>
+            </a:r>
+          </a:p>
+          <a:p>
+            <a:r>
+              <a:rPr lang="de-DE" dirty="0"/>
+              <a:t>partial </a:t>
+            </a:r>
+            <a:r>
+              <a:rPr lang="de-DE" dirty="0" err="1"/>
+              <a:t>observability</a:t>
+            </a:r>
+            <a:endParaRPr lang="de-DE" dirty="0"/>
+          </a:p>
+          <a:p>
+            <a:r>
+              <a:rPr lang="de-DE" dirty="0" err="1"/>
+              <a:t>physical</a:t>
+            </a:r>
+            <a:r>
+              <a:rPr lang="de-DE" dirty="0"/>
+              <a:t> </a:t>
+            </a:r>
+            <a:r>
+              <a:rPr lang="de-DE" dirty="0" err="1"/>
+              <a:t>constraints</a:t>
+            </a:r>
+            <a:endParaRPr lang="de-DE" dirty="0"/>
+          </a:p>
+          <a:p>
+            <a:r>
+              <a:rPr lang="de-DE" dirty="0" err="1"/>
+              <a:t>long-horizon</a:t>
+            </a:r>
+            <a:r>
+              <a:rPr lang="de-DE" dirty="0"/>
+              <a:t> </a:t>
+            </a:r>
+            <a:r>
+              <a:rPr lang="de-DE" dirty="0" err="1"/>
+              <a:t>interactions</a:t>
             </a:r>
             <a:endParaRPr lang="de-DE" dirty="0"/>
           </a:p>
@@ -5678,10 +6798,344 @@
         </p:nvSpPr>
         <p:spPr/>
         <p:txBody>
-          <a:bodyPr/>
+          <a:bodyPr>
+            <a:normAutofit/>
+          </a:bodyPr>
           <a:lstStyle/>
           <a:p>
-            <a:endParaRPr lang="de-DE"/>
+            <a:pPr marL="0" indent="0">
+              <a:buNone/>
+            </a:pPr>
+            <a:r>
+              <a:rPr lang="de-DE" dirty="0"/>
+              <a:t>high-</a:t>
+            </a:r>
+            <a:r>
+              <a:rPr lang="de-DE" dirty="0" err="1"/>
+              <a:t>fidelity</a:t>
+            </a:r>
+            <a:r>
+              <a:rPr lang="de-DE" dirty="0"/>
+              <a:t> </a:t>
+            </a:r>
+            <a:r>
+              <a:rPr lang="de-DE" dirty="0" err="1"/>
+              <a:t>robotics</a:t>
+            </a:r>
+            <a:r>
+              <a:rPr lang="de-DE" dirty="0"/>
+              <a:t> </a:t>
+            </a:r>
+            <a:r>
+              <a:rPr lang="de-DE" dirty="0" err="1"/>
+              <a:t>simulation</a:t>
+            </a:r>
+            <a:r>
+              <a:rPr lang="de-DE" dirty="0"/>
+              <a:t> and </a:t>
+            </a:r>
+            <a:r>
+              <a:rPr lang="de-DE" dirty="0" err="1"/>
+              <a:t>learning</a:t>
+            </a:r>
+            <a:r>
+              <a:rPr lang="de-DE" dirty="0"/>
+              <a:t> </a:t>
+            </a:r>
+            <a:r>
+              <a:rPr lang="de-DE" dirty="0" err="1"/>
+              <a:t>platform</a:t>
+            </a:r>
+            <a:r>
+              <a:rPr lang="de-DE" dirty="0"/>
+              <a:t> </a:t>
+            </a:r>
+            <a:r>
+              <a:rPr lang="de-DE" dirty="0" err="1"/>
+              <a:t>for</a:t>
+            </a:r>
+            <a:r>
+              <a:rPr lang="de-DE" dirty="0"/>
+              <a:t> </a:t>
+            </a:r>
+            <a:r>
+              <a:rPr lang="de-DE" dirty="0" err="1"/>
+              <a:t>training</a:t>
+            </a:r>
+            <a:r>
+              <a:rPr lang="de-DE" dirty="0"/>
+              <a:t> and </a:t>
+            </a:r>
+            <a:r>
+              <a:rPr lang="de-DE" dirty="0" err="1"/>
+              <a:t>evaluating</a:t>
+            </a:r>
+            <a:r>
+              <a:rPr lang="de-DE" dirty="0"/>
+              <a:t> </a:t>
+            </a:r>
+            <a:r>
+              <a:rPr lang="de-DE" dirty="0" err="1"/>
+              <a:t>embodied</a:t>
+            </a:r>
+            <a:r>
+              <a:rPr lang="de-DE" dirty="0"/>
+              <a:t> AI </a:t>
+            </a:r>
+            <a:r>
+              <a:rPr lang="de-DE" dirty="0" err="1"/>
+              <a:t>agents</a:t>
+            </a:r>
+            <a:r>
+              <a:rPr lang="de-DE" dirty="0"/>
+              <a:t> at </a:t>
+            </a:r>
+            <a:r>
+              <a:rPr lang="de-DE" dirty="0" err="1"/>
+              <a:t>scale</a:t>
+            </a:r>
+            <a:endParaRPr lang="de-DE" dirty="0"/>
+          </a:p>
+          <a:p>
+            <a:r>
+              <a:rPr lang="de-DE" dirty="0"/>
+              <a:t>Isaac Sim (</a:t>
+            </a:r>
+            <a:r>
+              <a:rPr lang="de-DE" dirty="0" err="1"/>
+              <a:t>simulation</a:t>
+            </a:r>
+            <a:r>
+              <a:rPr lang="de-DE" dirty="0"/>
+              <a:t> </a:t>
+            </a:r>
+            <a:r>
+              <a:rPr lang="de-DE" dirty="0" err="1"/>
+              <a:t>engine</a:t>
+            </a:r>
+            <a:r>
+              <a:rPr lang="de-DE" dirty="0"/>
+              <a:t>): </a:t>
+            </a:r>
+            <a:r>
+              <a:rPr lang="de-DE" dirty="0" err="1"/>
+              <a:t>realistic</a:t>
+            </a:r>
+            <a:r>
+              <a:rPr lang="de-DE" dirty="0"/>
+              <a:t> </a:t>
+            </a:r>
+            <a:r>
+              <a:rPr lang="de-DE" dirty="0" err="1"/>
+              <a:t>modeling</a:t>
+            </a:r>
+            <a:r>
+              <a:rPr lang="de-DE" dirty="0"/>
+              <a:t> </a:t>
+            </a:r>
+            <a:r>
+              <a:rPr lang="de-DE" dirty="0" err="1"/>
+              <a:t>of</a:t>
+            </a:r>
+            <a:r>
+              <a:rPr lang="de-DE" dirty="0"/>
+              <a:t> rigid </a:t>
+            </a:r>
+            <a:r>
+              <a:rPr lang="de-DE" dirty="0" err="1"/>
+              <a:t>body</a:t>
+            </a:r>
+            <a:r>
+              <a:rPr lang="de-DE" dirty="0"/>
+              <a:t> </a:t>
+            </a:r>
+            <a:r>
+              <a:rPr lang="de-DE" dirty="0" err="1"/>
+              <a:t>dynamics</a:t>
+            </a:r>
+            <a:r>
+              <a:rPr lang="de-DE" dirty="0"/>
+              <a:t>, </a:t>
+            </a:r>
+            <a:r>
+              <a:rPr lang="de-DE" dirty="0" err="1"/>
+              <a:t>contacts</a:t>
+            </a:r>
+            <a:r>
+              <a:rPr lang="de-DE" dirty="0"/>
+              <a:t> and </a:t>
+            </a:r>
+            <a:r>
+              <a:rPr lang="de-DE" dirty="0" err="1"/>
+              <a:t>collisions</a:t>
+            </a:r>
+            <a:r>
+              <a:rPr lang="de-DE" dirty="0"/>
+              <a:t>, </a:t>
+            </a:r>
+            <a:r>
+              <a:rPr lang="de-DE" dirty="0" err="1"/>
+              <a:t>sensors</a:t>
+            </a:r>
+            <a:r>
+              <a:rPr lang="de-DE" dirty="0"/>
+              <a:t> (RGB, </a:t>
+            </a:r>
+            <a:r>
+              <a:rPr lang="de-DE" dirty="0" err="1"/>
+              <a:t>depth</a:t>
+            </a:r>
+            <a:r>
+              <a:rPr lang="de-DE" dirty="0"/>
+              <a:t>, LiDAR)</a:t>
+            </a:r>
+          </a:p>
+          <a:p>
+            <a:r>
+              <a:rPr lang="de-DE" dirty="0"/>
+              <a:t>Isaac Lab (RL/</a:t>
+            </a:r>
+            <a:r>
+              <a:rPr lang="de-DE" dirty="0" err="1"/>
+              <a:t>learning</a:t>
+            </a:r>
+            <a:r>
+              <a:rPr lang="de-DE" dirty="0"/>
+              <a:t> </a:t>
+            </a:r>
+            <a:r>
+              <a:rPr lang="de-DE" dirty="0" err="1"/>
+              <a:t>framework</a:t>
+            </a:r>
+            <a:r>
+              <a:rPr lang="de-DE" dirty="0"/>
+              <a:t>): </a:t>
+            </a:r>
+            <a:r>
+              <a:rPr lang="de-DE" dirty="0" err="1"/>
+              <a:t>built</a:t>
+            </a:r>
+            <a:r>
+              <a:rPr lang="de-DE" dirty="0"/>
+              <a:t> on top </a:t>
+            </a:r>
+            <a:r>
+              <a:rPr lang="de-DE" dirty="0" err="1"/>
+              <a:t>of</a:t>
+            </a:r>
+            <a:r>
+              <a:rPr lang="de-DE" dirty="0"/>
+              <a:t> Isaac Sim </a:t>
+            </a:r>
+            <a:r>
+              <a:rPr lang="de-DE" dirty="0" err="1"/>
+              <a:t>for</a:t>
+            </a:r>
+            <a:r>
+              <a:rPr lang="de-DE" dirty="0"/>
+              <a:t> </a:t>
+            </a:r>
+            <a:r>
+              <a:rPr lang="de-DE" dirty="0" err="1"/>
+              <a:t>robot</a:t>
+            </a:r>
+            <a:r>
+              <a:rPr lang="de-DE" dirty="0"/>
+              <a:t> </a:t>
+            </a:r>
+            <a:r>
+              <a:rPr lang="de-DE" dirty="0" err="1"/>
+              <a:t>learning</a:t>
+            </a:r>
+            <a:r>
+              <a:rPr lang="de-DE" dirty="0"/>
+              <a:t> </a:t>
+            </a:r>
+            <a:r>
+              <a:rPr lang="de-DE" dirty="0" err="1"/>
+              <a:t>workflows</a:t>
+            </a:r>
+            <a:endParaRPr lang="de-DE" dirty="0"/>
+          </a:p>
+          <a:p>
+            <a:pPr marL="0" indent="0">
+              <a:buNone/>
+            </a:pPr>
+            <a:endParaRPr lang="de-DE" dirty="0"/>
+          </a:p>
+          <a:p>
+            <a:pPr marL="0" indent="0">
+              <a:buNone/>
+            </a:pPr>
+            <a:r>
+              <a:rPr lang="de-DE" dirty="0" err="1"/>
+              <a:t>enables</a:t>
+            </a:r>
+            <a:r>
+              <a:rPr lang="de-DE" dirty="0"/>
+              <a:t> massive </a:t>
+            </a:r>
+            <a:r>
+              <a:rPr lang="de-DE" dirty="0" err="1"/>
+              <a:t>data</a:t>
+            </a:r>
+            <a:r>
+              <a:rPr lang="de-DE" dirty="0"/>
+              <a:t> </a:t>
+            </a:r>
+            <a:r>
+              <a:rPr lang="de-DE" dirty="0" err="1"/>
+              <a:t>generation</a:t>
+            </a:r>
+            <a:r>
+              <a:rPr lang="de-DE" dirty="0"/>
+              <a:t> in </a:t>
+            </a:r>
+            <a:r>
+              <a:rPr lang="de-DE" dirty="0" err="1"/>
+              <a:t>simulation</a:t>
+            </a:r>
+            <a:r>
+              <a:rPr lang="de-DE" dirty="0"/>
+              <a:t>, </a:t>
+            </a:r>
+            <a:r>
+              <a:rPr lang="de-DE" dirty="0" err="1"/>
+              <a:t>reducing</a:t>
+            </a:r>
+            <a:r>
+              <a:rPr lang="de-DE" dirty="0"/>
+              <a:t> </a:t>
+            </a:r>
+            <a:r>
+              <a:rPr lang="de-DE" dirty="0" err="1"/>
+              <a:t>reliance</a:t>
+            </a:r>
+            <a:r>
+              <a:rPr lang="de-DE" dirty="0"/>
+              <a:t> on expensive real-</a:t>
+            </a:r>
+            <a:r>
+              <a:rPr lang="de-DE" dirty="0" err="1"/>
+              <a:t>world</a:t>
+            </a:r>
+            <a:r>
+              <a:rPr lang="de-DE" dirty="0"/>
+              <a:t> </a:t>
+            </a:r>
+            <a:r>
+              <a:rPr lang="de-DE" dirty="0" err="1"/>
+              <a:t>robot</a:t>
+            </a:r>
+            <a:r>
+              <a:rPr lang="de-DE" dirty="0"/>
+              <a:t> </a:t>
+            </a:r>
+            <a:r>
+              <a:rPr lang="de-DE" dirty="0" err="1"/>
+              <a:t>data</a:t>
+            </a:r>
+            <a:endParaRPr lang="de-DE" dirty="0"/>
           </a:p>
         </p:txBody>
       </p:sp>
@@ -5796,12 +7250,546 @@
             <p:ph idx="1"/>
           </p:nvPr>
         </p:nvSpPr>
-        <p:spPr/>
+        <p:spPr>
+          <a:xfrm>
+            <a:off x="838199" y="1825625"/>
+            <a:ext cx="10732477" cy="4351338"/>
+          </a:xfrm>
+        </p:spPr>
         <p:txBody>
-          <a:bodyPr/>
+          <a:bodyPr>
+            <a:normAutofit fontScale="92500" lnSpcReduction="20000"/>
+          </a:bodyPr>
           <a:lstStyle/>
           <a:p>
-            <a:endParaRPr lang="de-DE"/>
+            <a:pPr marL="0" indent="0">
+              <a:buNone/>
+            </a:pPr>
+            <a:r>
+              <a:rPr lang="de-DE" dirty="0" err="1"/>
+              <a:t>policies</a:t>
+            </a:r>
+            <a:r>
+              <a:rPr lang="de-DE" dirty="0"/>
+              <a:t> </a:t>
+            </a:r>
+            <a:r>
+              <a:rPr lang="de-DE" dirty="0" err="1"/>
+              <a:t>trained</a:t>
+            </a:r>
+            <a:r>
+              <a:rPr lang="de-DE" dirty="0"/>
+              <a:t> in </a:t>
+            </a:r>
+            <a:r>
+              <a:rPr lang="de-DE" dirty="0" err="1"/>
+              <a:t>simulation</a:t>
+            </a:r>
+            <a:r>
+              <a:rPr lang="de-DE" dirty="0"/>
+              <a:t> </a:t>
+            </a:r>
+            <a:r>
+              <a:rPr lang="de-DE" dirty="0" err="1"/>
+              <a:t>often</a:t>
+            </a:r>
+            <a:r>
+              <a:rPr lang="de-DE" dirty="0"/>
+              <a:t> fail </a:t>
+            </a:r>
+            <a:r>
+              <a:rPr lang="de-DE" dirty="0" err="1"/>
+              <a:t>to</a:t>
+            </a:r>
+            <a:r>
+              <a:rPr lang="de-DE" dirty="0"/>
+              <a:t> </a:t>
+            </a:r>
+            <a:r>
+              <a:rPr lang="de-DE" dirty="0" err="1"/>
+              <a:t>transfer</a:t>
+            </a:r>
+            <a:r>
+              <a:rPr lang="de-DE" dirty="0"/>
+              <a:t> </a:t>
+            </a:r>
+            <a:r>
+              <a:rPr lang="de-DE" dirty="0" err="1"/>
+              <a:t>directly</a:t>
+            </a:r>
+            <a:r>
+              <a:rPr lang="de-DE" dirty="0"/>
+              <a:t> </a:t>
+            </a:r>
+            <a:r>
+              <a:rPr lang="de-DE" dirty="0" err="1"/>
+              <a:t>to</a:t>
+            </a:r>
+            <a:r>
+              <a:rPr lang="de-DE" dirty="0"/>
+              <a:t> </a:t>
+            </a:r>
+            <a:r>
+              <a:rPr lang="de-DE" dirty="0" err="1"/>
+              <a:t>the</a:t>
+            </a:r>
+            <a:r>
+              <a:rPr lang="de-DE" dirty="0"/>
+              <a:t> real </a:t>
+            </a:r>
+            <a:r>
+              <a:rPr lang="de-DE" dirty="0" err="1"/>
+              <a:t>world</a:t>
+            </a:r>
+            <a:r>
+              <a:rPr lang="de-DE" dirty="0"/>
+              <a:t> due </a:t>
+            </a:r>
+            <a:r>
+              <a:rPr lang="de-DE" dirty="0" err="1"/>
+              <a:t>to</a:t>
+            </a:r>
+            <a:r>
+              <a:rPr lang="de-DE" dirty="0"/>
+              <a:t> </a:t>
+            </a:r>
+            <a:r>
+              <a:rPr lang="de-DE" dirty="0" err="1"/>
+              <a:t>mismatches</a:t>
+            </a:r>
+            <a:r>
+              <a:rPr lang="de-DE" dirty="0"/>
+              <a:t> </a:t>
+            </a:r>
+            <a:r>
+              <a:rPr lang="de-DE" dirty="0" err="1"/>
+              <a:t>between</a:t>
+            </a:r>
+            <a:r>
+              <a:rPr lang="de-DE" dirty="0"/>
+              <a:t> </a:t>
+            </a:r>
+            <a:r>
+              <a:rPr lang="de-DE" dirty="0" err="1"/>
+              <a:t>simulated</a:t>
+            </a:r>
+            <a:r>
+              <a:rPr lang="de-DE" dirty="0"/>
+              <a:t> and </a:t>
+            </a:r>
+            <a:r>
+              <a:rPr lang="de-DE" dirty="0" err="1"/>
+              <a:t>physical</a:t>
+            </a:r>
+            <a:r>
+              <a:rPr lang="de-DE" dirty="0"/>
+              <a:t> </a:t>
+            </a:r>
+            <a:r>
+              <a:rPr lang="de-DE" dirty="0" err="1"/>
+              <a:t>environments</a:t>
+            </a:r>
+            <a:endParaRPr lang="de-DE" dirty="0"/>
+          </a:p>
+          <a:p>
+            <a:pPr marL="0" indent="0">
+              <a:buNone/>
+            </a:pPr>
+            <a:endParaRPr lang="de-DE" dirty="0"/>
+          </a:p>
+          <a:p>
+            <a:pPr marL="0" indent="0">
+              <a:buNone/>
+            </a:pPr>
+            <a:r>
+              <a:rPr lang="de-DE" dirty="0">
+                <a:sym typeface="Wingdings" pitchFamily="2" charset="2"/>
+              </a:rPr>
+              <a:t> </a:t>
+            </a:r>
+            <a:r>
+              <a:rPr lang="de-DE" dirty="0" err="1">
+                <a:sym typeface="Wingdings" pitchFamily="2" charset="2"/>
+              </a:rPr>
+              <a:t>l</a:t>
+            </a:r>
+            <a:r>
+              <a:rPr lang="de-DE" dirty="0" err="1"/>
+              <a:t>imits</a:t>
+            </a:r>
+            <a:r>
+              <a:rPr lang="de-DE" dirty="0"/>
+              <a:t> </a:t>
+            </a:r>
+            <a:r>
+              <a:rPr lang="de-DE" dirty="0" err="1"/>
+              <a:t>direct</a:t>
+            </a:r>
+            <a:r>
+              <a:rPr lang="de-DE" dirty="0"/>
+              <a:t> </a:t>
+            </a:r>
+            <a:r>
+              <a:rPr lang="de-DE" dirty="0" err="1"/>
+              <a:t>deployment</a:t>
+            </a:r>
+            <a:r>
+              <a:rPr lang="de-DE" dirty="0"/>
+              <a:t> </a:t>
+            </a:r>
+            <a:r>
+              <a:rPr lang="de-DE" dirty="0" err="1"/>
+              <a:t>of</a:t>
+            </a:r>
+            <a:r>
+              <a:rPr lang="de-DE" dirty="0"/>
+              <a:t> RL </a:t>
+            </a:r>
+            <a:r>
+              <a:rPr lang="de-DE" dirty="0" err="1"/>
+              <a:t>policies</a:t>
+            </a:r>
+            <a:r>
+              <a:rPr lang="de-DE" dirty="0"/>
+              <a:t> </a:t>
+            </a:r>
+            <a:r>
+              <a:rPr lang="de-DE" dirty="0" err="1"/>
+              <a:t>trained</a:t>
+            </a:r>
+            <a:r>
+              <a:rPr lang="de-DE" dirty="0"/>
+              <a:t> in </a:t>
+            </a:r>
+            <a:r>
+              <a:rPr lang="de-DE" dirty="0" err="1"/>
+              <a:t>simulation</a:t>
+            </a:r>
+            <a:r>
+              <a:rPr lang="de-DE" dirty="0"/>
+              <a:t> (</a:t>
+            </a:r>
+            <a:r>
+              <a:rPr lang="de-DE" dirty="0" err="1"/>
+              <a:t>central</a:t>
+            </a:r>
+            <a:r>
+              <a:rPr lang="de-DE" dirty="0"/>
+              <a:t> </a:t>
+            </a:r>
+            <a:r>
+              <a:rPr lang="de-DE" dirty="0" err="1"/>
+              <a:t>challenge</a:t>
+            </a:r>
+            <a:r>
+              <a:rPr lang="de-DE" dirty="0"/>
+              <a:t> in </a:t>
+            </a:r>
+            <a:r>
+              <a:rPr lang="de-DE" dirty="0" err="1"/>
+              <a:t>robotics</a:t>
+            </a:r>
+            <a:r>
+              <a:rPr lang="de-DE" dirty="0"/>
+              <a:t> and </a:t>
+            </a:r>
+            <a:r>
+              <a:rPr lang="de-DE" dirty="0" err="1"/>
+              <a:t>embodied</a:t>
+            </a:r>
+            <a:r>
+              <a:rPr lang="de-DE" dirty="0"/>
+              <a:t> AI)</a:t>
+            </a:r>
+            <a:br>
+              <a:rPr lang="de-DE" dirty="0"/>
+            </a:br>
+            <a:endParaRPr lang="de-DE" dirty="0"/>
+          </a:p>
+          <a:p>
+            <a:pPr marL="0" indent="0">
+              <a:buNone/>
+            </a:pPr>
+            <a:r>
+              <a:rPr lang="de-DE" dirty="0" err="1"/>
+              <a:t>common</a:t>
+            </a:r>
+            <a:r>
+              <a:rPr lang="de-DE" dirty="0"/>
+              <a:t> </a:t>
+            </a:r>
+            <a:r>
+              <a:rPr lang="de-DE" dirty="0" err="1"/>
+              <a:t>strategies</a:t>
+            </a:r>
+            <a:r>
+              <a:rPr lang="de-DE" dirty="0"/>
+              <a:t> </a:t>
+            </a:r>
+            <a:r>
+              <a:rPr lang="de-DE" dirty="0" err="1"/>
+              <a:t>to</a:t>
+            </a:r>
+            <a:r>
+              <a:rPr lang="de-DE" dirty="0"/>
+              <a:t> </a:t>
+            </a:r>
+            <a:r>
+              <a:rPr lang="de-DE" dirty="0" err="1"/>
+              <a:t>bridge</a:t>
+            </a:r>
+            <a:r>
+              <a:rPr lang="de-DE" dirty="0"/>
+              <a:t> </a:t>
+            </a:r>
+            <a:r>
+              <a:rPr lang="de-DE" dirty="0" err="1"/>
+              <a:t>the</a:t>
+            </a:r>
+            <a:r>
+              <a:rPr lang="de-DE" dirty="0"/>
+              <a:t> </a:t>
+            </a:r>
+            <a:r>
+              <a:rPr lang="de-DE" dirty="0" err="1"/>
+              <a:t>gap</a:t>
+            </a:r>
+            <a:r>
+              <a:rPr lang="de-DE" dirty="0"/>
+              <a:t>:</a:t>
+            </a:r>
+          </a:p>
+          <a:p>
+            <a:r>
+              <a:rPr lang="de-DE" dirty="0" err="1"/>
+              <a:t>domain</a:t>
+            </a:r>
+            <a:r>
+              <a:rPr lang="de-DE" dirty="0"/>
+              <a:t> </a:t>
+            </a:r>
+            <a:r>
+              <a:rPr lang="de-DE" dirty="0" err="1"/>
+              <a:t>randomization</a:t>
+            </a:r>
+            <a:r>
+              <a:rPr lang="de-DE" dirty="0"/>
+              <a:t>: </a:t>
+            </a:r>
+            <a:r>
+              <a:rPr lang="de-DE" dirty="0" err="1"/>
+              <a:t>vary</a:t>
+            </a:r>
+            <a:r>
+              <a:rPr lang="de-DE" dirty="0"/>
+              <a:t> </a:t>
+            </a:r>
+            <a:r>
+              <a:rPr lang="de-DE" dirty="0" err="1"/>
+              <a:t>simulation</a:t>
+            </a:r>
+            <a:r>
+              <a:rPr lang="de-DE" dirty="0"/>
+              <a:t> </a:t>
+            </a:r>
+            <a:r>
+              <a:rPr lang="de-DE" dirty="0" err="1"/>
+              <a:t>parameters</a:t>
+            </a:r>
+            <a:r>
+              <a:rPr lang="de-DE" dirty="0"/>
+              <a:t> </a:t>
+            </a:r>
+            <a:r>
+              <a:rPr lang="de-DE" dirty="0" err="1"/>
+              <a:t>during</a:t>
+            </a:r>
+            <a:r>
+              <a:rPr lang="de-DE" dirty="0"/>
+              <a:t> </a:t>
+            </a:r>
+            <a:r>
+              <a:rPr lang="de-DE" dirty="0" err="1"/>
+              <a:t>training</a:t>
+            </a:r>
+            <a:endParaRPr lang="de-DE" dirty="0"/>
+          </a:p>
+          <a:p>
+            <a:r>
+              <a:rPr lang="de-DE" dirty="0" err="1"/>
+              <a:t>system</a:t>
+            </a:r>
+            <a:r>
+              <a:rPr lang="de-DE" dirty="0"/>
+              <a:t> </a:t>
+            </a:r>
+            <a:r>
+              <a:rPr lang="de-DE" dirty="0" err="1"/>
+              <a:t>identification</a:t>
+            </a:r>
+            <a:r>
+              <a:rPr lang="de-DE" dirty="0"/>
+              <a:t>: </a:t>
+            </a:r>
+            <a:r>
+              <a:rPr lang="de-DE" dirty="0" err="1"/>
+              <a:t>calibrate</a:t>
+            </a:r>
+            <a:r>
+              <a:rPr lang="de-DE" dirty="0"/>
+              <a:t> </a:t>
+            </a:r>
+            <a:r>
+              <a:rPr lang="de-DE" dirty="0" err="1"/>
+              <a:t>simulation</a:t>
+            </a:r>
+            <a:r>
+              <a:rPr lang="de-DE" dirty="0"/>
+              <a:t> </a:t>
+            </a:r>
+            <a:r>
+              <a:rPr lang="de-DE" dirty="0" err="1"/>
+              <a:t>to</a:t>
+            </a:r>
+            <a:r>
+              <a:rPr lang="de-DE" dirty="0"/>
+              <a:t> </a:t>
+            </a:r>
+            <a:r>
+              <a:rPr lang="de-DE" dirty="0" err="1"/>
+              <a:t>better</a:t>
+            </a:r>
+            <a:r>
+              <a:rPr lang="de-DE" dirty="0"/>
+              <a:t> match real </a:t>
+            </a:r>
+            <a:r>
+              <a:rPr lang="de-DE" dirty="0" err="1"/>
+              <a:t>dynamics</a:t>
+            </a:r>
+            <a:endParaRPr lang="de-DE" dirty="0"/>
+          </a:p>
+          <a:p>
+            <a:r>
+              <a:rPr lang="de-DE" dirty="0" err="1"/>
+              <a:t>fine</a:t>
+            </a:r>
+            <a:r>
+              <a:rPr lang="de-DE" dirty="0"/>
+              <a:t>-tuning on real </a:t>
+            </a:r>
+            <a:r>
+              <a:rPr lang="de-DE" dirty="0" err="1"/>
+              <a:t>data</a:t>
+            </a:r>
+            <a:r>
+              <a:rPr lang="de-DE" dirty="0"/>
+              <a:t>: </a:t>
+            </a:r>
+            <a:r>
+              <a:rPr lang="de-DE" dirty="0" err="1"/>
+              <a:t>small</a:t>
+            </a:r>
+            <a:r>
+              <a:rPr lang="de-DE" dirty="0"/>
+              <a:t> </a:t>
+            </a:r>
+            <a:r>
+              <a:rPr lang="de-DE" dirty="0" err="1"/>
+              <a:t>amount</a:t>
+            </a:r>
+            <a:r>
+              <a:rPr lang="de-DE" dirty="0"/>
+              <a:t> </a:t>
+            </a:r>
+            <a:r>
+              <a:rPr lang="de-DE" dirty="0" err="1"/>
+              <a:t>of</a:t>
+            </a:r>
+            <a:r>
+              <a:rPr lang="de-DE" dirty="0"/>
+              <a:t> real-</a:t>
+            </a:r>
+            <a:r>
+              <a:rPr lang="de-DE" dirty="0" err="1"/>
+              <a:t>world</a:t>
+            </a:r>
+            <a:r>
+              <a:rPr lang="de-DE" dirty="0"/>
+              <a:t> </a:t>
+            </a:r>
+            <a:r>
+              <a:rPr lang="de-DE" dirty="0" err="1"/>
+              <a:t>adaptation</a:t>
+            </a:r>
+            <a:endParaRPr lang="de-DE" dirty="0"/>
+          </a:p>
+          <a:p>
+            <a:r>
+              <a:rPr lang="de-DE" dirty="0"/>
+              <a:t>robust </a:t>
+            </a:r>
+            <a:r>
+              <a:rPr lang="de-DE" dirty="0" err="1"/>
+              <a:t>policy</a:t>
+            </a:r>
+            <a:r>
+              <a:rPr lang="de-DE" dirty="0"/>
+              <a:t> </a:t>
+            </a:r>
+            <a:r>
+              <a:rPr lang="de-DE" dirty="0" err="1"/>
+              <a:t>learning</a:t>
+            </a:r>
+            <a:r>
+              <a:rPr lang="de-DE" dirty="0"/>
+              <a:t>: </a:t>
+            </a:r>
+            <a:r>
+              <a:rPr lang="de-DE" dirty="0" err="1"/>
+              <a:t>train</a:t>
+            </a:r>
+            <a:r>
+              <a:rPr lang="de-DE" dirty="0"/>
+              <a:t> </a:t>
+            </a:r>
+            <a:r>
+              <a:rPr lang="de-DE" dirty="0" err="1"/>
+              <a:t>policies</a:t>
+            </a:r>
+            <a:r>
+              <a:rPr lang="de-DE" dirty="0"/>
+              <a:t> </a:t>
+            </a:r>
+            <a:r>
+              <a:rPr lang="de-DE" dirty="0" err="1"/>
+              <a:t>that</a:t>
+            </a:r>
+            <a:r>
+              <a:rPr lang="de-DE" dirty="0"/>
+              <a:t> </a:t>
+            </a:r>
+            <a:r>
+              <a:rPr lang="de-DE" dirty="0" err="1"/>
+              <a:t>generalize</a:t>
+            </a:r>
+            <a:r>
+              <a:rPr lang="de-DE" dirty="0"/>
+              <a:t> </a:t>
+            </a:r>
+            <a:r>
+              <a:rPr lang="de-DE" dirty="0" err="1"/>
+              <a:t>across</a:t>
+            </a:r>
+            <a:r>
+              <a:rPr lang="de-DE" dirty="0"/>
+              <a:t> </a:t>
+            </a:r>
+            <a:r>
+              <a:rPr lang="de-DE" dirty="0" err="1"/>
+              <a:t>variations</a:t>
+            </a:r>
+            <a:endParaRPr lang="de-DE" dirty="0"/>
           </a:p>
         </p:txBody>
       </p:sp>
@@ -5915,19 +7903,455 @@
         </p:nvSpPr>
         <p:spPr/>
         <p:txBody>
-          <a:bodyPr/>
+          <a:bodyPr>
+            <a:normAutofit fontScale="92500" lnSpcReduction="20000"/>
+          </a:bodyPr>
           <a:lstStyle/>
           <a:p>
             <a:pPr marL="0" indent="0">
               <a:buNone/>
             </a:pPr>
             <a:r>
-              <a:rPr lang="de-DE" dirty="0"/>
-              <a:t>e.g., </a:t>
-            </a:r>
-            <a:r>
-              <a:rPr lang="de-DE" dirty="0" err="1"/>
-              <a:t>SmolVLA</a:t>
+              <a:rPr lang="de-DE" dirty="0" err="1"/>
+              <a:t>idea</a:t>
+            </a:r>
+            <a:r>
+              <a:rPr lang="de-DE" dirty="0"/>
+              <a:t>: </a:t>
+            </a:r>
+            <a:r>
+              <a:rPr lang="de-DE" dirty="0" err="1"/>
+              <a:t>learn</a:t>
+            </a:r>
+            <a:r>
+              <a:rPr lang="de-DE" dirty="0"/>
+              <a:t> a </a:t>
+            </a:r>
+            <a:r>
+              <a:rPr lang="de-DE" dirty="0" err="1"/>
+              <a:t>single</a:t>
+            </a:r>
+            <a:r>
+              <a:rPr lang="de-DE" dirty="0"/>
+              <a:t> </a:t>
+            </a:r>
+            <a:r>
+              <a:rPr lang="de-DE" dirty="0" err="1"/>
+              <a:t>policy</a:t>
+            </a:r>
+            <a:r>
+              <a:rPr lang="de-DE" dirty="0"/>
+              <a:t> </a:t>
+            </a:r>
+            <a:r>
+              <a:rPr lang="de-DE" dirty="0" err="1"/>
+              <a:t>that</a:t>
+            </a:r>
+            <a:r>
+              <a:rPr lang="de-DE" dirty="0"/>
+              <a:t> </a:t>
+            </a:r>
+            <a:r>
+              <a:rPr lang="de-DE" dirty="0" err="1"/>
+              <a:t>can</a:t>
+            </a:r>
+            <a:r>
+              <a:rPr lang="de-DE" dirty="0"/>
+              <a:t> perform </a:t>
+            </a:r>
+            <a:r>
+              <a:rPr lang="de-DE" dirty="0" err="1"/>
+              <a:t>many</a:t>
+            </a:r>
+            <a:r>
+              <a:rPr lang="de-DE" dirty="0"/>
+              <a:t> different </a:t>
+            </a:r>
+            <a:r>
+              <a:rPr lang="de-DE" dirty="0" err="1"/>
+              <a:t>robotic</a:t>
+            </a:r>
+            <a:r>
+              <a:rPr lang="de-DE" dirty="0"/>
+              <a:t> </a:t>
+            </a:r>
+            <a:r>
+              <a:rPr lang="de-DE" dirty="0" err="1"/>
+              <a:t>tasks</a:t>
+            </a:r>
+            <a:r>
+              <a:rPr lang="de-DE" dirty="0"/>
+              <a:t>, </a:t>
+            </a:r>
+            <a:r>
+              <a:rPr lang="de-DE" dirty="0" err="1"/>
+              <a:t>rather</a:t>
+            </a:r>
+            <a:r>
+              <a:rPr lang="de-DE" dirty="0"/>
+              <a:t> </a:t>
+            </a:r>
+            <a:r>
+              <a:rPr lang="de-DE" dirty="0" err="1"/>
+              <a:t>than</a:t>
+            </a:r>
+            <a:r>
+              <a:rPr lang="de-DE" dirty="0"/>
+              <a:t> </a:t>
+            </a:r>
+            <a:r>
+              <a:rPr lang="de-DE" dirty="0" err="1"/>
+              <a:t>training</a:t>
+            </a:r>
+            <a:r>
+              <a:rPr lang="de-DE" dirty="0"/>
+              <a:t> separate </a:t>
+            </a:r>
+            <a:r>
+              <a:rPr lang="de-DE" dirty="0" err="1"/>
+              <a:t>models</a:t>
+            </a:r>
+            <a:r>
+              <a:rPr lang="de-DE" dirty="0"/>
+              <a:t> per </a:t>
+            </a:r>
+            <a:r>
+              <a:rPr lang="de-DE" dirty="0" err="1"/>
+              <a:t>task</a:t>
+            </a:r>
+            <a:endParaRPr lang="de-DE" dirty="0"/>
+          </a:p>
+          <a:p>
+            <a:pPr marL="0" indent="0">
+              <a:buNone/>
+            </a:pPr>
+            <a:r>
+              <a:rPr lang="de-DE" dirty="0">
+                <a:sym typeface="Wingdings" pitchFamily="2" charset="2"/>
+              </a:rPr>
+              <a:t> </a:t>
+            </a:r>
+            <a:r>
+              <a:rPr lang="de-DE" dirty="0" err="1">
+                <a:sym typeface="Wingdings" pitchFamily="2" charset="2"/>
+              </a:rPr>
+              <a:t>o</a:t>
+            </a:r>
+            <a:r>
+              <a:rPr lang="de-DE" dirty="0" err="1"/>
+              <a:t>ne</a:t>
+            </a:r>
+            <a:r>
+              <a:rPr lang="de-DE" dirty="0"/>
+              <a:t> </a:t>
+            </a:r>
+            <a:r>
+              <a:rPr lang="de-DE" dirty="0" err="1"/>
+              <a:t>model</a:t>
+            </a:r>
+            <a:r>
+              <a:rPr lang="de-DE" dirty="0"/>
+              <a:t>, </a:t>
+            </a:r>
+            <a:r>
+              <a:rPr lang="de-DE" dirty="0" err="1"/>
+              <a:t>many</a:t>
+            </a:r>
+            <a:r>
+              <a:rPr lang="de-DE" dirty="0"/>
+              <a:t> </a:t>
+            </a:r>
+            <a:r>
+              <a:rPr lang="de-DE" dirty="0" err="1"/>
+              <a:t>skills</a:t>
+            </a:r>
+            <a:r>
+              <a:rPr lang="de-DE" dirty="0"/>
+              <a:t>: </a:t>
+            </a:r>
+            <a:r>
+              <a:rPr lang="de-DE" dirty="0" err="1"/>
+              <a:t>manipulation</a:t>
+            </a:r>
+            <a:r>
+              <a:rPr lang="de-DE" dirty="0"/>
+              <a:t> (pick &amp; </a:t>
+            </a:r>
+            <a:r>
+              <a:rPr lang="de-DE" dirty="0" err="1"/>
+              <a:t>place</a:t>
+            </a:r>
+            <a:r>
+              <a:rPr lang="de-DE" dirty="0"/>
+              <a:t>, </a:t>
+            </a:r>
+            <a:r>
+              <a:rPr lang="de-DE" dirty="0" err="1"/>
+              <a:t>grasping</a:t>
+            </a:r>
+            <a:r>
+              <a:rPr lang="de-DE" dirty="0"/>
+              <a:t>)m </a:t>
+            </a:r>
+            <a:r>
+              <a:rPr lang="de-DE" dirty="0" err="1"/>
+              <a:t>navigation</a:t>
+            </a:r>
+            <a:r>
+              <a:rPr lang="de-DE" dirty="0"/>
+              <a:t>, </a:t>
+            </a:r>
+            <a:r>
+              <a:rPr lang="de-DE" dirty="0" err="1"/>
+              <a:t>tool</a:t>
+            </a:r>
+            <a:r>
+              <a:rPr lang="de-DE" dirty="0"/>
+              <a:t> </a:t>
+            </a:r>
+            <a:r>
+              <a:rPr lang="de-DE" dirty="0" err="1"/>
+              <a:t>use</a:t>
+            </a:r>
+            <a:r>
+              <a:rPr lang="de-DE" dirty="0"/>
+              <a:t>, multi-</a:t>
+            </a:r>
+            <a:r>
+              <a:rPr lang="de-DE" dirty="0" err="1"/>
+              <a:t>step</a:t>
+            </a:r>
+            <a:r>
+              <a:rPr lang="de-DE" dirty="0"/>
+              <a:t> </a:t>
+            </a:r>
+            <a:r>
+              <a:rPr lang="de-DE" dirty="0" err="1"/>
+              <a:t>household</a:t>
+            </a:r>
+            <a:r>
+              <a:rPr lang="de-DE" dirty="0"/>
+              <a:t> </a:t>
+            </a:r>
+            <a:r>
+              <a:rPr lang="de-DE" dirty="0" err="1"/>
+              <a:t>tasks</a:t>
+            </a:r>
+            <a:endParaRPr lang="de-DE" dirty="0"/>
+          </a:p>
+          <a:p>
+            <a:pPr marL="0" indent="0">
+              <a:buNone/>
+            </a:pPr>
+            <a:endParaRPr lang="de-DE" dirty="0"/>
+          </a:p>
+          <a:p>
+            <a:r>
+              <a:rPr lang="de-DE" dirty="0"/>
+              <a:t>large-</a:t>
+            </a:r>
+            <a:r>
+              <a:rPr lang="de-DE" dirty="0" err="1"/>
+              <a:t>scale</a:t>
+            </a:r>
+            <a:r>
+              <a:rPr lang="de-DE" dirty="0"/>
+              <a:t> multi-task </a:t>
+            </a:r>
+            <a:r>
+              <a:rPr lang="de-DE" dirty="0" err="1"/>
+              <a:t>datasets</a:t>
+            </a:r>
+            <a:r>
+              <a:rPr lang="de-DE" dirty="0"/>
+              <a:t> (</a:t>
+            </a:r>
+            <a:r>
+              <a:rPr lang="de-DE" dirty="0" err="1"/>
+              <a:t>often</a:t>
+            </a:r>
+            <a:r>
+              <a:rPr lang="de-DE" dirty="0"/>
+              <a:t> </a:t>
+            </a:r>
+            <a:r>
+              <a:rPr lang="de-DE" dirty="0" err="1"/>
+              <a:t>across</a:t>
+            </a:r>
+            <a:r>
+              <a:rPr lang="de-DE" dirty="0"/>
+              <a:t> </a:t>
+            </a:r>
+            <a:r>
+              <a:rPr lang="de-DE" dirty="0" err="1"/>
+              <a:t>robots</a:t>
+            </a:r>
+            <a:r>
+              <a:rPr lang="de-DE" dirty="0"/>
+              <a:t> and </a:t>
+            </a:r>
+            <a:r>
+              <a:rPr lang="de-DE" dirty="0" err="1"/>
+              <a:t>environments</a:t>
+            </a:r>
+            <a:r>
+              <a:rPr lang="de-DE" dirty="0"/>
+              <a:t>)</a:t>
+            </a:r>
+          </a:p>
+          <a:p>
+            <a:r>
+              <a:rPr lang="de-DE" dirty="0" err="1"/>
+              <a:t>unified</a:t>
+            </a:r>
+            <a:r>
+              <a:rPr lang="de-DE" dirty="0"/>
+              <a:t> </a:t>
+            </a:r>
+            <a:r>
+              <a:rPr lang="de-DE" dirty="0" err="1"/>
+              <a:t>policy</a:t>
+            </a:r>
+            <a:r>
+              <a:rPr lang="de-DE" dirty="0"/>
+              <a:t> </a:t>
+            </a:r>
+            <a:r>
+              <a:rPr lang="de-DE" dirty="0" err="1"/>
+              <a:t>architectures</a:t>
+            </a:r>
+            <a:r>
+              <a:rPr lang="de-DE" dirty="0"/>
+              <a:t> (</a:t>
+            </a:r>
+            <a:r>
+              <a:rPr lang="de-DE" dirty="0" err="1"/>
+              <a:t>often</a:t>
+            </a:r>
+            <a:r>
+              <a:rPr lang="de-DE" dirty="0"/>
+              <a:t> </a:t>
+            </a:r>
+            <a:r>
+              <a:rPr lang="de-DE" dirty="0" err="1"/>
+              <a:t>transformer-based</a:t>
+            </a:r>
+            <a:r>
+              <a:rPr lang="de-DE" dirty="0"/>
+              <a:t>)</a:t>
+            </a:r>
+          </a:p>
+          <a:p>
+            <a:r>
+              <a:rPr lang="de-DE" dirty="0" err="1"/>
+              <a:t>conditioning</a:t>
+            </a:r>
+            <a:r>
+              <a:rPr lang="de-DE" dirty="0"/>
+              <a:t> on </a:t>
+            </a:r>
+            <a:r>
+              <a:rPr lang="de-DE" dirty="0" err="1"/>
+              <a:t>task</a:t>
+            </a:r>
+            <a:r>
+              <a:rPr lang="de-DE" dirty="0"/>
+              <a:t> </a:t>
+            </a:r>
+            <a:r>
+              <a:rPr lang="de-DE" dirty="0" err="1"/>
+              <a:t>instructions</a:t>
+            </a:r>
+            <a:r>
+              <a:rPr lang="de-DE" dirty="0"/>
+              <a:t> (e.g., </a:t>
+            </a:r>
+            <a:r>
+              <a:rPr lang="de-DE" dirty="0" err="1"/>
+              <a:t>language</a:t>
+            </a:r>
+            <a:r>
+              <a:rPr lang="de-DE" dirty="0"/>
+              <a:t>, </a:t>
+            </a:r>
+            <a:r>
+              <a:rPr lang="de-DE" dirty="0" err="1"/>
+              <a:t>goal</a:t>
+            </a:r>
+            <a:r>
+              <a:rPr lang="de-DE" dirty="0"/>
+              <a:t> </a:t>
+            </a:r>
+            <a:r>
+              <a:rPr lang="de-DE" dirty="0" err="1"/>
+              <a:t>images</a:t>
+            </a:r>
+            <a:r>
+              <a:rPr lang="de-DE" dirty="0"/>
+              <a:t>, </a:t>
+            </a:r>
+            <a:r>
+              <a:rPr lang="de-DE" dirty="0" err="1"/>
+              <a:t>demonstrations</a:t>
+            </a:r>
+            <a:r>
+              <a:rPr lang="de-DE" dirty="0"/>
+              <a:t>)</a:t>
+            </a:r>
+          </a:p>
+          <a:p>
+            <a:pPr marL="0" indent="0">
+              <a:buNone/>
+            </a:pPr>
+            <a:endParaRPr lang="de-DE" dirty="0"/>
+          </a:p>
+          <a:p>
+            <a:pPr marL="0" indent="0">
+              <a:buNone/>
+            </a:pPr>
+            <a:r>
+              <a:rPr lang="de-DE" dirty="0" err="1"/>
+              <a:t>step</a:t>
+            </a:r>
+            <a:r>
+              <a:rPr lang="de-DE" dirty="0"/>
+              <a:t> </a:t>
+            </a:r>
+            <a:r>
+              <a:rPr lang="de-DE" dirty="0" err="1"/>
+              <a:t>toward</a:t>
+            </a:r>
+            <a:r>
+              <a:rPr lang="de-DE" dirty="0"/>
+              <a:t> </a:t>
+            </a:r>
+            <a:r>
+              <a:rPr lang="de-DE" dirty="0" err="1"/>
+              <a:t>scalable</a:t>
+            </a:r>
+            <a:r>
+              <a:rPr lang="de-DE" dirty="0"/>
+              <a:t> </a:t>
+            </a:r>
+            <a:r>
+              <a:rPr lang="de-DE" dirty="0" err="1"/>
+              <a:t>robot</a:t>
+            </a:r>
+            <a:r>
+              <a:rPr lang="de-DE" dirty="0"/>
+              <a:t> </a:t>
+            </a:r>
+            <a:r>
+              <a:rPr lang="de-DE" dirty="0" err="1"/>
+              <a:t>foundation</a:t>
+            </a:r>
+            <a:r>
+              <a:rPr lang="de-DE" dirty="0"/>
+              <a:t> </a:t>
+            </a:r>
+            <a:r>
+              <a:rPr lang="de-DE" dirty="0" err="1"/>
+              <a:t>models</a:t>
             </a:r>
             <a:endParaRPr lang="de-DE" dirty="0"/>
           </a:p>
@@ -6458,7 +8882,7 @@
           <a:p>
             <a:r>
               <a:rPr lang="de-DE" dirty="0"/>
-              <a:t>Vision-Language-Action Models</a:t>
+              <a:t>Vision-Language-Action (VLA) Models</a:t>
             </a:r>
           </a:p>
         </p:txBody>
@@ -6479,9 +8903,16 @@
             <p:ph idx="1"/>
           </p:nvPr>
         </p:nvSpPr>
-        <p:spPr/>
+        <p:spPr>
+          <a:xfrm>
+            <a:off x="838200" y="1825625"/>
+            <a:ext cx="10697308" cy="4351338"/>
+          </a:xfrm>
+        </p:spPr>
         <p:txBody>
-          <a:bodyPr/>
+          <a:bodyPr>
+            <a:normAutofit fontScale="85000" lnSpcReduction="20000"/>
+          </a:bodyPr>
           <a:lstStyle/>
           <a:p>
             <a:pPr marL="0" indent="0">
@@ -6489,7 +8920,47 @@
             </a:pPr>
             <a:r>
               <a:rPr lang="de-DE" dirty="0" err="1"/>
-              <a:t>integrating</a:t>
+              <a:t>idea</a:t>
+            </a:r>
+            <a:r>
+              <a:rPr lang="de-DE" dirty="0"/>
+              <a:t>: </a:t>
+            </a:r>
+            <a:r>
+              <a:rPr lang="de-DE" dirty="0" err="1"/>
+              <a:t>learn</a:t>
+            </a:r>
+            <a:r>
+              <a:rPr lang="de-DE" dirty="0"/>
+              <a:t> </a:t>
+            </a:r>
+            <a:r>
+              <a:rPr lang="de-DE" dirty="0" err="1"/>
+              <a:t>robot</a:t>
+            </a:r>
+            <a:r>
+              <a:rPr lang="de-DE" dirty="0"/>
+              <a:t> </a:t>
+            </a:r>
+            <a:r>
+              <a:rPr lang="de-DE" dirty="0" err="1"/>
+              <a:t>policies</a:t>
+            </a:r>
+            <a:r>
+              <a:rPr lang="de-DE" dirty="0"/>
+              <a:t> </a:t>
+            </a:r>
+            <a:r>
+              <a:rPr lang="de-DE" dirty="0" err="1"/>
+              <a:t>that</a:t>
+            </a:r>
+            <a:r>
+              <a:rPr lang="de-DE" dirty="0"/>
+              <a:t> </a:t>
+            </a:r>
+            <a:r>
+              <a:rPr lang="de-DE" dirty="0" err="1"/>
+              <a:t>map</a:t>
             </a:r>
             <a:r>
               <a:rPr lang="de-DE" dirty="0"/>
@@ -6505,7 +8976,7 @@
             </a:r>
             <a:r>
               <a:rPr lang="de-DE" dirty="0" err="1"/>
-              <a:t>textual</a:t>
+              <a:t>language</a:t>
             </a:r>
             <a:r>
               <a:rPr lang="de-DE" dirty="0"/>
@@ -6521,11 +8992,113 @@
             </a:r>
             <a:r>
               <a:rPr lang="de-DE" dirty="0" err="1"/>
-              <a:t>for</a:t>
-            </a:r>
-            <a:r>
-              <a:rPr lang="de-DE" dirty="0"/>
-              <a:t> </a:t>
+              <a:t>directly</a:t>
+            </a:r>
+            <a:r>
+              <a:rPr lang="de-DE" dirty="0"/>
+              <a:t> </a:t>
+            </a:r>
+            <a:r>
+              <a:rPr lang="de-DE" dirty="0" err="1"/>
+              <a:t>to</a:t>
+            </a:r>
+            <a:r>
+              <a:rPr lang="de-DE" dirty="0"/>
+              <a:t> </a:t>
+            </a:r>
+            <a:r>
+              <a:rPr lang="de-DE" dirty="0" err="1"/>
+              <a:t>actions</a:t>
+            </a:r>
+            <a:r>
+              <a:rPr lang="de-DE" dirty="0"/>
+              <a:t>, </a:t>
+            </a:r>
+            <a:r>
+              <a:rPr lang="de-DE" dirty="0" err="1"/>
+              <a:t>enabling</a:t>
+            </a:r>
+            <a:r>
+              <a:rPr lang="de-DE" dirty="0"/>
+              <a:t> </a:t>
+            </a:r>
+            <a:r>
+              <a:rPr lang="de-DE" dirty="0" err="1"/>
+              <a:t>instruction-following</a:t>
+            </a:r>
+            <a:r>
+              <a:rPr lang="de-DE" dirty="0"/>
+              <a:t> </a:t>
+            </a:r>
+            <a:r>
+              <a:rPr lang="de-DE" dirty="0" err="1"/>
+              <a:t>embodied</a:t>
+            </a:r>
+            <a:r>
+              <a:rPr lang="de-DE" dirty="0"/>
+              <a:t> </a:t>
+            </a:r>
+            <a:r>
+              <a:rPr lang="de-DE" dirty="0" err="1"/>
+              <a:t>behavior</a:t>
+            </a:r>
+            <a:endParaRPr lang="de-DE" dirty="0"/>
+          </a:p>
+          <a:p>
+            <a:pPr marL="0" indent="0">
+              <a:buNone/>
+            </a:pPr>
+            <a:r>
+              <a:rPr lang="de-DE" dirty="0">
+                <a:sym typeface="Wingdings" pitchFamily="2" charset="2"/>
+              </a:rPr>
+              <a:t> </a:t>
+            </a:r>
+            <a:r>
+              <a:rPr lang="de-DE" dirty="0" err="1">
+                <a:sym typeface="Wingdings" pitchFamily="2" charset="2"/>
+              </a:rPr>
+              <a:t>u</a:t>
+            </a:r>
+            <a:r>
+              <a:rPr lang="de-DE" dirty="0" err="1"/>
+              <a:t>nify</a:t>
+            </a:r>
+            <a:r>
+              <a:rPr lang="de-DE" dirty="0"/>
+              <a:t> </a:t>
+            </a:r>
+            <a:r>
+              <a:rPr lang="de-DE" dirty="0" err="1"/>
+              <a:t>perception</a:t>
+            </a:r>
+            <a:r>
+              <a:rPr lang="de-DE" dirty="0"/>
+              <a:t>, </a:t>
+            </a:r>
+            <a:r>
+              <a:rPr lang="de-DE" dirty="0" err="1"/>
+              <a:t>reasoning</a:t>
+            </a:r>
+            <a:r>
+              <a:rPr lang="de-DE" dirty="0"/>
+              <a:t>, and </a:t>
+            </a:r>
+            <a:r>
+              <a:rPr lang="de-DE" dirty="0" err="1"/>
+              <a:t>control</a:t>
+            </a:r>
+            <a:r>
+              <a:rPr lang="de-DE" dirty="0"/>
+              <a:t> in a </a:t>
+            </a:r>
+            <a:r>
+              <a:rPr lang="de-DE" dirty="0" err="1"/>
+              <a:t>single</a:t>
+            </a:r>
+            <a:r>
+              <a:rPr lang="de-DE" dirty="0"/>
+              <a:t> multimodal </a:t>
             </a:r>
             <a:r>
               <a:rPr lang="de-DE" dirty="0" err="1"/>
@@ -6537,7 +9110,7 @@
             </a:r>
             <a:r>
               <a:rPr lang="de-DE" dirty="0" err="1"/>
-              <a:t>learning</a:t>
+              <a:t>model</a:t>
             </a:r>
             <a:endParaRPr lang="de-DE" dirty="0"/>
           </a:p>
@@ -6548,6 +9121,27 @@
             <a:endParaRPr lang="de-DE" dirty="0"/>
           </a:p>
           <a:p>
+            <a:pPr marL="0" indent="0">
+              <a:buNone/>
+            </a:pPr>
+            <a:r>
+              <a:rPr lang="de-DE" dirty="0" err="1"/>
+              <a:t>model</a:t>
+            </a:r>
+            <a:r>
+              <a:rPr lang="de-DE" dirty="0"/>
+              <a:t> </a:t>
+            </a:r>
+            <a:r>
+              <a:rPr lang="de-DE" dirty="0" err="1"/>
+              <a:t>components</a:t>
+            </a:r>
+            <a:r>
+              <a:rPr lang="de-DE" dirty="0"/>
+              <a:t>:</a:t>
+            </a:r>
+          </a:p>
+          <a:p>
             <a:r>
               <a:rPr lang="de-DE" dirty="0" err="1"/>
               <a:t>vision</a:t>
@@ -6562,19 +9156,138 @@
             </a:r>
             <a:r>
               <a:rPr lang="de-DE" dirty="0"/>
+              <a:t> (e.g., </a:t>
+            </a:r>
+            <a:r>
+              <a:rPr lang="de-DE" dirty="0" err="1"/>
+              <a:t>ResNet</a:t>
+            </a:r>
+            <a:r>
+              <a:rPr lang="de-DE" dirty="0"/>
+              <a:t>, </a:t>
+            </a:r>
+            <a:r>
+              <a:rPr lang="de-DE" dirty="0" err="1"/>
+              <a:t>ViT</a:t>
+            </a:r>
+            <a:r>
+              <a:rPr lang="de-DE" dirty="0"/>
+              <a:t>): </a:t>
+            </a:r>
+            <a:r>
+              <a:rPr lang="de-DE" dirty="0" err="1"/>
+              <a:t>extract</a:t>
+            </a:r>
+            <a:r>
+              <a:rPr lang="de-DE" dirty="0"/>
+              <a:t> </a:t>
+            </a:r>
+            <a:r>
+              <a:rPr lang="de-DE" dirty="0" err="1"/>
+              <a:t>features</a:t>
+            </a:r>
+            <a:r>
+              <a:rPr lang="de-DE" dirty="0"/>
+              <a:t> </a:t>
+            </a:r>
+            <a:r>
+              <a:rPr lang="de-DE" dirty="0" err="1"/>
+              <a:t>from</a:t>
+            </a:r>
+            <a:r>
+              <a:rPr lang="de-DE" dirty="0"/>
+              <a:t> </a:t>
+            </a:r>
+            <a:r>
+              <a:rPr lang="de-DE" dirty="0" err="1"/>
+              <a:t>images</a:t>
+            </a:r>
+            <a:r>
+              <a:rPr lang="de-DE" dirty="0"/>
+              <a:t> / </a:t>
+            </a:r>
+            <a:r>
+              <a:rPr lang="de-DE" dirty="0" err="1"/>
+              <a:t>observations</a:t>
+            </a:r>
+            <a:endParaRPr lang="de-DE" dirty="0"/>
+          </a:p>
+          <a:p>
+            <a:r>
+              <a:rPr lang="de-DE" dirty="0" err="1"/>
+              <a:t>language</a:t>
+            </a:r>
+            <a:r>
+              <a:rPr lang="de-DE" dirty="0"/>
+              <a:t> </a:t>
+            </a:r>
+            <a:r>
+              <a:rPr lang="de-DE" dirty="0" err="1"/>
+              <a:t>models</a:t>
+            </a:r>
+            <a:r>
+              <a:rPr lang="de-DE" dirty="0"/>
+              <a:t>: </a:t>
+            </a:r>
+            <a:r>
+              <a:rPr lang="de-DE" dirty="0" err="1"/>
+              <a:t>encode</a:t>
+            </a:r>
+            <a:r>
+              <a:rPr lang="de-DE" dirty="0"/>
+              <a:t> </a:t>
+            </a:r>
+            <a:r>
+              <a:rPr lang="de-DE" dirty="0" err="1"/>
+              <a:t>task</a:t>
+            </a:r>
+            <a:r>
+              <a:rPr lang="de-DE" dirty="0"/>
+              <a:t> </a:t>
+            </a:r>
+            <a:r>
+              <a:rPr lang="de-DE" dirty="0" err="1"/>
+              <a:t>instructions</a:t>
+            </a:r>
+            <a:r>
+              <a:rPr lang="de-DE" dirty="0"/>
+              <a:t> </a:t>
+            </a:r>
+            <a:r>
+              <a:rPr lang="de-DE" dirty="0" err="1"/>
+              <a:t>or</a:t>
+            </a:r>
+            <a:r>
+              <a:rPr lang="de-DE" dirty="0"/>
+              <a:t> </a:t>
+            </a:r>
+            <a:r>
+              <a:rPr lang="de-DE" dirty="0" err="1"/>
+              <a:t>goals</a:t>
+            </a:r>
+            <a:r>
+              <a:rPr lang="de-DE" dirty="0"/>
               <a:t> (</a:t>
             </a:r>
             <a:r>
               <a:rPr lang="de-DE" dirty="0" err="1"/>
-              <a:t>ResNet</a:t>
-            </a:r>
-            <a:r>
-              <a:rPr lang="de-DE" dirty="0"/>
-              <a:t>, </a:t>
-            </a:r>
-            <a:r>
-              <a:rPr lang="de-DE" dirty="0" err="1"/>
-              <a:t>ViT</a:t>
+              <a:t>natural</a:t>
+            </a:r>
+            <a:r>
+              <a:rPr lang="de-DE" dirty="0"/>
+              <a:t> </a:t>
+            </a:r>
+            <a:r>
+              <a:rPr lang="de-DE" dirty="0" err="1"/>
+              <a:t>language</a:t>
+            </a:r>
+            <a:r>
+              <a:rPr lang="de-DE" dirty="0"/>
+              <a:t> </a:t>
+            </a:r>
+            <a:r>
+              <a:rPr lang="de-DE" dirty="0" err="1"/>
+              <a:t>control</a:t>
             </a:r>
             <a:r>
               <a:rPr lang="de-DE" dirty="0"/>
@@ -6583,6 +9296,34 @@
           </a:p>
           <a:p>
             <a:r>
+              <a:rPr lang="de-DE" dirty="0"/>
+              <a:t>multimodal </a:t>
+            </a:r>
+            <a:r>
+              <a:rPr lang="de-DE" dirty="0" err="1"/>
+              <a:t>fusion</a:t>
+            </a:r>
+            <a:r>
+              <a:rPr lang="de-DE" dirty="0"/>
+              <a:t>: </a:t>
+            </a:r>
+            <a:r>
+              <a:rPr lang="de-DE" dirty="0" err="1"/>
+              <a:t>combine</a:t>
+            </a:r>
+            <a:r>
+              <a:rPr lang="de-DE" dirty="0"/>
+              <a:t> </a:t>
+            </a:r>
+            <a:r>
+              <a:rPr lang="de-DE" dirty="0" err="1"/>
+              <a:t>vision</a:t>
+            </a:r>
+            <a:r>
+              <a:rPr lang="de-DE" dirty="0"/>
+              <a:t> + </a:t>
+            </a:r>
+            <a:r>
               <a:rPr lang="de-DE" dirty="0" err="1"/>
               <a:t>language</a:t>
             </a:r>
@@ -6592,49 +9333,142 @@
             </a:r>
             <a:r>
               <a:rPr lang="de-DE" dirty="0" err="1"/>
+              <a:t>into</a:t>
+            </a:r>
+            <a:r>
+              <a:rPr lang="de-DE" dirty="0"/>
+              <a:t> a </a:t>
+            </a:r>
+            <a:r>
+              <a:rPr lang="de-DE" dirty="0" err="1"/>
+              <a:t>shared</a:t>
+            </a:r>
+            <a:r>
+              <a:rPr lang="de-DE" dirty="0"/>
+              <a:t> </a:t>
+            </a:r>
+            <a:r>
+              <a:rPr lang="de-DE" dirty="0" err="1"/>
+              <a:t>representation</a:t>
+            </a:r>
+            <a:endParaRPr lang="de-DE" dirty="0"/>
+          </a:p>
+          <a:p>
+            <a:r>
+              <a:rPr lang="de-DE" dirty="0" err="1"/>
+              <a:t>action</a:t>
+            </a:r>
+            <a:r>
+              <a:rPr lang="de-DE" dirty="0"/>
+              <a:t> </a:t>
+            </a:r>
+            <a:r>
+              <a:rPr lang="de-DE" dirty="0" err="1"/>
+              <a:t>head</a:t>
+            </a:r>
+            <a:r>
+              <a:rPr lang="de-DE" dirty="0"/>
+              <a:t> / </a:t>
+            </a:r>
+            <a:r>
+              <a:rPr lang="de-DE" dirty="0" err="1"/>
+              <a:t>decoder</a:t>
+            </a:r>
+            <a:r>
+              <a:rPr lang="de-DE" dirty="0"/>
+              <a:t>: </a:t>
+            </a:r>
+            <a:r>
+              <a:rPr lang="de-DE" dirty="0" err="1"/>
+              <a:t>outputs</a:t>
+            </a:r>
+            <a:r>
+              <a:rPr lang="de-DE" dirty="0"/>
+              <a:t> </a:t>
+            </a:r>
+            <a:r>
+              <a:rPr lang="de-DE" dirty="0" err="1"/>
+              <a:t>motor</a:t>
+            </a:r>
+            <a:r>
+              <a:rPr lang="de-DE" dirty="0"/>
+              <a:t> </a:t>
+            </a:r>
+            <a:r>
+              <a:rPr lang="de-DE" dirty="0" err="1"/>
+              <a:t>commands</a:t>
+            </a:r>
+            <a:r>
+              <a:rPr lang="de-DE" dirty="0"/>
+              <a:t> </a:t>
+            </a:r>
+            <a:r>
+              <a:rPr lang="de-DE" dirty="0" err="1"/>
+              <a:t>or</a:t>
+            </a:r>
+            <a:r>
+              <a:rPr lang="de-DE" dirty="0"/>
+              <a:t> </a:t>
+            </a:r>
+            <a:r>
+              <a:rPr lang="de-DE" dirty="0" err="1"/>
+              <a:t>action</a:t>
+            </a:r>
+            <a:r>
+              <a:rPr lang="de-DE" dirty="0"/>
+              <a:t> </a:t>
+            </a:r>
+            <a:r>
+              <a:rPr lang="de-DE" dirty="0" err="1"/>
+              <a:t>tokens</a:t>
+            </a:r>
+            <a:endParaRPr lang="de-DE" dirty="0"/>
+          </a:p>
+          <a:p>
+            <a:pPr marL="0" indent="0">
+              <a:buNone/>
+            </a:pPr>
+            <a:endParaRPr lang="de-DE" dirty="0"/>
+          </a:p>
+          <a:p>
+            <a:pPr marL="0" indent="0">
+              <a:buNone/>
+            </a:pPr>
+            <a:r>
+              <a:rPr lang="de-DE" dirty="0" err="1"/>
+              <a:t>central</a:t>
+            </a:r>
+            <a:r>
+              <a:rPr lang="de-DE" dirty="0"/>
+              <a:t> </a:t>
+            </a:r>
+            <a:r>
+              <a:rPr lang="de-DE" dirty="0" err="1"/>
+              <a:t>component</a:t>
+            </a:r>
+            <a:r>
+              <a:rPr lang="de-DE" dirty="0"/>
+              <a:t> in modern </a:t>
+            </a:r>
+            <a:r>
+              <a:rPr lang="de-DE" dirty="0" err="1"/>
+              <a:t>robot</a:t>
+            </a:r>
+            <a:r>
+              <a:rPr lang="de-DE" dirty="0"/>
+              <a:t> </a:t>
+            </a:r>
+            <a:r>
+              <a:rPr lang="de-DE" dirty="0" err="1"/>
+              <a:t>foundation</a:t>
+            </a:r>
+            <a:r>
+              <a:rPr lang="de-DE" dirty="0"/>
+              <a:t> </a:t>
+            </a:r>
+            <a:r>
+              <a:rPr lang="de-DE" dirty="0" err="1"/>
               <a:t>models</a:t>
-            </a:r>
-            <a:endParaRPr lang="de-DE" dirty="0"/>
-          </a:p>
-          <a:p>
-            <a:r>
-              <a:rPr lang="de-DE" dirty="0"/>
-              <a:t>multimodal </a:t>
-            </a:r>
-            <a:r>
-              <a:rPr lang="de-DE" dirty="0" err="1"/>
-              <a:t>fusion</a:t>
-            </a:r>
-            <a:endParaRPr lang="de-DE" dirty="0"/>
-          </a:p>
-          <a:p>
-            <a:r>
-              <a:rPr lang="de-DE" dirty="0" err="1"/>
-              <a:t>tokenization</a:t>
-            </a:r>
-            <a:r>
-              <a:rPr lang="de-DE" dirty="0"/>
-              <a:t> </a:t>
-            </a:r>
-            <a:r>
-              <a:rPr lang="de-DE" dirty="0" err="1"/>
-              <a:t>of</a:t>
-            </a:r>
-            <a:r>
-              <a:rPr lang="de-DE" dirty="0"/>
-              <a:t> </a:t>
-            </a:r>
-            <a:r>
-              <a:rPr lang="de-DE" dirty="0" err="1"/>
-              <a:t>sensorimotor</a:t>
-            </a:r>
-            <a:r>
-              <a:rPr lang="de-DE" dirty="0"/>
-              <a:t> </a:t>
-            </a:r>
-            <a:r>
-              <a:rPr lang="de-DE" dirty="0" err="1"/>
-              <a:t>sequences</a:t>
             </a:r>
             <a:endParaRPr lang="de-DE" dirty="0"/>
           </a:p>
@@ -7045,158 +9879,6 @@
 </p:sld>
 </file>
 
-<file path=ppt/slides/slide22.xml><?xml version="1.0" encoding="utf-8"?>
-<p:sld xmlns:a="http://schemas.openxmlformats.org/drawingml/2006/main" xmlns:r="http://schemas.openxmlformats.org/officeDocument/2006/relationships" xmlns:p="http://schemas.openxmlformats.org/presentationml/2006/main">
-  <p:cSld>
-    <p:spTree>
-      <p:nvGrpSpPr>
-        <p:cNvPr id="1" name=""/>
-        <p:cNvGrpSpPr/>
-        <p:nvPr/>
-      </p:nvGrpSpPr>
-      <p:grpSpPr>
-        <a:xfrm>
-          <a:off x="0" y="0"/>
-          <a:ext cx="0" cy="0"/>
-          <a:chOff x="0" y="0"/>
-          <a:chExt cx="0" cy="0"/>
-        </a:xfrm>
-      </p:grpSpPr>
-      <p:sp>
-        <p:nvSpPr>
-          <p:cNvPr id="2" name="Titel 1">
-            <a:extLst>
-              <a:ext uri="{FF2B5EF4-FFF2-40B4-BE49-F238E27FC236}">
-                <a16:creationId xmlns:a16="http://schemas.microsoft.com/office/drawing/2014/main" id="{2C8A541A-688B-352E-B669-CBF5322109C5}"/>
-              </a:ext>
-            </a:extLst>
-          </p:cNvPr>
-          <p:cNvSpPr>
-            <a:spLocks noGrp="1"/>
-          </p:cNvSpPr>
-          <p:nvPr>
-            <p:ph type="title"/>
-          </p:nvPr>
-        </p:nvSpPr>
-        <p:spPr/>
-        <p:txBody>
-          <a:bodyPr/>
-          <a:lstStyle/>
-          <a:p>
-            <a:r>
-              <a:rPr lang="de-DE" dirty="0"/>
-              <a:t>Practice Project</a:t>
-            </a:r>
-          </a:p>
-        </p:txBody>
-      </p:sp>
-      <p:sp>
-        <p:nvSpPr>
-          <p:cNvPr id="3" name="Inhaltsplatzhalter 2">
-            <a:extLst>
-              <a:ext uri="{FF2B5EF4-FFF2-40B4-BE49-F238E27FC236}">
-                <a16:creationId xmlns:a16="http://schemas.microsoft.com/office/drawing/2014/main" id="{E4F5C922-C516-DF84-C547-EB961559F25A}"/>
-              </a:ext>
-            </a:extLst>
-          </p:cNvPr>
-          <p:cNvSpPr>
-            <a:spLocks noGrp="1"/>
-          </p:cNvSpPr>
-          <p:nvPr>
-            <p:ph idx="1"/>
-          </p:nvPr>
-        </p:nvSpPr>
-        <p:spPr/>
-        <p:txBody>
-          <a:bodyPr/>
-          <a:lstStyle/>
-          <a:p>
-            <a:pPr marL="0" indent="0">
-              <a:buNone/>
-            </a:pPr>
-            <a:endParaRPr lang="de-DE" dirty="0"/>
-          </a:p>
-          <a:p>
-            <a:pPr marL="0" indent="0">
-              <a:buNone/>
-            </a:pPr>
-            <a:endParaRPr lang="de-DE" dirty="0"/>
-          </a:p>
-          <a:p>
-            <a:pPr marL="0" indent="0">
-              <a:buNone/>
-            </a:pPr>
-            <a:r>
-              <a:rPr lang="de-DE" dirty="0">
-                <a:hlinkClick r:id="rId2"/>
-              </a:rPr>
-              <a:t>Gymnasium Pendulum</a:t>
-            </a:r>
-            <a:r>
-              <a:rPr lang="de-DE" dirty="0"/>
-              <a:t> </a:t>
-            </a:r>
-            <a:r>
-              <a:rPr lang="de-DE" dirty="0" err="1"/>
-              <a:t>with</a:t>
-            </a:r>
-            <a:r>
-              <a:rPr lang="de-DE" dirty="0"/>
-              <a:t> </a:t>
-            </a:r>
-            <a:r>
-              <a:rPr lang="de-DE" dirty="0" err="1"/>
-              <a:t>Decision</a:t>
-            </a:r>
-            <a:r>
-              <a:rPr lang="de-DE" dirty="0"/>
-              <a:t> Transformer</a:t>
-            </a:r>
-          </a:p>
-        </p:txBody>
-      </p:sp>
-      <p:sp>
-        <p:nvSpPr>
-          <p:cNvPr id="4" name="Foliennummernplatzhalter 3">
-            <a:extLst>
-              <a:ext uri="{FF2B5EF4-FFF2-40B4-BE49-F238E27FC236}">
-                <a16:creationId xmlns:a16="http://schemas.microsoft.com/office/drawing/2014/main" id="{35F9A812-E563-E4FA-9399-59C1E5768553}"/>
-              </a:ext>
-            </a:extLst>
-          </p:cNvPr>
-          <p:cNvSpPr>
-            <a:spLocks noGrp="1"/>
-          </p:cNvSpPr>
-          <p:nvPr>
-            <p:ph type="sldNum" sz="quarter" idx="12"/>
-          </p:nvPr>
-        </p:nvSpPr>
-        <p:spPr/>
-        <p:txBody>
-          <a:bodyPr/>
-          <a:lstStyle/>
-          <a:p>
-            <a:fld id="{08C366F5-AFAD-49CB-854A-9D9E238FCA13}" type="slidenum">
-              <a:rPr lang="en-GB" smtClean="0"/>
-              <a:t>22</a:t>
-            </a:fld>
-            <a:endParaRPr lang="en-GB"/>
-          </a:p>
-        </p:txBody>
-      </p:sp>
-    </p:spTree>
-    <p:extLst>
-      <p:ext uri="{BB962C8B-B14F-4D97-AF65-F5344CB8AC3E}">
-        <p14:creationId xmlns:p14="http://schemas.microsoft.com/office/powerpoint/2010/main" val="4058683615"/>
-      </p:ext>
-    </p:extLst>
-  </p:cSld>
-  <p:clrMapOvr>
-    <a:masterClrMapping/>
-  </p:clrMapOvr>
-</p:sld>
-</file>
-
 <file path=ppt/slides/slide3.xml><?xml version="1.0" encoding="utf-8"?>
 <p:sld xmlns:a="http://schemas.openxmlformats.org/drawingml/2006/main" xmlns:r="http://schemas.openxmlformats.org/officeDocument/2006/relationships" xmlns:p="http://schemas.openxmlformats.org/presentationml/2006/main">
   <p:cSld>
@@ -7636,86 +10318,688 @@
           </a:p>
         </p:txBody>
       </p:sp>
-      <p:sp>
-        <p:nvSpPr>
-          <p:cNvPr id="3" name="Inhaltsplatzhalter 2">
-            <a:extLst>
-              <a:ext uri="{FF2B5EF4-FFF2-40B4-BE49-F238E27FC236}">
-                <a16:creationId xmlns:a16="http://schemas.microsoft.com/office/drawing/2014/main" id="{F51217FA-F236-BEE9-1596-5444C7A83D3C}"/>
-              </a:ext>
-            </a:extLst>
-          </p:cNvPr>
-          <p:cNvSpPr>
-            <a:spLocks noGrp="1"/>
-          </p:cNvSpPr>
-          <p:nvPr>
-            <p:ph idx="1"/>
-          </p:nvPr>
-        </p:nvSpPr>
-        <p:spPr/>
-        <p:txBody>
-          <a:bodyPr/>
-          <a:lstStyle/>
-          <a:p>
-            <a:pPr marL="0" indent="0">
-              <a:buNone/>
-            </a:pPr>
-            <a:r>
-              <a:rPr lang="de-DE" dirty="0" err="1"/>
-              <a:t>learning</a:t>
-            </a:r>
-            <a:r>
-              <a:rPr lang="de-DE" dirty="0"/>
-              <a:t> </a:t>
-            </a:r>
-            <a:r>
-              <a:rPr lang="de-DE" dirty="0" err="1"/>
-              <a:t>dynamics</a:t>
-            </a:r>
-            <a:r>
-              <a:rPr lang="de-DE" dirty="0"/>
-              <a:t> </a:t>
-            </a:r>
-            <a:r>
-              <a:rPr lang="de-DE" dirty="0" err="1"/>
-              <a:t>models</a:t>
-            </a:r>
-            <a:r>
-              <a:rPr lang="de-DE" dirty="0"/>
-              <a:t> </a:t>
-            </a:r>
-            <a:r>
-              <a:rPr lang="de-DE" dirty="0" err="1"/>
-              <a:t>to</a:t>
-            </a:r>
-            <a:r>
-              <a:rPr lang="de-DE" dirty="0"/>
-              <a:t> plan </a:t>
-            </a:r>
-            <a:r>
-              <a:rPr lang="de-DE" dirty="0" err="1"/>
-              <a:t>or</a:t>
-            </a:r>
-            <a:r>
-              <a:rPr lang="de-DE" dirty="0"/>
-              <a:t> </a:t>
-            </a:r>
-            <a:r>
-              <a:rPr lang="de-DE" dirty="0" err="1"/>
-              <a:t>improve</a:t>
-            </a:r>
-            <a:r>
-              <a:rPr lang="de-DE" dirty="0"/>
-              <a:t> sample </a:t>
-            </a:r>
-            <a:r>
-              <a:rPr lang="de-DE" dirty="0" err="1"/>
-              <a:t>efficiency</a:t>
-            </a:r>
-            <a:endParaRPr lang="de-DE" dirty="0"/>
-          </a:p>
-        </p:txBody>
-      </p:sp>
+      <mc:AlternateContent xmlns:mc="http://schemas.openxmlformats.org/markup-compatibility/2006" xmlns:a14="http://schemas.microsoft.com/office/drawing/2010/main">
+        <mc:Choice Requires="a14">
+          <p:sp>
+            <p:nvSpPr>
+              <p:cNvPr id="3" name="Inhaltsplatzhalter 2">
+                <a:extLst>
+                  <a:ext uri="{FF2B5EF4-FFF2-40B4-BE49-F238E27FC236}">
+                    <a16:creationId xmlns:a16="http://schemas.microsoft.com/office/drawing/2014/main" id="{F51217FA-F236-BEE9-1596-5444C7A83D3C}"/>
+                  </a:ext>
+                </a:extLst>
+              </p:cNvPr>
+              <p:cNvSpPr>
+                <a:spLocks noGrp="1"/>
+              </p:cNvSpPr>
+              <p:nvPr>
+                <p:ph idx="1"/>
+              </p:nvPr>
+            </p:nvSpPr>
+            <p:spPr/>
+            <p:txBody>
+              <a:bodyPr>
+                <a:normAutofit fontScale="92500" lnSpcReduction="20000"/>
+              </a:bodyPr>
+              <a:lstStyle/>
+              <a:p>
+                <a:pPr marL="0" indent="0">
+                  <a:buNone/>
+                </a:pPr>
+                <a:r>
+                  <a:rPr lang="de-DE" dirty="0" err="1"/>
+                  <a:t>instead</a:t>
+                </a:r>
+                <a:r>
+                  <a:rPr lang="de-DE" dirty="0"/>
+                  <a:t> </a:t>
+                </a:r>
+                <a:r>
+                  <a:rPr lang="de-DE" dirty="0" err="1"/>
+                  <a:t>of</a:t>
+                </a:r>
+                <a:r>
+                  <a:rPr lang="de-DE" dirty="0"/>
+                  <a:t> </a:t>
+                </a:r>
+                <a:r>
+                  <a:rPr lang="de-DE" dirty="0" err="1"/>
+                  <a:t>only</a:t>
+                </a:r>
+                <a:r>
+                  <a:rPr lang="de-DE" dirty="0"/>
+                  <a:t> a </a:t>
+                </a:r>
+                <a:r>
+                  <a:rPr lang="de-DE" dirty="0" err="1"/>
+                  <a:t>policy</a:t>
+                </a:r>
+                <a:r>
+                  <a:rPr lang="de-DE" dirty="0"/>
+                  <a:t> </a:t>
+                </a:r>
+                <a:r>
+                  <a:rPr lang="de-DE" dirty="0" err="1"/>
+                  <a:t>or</a:t>
+                </a:r>
+                <a:r>
+                  <a:rPr lang="de-DE" dirty="0"/>
+                  <a:t> a </a:t>
+                </a:r>
+                <a:r>
+                  <a:rPr lang="de-DE" dirty="0" err="1"/>
+                  <a:t>value</a:t>
+                </a:r>
+                <a:r>
+                  <a:rPr lang="de-DE" dirty="0"/>
+                  <a:t> </a:t>
+                </a:r>
+                <a:r>
+                  <a:rPr lang="de-DE" dirty="0" err="1"/>
+                  <a:t>function</a:t>
+                </a:r>
+                <a:r>
+                  <a:rPr lang="de-DE" dirty="0"/>
+                  <a:t>, </a:t>
+                </a:r>
+                <a:r>
+                  <a:rPr lang="de-DE" dirty="0" err="1"/>
+                  <a:t>learn</a:t>
+                </a:r>
+                <a:r>
+                  <a:rPr lang="de-DE" dirty="0"/>
+                  <a:t> a </a:t>
+                </a:r>
+                <a:r>
+                  <a:rPr lang="de-DE" dirty="0" err="1"/>
+                  <a:t>dynamics</a:t>
+                </a:r>
+                <a:r>
+                  <a:rPr lang="de-DE" dirty="0"/>
+                  <a:t> </a:t>
+                </a:r>
+                <a:r>
+                  <a:rPr lang="de-DE" dirty="0" err="1"/>
+                  <a:t>model</a:t>
+                </a:r>
+                <a:r>
+                  <a:rPr lang="de-DE" dirty="0"/>
+                  <a:t> </a:t>
+                </a:r>
+                <a14:m>
+                  <m:oMath xmlns:m="http://schemas.openxmlformats.org/officeDocument/2006/math">
+                    <m:r>
+                      <a:rPr lang="en-US" i="1">
+                        <a:latin typeface="Cambria Math" panose="02040503050406030204" pitchFamily="18" charset="0"/>
+                      </a:rPr>
+                      <m:t>𝑝</m:t>
+                    </m:r>
+                    <m:d>
+                      <m:dPr>
+                        <m:ctrlPr>
+                          <a:rPr lang="en-US" i="1">
+                            <a:latin typeface="Cambria Math" panose="02040503050406030204" pitchFamily="18" charset="0"/>
+                          </a:rPr>
+                        </m:ctrlPr>
+                      </m:dPr>
+                      <m:e>
+                        <m:sSub>
+                          <m:sSubPr>
+                            <m:ctrlPr>
+                              <a:rPr lang="en-US" i="1">
+                                <a:latin typeface="Cambria Math" panose="02040503050406030204" pitchFamily="18" charset="0"/>
+                              </a:rPr>
+                            </m:ctrlPr>
+                          </m:sSubPr>
+                          <m:e>
+                            <m:r>
+                              <a:rPr lang="en-US" i="1">
+                                <a:latin typeface="Cambria Math" panose="02040503050406030204" pitchFamily="18" charset="0"/>
+                              </a:rPr>
+                              <m:t>𝑠</m:t>
+                            </m:r>
+                          </m:e>
+                          <m:sub>
+                            <m:r>
+                              <a:rPr lang="en-US" i="1">
+                                <a:latin typeface="Cambria Math" panose="02040503050406030204" pitchFamily="18" charset="0"/>
+                              </a:rPr>
+                              <m:t>𝑡</m:t>
+                            </m:r>
+                            <m:r>
+                              <a:rPr lang="en-US" i="1">
+                                <a:latin typeface="Cambria Math" panose="02040503050406030204" pitchFamily="18" charset="0"/>
+                              </a:rPr>
+                              <m:t>+1</m:t>
+                            </m:r>
+                          </m:sub>
+                        </m:sSub>
+                        <m:r>
+                          <a:rPr lang="en-US" i="1">
+                            <a:latin typeface="Cambria Math" panose="02040503050406030204" pitchFamily="18" charset="0"/>
+                          </a:rPr>
+                          <m:t>,</m:t>
+                        </m:r>
+                        <m:sSub>
+                          <m:sSubPr>
+                            <m:ctrlPr>
+                              <a:rPr lang="en-US" i="1">
+                                <a:latin typeface="Cambria Math" panose="02040503050406030204" pitchFamily="18" charset="0"/>
+                              </a:rPr>
+                            </m:ctrlPr>
+                          </m:sSubPr>
+                          <m:e>
+                            <m:r>
+                              <a:rPr lang="en-US" i="1">
+                                <a:latin typeface="Cambria Math" panose="02040503050406030204" pitchFamily="18" charset="0"/>
+                              </a:rPr>
+                              <m:t>𝑟</m:t>
+                            </m:r>
+                          </m:e>
+                          <m:sub>
+                            <m:r>
+                              <a:rPr lang="en-US" i="1" smtClean="0">
+                                <a:latin typeface="Cambria Math" panose="02040503050406030204" pitchFamily="18" charset="0"/>
+                              </a:rPr>
+                              <m:t>𝑡</m:t>
+                            </m:r>
+                          </m:sub>
+                        </m:sSub>
+                        <m:r>
+                          <a:rPr lang="en-US" i="1">
+                            <a:latin typeface="Cambria Math" panose="02040503050406030204" pitchFamily="18" charset="0"/>
+                          </a:rPr>
+                          <m:t>|</m:t>
+                        </m:r>
+                        <m:sSub>
+                          <m:sSubPr>
+                            <m:ctrlPr>
+                              <a:rPr lang="en-US" i="1">
+                                <a:latin typeface="Cambria Math" panose="02040503050406030204" pitchFamily="18" charset="0"/>
+                              </a:rPr>
+                            </m:ctrlPr>
+                          </m:sSubPr>
+                          <m:e>
+                            <m:r>
+                              <a:rPr lang="en-US" i="1">
+                                <a:latin typeface="Cambria Math" panose="02040503050406030204" pitchFamily="18" charset="0"/>
+                              </a:rPr>
+                              <m:t>𝑠</m:t>
+                            </m:r>
+                          </m:e>
+                          <m:sub>
+                            <m:r>
+                              <a:rPr lang="en-US" i="1">
+                                <a:latin typeface="Cambria Math" panose="02040503050406030204" pitchFamily="18" charset="0"/>
+                              </a:rPr>
+                              <m:t>𝑡</m:t>
+                            </m:r>
+                          </m:sub>
+                        </m:sSub>
+                        <m:r>
+                          <a:rPr lang="en-US" i="1">
+                            <a:latin typeface="Cambria Math" panose="02040503050406030204" pitchFamily="18" charset="0"/>
+                          </a:rPr>
+                          <m:t>,</m:t>
+                        </m:r>
+                        <m:sSub>
+                          <m:sSubPr>
+                            <m:ctrlPr>
+                              <a:rPr lang="en-US" i="1">
+                                <a:latin typeface="Cambria Math" panose="02040503050406030204" pitchFamily="18" charset="0"/>
+                              </a:rPr>
+                            </m:ctrlPr>
+                          </m:sSubPr>
+                          <m:e>
+                            <m:r>
+                              <a:rPr lang="en-US" i="1">
+                                <a:latin typeface="Cambria Math" panose="02040503050406030204" pitchFamily="18" charset="0"/>
+                              </a:rPr>
+                              <m:t>𝑎</m:t>
+                            </m:r>
+                          </m:e>
+                          <m:sub>
+                            <m:r>
+                              <a:rPr lang="en-US" i="1">
+                                <a:latin typeface="Cambria Math" panose="02040503050406030204" pitchFamily="18" charset="0"/>
+                              </a:rPr>
+                              <m:t>𝑡</m:t>
+                            </m:r>
+                          </m:sub>
+                        </m:sSub>
+                      </m:e>
+                    </m:d>
+                  </m:oMath>
+                </a14:m>
+                <a:r>
+                  <a:rPr lang="de-DE" dirty="0"/>
+                  <a:t> </a:t>
+                </a:r>
+                <a:r>
+                  <a:rPr lang="de-DE" dirty="0" err="1"/>
+                  <a:t>predicting</a:t>
+                </a:r>
+                <a:r>
+                  <a:rPr lang="de-DE" dirty="0"/>
+                  <a:t> </a:t>
+                </a:r>
+                <a:r>
+                  <a:rPr lang="de-DE" dirty="0" err="1"/>
+                  <a:t>future</a:t>
+                </a:r>
+                <a:r>
+                  <a:rPr lang="de-DE" dirty="0"/>
+                  <a:t> </a:t>
+                </a:r>
+                <a:r>
+                  <a:rPr lang="de-DE" dirty="0" err="1"/>
+                  <a:t>states</a:t>
+                </a:r>
+                <a:r>
+                  <a:rPr lang="de-DE" dirty="0"/>
+                  <a:t> and </a:t>
+                </a:r>
+                <a:r>
+                  <a:rPr lang="de-DE" dirty="0" err="1"/>
+                  <a:t>rewards</a:t>
+                </a:r>
+                <a:endParaRPr lang="de-DE" dirty="0"/>
+              </a:p>
+              <a:p>
+                <a:pPr marL="0" indent="0">
+                  <a:buNone/>
+                </a:pPr>
+                <a:endParaRPr lang="de-DE" dirty="0"/>
+              </a:p>
+              <a:p>
+                <a:pPr marL="0" indent="0">
+                  <a:buNone/>
+                </a:pPr>
+                <a:r>
+                  <a:rPr lang="de-DE" dirty="0" err="1"/>
+                  <a:t>the</a:t>
+                </a:r>
+                <a:r>
+                  <a:rPr lang="de-DE" dirty="0"/>
+                  <a:t> </a:t>
+                </a:r>
+                <a:r>
+                  <a:rPr lang="de-DE" dirty="0" err="1"/>
+                  <a:t>model</a:t>
+                </a:r>
+                <a:r>
+                  <a:rPr lang="de-DE" dirty="0"/>
+                  <a:t> </a:t>
+                </a:r>
+                <a:r>
+                  <a:rPr lang="de-DE" dirty="0" err="1"/>
+                  <a:t>can</a:t>
+                </a:r>
+                <a:r>
+                  <a:rPr lang="de-DE" dirty="0"/>
+                  <a:t> </a:t>
+                </a:r>
+                <a:r>
+                  <a:rPr lang="de-DE" dirty="0" err="1"/>
+                  <a:t>then</a:t>
+                </a:r>
+                <a:r>
+                  <a:rPr lang="de-DE" dirty="0"/>
+                  <a:t> </a:t>
+                </a:r>
+                <a:r>
+                  <a:rPr lang="de-DE" dirty="0" err="1"/>
+                  <a:t>be</a:t>
+                </a:r>
+                <a:r>
+                  <a:rPr lang="de-DE" dirty="0"/>
+                  <a:t> </a:t>
+                </a:r>
+                <a:r>
+                  <a:rPr lang="de-DE" dirty="0" err="1"/>
+                  <a:t>used</a:t>
+                </a:r>
+                <a:r>
+                  <a:rPr lang="de-DE" dirty="0"/>
+                  <a:t> </a:t>
+                </a:r>
+                <a:r>
+                  <a:rPr lang="de-DE" dirty="0" err="1"/>
+                  <a:t>for</a:t>
+                </a:r>
+                <a:endParaRPr lang="de-DE" dirty="0"/>
+              </a:p>
+              <a:p>
+                <a:r>
+                  <a:rPr lang="de-DE" dirty="0" err="1"/>
+                  <a:t>planning</a:t>
+                </a:r>
+                <a:r>
+                  <a:rPr lang="de-DE" dirty="0"/>
+                  <a:t>: </a:t>
+                </a:r>
+                <a:r>
+                  <a:rPr lang="de-DE" dirty="0" err="1"/>
+                  <a:t>simulate</a:t>
+                </a:r>
+                <a:r>
+                  <a:rPr lang="de-DE" dirty="0"/>
+                  <a:t> possible </a:t>
+                </a:r>
+                <a:r>
+                  <a:rPr lang="de-DE" dirty="0" err="1"/>
+                  <a:t>futures</a:t>
+                </a:r>
+                <a:r>
+                  <a:rPr lang="de-DE" dirty="0"/>
+                  <a:t> and </a:t>
+                </a:r>
+                <a:r>
+                  <a:rPr lang="de-DE" dirty="0" err="1"/>
+                  <a:t>select</a:t>
+                </a:r>
+                <a:r>
+                  <a:rPr lang="de-DE" dirty="0"/>
+                  <a:t> </a:t>
+                </a:r>
+                <a:r>
+                  <a:rPr lang="de-DE" dirty="0" err="1"/>
+                  <a:t>actions</a:t>
+                </a:r>
+                <a:r>
+                  <a:rPr lang="de-DE" dirty="0"/>
+                  <a:t> (e.g., MPC)</a:t>
+                </a:r>
+              </a:p>
+              <a:p>
+                <a:r>
+                  <a:rPr lang="de-DE" dirty="0" err="1"/>
+                  <a:t>data</a:t>
+                </a:r>
+                <a:r>
+                  <a:rPr lang="de-DE" dirty="0"/>
+                  <a:t> </a:t>
+                </a:r>
+                <a:r>
+                  <a:rPr lang="de-DE" dirty="0" err="1"/>
+                  <a:t>generation</a:t>
+                </a:r>
+                <a:r>
+                  <a:rPr lang="de-DE" dirty="0"/>
+                  <a:t>: </a:t>
+                </a:r>
+                <a:r>
+                  <a:rPr lang="de-DE" dirty="0" err="1"/>
+                  <a:t>create</a:t>
+                </a:r>
+                <a:r>
+                  <a:rPr lang="de-DE" dirty="0"/>
+                  <a:t> </a:t>
+                </a:r>
+                <a:r>
+                  <a:rPr lang="de-DE" dirty="0" err="1"/>
+                  <a:t>imagined</a:t>
+                </a:r>
+                <a:r>
+                  <a:rPr lang="de-DE" dirty="0"/>
+                  <a:t> </a:t>
+                </a:r>
+                <a:r>
+                  <a:rPr lang="de-DE" dirty="0" err="1"/>
+                  <a:t>rollouts</a:t>
+                </a:r>
+                <a:r>
+                  <a:rPr lang="de-DE" dirty="0"/>
+                  <a:t> </a:t>
+                </a:r>
+                <a:r>
+                  <a:rPr lang="de-DE" dirty="0" err="1"/>
+                  <a:t>for</a:t>
+                </a:r>
+                <a:r>
+                  <a:rPr lang="de-DE" dirty="0"/>
+                  <a:t> </a:t>
+                </a:r>
+                <a:r>
+                  <a:rPr lang="de-DE" dirty="0" err="1"/>
+                  <a:t>policy</a:t>
+                </a:r>
+                <a:r>
+                  <a:rPr lang="de-DE" dirty="0"/>
+                  <a:t> </a:t>
+                </a:r>
+                <a:r>
+                  <a:rPr lang="de-DE" dirty="0" err="1"/>
+                  <a:t>learning</a:t>
+                </a:r>
+                <a:endParaRPr lang="de-DE" dirty="0"/>
+              </a:p>
+              <a:p>
+                <a:r>
+                  <a:rPr lang="de-DE" dirty="0" err="1"/>
+                  <a:t>improved</a:t>
+                </a:r>
+                <a:r>
+                  <a:rPr lang="de-DE" dirty="0"/>
+                  <a:t> sample </a:t>
+                </a:r>
+                <a:r>
+                  <a:rPr lang="de-DE" dirty="0" err="1"/>
+                  <a:t>efficiency</a:t>
+                </a:r>
+                <a:r>
+                  <a:rPr lang="de-DE" dirty="0"/>
+                  <a:t>: </a:t>
+                </a:r>
+                <a:r>
+                  <a:rPr lang="de-DE" dirty="0" err="1"/>
+                  <a:t>reduce</a:t>
+                </a:r>
+                <a:r>
+                  <a:rPr lang="de-DE" dirty="0"/>
+                  <a:t> expensive </a:t>
+                </a:r>
+                <a:r>
+                  <a:rPr lang="de-DE" dirty="0" err="1"/>
+                  <a:t>interaction</a:t>
+                </a:r>
+                <a:r>
+                  <a:rPr lang="de-DE" dirty="0"/>
+                  <a:t> </a:t>
+                </a:r>
+                <a:r>
+                  <a:rPr lang="de-DE" dirty="0" err="1"/>
+                  <a:t>with</a:t>
+                </a:r>
+                <a:r>
+                  <a:rPr lang="de-DE" dirty="0"/>
+                  <a:t> real </a:t>
+                </a:r>
+                <a:r>
+                  <a:rPr lang="de-DE" dirty="0" err="1"/>
+                  <a:t>environment</a:t>
+                </a:r>
+                <a:endParaRPr lang="de-DE" dirty="0"/>
+              </a:p>
+              <a:p>
+                <a:pPr marL="0" indent="0">
+                  <a:buNone/>
+                </a:pPr>
+                <a:endParaRPr lang="de-DE" dirty="0"/>
+              </a:p>
+              <a:p>
+                <a:pPr marL="0" indent="0">
+                  <a:buNone/>
+                </a:pPr>
+                <a:r>
+                  <a:rPr lang="de-DE" dirty="0" err="1"/>
+                  <a:t>key</a:t>
+                </a:r>
+                <a:r>
+                  <a:rPr lang="de-DE" dirty="0"/>
+                  <a:t> </a:t>
+                </a:r>
+                <a:r>
+                  <a:rPr lang="de-DE" dirty="0" err="1"/>
+                  <a:t>challenge</a:t>
+                </a:r>
+                <a:r>
+                  <a:rPr lang="de-DE" dirty="0"/>
+                  <a:t>: </a:t>
+                </a:r>
+                <a:r>
+                  <a:rPr lang="de-DE" dirty="0" err="1"/>
+                  <a:t>model</a:t>
+                </a:r>
+                <a:r>
+                  <a:rPr lang="de-DE" dirty="0"/>
+                  <a:t> </a:t>
+                </a:r>
+                <a:r>
+                  <a:rPr lang="de-DE" dirty="0" err="1"/>
+                  <a:t>errors</a:t>
+                </a:r>
+                <a:r>
+                  <a:rPr lang="de-DE" dirty="0"/>
+                  <a:t> </a:t>
+                </a:r>
+                <a:r>
+                  <a:rPr lang="de-DE" dirty="0" err="1"/>
+                  <a:t>can</a:t>
+                </a:r>
+                <a:r>
+                  <a:rPr lang="de-DE" dirty="0"/>
+                  <a:t> </a:t>
+                </a:r>
+                <a:r>
+                  <a:rPr lang="de-DE" dirty="0" err="1"/>
+                  <a:t>accumulate</a:t>
+                </a:r>
+                <a:r>
+                  <a:rPr lang="de-DE" dirty="0"/>
+                  <a:t> </a:t>
+                </a:r>
+                <a:r>
+                  <a:rPr lang="de-DE" dirty="0" err="1"/>
+                  <a:t>over</a:t>
+                </a:r>
+                <a:r>
+                  <a:rPr lang="de-DE" dirty="0"/>
+                  <a:t> </a:t>
+                </a:r>
+                <a:r>
+                  <a:rPr lang="de-DE" dirty="0" err="1"/>
+                  <a:t>long</a:t>
+                </a:r>
+                <a:r>
+                  <a:rPr lang="de-DE" dirty="0"/>
+                  <a:t> </a:t>
+                </a:r>
+                <a:r>
+                  <a:rPr lang="de-DE" dirty="0" err="1"/>
+                  <a:t>horizons</a:t>
+                </a:r>
+                <a:endParaRPr lang="de-DE" dirty="0"/>
+              </a:p>
+              <a:p>
+                <a:pPr marL="0" indent="0">
+                  <a:buNone/>
+                </a:pPr>
+                <a:r>
+                  <a:rPr lang="de-DE" dirty="0">
+                    <a:sym typeface="Wingdings" pitchFamily="2" charset="2"/>
+                  </a:rPr>
+                  <a:t> </a:t>
+                </a:r>
+                <a:r>
+                  <a:rPr lang="de-DE" dirty="0" err="1"/>
+                  <a:t>inaccurate</a:t>
+                </a:r>
+                <a:r>
+                  <a:rPr lang="de-DE" dirty="0"/>
+                  <a:t> </a:t>
+                </a:r>
+                <a:r>
+                  <a:rPr lang="de-DE" dirty="0" err="1"/>
+                  <a:t>predictions</a:t>
+                </a:r>
+                <a:r>
+                  <a:rPr lang="de-DE" dirty="0"/>
+                  <a:t> </a:t>
+                </a:r>
+                <a:r>
+                  <a:rPr lang="de-DE" dirty="0" err="1"/>
+                  <a:t>may</a:t>
+                </a:r>
+                <a:r>
+                  <a:rPr lang="de-DE" dirty="0"/>
+                  <a:t> </a:t>
+                </a:r>
+                <a:r>
+                  <a:rPr lang="de-DE" dirty="0" err="1"/>
+                  <a:t>degrade</a:t>
+                </a:r>
+                <a:r>
+                  <a:rPr lang="de-DE" dirty="0"/>
+                  <a:t> </a:t>
+                </a:r>
+                <a:r>
+                  <a:rPr lang="de-DE" dirty="0" err="1"/>
+                  <a:t>policy</a:t>
+                </a:r>
+                <a:r>
+                  <a:rPr lang="de-DE" dirty="0"/>
+                  <a:t> </a:t>
+                </a:r>
+                <a:r>
+                  <a:rPr lang="de-DE" dirty="0" err="1"/>
+                  <a:t>performance</a:t>
+                </a:r>
+                <a:endParaRPr lang="de-DE" dirty="0"/>
+              </a:p>
+            </p:txBody>
+          </p:sp>
+        </mc:Choice>
+        <mc:Fallback xmlns="">
+          <p:sp>
+            <p:nvSpPr>
+              <p:cNvPr id="3" name="Inhaltsplatzhalter 2">
+                <a:extLst>
+                  <a:ext uri="{FF2B5EF4-FFF2-40B4-BE49-F238E27FC236}">
+                    <a16:creationId xmlns:a16="http://schemas.microsoft.com/office/drawing/2014/main" id="{F51217FA-F236-BEE9-1596-5444C7A83D3C}"/>
+                  </a:ext>
+                </a:extLst>
+              </p:cNvPr>
+              <p:cNvSpPr>
+                <a:spLocks noGrp="1" noRot="1" noChangeAspect="1" noMove="1" noResize="1" noEditPoints="1" noAdjustHandles="1" noChangeArrowheads="1" noChangeShapeType="1" noTextEdit="1"/>
+              </p:cNvSpPr>
+              <p:nvPr>
+                <p:ph idx="1"/>
+              </p:nvPr>
+            </p:nvSpPr>
+            <p:spPr>
+              <a:blipFill>
+                <a:blip r:embed="rId2"/>
+                <a:stretch>
+                  <a:fillRect l="-1086" t="-3488"/>
+                </a:stretch>
+              </a:blipFill>
+            </p:spPr>
+            <p:txBody>
+              <a:bodyPr/>
+              <a:lstStyle/>
+              <a:p>
+                <a:r>
+                  <a:rPr lang="de-DE">
+                    <a:noFill/>
+                  </a:rPr>
+                  <a:t> </a:t>
+                </a:r>
+              </a:p>
+            </p:txBody>
+          </p:sp>
+        </mc:Fallback>
+      </mc:AlternateContent>
       <p:sp>
         <p:nvSpPr>
           <p:cNvPr id="4" name="Foliennummernplatzhalter 3">
@@ -7821,7 +11105,9 @@
         </p:nvSpPr>
         <p:spPr/>
         <p:txBody>
-          <a:bodyPr/>
+          <a:bodyPr>
+            <a:normAutofit fontScale="92500" lnSpcReduction="10000"/>
+          </a:bodyPr>
           <a:lstStyle/>
           <a:p>
             <a:pPr marL="0" indent="0">
@@ -7829,48 +11115,432 @@
             </a:pPr>
             <a:r>
               <a:rPr lang="de-DE" dirty="0" err="1"/>
+              <a:t>learn</a:t>
+            </a:r>
+            <a:r>
+              <a:rPr lang="de-DE" dirty="0"/>
+              <a:t> a </a:t>
+            </a:r>
+            <a:r>
+              <a:rPr lang="de-DE" dirty="0" err="1"/>
+              <a:t>policy</a:t>
+            </a:r>
+            <a:r>
+              <a:rPr lang="de-DE" dirty="0"/>
+              <a:t> </a:t>
+            </a:r>
+            <a:r>
+              <a:rPr lang="de-DE" dirty="0" err="1"/>
+              <a:t>entirely</a:t>
+            </a:r>
+            <a:r>
+              <a:rPr lang="de-DE" dirty="0"/>
+              <a:t> </a:t>
+            </a:r>
+            <a:r>
+              <a:rPr lang="de-DE" dirty="0" err="1"/>
+              <a:t>from</a:t>
+            </a:r>
+            <a:r>
+              <a:rPr lang="de-DE" dirty="0"/>
+              <a:t> a </a:t>
+            </a:r>
+            <a:r>
+              <a:rPr lang="de-DE" dirty="0" err="1"/>
+              <a:t>fixed</a:t>
+            </a:r>
+            <a:r>
+              <a:rPr lang="de-DE" dirty="0"/>
+              <a:t> </a:t>
+            </a:r>
+            <a:r>
+              <a:rPr lang="de-DE" dirty="0" err="1"/>
+              <a:t>dataset</a:t>
+            </a:r>
+            <a:r>
+              <a:rPr lang="de-DE" dirty="0"/>
+              <a:t>:</a:t>
+            </a:r>
+          </a:p>
+          <a:p>
+            <a:r>
+              <a:rPr lang="de-DE" dirty="0" err="1"/>
+              <a:t>training</a:t>
+            </a:r>
+            <a:r>
+              <a:rPr lang="de-DE" dirty="0"/>
+              <a:t> </a:t>
+            </a:r>
+            <a:r>
+              <a:rPr lang="de-DE" dirty="0" err="1"/>
+              <a:t>data</a:t>
+            </a:r>
+            <a:r>
+              <a:rPr lang="de-DE" dirty="0"/>
+              <a:t> </a:t>
+            </a:r>
+            <a:r>
+              <a:rPr lang="de-DE" dirty="0" err="1"/>
+              <a:t>consists</a:t>
+            </a:r>
+            <a:r>
+              <a:rPr lang="de-DE" dirty="0"/>
+              <a:t> </a:t>
+            </a:r>
+            <a:r>
+              <a:rPr lang="de-DE" dirty="0" err="1"/>
+              <a:t>of</a:t>
+            </a:r>
+            <a:r>
+              <a:rPr lang="de-DE" dirty="0"/>
+              <a:t> </a:t>
+            </a:r>
+            <a:r>
+              <a:rPr lang="de-DE" dirty="0" err="1"/>
+              <a:t>previously</a:t>
+            </a:r>
+            <a:r>
+              <a:rPr lang="de-DE" dirty="0"/>
+              <a:t> </a:t>
+            </a:r>
+            <a:r>
+              <a:rPr lang="de-DE" dirty="0" err="1"/>
+              <a:t>collected</a:t>
+            </a:r>
+            <a:r>
+              <a:rPr lang="de-DE" dirty="0"/>
+              <a:t> </a:t>
+            </a:r>
+            <a:r>
+              <a:rPr lang="de-DE" dirty="0" err="1"/>
+              <a:t>trajectories</a:t>
+            </a:r>
+            <a:endParaRPr lang="de-DE" dirty="0"/>
+          </a:p>
+          <a:p>
+            <a:r>
+              <a:rPr lang="de-DE" dirty="0" err="1"/>
+              <a:t>no</a:t>
+            </a:r>
+            <a:r>
+              <a:rPr lang="de-DE" dirty="0"/>
+              <a:t> online </a:t>
+            </a:r>
+            <a:r>
+              <a:rPr lang="de-DE" dirty="0" err="1"/>
+              <a:t>exploration</a:t>
+            </a:r>
+            <a:r>
+              <a:rPr lang="de-DE" dirty="0"/>
+              <a:t> </a:t>
+            </a:r>
+            <a:r>
+              <a:rPr lang="de-DE" dirty="0" err="1"/>
+              <a:t>or</a:t>
+            </a:r>
+            <a:r>
+              <a:rPr lang="de-DE" dirty="0"/>
+              <a:t> </a:t>
+            </a:r>
+            <a:r>
+              <a:rPr lang="de-DE" dirty="0" err="1"/>
+              <a:t>environment</a:t>
+            </a:r>
+            <a:r>
+              <a:rPr lang="de-DE" dirty="0"/>
+              <a:t> </a:t>
+            </a:r>
+            <a:r>
+              <a:rPr lang="de-DE" dirty="0" err="1"/>
+              <a:t>interaction</a:t>
+            </a:r>
+            <a:r>
+              <a:rPr lang="de-DE" dirty="0"/>
+              <a:t> </a:t>
+            </a:r>
+            <a:r>
+              <a:rPr lang="de-DE" dirty="0" err="1"/>
+              <a:t>during</a:t>
+            </a:r>
+            <a:r>
+              <a:rPr lang="de-DE" dirty="0"/>
+              <a:t> </a:t>
+            </a:r>
+            <a:r>
+              <a:rPr lang="de-DE" dirty="0" err="1"/>
               <a:t>learning</a:t>
             </a:r>
-            <a:r>
-              <a:rPr lang="de-DE" dirty="0"/>
-              <a:t> </a:t>
-            </a:r>
-            <a:r>
-              <a:rPr lang="de-DE" dirty="0" err="1"/>
-              <a:t>from</a:t>
-            </a:r>
-            <a:r>
-              <a:rPr lang="de-DE" dirty="0"/>
-              <a:t> </a:t>
-            </a:r>
-            <a:r>
-              <a:rPr lang="de-DE" dirty="0" err="1"/>
-              <a:t>fixed</a:t>
-            </a:r>
-            <a:r>
-              <a:rPr lang="de-DE" dirty="0"/>
-              <a:t> </a:t>
-            </a:r>
-            <a:r>
-              <a:rPr lang="de-DE" dirty="0" err="1"/>
-              <a:t>datasets</a:t>
-            </a:r>
-            <a:r>
-              <a:rPr lang="de-DE" dirty="0"/>
-              <a:t> </a:t>
-            </a:r>
-            <a:r>
-              <a:rPr lang="de-DE" dirty="0" err="1"/>
-              <a:t>without</a:t>
-            </a:r>
-            <a:r>
-              <a:rPr lang="de-DE" dirty="0"/>
-              <a:t> online </a:t>
-            </a:r>
-            <a:r>
-              <a:rPr lang="de-DE" dirty="0" err="1"/>
-              <a:t>interaction</a:t>
-            </a:r>
+            <a:endParaRPr lang="de-DE" dirty="0"/>
+          </a:p>
+          <a:p>
+            <a:pPr marL="0" indent="0">
+              <a:buNone/>
+            </a:pPr>
+            <a:endParaRPr lang="de-DE" dirty="0"/>
+          </a:p>
+          <a:p>
+            <a:pPr marL="0" indent="0">
+              <a:buNone/>
+            </a:pPr>
+            <a:r>
+              <a:rPr lang="de-DE" dirty="0" err="1"/>
+              <a:t>key</a:t>
+            </a:r>
+            <a:r>
+              <a:rPr lang="de-DE" dirty="0"/>
+              <a:t> </a:t>
+            </a:r>
+            <a:r>
+              <a:rPr lang="de-DE" dirty="0" err="1"/>
+              <a:t>idea</a:t>
+            </a:r>
+            <a:r>
+              <a:rPr lang="de-DE" dirty="0"/>
+              <a:t>: </a:t>
+            </a:r>
+            <a:r>
+              <a:rPr lang="de-DE" dirty="0" err="1"/>
+              <a:t>use</a:t>
+            </a:r>
+            <a:r>
+              <a:rPr lang="de-DE" dirty="0"/>
+              <a:t> </a:t>
+            </a:r>
+            <a:r>
+              <a:rPr lang="de-DE" dirty="0" err="1"/>
+              <a:t>reward</a:t>
+            </a:r>
+            <a:r>
+              <a:rPr lang="de-DE" dirty="0"/>
+              <a:t> </a:t>
+            </a:r>
+            <a:r>
+              <a:rPr lang="de-DE" dirty="0" err="1"/>
+              <a:t>information</a:t>
+            </a:r>
+            <a:r>
+              <a:rPr lang="de-DE" dirty="0"/>
+              <a:t> </a:t>
+            </a:r>
+            <a:r>
+              <a:rPr lang="de-DE" dirty="0" err="1"/>
+              <a:t>to</a:t>
+            </a:r>
+            <a:r>
+              <a:rPr lang="de-DE" dirty="0"/>
+              <a:t> </a:t>
+            </a:r>
+            <a:r>
+              <a:rPr lang="de-DE" dirty="0" err="1"/>
+              <a:t>learn</a:t>
+            </a:r>
+            <a:r>
+              <a:rPr lang="de-DE" dirty="0"/>
+              <a:t> </a:t>
+            </a:r>
+            <a:r>
+              <a:rPr lang="de-DE" dirty="0" err="1"/>
+              <a:t>policies</a:t>
+            </a:r>
+            <a:r>
+              <a:rPr lang="de-DE" dirty="0"/>
+              <a:t> </a:t>
+            </a:r>
+            <a:r>
+              <a:rPr lang="de-DE" dirty="0" err="1"/>
+              <a:t>that</a:t>
+            </a:r>
+            <a:r>
+              <a:rPr lang="de-DE" dirty="0"/>
+              <a:t> </a:t>
+            </a:r>
+            <a:r>
+              <a:rPr lang="de-DE" dirty="0" err="1"/>
+              <a:t>may</a:t>
+            </a:r>
+            <a:r>
+              <a:rPr lang="de-DE" dirty="0"/>
+              <a:t> </a:t>
+            </a:r>
+            <a:r>
+              <a:rPr lang="de-DE" dirty="0" err="1"/>
+              <a:t>prefer</a:t>
+            </a:r>
+            <a:r>
+              <a:rPr lang="de-DE" dirty="0"/>
+              <a:t> </a:t>
+            </a:r>
+            <a:r>
+              <a:rPr lang="de-DE" dirty="0" err="1"/>
+              <a:t>higher</a:t>
+            </a:r>
+            <a:r>
+              <a:rPr lang="de-DE" dirty="0"/>
+              <a:t>-return </a:t>
+            </a:r>
+            <a:r>
+              <a:rPr lang="de-DE" dirty="0" err="1"/>
+              <a:t>behaviors</a:t>
+            </a:r>
+            <a:r>
+              <a:rPr lang="de-DE" dirty="0"/>
+              <a:t> in </a:t>
+            </a:r>
+            <a:r>
+              <a:rPr lang="de-DE" dirty="0" err="1"/>
+              <a:t>the</a:t>
+            </a:r>
+            <a:r>
+              <a:rPr lang="de-DE" dirty="0"/>
+              <a:t> </a:t>
+            </a:r>
+            <a:r>
+              <a:rPr lang="de-DE" dirty="0" err="1"/>
+              <a:t>dataset</a:t>
+            </a:r>
+            <a:endParaRPr lang="de-DE" dirty="0"/>
+          </a:p>
+          <a:p>
+            <a:pPr marL="0" indent="0">
+              <a:buNone/>
+            </a:pPr>
+            <a:endParaRPr lang="de-DE" dirty="0"/>
+          </a:p>
+          <a:p>
+            <a:pPr marL="0" indent="0">
+              <a:buNone/>
+            </a:pPr>
+            <a:r>
+              <a:rPr lang="de-DE" dirty="0" err="1"/>
+              <a:t>important</a:t>
+            </a:r>
+            <a:r>
+              <a:rPr lang="de-DE" dirty="0"/>
+              <a:t> caveat:</a:t>
+            </a:r>
+          </a:p>
+          <a:p>
+            <a:pPr marL="0" indent="0">
+              <a:buNone/>
+            </a:pPr>
+            <a:r>
+              <a:rPr lang="de-DE" dirty="0" err="1"/>
+              <a:t>improvement</a:t>
+            </a:r>
+            <a:r>
+              <a:rPr lang="de-DE" dirty="0"/>
+              <a:t> </a:t>
+            </a:r>
+            <a:r>
+              <a:rPr lang="de-DE" dirty="0" err="1"/>
+              <a:t>only</a:t>
+            </a:r>
+            <a:r>
+              <a:rPr lang="de-DE" dirty="0"/>
+              <a:t> possible </a:t>
+            </a:r>
+            <a:r>
+              <a:rPr lang="de-DE" dirty="0" err="1"/>
+              <a:t>within</a:t>
+            </a:r>
+            <a:r>
+              <a:rPr lang="de-DE" dirty="0"/>
+              <a:t> </a:t>
+            </a:r>
+            <a:r>
+              <a:rPr lang="de-DE" dirty="0" err="1"/>
+              <a:t>the</a:t>
+            </a:r>
+            <a:r>
+              <a:rPr lang="de-DE" dirty="0"/>
+              <a:t> </a:t>
+            </a:r>
+            <a:r>
+              <a:rPr lang="de-DE" dirty="0" err="1"/>
+              <a:t>coverage</a:t>
+            </a:r>
+            <a:r>
+              <a:rPr lang="de-DE" dirty="0"/>
+              <a:t> </a:t>
+            </a:r>
+            <a:r>
+              <a:rPr lang="de-DE" dirty="0" err="1"/>
+              <a:t>of</a:t>
+            </a:r>
+            <a:r>
+              <a:rPr lang="de-DE" dirty="0"/>
+              <a:t> </a:t>
+            </a:r>
+            <a:r>
+              <a:rPr lang="de-DE" dirty="0" err="1"/>
+              <a:t>the</a:t>
+            </a:r>
+            <a:r>
+              <a:rPr lang="de-DE" dirty="0"/>
+              <a:t> </a:t>
+            </a:r>
+            <a:r>
+              <a:rPr lang="de-DE" dirty="0" err="1"/>
+              <a:t>dataset</a:t>
+            </a:r>
+            <a:endParaRPr lang="de-DE" dirty="0"/>
+          </a:p>
+          <a:p>
+            <a:pPr marL="0" indent="0">
+              <a:buNone/>
+            </a:pPr>
+            <a:r>
+              <a:rPr lang="de-DE" dirty="0">
+                <a:sym typeface="Wingdings" pitchFamily="2" charset="2"/>
+              </a:rPr>
+              <a:t></a:t>
+            </a:r>
+            <a:r>
+              <a:rPr lang="de-DE" dirty="0"/>
+              <a:t> limited </a:t>
+            </a:r>
+            <a:r>
+              <a:rPr lang="de-DE" dirty="0" err="1"/>
+              <a:t>generalization</a:t>
+            </a:r>
+            <a:r>
+              <a:rPr lang="de-DE" dirty="0"/>
+              <a:t> </a:t>
+            </a:r>
+            <a:r>
+              <a:rPr lang="de-DE" dirty="0" err="1"/>
+              <a:t>to</a:t>
+            </a:r>
+            <a:r>
+              <a:rPr lang="de-DE" dirty="0"/>
+              <a:t> </a:t>
+            </a:r>
+            <a:r>
+              <a:rPr lang="de-DE" dirty="0" err="1"/>
+              <a:t>unseen</a:t>
+            </a:r>
+            <a:r>
+              <a:rPr lang="de-DE" dirty="0"/>
+              <a:t>/out-</a:t>
+            </a:r>
+            <a:r>
+              <a:rPr lang="de-DE" dirty="0" err="1"/>
+              <a:t>of</a:t>
+            </a:r>
+            <a:r>
+              <a:rPr lang="de-DE" dirty="0"/>
+              <a:t>-distribution </a:t>
+            </a:r>
+            <a:r>
+              <a:rPr lang="de-DE" dirty="0" err="1"/>
+              <a:t>actions</a:t>
+            </a:r>
+            <a:endParaRPr lang="de-DE" dirty="0"/>
+          </a:p>
+          <a:p>
+            <a:pPr marL="0" indent="0">
+              <a:buNone/>
+            </a:pPr>
             <a:endParaRPr lang="de-DE" dirty="0"/>
           </a:p>
         </p:txBody>
@@ -8095,9 +11765,354 @@
         </p:nvSpPr>
         <p:spPr/>
         <p:txBody>
-          <a:bodyPr/>
+          <a:bodyPr>
+            <a:normAutofit fontScale="92500" lnSpcReduction="10000"/>
+          </a:bodyPr>
           <a:lstStyle/>
           <a:p>
+            <a:pPr marL="0" indent="0">
+              <a:buNone/>
+            </a:pPr>
+            <a:r>
+              <a:rPr lang="de-DE" dirty="0" err="1"/>
+              <a:t>learn</a:t>
+            </a:r>
+            <a:r>
+              <a:rPr lang="de-DE" dirty="0"/>
+              <a:t> a </a:t>
+            </a:r>
+            <a:r>
+              <a:rPr lang="de-DE" dirty="0" err="1"/>
+              <a:t>policy</a:t>
+            </a:r>
+            <a:r>
+              <a:rPr lang="de-DE" dirty="0"/>
+              <a:t> </a:t>
+            </a:r>
+            <a:r>
+              <a:rPr lang="de-DE" dirty="0" err="1"/>
+              <a:t>by</a:t>
+            </a:r>
+            <a:r>
+              <a:rPr lang="de-DE" dirty="0"/>
+              <a:t> </a:t>
+            </a:r>
+            <a:r>
+              <a:rPr lang="de-DE" dirty="0" err="1"/>
+              <a:t>directly</a:t>
+            </a:r>
+            <a:r>
+              <a:rPr lang="de-DE" dirty="0"/>
+              <a:t> </a:t>
+            </a:r>
+            <a:r>
+              <a:rPr lang="de-DE" dirty="0" err="1"/>
+              <a:t>imitating</a:t>
+            </a:r>
+            <a:r>
+              <a:rPr lang="de-DE" dirty="0"/>
+              <a:t> </a:t>
+            </a:r>
+            <a:r>
+              <a:rPr lang="de-DE" dirty="0" err="1"/>
+              <a:t>demonstrations</a:t>
+            </a:r>
+            <a:r>
+              <a:rPr lang="de-DE" dirty="0"/>
+              <a:t>:</a:t>
+            </a:r>
+          </a:p>
+          <a:p>
+            <a:r>
+              <a:rPr lang="de-DE" dirty="0" err="1"/>
+              <a:t>training</a:t>
+            </a:r>
+            <a:r>
+              <a:rPr lang="de-DE" dirty="0"/>
+              <a:t> </a:t>
+            </a:r>
+            <a:r>
+              <a:rPr lang="de-DE" dirty="0" err="1"/>
+              <a:t>data</a:t>
+            </a:r>
+            <a:r>
+              <a:rPr lang="de-DE" dirty="0"/>
+              <a:t> </a:t>
+            </a:r>
+            <a:r>
+              <a:rPr lang="de-DE" dirty="0" err="1"/>
+              <a:t>consists</a:t>
+            </a:r>
+            <a:r>
+              <a:rPr lang="de-DE" dirty="0"/>
+              <a:t> </a:t>
+            </a:r>
+            <a:r>
+              <a:rPr lang="de-DE" dirty="0" err="1"/>
+              <a:t>of</a:t>
+            </a:r>
+            <a:r>
+              <a:rPr lang="de-DE" dirty="0"/>
+              <a:t> expert </a:t>
+            </a:r>
+            <a:r>
+              <a:rPr lang="de-DE" dirty="0" err="1"/>
+              <a:t>trajectories</a:t>
+            </a:r>
+            <a:endParaRPr lang="de-DE" dirty="0"/>
+          </a:p>
+          <a:p>
+            <a:r>
+              <a:rPr lang="de-DE" dirty="0" err="1"/>
+              <a:t>learn</a:t>
+            </a:r>
+            <a:r>
+              <a:rPr lang="de-DE" dirty="0"/>
+              <a:t> a </a:t>
+            </a:r>
+            <a:r>
+              <a:rPr lang="de-DE" dirty="0" err="1"/>
+              <a:t>mapping</a:t>
+            </a:r>
+            <a:r>
+              <a:rPr lang="de-DE" dirty="0"/>
+              <a:t> </a:t>
+            </a:r>
+            <a:r>
+              <a:rPr lang="de-DE" dirty="0" err="1"/>
+              <a:t>from</a:t>
+            </a:r>
+            <a:r>
+              <a:rPr lang="de-DE" dirty="0"/>
+              <a:t> </a:t>
+            </a:r>
+            <a:r>
+              <a:rPr lang="de-DE" dirty="0" err="1"/>
+              <a:t>states</a:t>
+            </a:r>
+            <a:r>
+              <a:rPr lang="de-DE" dirty="0"/>
+              <a:t> </a:t>
+            </a:r>
+            <a:r>
+              <a:rPr lang="de-DE" dirty="0" err="1"/>
+              <a:t>to</a:t>
+            </a:r>
+            <a:r>
+              <a:rPr lang="de-DE" dirty="0"/>
+              <a:t> </a:t>
+            </a:r>
+            <a:r>
+              <a:rPr lang="de-DE" dirty="0" err="1"/>
+              <a:t>actions</a:t>
+            </a:r>
+            <a:endParaRPr lang="de-DE" dirty="0"/>
+          </a:p>
+          <a:p>
+            <a:pPr marL="0" indent="0">
+              <a:buNone/>
+            </a:pPr>
+            <a:endParaRPr lang="de-DE" dirty="0"/>
+          </a:p>
+          <a:p>
+            <a:pPr marL="0" indent="0">
+              <a:buNone/>
+            </a:pPr>
+            <a:r>
+              <a:rPr lang="de-DE" dirty="0">
+                <a:sym typeface="Wingdings" pitchFamily="2" charset="2"/>
+              </a:rPr>
+              <a:t> </a:t>
+            </a:r>
+            <a:r>
+              <a:rPr lang="de-DE" dirty="0" err="1">
+                <a:sym typeface="Wingdings" pitchFamily="2" charset="2"/>
+              </a:rPr>
+              <a:t>t</a:t>
+            </a:r>
+            <a:r>
+              <a:rPr lang="de-DE" dirty="0" err="1"/>
+              <a:t>reat</a:t>
+            </a:r>
+            <a:r>
+              <a:rPr lang="de-DE" dirty="0"/>
+              <a:t> RL </a:t>
+            </a:r>
+            <a:r>
+              <a:rPr lang="de-DE" dirty="0" err="1"/>
+              <a:t>as</a:t>
+            </a:r>
+            <a:r>
+              <a:rPr lang="de-DE" dirty="0"/>
+              <a:t> a </a:t>
+            </a:r>
+            <a:r>
+              <a:rPr lang="de-DE" dirty="0" err="1"/>
+              <a:t>standard</a:t>
+            </a:r>
+            <a:r>
+              <a:rPr lang="de-DE" dirty="0"/>
+              <a:t> </a:t>
+            </a:r>
+            <a:r>
+              <a:rPr lang="de-DE" dirty="0" err="1"/>
+              <a:t>supervised</a:t>
+            </a:r>
+            <a:r>
+              <a:rPr lang="de-DE" dirty="0"/>
+              <a:t> </a:t>
+            </a:r>
+            <a:r>
+              <a:rPr lang="de-DE" dirty="0" err="1"/>
+              <a:t>learning</a:t>
+            </a:r>
+            <a:r>
+              <a:rPr lang="de-DE" dirty="0"/>
+              <a:t> </a:t>
+            </a:r>
+            <a:r>
+              <a:rPr lang="de-DE" dirty="0" err="1"/>
+              <a:t>problem</a:t>
+            </a:r>
+            <a:r>
+              <a:rPr lang="de-DE" dirty="0"/>
+              <a:t> (</a:t>
+            </a:r>
+            <a:r>
+              <a:rPr lang="de-DE" dirty="0" err="1"/>
+              <a:t>no</a:t>
+            </a:r>
+            <a:r>
+              <a:rPr lang="de-DE" dirty="0"/>
+              <a:t> </a:t>
+            </a:r>
+            <a:r>
+              <a:rPr lang="de-DE" dirty="0" err="1"/>
+              <a:t>reward</a:t>
+            </a:r>
+            <a:r>
+              <a:rPr lang="de-DE" dirty="0"/>
+              <a:t>, </a:t>
+            </a:r>
+            <a:r>
+              <a:rPr lang="de-DE" dirty="0" err="1"/>
+              <a:t>no</a:t>
+            </a:r>
+            <a:r>
+              <a:rPr lang="de-DE" dirty="0"/>
+              <a:t> </a:t>
+            </a:r>
+            <a:r>
+              <a:rPr lang="de-DE" dirty="0" err="1"/>
+              <a:t>exploration</a:t>
+            </a:r>
+            <a:r>
+              <a:rPr lang="de-DE" dirty="0"/>
+              <a:t>)</a:t>
+            </a:r>
+          </a:p>
+          <a:p>
+            <a:pPr marL="0" indent="0">
+              <a:buNone/>
+            </a:pPr>
+            <a:endParaRPr lang="de-DE" dirty="0"/>
+          </a:p>
+          <a:p>
+            <a:pPr marL="0" indent="0">
+              <a:buNone/>
+            </a:pPr>
+            <a:r>
+              <a:rPr lang="de-DE" dirty="0" err="1"/>
+              <a:t>effective</a:t>
+            </a:r>
+            <a:r>
+              <a:rPr lang="de-DE" dirty="0"/>
+              <a:t> </a:t>
+            </a:r>
+            <a:r>
+              <a:rPr lang="de-DE" dirty="0" err="1"/>
+              <a:t>when</a:t>
+            </a:r>
+            <a:r>
+              <a:rPr lang="de-DE" dirty="0"/>
+              <a:t> expert </a:t>
+            </a:r>
+            <a:r>
+              <a:rPr lang="de-DE" dirty="0" err="1"/>
+              <a:t>data</a:t>
+            </a:r>
+            <a:r>
+              <a:rPr lang="de-DE" dirty="0"/>
+              <a:t> </a:t>
+            </a:r>
+            <a:r>
+              <a:rPr lang="de-DE" dirty="0" err="1"/>
+              <a:t>is</a:t>
+            </a:r>
+            <a:r>
+              <a:rPr lang="de-DE" dirty="0"/>
+              <a:t> high </a:t>
+            </a:r>
+            <a:r>
+              <a:rPr lang="de-DE" dirty="0" err="1"/>
+              <a:t>quality</a:t>
+            </a:r>
+            <a:r>
+              <a:rPr lang="de-DE" dirty="0"/>
+              <a:t> and </a:t>
+            </a:r>
+            <a:r>
+              <a:rPr lang="de-DE" dirty="0" err="1"/>
+              <a:t>covers</a:t>
+            </a:r>
+            <a:r>
+              <a:rPr lang="de-DE" dirty="0"/>
+              <a:t> relevant </a:t>
+            </a:r>
+            <a:r>
+              <a:rPr lang="de-DE" dirty="0" err="1"/>
+              <a:t>states</a:t>
+            </a:r>
+            <a:endParaRPr lang="de-DE" dirty="0"/>
+          </a:p>
+          <a:p>
+            <a:pPr marL="0" indent="0">
+              <a:buNone/>
+            </a:pPr>
+            <a:endParaRPr lang="de-DE" dirty="0"/>
+          </a:p>
+          <a:p>
+            <a:pPr marL="0" indent="0">
+              <a:buNone/>
+            </a:pPr>
+            <a:r>
+              <a:rPr lang="de-DE" dirty="0" err="1"/>
+              <a:t>simplest</a:t>
+            </a:r>
+            <a:r>
+              <a:rPr lang="de-DE" dirty="0"/>
+              <a:t> form </a:t>
+            </a:r>
+            <a:r>
+              <a:rPr lang="de-DE" dirty="0" err="1"/>
+              <a:t>of</a:t>
+            </a:r>
+            <a:r>
+              <a:rPr lang="de-DE" dirty="0"/>
+              <a:t> </a:t>
+            </a:r>
+            <a:r>
+              <a:rPr lang="de-DE" dirty="0" err="1"/>
+              <a:t>imitation</a:t>
+            </a:r>
+            <a:r>
+              <a:rPr lang="de-DE" dirty="0"/>
+              <a:t> </a:t>
+            </a:r>
+            <a:r>
+              <a:rPr lang="de-DE" dirty="0" err="1"/>
+              <a:t>learning</a:t>
+            </a:r>
             <a:endParaRPr lang="de-DE" dirty="0"/>
           </a:p>
         </p:txBody>
@@ -8207,7 +12222,9 @@
         </p:nvSpPr>
         <p:spPr/>
         <p:txBody>
-          <a:bodyPr/>
+          <a:bodyPr>
+            <a:normAutofit fontScale="92500"/>
+          </a:bodyPr>
           <a:lstStyle/>
           <a:p>
             <a:pPr marL="0" indent="0">
@@ -8215,10 +12232,108 @@
             </a:pPr>
             <a:r>
               <a:rPr lang="de-DE" dirty="0" err="1"/>
+              <a:t>behavior</a:t>
+            </a:r>
+            <a:r>
+              <a:rPr lang="de-DE" dirty="0"/>
+              <a:t> </a:t>
+            </a:r>
+            <a:r>
+              <a:rPr lang="de-DE" dirty="0" err="1"/>
+              <a:t>cloning</a:t>
+            </a:r>
+            <a:r>
+              <a:rPr lang="de-DE" dirty="0"/>
+              <a:t>: </a:t>
+            </a:r>
+            <a:r>
+              <a:rPr lang="de-DE" dirty="0" err="1"/>
+              <a:t>direct</a:t>
+            </a:r>
+            <a:r>
+              <a:rPr lang="de-DE" dirty="0"/>
+              <a:t> </a:t>
+            </a:r>
+            <a:r>
+              <a:rPr lang="de-DE" dirty="0" err="1"/>
+              <a:t>supervised</a:t>
+            </a:r>
+            <a:r>
+              <a:rPr lang="de-DE" dirty="0"/>
+              <a:t> </a:t>
+            </a:r>
+            <a:r>
+              <a:rPr lang="de-DE" dirty="0" err="1"/>
               <a:t>learning</a:t>
             </a:r>
             <a:r>
               <a:rPr lang="de-DE" dirty="0"/>
+              <a:t> on </a:t>
+            </a:r>
+            <a:r>
+              <a:rPr lang="de-DE" dirty="0" err="1"/>
+              <a:t>state</a:t>
+            </a:r>
+            <a:r>
+              <a:rPr lang="de-DE" dirty="0"/>
+              <a:t>-action </a:t>
+            </a:r>
+            <a:r>
+              <a:rPr lang="de-DE" dirty="0" err="1"/>
+              <a:t>pairs</a:t>
+            </a:r>
+            <a:endParaRPr lang="de-DE" dirty="0"/>
+          </a:p>
+          <a:p>
+            <a:pPr marL="0" indent="0">
+              <a:buNone/>
+            </a:pPr>
+            <a:r>
+              <a:rPr lang="de-DE" dirty="0" err="1"/>
+              <a:t>imitation</a:t>
+            </a:r>
+            <a:r>
+              <a:rPr lang="de-DE" dirty="0"/>
+              <a:t> </a:t>
+            </a:r>
+            <a:r>
+              <a:rPr lang="de-DE" dirty="0" err="1"/>
+              <a:t>learning</a:t>
+            </a:r>
+            <a:r>
+              <a:rPr lang="de-DE" dirty="0"/>
+              <a:t>: </a:t>
+            </a:r>
+            <a:r>
+              <a:rPr lang="de-DE" dirty="0" err="1"/>
+              <a:t>broader</a:t>
+            </a:r>
+            <a:r>
+              <a:rPr lang="de-DE" dirty="0"/>
+              <a:t> </a:t>
+            </a:r>
+            <a:r>
+              <a:rPr lang="de-DE" dirty="0" err="1"/>
+              <a:t>framework</a:t>
+            </a:r>
+            <a:r>
+              <a:rPr lang="de-DE" dirty="0"/>
+              <a:t> </a:t>
+            </a:r>
+            <a:r>
+              <a:rPr lang="de-DE" dirty="0" err="1"/>
+              <a:t>of</a:t>
+            </a:r>
+            <a:r>
+              <a:rPr lang="de-DE" dirty="0"/>
+              <a:t> </a:t>
+            </a:r>
+            <a:r>
+              <a:rPr lang="de-DE" dirty="0" err="1"/>
+              <a:t>learning</a:t>
+            </a:r>
+            <a:r>
+              <a:rPr lang="de-DE" dirty="0"/>
               <a:t> </a:t>
             </a:r>
             <a:r>
@@ -8233,7 +12348,298 @@
               <a:rPr lang="de-DE" dirty="0" err="1"/>
               <a:t>demonstrations</a:t>
             </a:r>
+            <a:r>
+              <a:rPr lang="de-DE" dirty="0"/>
+              <a:t> (</a:t>
+            </a:r>
+            <a:r>
+              <a:rPr lang="de-DE" dirty="0" err="1"/>
+              <a:t>including</a:t>
+            </a:r>
+            <a:r>
+              <a:rPr lang="de-DE" dirty="0"/>
+              <a:t> </a:t>
+            </a:r>
+            <a:r>
+              <a:rPr lang="de-DE" dirty="0" err="1"/>
+              <a:t>methods</a:t>
+            </a:r>
+            <a:r>
+              <a:rPr lang="de-DE" dirty="0"/>
+              <a:t> </a:t>
+            </a:r>
+            <a:r>
+              <a:rPr lang="de-DE" dirty="0" err="1"/>
+              <a:t>that</a:t>
+            </a:r>
+            <a:r>
+              <a:rPr lang="de-DE" dirty="0"/>
+              <a:t> </a:t>
+            </a:r>
+            <a:r>
+              <a:rPr lang="de-DE" dirty="0" err="1"/>
+              <a:t>go</a:t>
+            </a:r>
+            <a:r>
+              <a:rPr lang="de-DE" dirty="0"/>
+              <a:t> </a:t>
+            </a:r>
+            <a:r>
+              <a:rPr lang="de-DE" dirty="0" err="1"/>
+              <a:t>beyond</a:t>
+            </a:r>
+            <a:r>
+              <a:rPr lang="de-DE" dirty="0"/>
+              <a:t> simple </a:t>
+            </a:r>
+            <a:r>
+              <a:rPr lang="de-DE" dirty="0" err="1"/>
+              <a:t>supervised</a:t>
+            </a:r>
+            <a:r>
+              <a:rPr lang="de-DE" dirty="0"/>
+              <a:t> </a:t>
+            </a:r>
+            <a:r>
+              <a:rPr lang="de-DE" dirty="0" err="1"/>
+              <a:t>learning</a:t>
+            </a:r>
+            <a:r>
+              <a:rPr lang="de-DE" dirty="0"/>
+              <a:t>)</a:t>
+            </a:r>
+          </a:p>
+          <a:p>
+            <a:pPr marL="0" indent="0">
+              <a:buNone/>
+            </a:pPr>
             <a:endParaRPr lang="de-DE" dirty="0"/>
+          </a:p>
+          <a:p>
+            <a:pPr marL="0" indent="0">
+              <a:buNone/>
+            </a:pPr>
+            <a:r>
+              <a:rPr lang="de-DE" dirty="0" err="1"/>
+              <a:t>useful</a:t>
+            </a:r>
+            <a:r>
+              <a:rPr lang="de-DE" dirty="0"/>
+              <a:t> </a:t>
+            </a:r>
+            <a:r>
+              <a:rPr lang="de-DE" dirty="0" err="1"/>
+              <a:t>when</a:t>
+            </a:r>
+            <a:r>
+              <a:rPr lang="de-DE" dirty="0"/>
+              <a:t> </a:t>
+            </a:r>
+            <a:r>
+              <a:rPr lang="de-DE" dirty="0" err="1"/>
+              <a:t>exploration</a:t>
+            </a:r>
+            <a:r>
+              <a:rPr lang="de-DE" dirty="0"/>
+              <a:t> </a:t>
+            </a:r>
+            <a:r>
+              <a:rPr lang="de-DE" dirty="0" err="1"/>
+              <a:t>is</a:t>
+            </a:r>
+            <a:r>
+              <a:rPr lang="de-DE" dirty="0"/>
+              <a:t> </a:t>
+            </a:r>
+            <a:r>
+              <a:rPr lang="de-DE" dirty="0" err="1"/>
+              <a:t>difficult</a:t>
+            </a:r>
+            <a:r>
+              <a:rPr lang="de-DE" dirty="0"/>
+              <a:t> </a:t>
+            </a:r>
+            <a:r>
+              <a:rPr lang="de-DE" dirty="0" err="1"/>
+              <a:t>or</a:t>
+            </a:r>
+            <a:r>
+              <a:rPr lang="de-DE" dirty="0"/>
+              <a:t> </a:t>
+            </a:r>
+            <a:r>
+              <a:rPr lang="de-DE" dirty="0" err="1"/>
+              <a:t>unsafe</a:t>
+            </a:r>
+            <a:endParaRPr lang="de-DE" dirty="0"/>
+          </a:p>
+          <a:p>
+            <a:pPr marL="0" indent="0">
+              <a:buNone/>
+            </a:pPr>
+            <a:endParaRPr lang="de-DE" dirty="0"/>
+          </a:p>
+          <a:p>
+            <a:pPr marL="0" indent="0">
+              <a:buNone/>
+            </a:pPr>
+            <a:r>
+              <a:rPr lang="de-DE" dirty="0" err="1"/>
+              <a:t>key</a:t>
+            </a:r>
+            <a:r>
+              <a:rPr lang="de-DE" dirty="0"/>
+              <a:t> </a:t>
+            </a:r>
+            <a:r>
+              <a:rPr lang="de-DE" dirty="0" err="1"/>
+              <a:t>limitation</a:t>
+            </a:r>
+            <a:r>
+              <a:rPr lang="de-DE" dirty="0"/>
+              <a:t>: </a:t>
+            </a:r>
+            <a:r>
+              <a:rPr lang="de-DE" dirty="0" err="1"/>
+              <a:t>performance</a:t>
+            </a:r>
+            <a:r>
+              <a:rPr lang="de-DE" dirty="0"/>
+              <a:t> </a:t>
+            </a:r>
+            <a:r>
+              <a:rPr lang="de-DE" dirty="0" err="1"/>
+              <a:t>typically</a:t>
+            </a:r>
+            <a:r>
+              <a:rPr lang="de-DE" dirty="0"/>
+              <a:t> </a:t>
+            </a:r>
+            <a:r>
+              <a:rPr lang="de-DE" dirty="0" err="1"/>
+              <a:t>bounded</a:t>
+            </a:r>
+            <a:r>
+              <a:rPr lang="de-DE" dirty="0"/>
+              <a:t> </a:t>
+            </a:r>
+            <a:r>
+              <a:rPr lang="de-DE" dirty="0" err="1"/>
+              <a:t>by</a:t>
+            </a:r>
+            <a:r>
+              <a:rPr lang="de-DE" dirty="0"/>
+              <a:t> </a:t>
+            </a:r>
+            <a:r>
+              <a:rPr lang="de-DE" dirty="0" err="1"/>
+              <a:t>the</a:t>
+            </a:r>
+            <a:r>
+              <a:rPr lang="de-DE" dirty="0"/>
+              <a:t> </a:t>
+            </a:r>
+            <a:r>
+              <a:rPr lang="de-DE" dirty="0" err="1"/>
+              <a:t>quality</a:t>
+            </a:r>
+            <a:r>
+              <a:rPr lang="de-DE" dirty="0"/>
+              <a:t> </a:t>
+            </a:r>
+            <a:r>
+              <a:rPr lang="de-DE" dirty="0" err="1"/>
+              <a:t>of</a:t>
+            </a:r>
+            <a:r>
+              <a:rPr lang="de-DE" dirty="0"/>
+              <a:t> </a:t>
+            </a:r>
+            <a:r>
+              <a:rPr lang="de-DE" dirty="0" err="1"/>
+              <a:t>the</a:t>
+            </a:r>
+            <a:r>
+              <a:rPr lang="de-DE" dirty="0"/>
+              <a:t> expert</a:t>
+            </a:r>
+          </a:p>
+          <a:p>
+            <a:pPr marL="0" indent="0">
+              <a:buNone/>
+            </a:pPr>
+            <a:r>
+              <a:rPr lang="de-DE" dirty="0">
+                <a:sym typeface="Wingdings" pitchFamily="2" charset="2"/>
+              </a:rPr>
+              <a:t> </a:t>
+            </a:r>
+            <a:r>
+              <a:rPr lang="de-DE" dirty="0" err="1"/>
+              <a:t>cannot</a:t>
+            </a:r>
+            <a:r>
+              <a:rPr lang="de-DE" dirty="0"/>
+              <a:t> </a:t>
+            </a:r>
+            <a:r>
+              <a:rPr lang="de-DE" dirty="0" err="1"/>
+              <a:t>reliably</a:t>
+            </a:r>
+            <a:r>
+              <a:rPr lang="de-DE" dirty="0"/>
+              <a:t> </a:t>
+            </a:r>
+            <a:r>
+              <a:rPr lang="de-DE" dirty="0" err="1"/>
+              <a:t>exceed</a:t>
+            </a:r>
+            <a:r>
+              <a:rPr lang="de-DE" dirty="0"/>
+              <a:t> expert </a:t>
+            </a:r>
+            <a:r>
+              <a:rPr lang="de-DE" dirty="0" err="1"/>
+              <a:t>without</a:t>
+            </a:r>
+            <a:r>
+              <a:rPr lang="de-DE" dirty="0"/>
+              <a:t> </a:t>
+            </a:r>
+            <a:r>
+              <a:rPr lang="de-DE" dirty="0" err="1"/>
+              <a:t>incorporating</a:t>
+            </a:r>
+            <a:r>
+              <a:rPr lang="de-DE" dirty="0"/>
+              <a:t> </a:t>
+            </a:r>
+            <a:r>
+              <a:rPr lang="de-DE" dirty="0" err="1"/>
+              <a:t>reward-based</a:t>
+            </a:r>
+            <a:r>
+              <a:rPr lang="de-DE" dirty="0"/>
+              <a:t> </a:t>
+            </a:r>
+            <a:r>
+              <a:rPr lang="de-DE" dirty="0" err="1"/>
+              <a:t>learning</a:t>
+            </a:r>
+            <a:r>
+              <a:rPr lang="de-DE" dirty="0"/>
+              <a:t> (</a:t>
+            </a:r>
+            <a:r>
+              <a:rPr lang="de-DE" dirty="0">
+                <a:sym typeface="Wingdings" pitchFamily="2" charset="2"/>
+              </a:rPr>
+              <a:t>e.g., </a:t>
+            </a:r>
+            <a:r>
+              <a:rPr lang="de-DE" dirty="0"/>
+              <a:t>offline RL)</a:t>
+            </a:r>
           </a:p>
         </p:txBody>
       </p:sp>
